--- a/PORTOEXPRESS_LOGISTICA_LTDA.pptx
+++ b/PORTOEXPRESS_LOGISTICA_LTDA.pptx
@@ -162,10 +162,10 @@
                 <c:formatCode>General</c:formatCode>
                 <c:ptCount val="2"/>
                 <c:pt idx="0">
-                  <c:v>51</c:v>
+                  <c:v>0</c:v>
                 </c:pt>
                 <c:pt idx="1">
-                  <c:v>31</c:v>
+                  <c:v>32</c:v>
                 </c:pt>
               </c:numCache>
             </c:numRef>
@@ -3688,7 +3688,7 @@
         <p:spPr>
           <a:xfrm>
             <a:off x="1005840" y="2240279"/>
-            <a:ext cx="2377439" cy="891540"/>
+            <a:ext cx="2377440" cy="868680"/>
           </a:xfrm>
           <a:prstGeom prst="rect">
             <a:avLst/>
@@ -3709,7 +3709,7 @@
                 </a:solidFill>
                 <a:latin typeface="Calibri"/>
               </a:rPr>
-              <a:t>39</a:t>
+              <a:t>40</a:t>
             </a:r>
           </a:p>
         </p:txBody>
@@ -3722,8 +3722,8 @@
         </p:nvSpPr>
         <p:spPr>
           <a:xfrm>
-            <a:off x="1005840" y="3058668"/>
-            <a:ext cx="2377439" cy="548640"/>
+            <a:off x="1005840" y="3090672"/>
+            <a:ext cx="2377440" cy="411480"/>
           </a:xfrm>
           <a:prstGeom prst="rect">
             <a:avLst/>
@@ -3803,7 +3803,7 @@
         <p:spPr>
           <a:xfrm>
             <a:off x="3931920" y="2240279"/>
-            <a:ext cx="2377439" cy="891540"/>
+            <a:ext cx="2377440" cy="868680"/>
           </a:xfrm>
           <a:prstGeom prst="rect">
             <a:avLst/>
@@ -3824,7 +3824,7 @@
                 </a:solidFill>
                 <a:latin typeface="Calibri"/>
               </a:rPr>
-              <a:t>31</a:t>
+              <a:t>32</a:t>
             </a:r>
           </a:p>
         </p:txBody>
@@ -3837,8 +3837,8 @@
         </p:nvSpPr>
         <p:spPr>
           <a:xfrm>
-            <a:off x="3931920" y="3058668"/>
-            <a:ext cx="2377439" cy="548640"/>
+            <a:off x="3931920" y="3090672"/>
+            <a:ext cx="2377440" cy="411480"/>
           </a:xfrm>
           <a:prstGeom prst="rect">
             <a:avLst/>
@@ -3918,7 +3918,7 @@
         <p:spPr>
           <a:xfrm>
             <a:off x="6858000" y="2240279"/>
-            <a:ext cx="2377439" cy="891540"/>
+            <a:ext cx="2377440" cy="868680"/>
           </a:xfrm>
           <a:prstGeom prst="rect">
             <a:avLst/>
@@ -3952,8 +3952,8 @@
         </p:nvSpPr>
         <p:spPr>
           <a:xfrm>
-            <a:off x="6858000" y="3058668"/>
-            <a:ext cx="2377439" cy="548640"/>
+            <a:off x="6858000" y="3090672"/>
+            <a:ext cx="2377440" cy="411480"/>
           </a:xfrm>
           <a:prstGeom prst="rect">
             <a:avLst/>
@@ -4033,7 +4033,7 @@
         <p:spPr>
           <a:xfrm>
             <a:off x="9784080" y="2240279"/>
-            <a:ext cx="2377439" cy="891540"/>
+            <a:ext cx="2377440" cy="868680"/>
           </a:xfrm>
           <a:prstGeom prst="rect">
             <a:avLst/>
@@ -4054,7 +4054,7 @@
                 </a:solidFill>
                 <a:latin typeface="Calibri"/>
               </a:rPr>
-              <a:t>79.5%</a:t>
+              <a:t>80.0%</a:t>
             </a:r>
           </a:p>
         </p:txBody>
@@ -4067,8 +4067,8 @@
         </p:nvSpPr>
         <p:spPr>
           <a:xfrm>
-            <a:off x="9784080" y="3058668"/>
-            <a:ext cx="2377439" cy="548640"/>
+            <a:off x="9784080" y="3090672"/>
+            <a:ext cx="2377440" cy="411480"/>
           </a:xfrm>
           <a:prstGeom prst="rect">
             <a:avLst/>
@@ -4121,7 +4121,7 @@
               <a:tr h="475488">
                 <a:tc>
                   <a:txBody>
-                    <a:bodyPr wrap="square"/>
+                    <a:bodyPr/>
                     <a:lstStyle/>
                     <a:p>
                       <a:pPr algn="ctr"/>
@@ -4144,7 +4144,7 @@
                 </a:tc>
                 <a:tc>
                   <a:txBody>
-                    <a:bodyPr wrap="square"/>
+                    <a:bodyPr/>
                     <a:lstStyle/>
                     <a:p>
                       <a:pPr algn="ctr"/>
@@ -4167,7 +4167,7 @@
                 </a:tc>
                 <a:tc>
                   <a:txBody>
-                    <a:bodyPr wrap="square"/>
+                    <a:bodyPr/>
                     <a:lstStyle/>
                     <a:p>
                       <a:pPr algn="ctr"/>
@@ -4190,7 +4190,7 @@
                 </a:tc>
                 <a:tc>
                   <a:txBody>
-                    <a:bodyPr wrap="square"/>
+                    <a:bodyPr/>
                     <a:lstStyle/>
                     <a:p>
                       <a:pPr algn="ctr"/>
@@ -4215,18 +4215,18 @@
               <a:tr h="475488">
                 <a:tc>
                   <a:txBody>
-                    <a:bodyPr wrap="square"/>
-                    <a:lstStyle/>
-                    <a:p>
-                      <a:pPr algn="l"/>
-                      <a:r>
-                        <a:rPr sz="1000" b="0">
-                          <a:solidFill>
-                            <a:srgbClr val="1D1B43"/>
-                          </a:solidFill>
-                          <a:latin typeface="Calibri"/>
-                        </a:rPr>
-                        <a:t>Total Entregas</a:t>
+                    <a:bodyPr/>
+                    <a:lstStyle/>
+                    <a:p>
+                      <a:pPr algn="l"/>
+                      <a:r>
+                        <a:rPr sz="1000" b="0">
+                          <a:solidFill>
+                            <a:srgbClr val="1D1B43"/>
+                          </a:solidFill>
+                          <a:latin typeface="Calibri"/>
+                        </a:rPr>
+                        <a:t>Total</a:t>
                       </a:r>
                     </a:p>
                   </a:txBody>
@@ -4238,18 +4238,18 @@
                 </a:tc>
                 <a:tc>
                   <a:txBody>
-                    <a:bodyPr wrap="square"/>
-                    <a:lstStyle/>
-                    <a:p>
-                      <a:pPr algn="l"/>
-                      <a:r>
-                        <a:rPr sz="1000" b="0">
-                          <a:solidFill>
-                            <a:srgbClr val="1D1B43"/>
-                          </a:solidFill>
-                          <a:latin typeface="Calibri"/>
-                        </a:rPr>
-                        <a:t>51</a:t>
+                    <a:bodyPr/>
+                    <a:lstStyle/>
+                    <a:p>
+                      <a:pPr algn="l"/>
+                      <a:r>
+                        <a:rPr sz="1000" b="0">
+                          <a:solidFill>
+                            <a:srgbClr val="1D1B43"/>
+                          </a:solidFill>
+                          <a:latin typeface="Calibri"/>
+                        </a:rPr>
+                        <a:t>0</a:t>
                       </a:r>
                     </a:p>
                   </a:txBody>
@@ -4261,18 +4261,18 @@
                 </a:tc>
                 <a:tc>
                   <a:txBody>
-                    <a:bodyPr wrap="square"/>
-                    <a:lstStyle/>
-                    <a:p>
-                      <a:pPr algn="l"/>
-                      <a:r>
-                        <a:rPr sz="1000" b="0">
-                          <a:solidFill>
-                            <a:srgbClr val="1D1B43"/>
-                          </a:solidFill>
-                          <a:latin typeface="Calibri"/>
-                        </a:rPr>
-                        <a:t>39</a:t>
+                    <a:bodyPr/>
+                    <a:lstStyle/>
+                    <a:p>
+                      <a:pPr algn="l"/>
+                      <a:r>
+                        <a:rPr sz="1000" b="0">
+                          <a:solidFill>
+                            <a:srgbClr val="1D1B43"/>
+                          </a:solidFill>
+                          <a:latin typeface="Calibri"/>
+                        </a:rPr>
+                        <a:t>40</a:t>
                       </a:r>
                     </a:p>
                   </a:txBody>
@@ -4284,18 +4284,18 @@
                 </a:tc>
                 <a:tc>
                   <a:txBody>
-                    <a:bodyPr wrap="square"/>
-                    <a:lstStyle/>
-                    <a:p>
-                      <a:pPr algn="l"/>
-                      <a:r>
-                        <a:rPr sz="1000" b="0">
-                          <a:solidFill>
-                            <a:srgbClr val="1D1B43"/>
-                          </a:solidFill>
-                          <a:latin typeface="Calibri"/>
-                        </a:rPr>
-                        <a:t>- 12</a:t>
+                    <a:bodyPr/>
+                    <a:lstStyle/>
+                    <a:p>
+                      <a:pPr algn="l"/>
+                      <a:r>
+                        <a:rPr sz="1000" b="0">
+                          <a:solidFill>
+                            <a:srgbClr val="1D1B43"/>
+                          </a:solidFill>
+                          <a:latin typeface="Calibri"/>
+                        </a:rPr>
+                        <a:t>+ 40</a:t>
                       </a:r>
                     </a:p>
                   </a:txBody>
@@ -4309,7 +4309,7 @@
               <a:tr h="475488">
                 <a:tc>
                   <a:txBody>
-                    <a:bodyPr wrap="square"/>
+                    <a:bodyPr/>
                     <a:lstStyle/>
                     <a:p>
                       <a:pPr algn="l"/>
@@ -4332,18 +4332,18 @@
                 </a:tc>
                 <a:tc>
                   <a:txBody>
-                    <a:bodyPr wrap="square"/>
-                    <a:lstStyle/>
-                    <a:p>
-                      <a:pPr algn="l"/>
-                      <a:r>
-                        <a:rPr sz="1000" b="0">
-                          <a:solidFill>
-                            <a:srgbClr val="1D1B43"/>
-                          </a:solidFill>
-                          <a:latin typeface="Calibri"/>
-                        </a:rPr>
-                        <a:t>51</a:t>
+                    <a:bodyPr/>
+                    <a:lstStyle/>
+                    <a:p>
+                      <a:pPr algn="l"/>
+                      <a:r>
+                        <a:rPr sz="1000" b="0">
+                          <a:solidFill>
+                            <a:srgbClr val="1D1B43"/>
+                          </a:solidFill>
+                          <a:latin typeface="Calibri"/>
+                        </a:rPr>
+                        <a:t>0</a:t>
                       </a:r>
                     </a:p>
                   </a:txBody>
@@ -4355,18 +4355,18 @@
                 </a:tc>
                 <a:tc>
                   <a:txBody>
-                    <a:bodyPr wrap="square"/>
-                    <a:lstStyle/>
-                    <a:p>
-                      <a:pPr algn="l"/>
-                      <a:r>
-                        <a:rPr sz="1000" b="0">
-                          <a:solidFill>
-                            <a:srgbClr val="1D1B43"/>
-                          </a:solidFill>
-                          <a:latin typeface="Calibri"/>
-                        </a:rPr>
-                        <a:t>31</a:t>
+                    <a:bodyPr/>
+                    <a:lstStyle/>
+                    <a:p>
+                      <a:pPr algn="l"/>
+                      <a:r>
+                        <a:rPr sz="1000" b="0">
+                          <a:solidFill>
+                            <a:srgbClr val="1D1B43"/>
+                          </a:solidFill>
+                          <a:latin typeface="Calibri"/>
+                        </a:rPr>
+                        <a:t>32</a:t>
                       </a:r>
                     </a:p>
                   </a:txBody>
@@ -4378,18 +4378,18 @@
                 </a:tc>
                 <a:tc>
                   <a:txBody>
-                    <a:bodyPr wrap="square"/>
-                    <a:lstStyle/>
-                    <a:p>
-                      <a:pPr algn="l"/>
-                      <a:r>
-                        <a:rPr sz="1000" b="0">
-                          <a:solidFill>
-                            <a:srgbClr val="1D1B43"/>
-                          </a:solidFill>
-                          <a:latin typeface="Calibri"/>
-                        </a:rPr>
-                        <a:t>- 20</a:t>
+                    <a:bodyPr/>
+                    <a:lstStyle/>
+                    <a:p>
+                      <a:pPr algn="l"/>
+                      <a:r>
+                        <a:rPr sz="1000" b="0">
+                          <a:solidFill>
+                            <a:srgbClr val="1D1B43"/>
+                          </a:solidFill>
+                          <a:latin typeface="Calibri"/>
+                        </a:rPr>
+                        <a:t>+ 32</a:t>
                       </a:r>
                     </a:p>
                   </a:txBody>
@@ -4403,18 +4403,18 @@
               <a:tr h="475488">
                 <a:tc>
                   <a:txBody>
-                    <a:bodyPr wrap="square"/>
-                    <a:lstStyle/>
-                    <a:p>
-                      <a:pPr algn="l"/>
-                      <a:r>
-                        <a:rPr sz="1000" b="0">
-                          <a:solidFill>
-                            <a:srgbClr val="1D1B43"/>
-                          </a:solidFill>
-                          <a:latin typeface="Calibri"/>
-                        </a:rPr>
-                        <a:t>Fora do Prazo</a:t>
+                    <a:bodyPr/>
+                    <a:lstStyle/>
+                    <a:p>
+                      <a:pPr algn="l"/>
+                      <a:r>
+                        <a:rPr sz="1000" b="0">
+                          <a:solidFill>
+                            <a:srgbClr val="1D1B43"/>
+                          </a:solidFill>
+                          <a:latin typeface="Calibri"/>
+                        </a:rPr>
+                        <a:t>Fora Prazo</a:t>
                       </a:r>
                     </a:p>
                   </a:txBody>
@@ -4426,7 +4426,7 @@
                 </a:tc>
                 <a:tc>
                   <a:txBody>
-                    <a:bodyPr wrap="square"/>
+                    <a:bodyPr/>
                     <a:lstStyle/>
                     <a:p>
                       <a:pPr algn="l"/>
@@ -4449,7 +4449,7 @@
                 </a:tc>
                 <a:tc>
                   <a:txBody>
-                    <a:bodyPr wrap="square"/>
+                    <a:bodyPr/>
                     <a:lstStyle/>
                     <a:p>
                       <a:pPr algn="l"/>
@@ -4472,7 +4472,7 @@
                 </a:tc>
                 <a:tc>
                   <a:txBody>
-                    <a:bodyPr wrap="square"/>
+                    <a:bodyPr/>
                     <a:lstStyle/>
                     <a:p>
                       <a:pPr algn="l"/>
@@ -4497,7 +4497,7 @@
               <a:tr h="475488">
                 <a:tc>
                   <a:txBody>
-                    <a:bodyPr wrap="square"/>
+                    <a:bodyPr/>
                     <a:lstStyle/>
                     <a:p>
                       <a:pPr algn="l"/>
@@ -4520,18 +4520,18 @@
                 </a:tc>
                 <a:tc>
                   <a:txBody>
-                    <a:bodyPr wrap="square"/>
-                    <a:lstStyle/>
-                    <a:p>
-                      <a:pPr algn="l"/>
-                      <a:r>
-                        <a:rPr sz="1000" b="0">
-                          <a:solidFill>
-                            <a:srgbClr val="1D1B43"/>
-                          </a:solidFill>
-                          <a:latin typeface="Calibri"/>
-                        </a:rPr>
-                        <a:t>100.0%</a:t>
+                    <a:bodyPr/>
+                    <a:lstStyle/>
+                    <a:p>
+                      <a:pPr algn="l"/>
+                      <a:r>
+                        <a:rPr sz="1000" b="0">
+                          <a:solidFill>
+                            <a:srgbClr val="1D1B43"/>
+                          </a:solidFill>
+                          <a:latin typeface="Calibri"/>
+                        </a:rPr>
+                        <a:t>80.0%</a:t>
                       </a:r>
                     </a:p>
                   </a:txBody>
@@ -4543,18 +4543,18 @@
                 </a:tc>
                 <a:tc>
                   <a:txBody>
-                    <a:bodyPr wrap="square"/>
-                    <a:lstStyle/>
-                    <a:p>
-                      <a:pPr algn="l"/>
-                      <a:r>
-                        <a:rPr sz="1000" b="0">
-                          <a:solidFill>
-                            <a:srgbClr val="1D1B43"/>
-                          </a:solidFill>
-                          <a:latin typeface="Calibri"/>
-                        </a:rPr>
-                        <a:t>79.5%</a:t>
+                    <a:bodyPr/>
+                    <a:lstStyle/>
+                    <a:p>
+                      <a:pPr algn="l"/>
+                      <a:r>
+                        <a:rPr sz="1000" b="0">
+                          <a:solidFill>
+                            <a:srgbClr val="1D1B43"/>
+                          </a:solidFill>
+                          <a:latin typeface="Calibri"/>
+                        </a:rPr>
+                        <a:t>80.0%</a:t>
                       </a:r>
                     </a:p>
                   </a:txBody>
@@ -4566,18 +4566,18 @@
                 </a:tc>
                 <a:tc>
                   <a:txBody>
-                    <a:bodyPr wrap="square"/>
-                    <a:lstStyle/>
-                    <a:p>
-                      <a:pPr algn="l"/>
-                      <a:r>
-                        <a:rPr sz="1000" b="0">
-                          <a:solidFill>
-                            <a:srgbClr val="1D1B43"/>
-                          </a:solidFill>
-                          <a:latin typeface="Calibri"/>
-                        </a:rPr>
-                        <a:t>- 20.5pp</a:t>
+                    <a:bodyPr/>
+                    <a:lstStyle/>
+                    <a:p>
+                      <a:pPr algn="l"/>
+                      <a:r>
+                        <a:rPr sz="1000" b="0">
+                          <a:solidFill>
+                            <a:srgbClr val="1D1B43"/>
+                          </a:solidFill>
+                          <a:latin typeface="Calibri"/>
+                        </a:rPr>
+                        <a:t>+ 0.0pp</a:t>
                       </a:r>
                     </a:p>
                   </a:txBody>
@@ -4766,7 +4766,7 @@
               <a:tr h="438912">
                 <a:tc>
                   <a:txBody>
-                    <a:bodyPr wrap="square"/>
+                    <a:bodyPr/>
                     <a:lstStyle/>
                     <a:p>
                       <a:pPr algn="ctr"/>
@@ -4789,7 +4789,7 @@
                 </a:tc>
                 <a:tc>
                   <a:txBody>
-                    <a:bodyPr wrap="square"/>
+                    <a:bodyPr/>
                     <a:lstStyle/>
                     <a:p>
                       <a:pPr algn="ctr"/>
@@ -4812,7 +4812,7 @@
                 </a:tc>
                 <a:tc>
                   <a:txBody>
-                    <a:bodyPr wrap="square"/>
+                    <a:bodyPr/>
                     <a:lstStyle/>
                     <a:p>
                       <a:pPr algn="ctr"/>
@@ -4835,7 +4835,7 @@
                 </a:tc>
                 <a:tc>
                   <a:txBody>
-                    <a:bodyPr wrap="square"/>
+                    <a:bodyPr/>
                     <a:lstStyle/>
                     <a:p>
                       <a:pPr algn="ctr"/>
@@ -4858,7 +4858,7 @@
                 </a:tc>
                 <a:tc>
                   <a:txBody>
-                    <a:bodyPr wrap="square"/>
+                    <a:bodyPr/>
                     <a:lstStyle/>
                     <a:p>
                       <a:pPr algn="ctr"/>
@@ -4883,7 +4883,7 @@
               <a:tr h="438912">
                 <a:tc>
                   <a:txBody>
-                    <a:bodyPr wrap="square"/>
+                    <a:bodyPr/>
                     <a:lstStyle/>
                     <a:p>
                       <a:pPr algn="l"/>
@@ -4906,18 +4906,18 @@
                 </a:tc>
                 <a:tc>
                   <a:txBody>
-                    <a:bodyPr wrap="square"/>
-                    <a:lstStyle/>
-                    <a:p>
-                      <a:pPr algn="l"/>
-                      <a:r>
-                        <a:rPr sz="1000" b="0">
-                          <a:solidFill>
-                            <a:srgbClr val="1D1B43"/>
-                          </a:solidFill>
-                          <a:latin typeface="Calibri"/>
-                        </a:rPr>
-                        <a:t>51</a:t>
+                    <a:bodyPr/>
+                    <a:lstStyle/>
+                    <a:p>
+                      <a:pPr algn="l"/>
+                      <a:r>
+                        <a:rPr sz="1000" b="0">
+                          <a:solidFill>
+                            <a:srgbClr val="1D1B43"/>
+                          </a:solidFill>
+                          <a:latin typeface="Calibri"/>
+                        </a:rPr>
+                        <a:t>0</a:t>
                       </a:r>
                     </a:p>
                   </a:txBody>
@@ -4929,18 +4929,18 @@
                 </a:tc>
                 <a:tc>
                   <a:txBody>
-                    <a:bodyPr wrap="square"/>
-                    <a:lstStyle/>
-                    <a:p>
-                      <a:pPr algn="l"/>
-                      <a:r>
-                        <a:rPr sz="1000" b="0">
-                          <a:solidFill>
-                            <a:srgbClr val="1D1B43"/>
-                          </a:solidFill>
-                          <a:latin typeface="Calibri"/>
-                        </a:rPr>
-                        <a:t>51</a:t>
+                    <a:bodyPr/>
+                    <a:lstStyle/>
+                    <a:p>
+                      <a:pPr algn="l"/>
+                      <a:r>
+                        <a:rPr sz="1000" b="0">
+                          <a:solidFill>
+                            <a:srgbClr val="1D1B43"/>
+                          </a:solidFill>
+                          <a:latin typeface="Calibri"/>
+                        </a:rPr>
+                        <a:t>0</a:t>
                       </a:r>
                     </a:p>
                   </a:txBody>
@@ -4952,7 +4952,7 @@
                 </a:tc>
                 <a:tc>
                   <a:txBody>
-                    <a:bodyPr wrap="square"/>
+                    <a:bodyPr/>
                     <a:lstStyle/>
                     <a:p>
                       <a:pPr algn="l"/>
@@ -4975,18 +4975,18 @@
                 </a:tc>
                 <a:tc>
                   <a:txBody>
-                    <a:bodyPr wrap="square"/>
-                    <a:lstStyle/>
-                    <a:p>
-                      <a:pPr algn="l"/>
-                      <a:r>
-                        <a:rPr sz="1000" b="0">
-                          <a:solidFill>
-                            <a:srgbClr val="1D1B43"/>
-                          </a:solidFill>
-                          <a:latin typeface="Calibri"/>
-                        </a:rPr>
-                        <a:t>100.0%</a:t>
+                    <a:bodyPr/>
+                    <a:lstStyle/>
+                    <a:p>
+                      <a:pPr algn="l"/>
+                      <a:r>
+                        <a:rPr sz="1000" b="0">
+                          <a:solidFill>
+                            <a:srgbClr val="1D1B43"/>
+                          </a:solidFill>
+                          <a:latin typeface="Calibri"/>
+                        </a:rPr>
+                        <a:t>80.0%</a:t>
                       </a:r>
                     </a:p>
                   </a:txBody>
@@ -5000,7 +5000,7 @@
               <a:tr h="438912">
                 <a:tc>
                   <a:txBody>
-                    <a:bodyPr wrap="square"/>
+                    <a:bodyPr/>
                     <a:lstStyle/>
                     <a:p>
                       <a:pPr algn="l"/>
@@ -5023,18 +5023,18 @@
                 </a:tc>
                 <a:tc>
                   <a:txBody>
-                    <a:bodyPr wrap="square"/>
-                    <a:lstStyle/>
-                    <a:p>
-                      <a:pPr algn="l"/>
-                      <a:r>
-                        <a:rPr sz="1000" b="0">
-                          <a:solidFill>
-                            <a:srgbClr val="1D1B43"/>
-                          </a:solidFill>
-                          <a:latin typeface="Calibri"/>
-                        </a:rPr>
-                        <a:t>39</a:t>
+                    <a:bodyPr/>
+                    <a:lstStyle/>
+                    <a:p>
+                      <a:pPr algn="l"/>
+                      <a:r>
+                        <a:rPr sz="1000" b="0">
+                          <a:solidFill>
+                            <a:srgbClr val="1D1B43"/>
+                          </a:solidFill>
+                          <a:latin typeface="Calibri"/>
+                        </a:rPr>
+                        <a:t>40</a:t>
                       </a:r>
                     </a:p>
                   </a:txBody>
@@ -5046,18 +5046,18 @@
                 </a:tc>
                 <a:tc>
                   <a:txBody>
-                    <a:bodyPr wrap="square"/>
-                    <a:lstStyle/>
-                    <a:p>
-                      <a:pPr algn="l"/>
-                      <a:r>
-                        <a:rPr sz="1000" b="0">
-                          <a:solidFill>
-                            <a:srgbClr val="1D1B43"/>
-                          </a:solidFill>
-                          <a:latin typeface="Calibri"/>
-                        </a:rPr>
-                        <a:t>31</a:t>
+                    <a:bodyPr/>
+                    <a:lstStyle/>
+                    <a:p>
+                      <a:pPr algn="l"/>
+                      <a:r>
+                        <a:rPr sz="1000" b="0">
+                          <a:solidFill>
+                            <a:srgbClr val="1D1B43"/>
+                          </a:solidFill>
+                          <a:latin typeface="Calibri"/>
+                        </a:rPr>
+                        <a:t>32</a:t>
                       </a:r>
                     </a:p>
                   </a:txBody>
@@ -5069,7 +5069,7 @@
                 </a:tc>
                 <a:tc>
                   <a:txBody>
-                    <a:bodyPr wrap="square"/>
+                    <a:bodyPr/>
                     <a:lstStyle/>
                     <a:p>
                       <a:pPr algn="l"/>
@@ -5092,18 +5092,18 @@
                 </a:tc>
                 <a:tc>
                   <a:txBody>
-                    <a:bodyPr wrap="square"/>
-                    <a:lstStyle/>
-                    <a:p>
-                      <a:pPr algn="l"/>
-                      <a:r>
-                        <a:rPr sz="1000" b="0">
-                          <a:solidFill>
-                            <a:srgbClr val="1D1B43"/>
-                          </a:solidFill>
-                          <a:latin typeface="Calibri"/>
-                        </a:rPr>
-                        <a:t>79.5%</a:t>
+                    <a:bodyPr/>
+                    <a:lstStyle/>
+                    <a:p>
+                      <a:pPr algn="l"/>
+                      <a:r>
+                        <a:rPr sz="1000" b="0">
+                          <a:solidFill>
+                            <a:srgbClr val="1D1B43"/>
+                          </a:solidFill>
+                          <a:latin typeface="Calibri"/>
+                        </a:rPr>
+                        <a:t>80.0%</a:t>
                       </a:r>
                     </a:p>
                   </a:txBody>
@@ -5191,7 +5191,7 @@
                 </a:solidFill>
                 <a:latin typeface="Calibri"/>
               </a:rPr>
-              <a:t>PERFORMANCE: 79.5% - ATENCAO</a:t>
+              <a:t>PERFORMANCE: 80.0% - ATENCAO</a:t>
             </a:r>
           </a:p>
         </p:txBody>
@@ -5352,7 +5352,7 @@
               <a:tr h="384048">
                 <a:tc>
                   <a:txBody>
-                    <a:bodyPr wrap="square"/>
+                    <a:bodyPr/>
                     <a:lstStyle/>
                     <a:p>
                       <a:pPr algn="ctr"/>
@@ -5375,7 +5375,7 @@
                 </a:tc>
                 <a:tc>
                   <a:txBody>
-                    <a:bodyPr wrap="square"/>
+                    <a:bodyPr/>
                     <a:lstStyle/>
                     <a:p>
                       <a:pPr algn="ctr"/>
@@ -5398,7 +5398,7 @@
                 </a:tc>
                 <a:tc>
                   <a:txBody>
-                    <a:bodyPr wrap="square"/>
+                    <a:bodyPr/>
                     <a:lstStyle/>
                     <a:p>
                       <a:pPr algn="ctr"/>
@@ -5421,7 +5421,7 @@
                 </a:tc>
                 <a:tc>
                   <a:txBody>
-                    <a:bodyPr wrap="square"/>
+                    <a:bodyPr/>
                     <a:lstStyle/>
                     <a:p>
                       <a:pPr algn="ctr"/>
@@ -5444,7 +5444,7 @@
                 </a:tc>
                 <a:tc>
                   <a:txBody>
-                    <a:bodyPr wrap="square"/>
+                    <a:bodyPr/>
                     <a:lstStyle/>
                     <a:p>
                       <a:pPr algn="ctr"/>
@@ -5469,7 +5469,7 @@
               <a:tr h="384048">
                 <a:tc>
                   <a:txBody>
-                    <a:bodyPr wrap="square"/>
+                    <a:bodyPr/>
                     <a:lstStyle/>
                     <a:p>
                       <a:pPr algn="l"/>
@@ -5492,7 +5492,7 @@
                 </a:tc>
                 <a:tc>
                   <a:txBody>
-                    <a:bodyPr wrap="square"/>
+                    <a:bodyPr/>
                     <a:lstStyle/>
                     <a:p>
                       <a:pPr algn="l"/>
@@ -5515,7 +5515,7 @@
                 </a:tc>
                 <a:tc>
                   <a:txBody>
-                    <a:bodyPr wrap="square"/>
+                    <a:bodyPr/>
                     <a:lstStyle/>
                     <a:p>
                       <a:pPr algn="l"/>
@@ -5538,7 +5538,7 @@
                 </a:tc>
                 <a:tc>
                   <a:txBody>
-                    <a:bodyPr wrap="square"/>
+                    <a:bodyPr/>
                     <a:lstStyle/>
                     <a:p>
                       <a:pPr algn="l"/>
@@ -5561,7 +5561,7 @@
                 </a:tc>
                 <a:tc>
                   <a:txBody>
-                    <a:bodyPr wrap="square"/>
+                    <a:bodyPr/>
                     <a:lstStyle/>
                     <a:p>
                       <a:pPr algn="l"/>
@@ -5586,7 +5586,7 @@
               <a:tr h="384048">
                 <a:tc>
                   <a:txBody>
-                    <a:bodyPr wrap="square"/>
+                    <a:bodyPr/>
                     <a:lstStyle/>
                     <a:p>
                       <a:pPr algn="l"/>
@@ -5609,7 +5609,7 @@
                 </a:tc>
                 <a:tc>
                   <a:txBody>
-                    <a:bodyPr wrap="square"/>
+                    <a:bodyPr/>
                     <a:lstStyle/>
                     <a:p>
                       <a:pPr algn="l"/>
@@ -5632,7 +5632,7 @@
                 </a:tc>
                 <a:tc>
                   <a:txBody>
-                    <a:bodyPr wrap="square"/>
+                    <a:bodyPr/>
                     <a:lstStyle/>
                     <a:p>
                       <a:pPr algn="l"/>
@@ -5655,7 +5655,7 @@
                 </a:tc>
                 <a:tc>
                   <a:txBody>
-                    <a:bodyPr wrap="square"/>
+                    <a:bodyPr/>
                     <a:lstStyle/>
                     <a:p>
                       <a:pPr algn="l"/>
@@ -5678,7 +5678,7 @@
                 </a:tc>
                 <a:tc>
                   <a:txBody>
-                    <a:bodyPr wrap="square"/>
+                    <a:bodyPr/>
                     <a:lstStyle/>
                     <a:p>
                       <a:pPr algn="l"/>
@@ -5703,7 +5703,7 @@
               <a:tr h="384048">
                 <a:tc>
                   <a:txBody>
-                    <a:bodyPr wrap="square"/>
+                    <a:bodyPr/>
                     <a:lstStyle/>
                     <a:p>
                       <a:pPr algn="l"/>
@@ -5726,7 +5726,7 @@
                 </a:tc>
                 <a:tc>
                   <a:txBody>
-                    <a:bodyPr wrap="square"/>
+                    <a:bodyPr/>
                     <a:lstStyle/>
                     <a:p>
                       <a:pPr algn="l"/>
@@ -5749,7 +5749,7 @@
                 </a:tc>
                 <a:tc>
                   <a:txBody>
-                    <a:bodyPr wrap="square"/>
+                    <a:bodyPr/>
                     <a:lstStyle/>
                     <a:p>
                       <a:pPr algn="l"/>
@@ -5772,7 +5772,7 @@
                 </a:tc>
                 <a:tc>
                   <a:txBody>
-                    <a:bodyPr wrap="square"/>
+                    <a:bodyPr/>
                     <a:lstStyle/>
                     <a:p>
                       <a:pPr algn="l"/>
@@ -5795,7 +5795,7 @@
                 </a:tc>
                 <a:tc>
                   <a:txBody>
-                    <a:bodyPr wrap="square"/>
+                    <a:bodyPr/>
                     <a:lstStyle/>
                     <a:p>
                       <a:pPr algn="l"/>
@@ -5820,7 +5820,7 @@
               <a:tr h="384048">
                 <a:tc>
                   <a:txBody>
-                    <a:bodyPr wrap="square"/>
+                    <a:bodyPr/>
                     <a:lstStyle/>
                     <a:p>
                       <a:pPr algn="l"/>
@@ -5843,7 +5843,7 @@
                 </a:tc>
                 <a:tc>
                   <a:txBody>
-                    <a:bodyPr wrap="square"/>
+                    <a:bodyPr/>
                     <a:lstStyle/>
                     <a:p>
                       <a:pPr algn="l"/>
@@ -5866,7 +5866,7 @@
                 </a:tc>
                 <a:tc>
                   <a:txBody>
-                    <a:bodyPr wrap="square"/>
+                    <a:bodyPr/>
                     <a:lstStyle/>
                     <a:p>
                       <a:pPr algn="l"/>
@@ -5889,7 +5889,7 @@
                 </a:tc>
                 <a:tc>
                   <a:txBody>
-                    <a:bodyPr wrap="square"/>
+                    <a:bodyPr/>
                     <a:lstStyle/>
                     <a:p>
                       <a:pPr algn="l"/>
@@ -5912,7 +5912,7 @@
                 </a:tc>
                 <a:tc>
                   <a:txBody>
-                    <a:bodyPr wrap="square"/>
+                    <a:bodyPr/>
                     <a:lstStyle/>
                     <a:p>
                       <a:pPr algn="l"/>
@@ -5937,7 +5937,7 @@
               <a:tr h="384048">
                 <a:tc>
                   <a:txBody>
-                    <a:bodyPr wrap="square"/>
+                    <a:bodyPr/>
                     <a:lstStyle/>
                     <a:p>
                       <a:pPr algn="l"/>
@@ -5960,7 +5960,7 @@
                 </a:tc>
                 <a:tc>
                   <a:txBody>
-                    <a:bodyPr wrap="square"/>
+                    <a:bodyPr/>
                     <a:lstStyle/>
                     <a:p>
                       <a:pPr algn="l"/>
@@ -5983,7 +5983,7 @@
                 </a:tc>
                 <a:tc>
                   <a:txBody>
-                    <a:bodyPr wrap="square"/>
+                    <a:bodyPr/>
                     <a:lstStyle/>
                     <a:p>
                       <a:pPr algn="l"/>
@@ -6006,7 +6006,7 @@
                 </a:tc>
                 <a:tc>
                   <a:txBody>
-                    <a:bodyPr wrap="square"/>
+                    <a:bodyPr/>
                     <a:lstStyle/>
                     <a:p>
                       <a:pPr algn="l"/>
@@ -6029,7 +6029,7 @@
                 </a:tc>
                 <a:tc>
                   <a:txBody>
-                    <a:bodyPr wrap="square"/>
+                    <a:bodyPr/>
                     <a:lstStyle/>
                     <a:p>
                       <a:pPr algn="l"/>
@@ -6054,7 +6054,7 @@
               <a:tr h="384048">
                 <a:tc>
                   <a:txBody>
-                    <a:bodyPr wrap="square"/>
+                    <a:bodyPr/>
                     <a:lstStyle/>
                     <a:p>
                       <a:pPr algn="l"/>
@@ -6077,7 +6077,7 @@
                 </a:tc>
                 <a:tc>
                   <a:txBody>
-                    <a:bodyPr wrap="square"/>
+                    <a:bodyPr/>
                     <a:lstStyle/>
                     <a:p>
                       <a:pPr algn="l"/>
@@ -6100,7 +6100,7 @@
                 </a:tc>
                 <a:tc>
                   <a:txBody>
-                    <a:bodyPr wrap="square"/>
+                    <a:bodyPr/>
                     <a:lstStyle/>
                     <a:p>
                       <a:pPr algn="l"/>
@@ -6123,7 +6123,7 @@
                 </a:tc>
                 <a:tc>
                   <a:txBody>
-                    <a:bodyPr wrap="square"/>
+                    <a:bodyPr/>
                     <a:lstStyle/>
                     <a:p>
                       <a:pPr algn="l"/>
@@ -6146,7 +6146,7 @@
                 </a:tc>
                 <a:tc>
                   <a:txBody>
-                    <a:bodyPr wrap="square"/>
+                    <a:bodyPr/>
                     <a:lstStyle/>
                     <a:p>
                       <a:pPr algn="l"/>
@@ -6171,7 +6171,7 @@
               <a:tr h="384048">
                 <a:tc>
                   <a:txBody>
-                    <a:bodyPr wrap="square"/>
+                    <a:bodyPr/>
                     <a:lstStyle/>
                     <a:p>
                       <a:pPr algn="l"/>
@@ -6194,7 +6194,7 @@
                 </a:tc>
                 <a:tc>
                   <a:txBody>
-                    <a:bodyPr wrap="square"/>
+                    <a:bodyPr/>
                     <a:lstStyle/>
                     <a:p>
                       <a:pPr algn="l"/>
@@ -6217,7 +6217,7 @@
                 </a:tc>
                 <a:tc>
                   <a:txBody>
-                    <a:bodyPr wrap="square"/>
+                    <a:bodyPr/>
                     <a:lstStyle/>
                     <a:p>
                       <a:pPr algn="l"/>
@@ -6240,7 +6240,7 @@
                 </a:tc>
                 <a:tc>
                   <a:txBody>
-                    <a:bodyPr wrap="square"/>
+                    <a:bodyPr/>
                     <a:lstStyle/>
                     <a:p>
                       <a:pPr algn="l"/>
@@ -6263,7 +6263,7 @@
                 </a:tc>
                 <a:tc>
                   <a:txBody>
-                    <a:bodyPr wrap="square"/>
+                    <a:bodyPr/>
                     <a:lstStyle/>
                     <a:p>
                       <a:pPr algn="l"/>
@@ -6288,7 +6288,7 @@
               <a:tr h="384048">
                 <a:tc>
                   <a:txBody>
-                    <a:bodyPr wrap="square"/>
+                    <a:bodyPr/>
                     <a:lstStyle/>
                     <a:p>
                       <a:pPr algn="l"/>
@@ -6311,7 +6311,7 @@
                 </a:tc>
                 <a:tc>
                   <a:txBody>
-                    <a:bodyPr wrap="square"/>
+                    <a:bodyPr/>
                     <a:lstStyle/>
                     <a:p>
                       <a:pPr algn="l"/>
@@ -6334,7 +6334,7 @@
                 </a:tc>
                 <a:tc>
                   <a:txBody>
-                    <a:bodyPr wrap="square"/>
+                    <a:bodyPr/>
                     <a:lstStyle/>
                     <a:p>
                       <a:pPr algn="l"/>
@@ -6357,7 +6357,7 @@
                 </a:tc>
                 <a:tc>
                   <a:txBody>
-                    <a:bodyPr wrap="square"/>
+                    <a:bodyPr/>
                     <a:lstStyle/>
                     <a:p>
                       <a:pPr algn="l"/>
@@ -6380,7 +6380,7 @@
                 </a:tc>
                 <a:tc>
                   <a:txBody>
-                    <a:bodyPr wrap="square"/>
+                    <a:bodyPr/>
                     <a:lstStyle/>
                     <a:p>
                       <a:pPr algn="l"/>
@@ -6563,7 +6563,7 @@
               <a:tr h="438912">
                 <a:tc>
                   <a:txBody>
-                    <a:bodyPr wrap="square"/>
+                    <a:bodyPr/>
                     <a:lstStyle/>
                     <a:p>
                       <a:pPr algn="ctr"/>
@@ -6586,7 +6586,7 @@
                 </a:tc>
                 <a:tc>
                   <a:txBody>
-                    <a:bodyPr wrap="square"/>
+                    <a:bodyPr/>
                     <a:lstStyle/>
                     <a:p>
                       <a:pPr algn="ctr"/>
@@ -6609,7 +6609,7 @@
                 </a:tc>
                 <a:tc>
                   <a:txBody>
-                    <a:bodyPr wrap="square"/>
+                    <a:bodyPr/>
                     <a:lstStyle/>
                     <a:p>
                       <a:pPr algn="ctr"/>
@@ -6632,7 +6632,7 @@
                 </a:tc>
                 <a:tc>
                   <a:txBody>
-                    <a:bodyPr wrap="square"/>
+                    <a:bodyPr/>
                     <a:lstStyle/>
                     <a:p>
                       <a:pPr algn="ctr"/>
@@ -6655,7 +6655,7 @@
                 </a:tc>
                 <a:tc>
                   <a:txBody>
-                    <a:bodyPr wrap="square"/>
+                    <a:bodyPr/>
                     <a:lstStyle/>
                     <a:p>
                       <a:pPr algn="ctr"/>
@@ -6678,7 +6678,7 @@
                 </a:tc>
                 <a:tc>
                   <a:txBody>
-                    <a:bodyPr wrap="square"/>
+                    <a:bodyPr/>
                     <a:lstStyle/>
                     <a:p>
                       <a:pPr algn="ctr"/>
@@ -6703,7 +6703,7 @@
               <a:tr h="438912">
                 <a:tc>
                   <a:txBody>
-                    <a:bodyPr wrap="square"/>
+                    <a:bodyPr/>
                     <a:lstStyle/>
                     <a:p>
                       <a:pPr algn="l"/>
@@ -6726,7 +6726,7 @@
                 </a:tc>
                 <a:tc>
                   <a:txBody>
-                    <a:bodyPr wrap="square"/>
+                    <a:bodyPr/>
                     <a:lstStyle/>
                     <a:p>
                       <a:pPr algn="l"/>
@@ -6749,7 +6749,7 @@
                 </a:tc>
                 <a:tc>
                   <a:txBody>
-                    <a:bodyPr wrap="square"/>
+                    <a:bodyPr/>
                     <a:lstStyle/>
                     <a:p>
                       <a:pPr algn="l"/>
@@ -6772,7 +6772,7 @@
                 </a:tc>
                 <a:tc>
                   <a:txBody>
-                    <a:bodyPr wrap="square"/>
+                    <a:bodyPr/>
                     <a:lstStyle/>
                     <a:p>
                       <a:pPr algn="l"/>
@@ -6795,7 +6795,7 @@
                 </a:tc>
                 <a:tc>
                   <a:txBody>
-                    <a:bodyPr wrap="square"/>
+                    <a:bodyPr/>
                     <a:lstStyle/>
                     <a:p>
                       <a:pPr algn="l"/>
@@ -6818,7 +6818,7 @@
                 </a:tc>
                 <a:tc>
                   <a:txBody>
-                    <a:bodyPr wrap="square"/>
+                    <a:bodyPr/>
                     <a:lstStyle/>
                     <a:p>
                       <a:pPr algn="l"/>
@@ -6843,7 +6843,7 @@
               <a:tr h="438912">
                 <a:tc>
                   <a:txBody>
-                    <a:bodyPr wrap="square"/>
+                    <a:bodyPr/>
                     <a:lstStyle/>
                     <a:p>
                       <a:pPr algn="l"/>
@@ -6866,7 +6866,7 @@
                 </a:tc>
                 <a:tc>
                   <a:txBody>
-                    <a:bodyPr wrap="square"/>
+                    <a:bodyPr/>
                     <a:lstStyle/>
                     <a:p>
                       <a:pPr algn="l"/>
@@ -6889,7 +6889,7 @@
                 </a:tc>
                 <a:tc>
                   <a:txBody>
-                    <a:bodyPr wrap="square"/>
+                    <a:bodyPr/>
                     <a:lstStyle/>
                     <a:p>
                       <a:pPr algn="l"/>
@@ -6912,7 +6912,7 @@
                 </a:tc>
                 <a:tc>
                   <a:txBody>
-                    <a:bodyPr wrap="square"/>
+                    <a:bodyPr/>
                     <a:lstStyle/>
                     <a:p>
                       <a:pPr algn="l"/>
@@ -6935,7 +6935,7 @@
                 </a:tc>
                 <a:tc>
                   <a:txBody>
-                    <a:bodyPr wrap="square"/>
+                    <a:bodyPr/>
                     <a:lstStyle/>
                     <a:p>
                       <a:pPr algn="l"/>
@@ -6958,7 +6958,7 @@
                 </a:tc>
                 <a:tc>
                   <a:txBody>
-                    <a:bodyPr wrap="square"/>
+                    <a:bodyPr/>
                     <a:lstStyle/>
                     <a:p>
                       <a:pPr algn="l"/>
@@ -6983,7 +6983,7 @@
               <a:tr h="438912">
                 <a:tc>
                   <a:txBody>
-                    <a:bodyPr wrap="square"/>
+                    <a:bodyPr/>
                     <a:lstStyle/>
                     <a:p>
                       <a:pPr algn="l"/>
@@ -7006,7 +7006,7 @@
                 </a:tc>
                 <a:tc>
                   <a:txBody>
-                    <a:bodyPr wrap="square"/>
+                    <a:bodyPr/>
                     <a:lstStyle/>
                     <a:p>
                       <a:pPr algn="l"/>
@@ -7029,7 +7029,7 @@
                 </a:tc>
                 <a:tc>
                   <a:txBody>
-                    <a:bodyPr wrap="square"/>
+                    <a:bodyPr/>
                     <a:lstStyle/>
                     <a:p>
                       <a:pPr algn="l"/>
@@ -7052,7 +7052,7 @@
                 </a:tc>
                 <a:tc>
                   <a:txBody>
-                    <a:bodyPr wrap="square"/>
+                    <a:bodyPr/>
                     <a:lstStyle/>
                     <a:p>
                       <a:pPr algn="l"/>
@@ -7075,7 +7075,7 @@
                 </a:tc>
                 <a:tc>
                   <a:txBody>
-                    <a:bodyPr wrap="square"/>
+                    <a:bodyPr/>
                     <a:lstStyle/>
                     <a:p>
                       <a:pPr algn="l"/>
@@ -7098,7 +7098,7 @@
                 </a:tc>
                 <a:tc>
                   <a:txBody>
-                    <a:bodyPr wrap="square"/>
+                    <a:bodyPr/>
                     <a:lstStyle/>
                     <a:p>
                       <a:pPr algn="l"/>
@@ -7123,7 +7123,7 @@
               <a:tr h="438912">
                 <a:tc>
                   <a:txBody>
-                    <a:bodyPr wrap="square"/>
+                    <a:bodyPr/>
                     <a:lstStyle/>
                     <a:p>
                       <a:pPr algn="l"/>
@@ -7146,7 +7146,7 @@
                 </a:tc>
                 <a:tc>
                   <a:txBody>
-                    <a:bodyPr wrap="square"/>
+                    <a:bodyPr/>
                     <a:lstStyle/>
                     <a:p>
                       <a:pPr algn="l"/>
@@ -7169,7 +7169,7 @@
                 </a:tc>
                 <a:tc>
                   <a:txBody>
-                    <a:bodyPr wrap="square"/>
+                    <a:bodyPr/>
                     <a:lstStyle/>
                     <a:p>
                       <a:pPr algn="l"/>
@@ -7192,7 +7192,7 @@
                 </a:tc>
                 <a:tc>
                   <a:txBody>
-                    <a:bodyPr wrap="square"/>
+                    <a:bodyPr/>
                     <a:lstStyle/>
                     <a:p>
                       <a:pPr algn="l"/>
@@ -7215,7 +7215,7 @@
                 </a:tc>
                 <a:tc>
                   <a:txBody>
-                    <a:bodyPr wrap="square"/>
+                    <a:bodyPr/>
                     <a:lstStyle/>
                     <a:p>
                       <a:pPr algn="l"/>
@@ -7238,7 +7238,7 @@
                 </a:tc>
                 <a:tc>
                   <a:txBody>
-                    <a:bodyPr wrap="square"/>
+                    <a:bodyPr/>
                     <a:lstStyle/>
                     <a:p>
                       <a:pPr algn="l"/>
@@ -7263,7 +7263,7 @@
               <a:tr h="438912">
                 <a:tc>
                   <a:txBody>
-                    <a:bodyPr wrap="square"/>
+                    <a:bodyPr/>
                     <a:lstStyle/>
                     <a:p>
                       <a:pPr algn="l"/>
@@ -7286,7 +7286,7 @@
                 </a:tc>
                 <a:tc>
                   <a:txBody>
-                    <a:bodyPr wrap="square"/>
+                    <a:bodyPr/>
                     <a:lstStyle/>
                     <a:p>
                       <a:pPr algn="l"/>
@@ -7309,7 +7309,7 @@
                 </a:tc>
                 <a:tc>
                   <a:txBody>
-                    <a:bodyPr wrap="square"/>
+                    <a:bodyPr/>
                     <a:lstStyle/>
                     <a:p>
                       <a:pPr algn="l"/>
@@ -7332,7 +7332,7 @@
                 </a:tc>
                 <a:tc>
                   <a:txBody>
-                    <a:bodyPr wrap="square"/>
+                    <a:bodyPr/>
                     <a:lstStyle/>
                     <a:p>
                       <a:pPr algn="l"/>
@@ -7355,7 +7355,7 @@
                 </a:tc>
                 <a:tc>
                   <a:txBody>
-                    <a:bodyPr wrap="square"/>
+                    <a:bodyPr/>
                     <a:lstStyle/>
                     <a:p>
                       <a:pPr algn="l"/>
@@ -7378,7 +7378,7 @@
                 </a:tc>
                 <a:tc>
                   <a:txBody>
-                    <a:bodyPr wrap="square"/>
+                    <a:bodyPr/>
                     <a:lstStyle/>
                     <a:p>
                       <a:pPr algn="l"/>
@@ -7403,7 +7403,7 @@
               <a:tr h="438912">
                 <a:tc>
                   <a:txBody>
-                    <a:bodyPr wrap="square"/>
+                    <a:bodyPr/>
                     <a:lstStyle/>
                     <a:p>
                       <a:pPr algn="l"/>
@@ -7426,7 +7426,7 @@
                 </a:tc>
                 <a:tc>
                   <a:txBody>
-                    <a:bodyPr wrap="square"/>
+                    <a:bodyPr/>
                     <a:lstStyle/>
                     <a:p>
                       <a:pPr algn="l"/>
@@ -7449,7 +7449,7 @@
                 </a:tc>
                 <a:tc>
                   <a:txBody>
-                    <a:bodyPr wrap="square"/>
+                    <a:bodyPr/>
                     <a:lstStyle/>
                     <a:p>
                       <a:pPr algn="l"/>
@@ -7472,7 +7472,7 @@
                 </a:tc>
                 <a:tc>
                   <a:txBody>
-                    <a:bodyPr wrap="square"/>
+                    <a:bodyPr/>
                     <a:lstStyle/>
                     <a:p>
                       <a:pPr algn="l"/>
@@ -7495,7 +7495,7 @@
                 </a:tc>
                 <a:tc>
                   <a:txBody>
-                    <a:bodyPr wrap="square"/>
+                    <a:bodyPr/>
                     <a:lstStyle/>
                     <a:p>
                       <a:pPr algn="l"/>
@@ -7518,7 +7518,7 @@
                 </a:tc>
                 <a:tc>
                   <a:txBody>
-                    <a:bodyPr wrap="square"/>
+                    <a:bodyPr/>
                     <a:lstStyle/>
                     <a:p>
                       <a:pPr algn="l"/>
@@ -7543,18 +7543,18 @@
               <a:tr h="438912">
                 <a:tc>
                   <a:txBody>
-                    <a:bodyPr wrap="square"/>
-                    <a:lstStyle/>
-                    <a:p>
-                      <a:pPr algn="l"/>
-                      <a:r>
-                        <a:rPr sz="1000" b="0">
-                          <a:solidFill>
-                            <a:srgbClr val="1D1B43"/>
-                          </a:solidFill>
-                          <a:latin typeface="Calibri"/>
-                        </a:rPr>
-                        <a:t>RS</a:t>
+                    <a:bodyPr/>
+                    <a:lstStyle/>
+                    <a:p>
+                      <a:pPr algn="l"/>
+                      <a:r>
+                        <a:rPr sz="1000" b="0">
+                          <a:solidFill>
+                            <a:srgbClr val="1D1B43"/>
+                          </a:solidFill>
+                          <a:latin typeface="Calibri"/>
+                        </a:rPr>
+                        <a:t>PE</a:t>
                       </a:r>
                     </a:p>
                   </a:txBody>
@@ -7566,7 +7566,7 @@
                 </a:tc>
                 <a:tc>
                   <a:txBody>
-                    <a:bodyPr wrap="square"/>
+                    <a:bodyPr/>
                     <a:lstStyle/>
                     <a:p>
                       <a:pPr algn="l"/>
@@ -7589,7 +7589,30 @@
                 </a:tc>
                 <a:tc>
                   <a:txBody>
-                    <a:bodyPr wrap="square"/>
+                    <a:bodyPr/>
+                    <a:lstStyle/>
+                    <a:p>
+                      <a:pPr algn="l"/>
+                      <a:r>
+                        <a:rPr sz="1000" b="0">
+                          <a:solidFill>
+                            <a:srgbClr val="1D1B43"/>
+                          </a:solidFill>
+                          <a:latin typeface="Calibri"/>
+                        </a:rPr>
+                        <a:t>2</a:t>
+                      </a:r>
+                    </a:p>
+                  </a:txBody>
+                  <a:tcPr>
+                    <a:solidFill>
+                      <a:srgbClr val="FFFFFF"/>
+                    </a:solidFill>
+                  </a:tcPr>
+                </a:tc>
+                <a:tc>
+                  <a:txBody>
+                    <a:bodyPr/>
                     <a:lstStyle/>
                     <a:p>
                       <a:pPr algn="l"/>
@@ -7612,18 +7635,18 @@
                 </a:tc>
                 <a:tc>
                   <a:txBody>
-                    <a:bodyPr wrap="square"/>
-                    <a:lstStyle/>
-                    <a:p>
-                      <a:pPr algn="l"/>
-                      <a:r>
-                        <a:rPr sz="1000" b="0">
-                          <a:solidFill>
-                            <a:srgbClr val="1D1B43"/>
-                          </a:solidFill>
-                          <a:latin typeface="Calibri"/>
-                        </a:rPr>
-                        <a:t>2</a:t>
+                    <a:bodyPr/>
+                    <a:lstStyle/>
+                    <a:p>
+                      <a:pPr algn="l"/>
+                      <a:r>
+                        <a:rPr sz="1000" b="0">
+                          <a:solidFill>
+                            <a:srgbClr val="1D1B43"/>
+                          </a:solidFill>
+                          <a:latin typeface="Calibri"/>
+                        </a:rPr>
+                        <a:t>100.0%</a:t>
                       </a:r>
                     </a:p>
                   </a:txBody>
@@ -7635,41 +7658,18 @@
                 </a:tc>
                 <a:tc>
                   <a:txBody>
-                    <a:bodyPr wrap="square"/>
-                    <a:lstStyle/>
-                    <a:p>
-                      <a:pPr algn="l"/>
-                      <a:r>
-                        <a:rPr sz="1000" b="0">
-                          <a:solidFill>
-                            <a:srgbClr val="1D1B43"/>
-                          </a:solidFill>
-                          <a:latin typeface="Calibri"/>
-                        </a:rPr>
-                        <a:t>0.0%</a:t>
-                      </a:r>
-                    </a:p>
-                  </a:txBody>
-                  <a:tcPr>
-                    <a:solidFill>
-                      <a:srgbClr val="FFFFFF"/>
-                    </a:solidFill>
-                  </a:tcPr>
-                </a:tc>
-                <a:tc>
-                  <a:txBody>
-                    <a:bodyPr wrap="square"/>
-                    <a:lstStyle/>
-                    <a:p>
-                      <a:pPr algn="l"/>
-                      <a:r>
-                        <a:rPr sz="1000" b="0">
-                          <a:solidFill>
-                            <a:srgbClr val="1D1B43"/>
-                          </a:solidFill>
-                          <a:latin typeface="Calibri"/>
-                        </a:rPr>
-                        <a:t>Atencao</a:t>
+                    <a:bodyPr/>
+                    <a:lstStyle/>
+                    <a:p>
+                      <a:pPr algn="l"/>
+                      <a:r>
+                        <a:rPr sz="1000" b="0">
+                          <a:solidFill>
+                            <a:srgbClr val="1D1B43"/>
+                          </a:solidFill>
+                          <a:latin typeface="Calibri"/>
+                        </a:rPr>
+                        <a:t>Excelente</a:t>
                       </a:r>
                     </a:p>
                   </a:txBody>
@@ -7683,18 +7683,18 @@
               <a:tr h="438912">
                 <a:tc>
                   <a:txBody>
-                    <a:bodyPr wrap="square"/>
-                    <a:lstStyle/>
-                    <a:p>
-                      <a:pPr algn="l"/>
-                      <a:r>
-                        <a:rPr sz="1000" b="0">
-                          <a:solidFill>
-                            <a:srgbClr val="1D1B43"/>
-                          </a:solidFill>
-                          <a:latin typeface="Calibri"/>
-                        </a:rPr>
-                        <a:t>PE</a:t>
+                    <a:bodyPr/>
+                    <a:lstStyle/>
+                    <a:p>
+                      <a:pPr algn="l"/>
+                      <a:r>
+                        <a:rPr sz="1000" b="0">
+                          <a:solidFill>
+                            <a:srgbClr val="1D1B43"/>
+                          </a:solidFill>
+                          <a:latin typeface="Calibri"/>
+                        </a:rPr>
+                        <a:t>RS</a:t>
                       </a:r>
                     </a:p>
                   </a:txBody>
@@ -7706,18 +7706,18 @@
                 </a:tc>
                 <a:tc>
                   <a:txBody>
-                    <a:bodyPr wrap="square"/>
-                    <a:lstStyle/>
-                    <a:p>
-                      <a:pPr algn="l"/>
-                      <a:r>
-                        <a:rPr sz="1000" b="0">
-                          <a:solidFill>
-                            <a:srgbClr val="1D1B43"/>
-                          </a:solidFill>
-                          <a:latin typeface="Calibri"/>
-                        </a:rPr>
-                        <a:t>1</a:t>
+                    <a:bodyPr/>
+                    <a:lstStyle/>
+                    <a:p>
+                      <a:pPr algn="l"/>
+                      <a:r>
+                        <a:rPr sz="1000" b="0">
+                          <a:solidFill>
+                            <a:srgbClr val="1D1B43"/>
+                          </a:solidFill>
+                          <a:latin typeface="Calibri"/>
+                        </a:rPr>
+                        <a:t>2</a:t>
                       </a:r>
                     </a:p>
                   </a:txBody>
@@ -7729,18 +7729,18 @@
                 </a:tc>
                 <a:tc>
                   <a:txBody>
-                    <a:bodyPr wrap="square"/>
-                    <a:lstStyle/>
-                    <a:p>
-                      <a:pPr algn="l"/>
-                      <a:r>
-                        <a:rPr sz="1000" b="0">
-                          <a:solidFill>
-                            <a:srgbClr val="1D1B43"/>
-                          </a:solidFill>
-                          <a:latin typeface="Calibri"/>
-                        </a:rPr>
-                        <a:t>1</a:t>
+                    <a:bodyPr/>
+                    <a:lstStyle/>
+                    <a:p>
+                      <a:pPr algn="l"/>
+                      <a:r>
+                        <a:rPr sz="1000" b="0">
+                          <a:solidFill>
+                            <a:srgbClr val="1D1B43"/>
+                          </a:solidFill>
+                          <a:latin typeface="Calibri"/>
+                        </a:rPr>
+                        <a:t>0</a:t>
                       </a:r>
                     </a:p>
                   </a:txBody>
@@ -7752,18 +7752,18 @@
                 </a:tc>
                 <a:tc>
                   <a:txBody>
-                    <a:bodyPr wrap="square"/>
-                    <a:lstStyle/>
-                    <a:p>
-                      <a:pPr algn="l"/>
-                      <a:r>
-                        <a:rPr sz="1000" b="0">
-                          <a:solidFill>
-                            <a:srgbClr val="1D1B43"/>
-                          </a:solidFill>
-                          <a:latin typeface="Calibri"/>
-                        </a:rPr>
-                        <a:t>0</a:t>
+                    <a:bodyPr/>
+                    <a:lstStyle/>
+                    <a:p>
+                      <a:pPr algn="l"/>
+                      <a:r>
+                        <a:rPr sz="1000" b="0">
+                          <a:solidFill>
+                            <a:srgbClr val="1D1B43"/>
+                          </a:solidFill>
+                          <a:latin typeface="Calibri"/>
+                        </a:rPr>
+                        <a:t>2</a:t>
                       </a:r>
                     </a:p>
                   </a:txBody>
@@ -7775,18 +7775,18 @@
                 </a:tc>
                 <a:tc>
                   <a:txBody>
-                    <a:bodyPr wrap="square"/>
-                    <a:lstStyle/>
-                    <a:p>
-                      <a:pPr algn="l"/>
-                      <a:r>
-                        <a:rPr sz="1000" b="0">
-                          <a:solidFill>
-                            <a:srgbClr val="1D1B43"/>
-                          </a:solidFill>
-                          <a:latin typeface="Calibri"/>
-                        </a:rPr>
-                        <a:t>100.0%</a:t>
+                    <a:bodyPr/>
+                    <a:lstStyle/>
+                    <a:p>
+                      <a:pPr algn="l"/>
+                      <a:r>
+                        <a:rPr sz="1000" b="0">
+                          <a:solidFill>
+                            <a:srgbClr val="1D1B43"/>
+                          </a:solidFill>
+                          <a:latin typeface="Calibri"/>
+                        </a:rPr>
+                        <a:t>0.0%</a:t>
                       </a:r>
                     </a:p>
                   </a:txBody>
@@ -7798,18 +7798,18 @@
                 </a:tc>
                 <a:tc>
                   <a:txBody>
-                    <a:bodyPr wrap="square"/>
-                    <a:lstStyle/>
-                    <a:p>
-                      <a:pPr algn="l"/>
-                      <a:r>
-                        <a:rPr sz="1000" b="0">
-                          <a:solidFill>
-                            <a:srgbClr val="1D1B43"/>
-                          </a:solidFill>
-                          <a:latin typeface="Calibri"/>
-                        </a:rPr>
-                        <a:t>Excelente</a:t>
+                    <a:bodyPr/>
+                    <a:lstStyle/>
+                    <a:p>
+                      <a:pPr algn="l"/>
+                      <a:r>
+                        <a:rPr sz="1000" b="0">
+                          <a:solidFill>
+                            <a:srgbClr val="1D1B43"/>
+                          </a:solidFill>
+                          <a:latin typeface="Calibri"/>
+                        </a:rPr>
+                        <a:t>Atencao</a:t>
                       </a:r>
                     </a:p>
                   </a:txBody>
@@ -7823,7 +7823,7 @@
               <a:tr h="438912">
                 <a:tc>
                   <a:txBody>
-                    <a:bodyPr wrap="square"/>
+                    <a:bodyPr/>
                     <a:lstStyle/>
                     <a:p>
                       <a:pPr algn="l"/>
@@ -7846,7 +7846,7 @@
                 </a:tc>
                 <a:tc>
                   <a:txBody>
-                    <a:bodyPr wrap="square"/>
+                    <a:bodyPr/>
                     <a:lstStyle/>
                     <a:p>
                       <a:pPr algn="l"/>
@@ -7869,7 +7869,7 @@
                 </a:tc>
                 <a:tc>
                   <a:txBody>
-                    <a:bodyPr wrap="square"/>
+                    <a:bodyPr/>
                     <a:lstStyle/>
                     <a:p>
                       <a:pPr algn="l"/>
@@ -7892,7 +7892,7 @@
                 </a:tc>
                 <a:tc>
                   <a:txBody>
-                    <a:bodyPr wrap="square"/>
+                    <a:bodyPr/>
                     <a:lstStyle/>
                     <a:p>
                       <a:pPr algn="l"/>
@@ -7915,7 +7915,7 @@
                 </a:tc>
                 <a:tc>
                   <a:txBody>
-                    <a:bodyPr wrap="square"/>
+                    <a:bodyPr/>
                     <a:lstStyle/>
                     <a:p>
                       <a:pPr algn="l"/>
@@ -7938,7 +7938,7 @@
                 </a:tc>
                 <a:tc>
                   <a:txBody>
-                    <a:bodyPr wrap="square"/>
+                    <a:bodyPr/>
                     <a:lstStyle/>
                     <a:p>
                       <a:pPr algn="l"/>
@@ -8122,7 +8122,7 @@
               <a:tr h="292608">
                 <a:tc>
                   <a:txBody>
-                    <a:bodyPr wrap="square"/>
+                    <a:bodyPr/>
                     <a:lstStyle/>
                     <a:p>
                       <a:pPr algn="ctr"/>
@@ -8145,7 +8145,7 @@
                 </a:tc>
                 <a:tc>
                   <a:txBody>
-                    <a:bodyPr wrap="square"/>
+                    <a:bodyPr/>
                     <a:lstStyle/>
                     <a:p>
                       <a:pPr algn="ctr"/>
@@ -8168,7 +8168,7 @@
                 </a:tc>
                 <a:tc>
                   <a:txBody>
-                    <a:bodyPr wrap="square"/>
+                    <a:bodyPr/>
                     <a:lstStyle/>
                     <a:p>
                       <a:pPr algn="ctr"/>
@@ -8191,7 +8191,7 @@
                 </a:tc>
                 <a:tc>
                   <a:txBody>
-                    <a:bodyPr wrap="square"/>
+                    <a:bodyPr/>
                     <a:lstStyle/>
                     <a:p>
                       <a:pPr algn="ctr"/>
@@ -8214,7 +8214,7 @@
                 </a:tc>
                 <a:tc>
                   <a:txBody>
-                    <a:bodyPr wrap="square"/>
+                    <a:bodyPr/>
                     <a:lstStyle/>
                     <a:p>
                       <a:pPr algn="ctr"/>
@@ -8237,7 +8237,7 @@
                 </a:tc>
                 <a:tc>
                   <a:txBody>
-                    <a:bodyPr wrap="square"/>
+                    <a:bodyPr/>
                     <a:lstStyle/>
                     <a:p>
                       <a:pPr algn="ctr"/>
@@ -8260,7 +8260,7 @@
                 </a:tc>
                 <a:tc>
                   <a:txBody>
-                    <a:bodyPr wrap="square"/>
+                    <a:bodyPr/>
                     <a:lstStyle/>
                     <a:p>
                       <a:pPr algn="ctr"/>
@@ -8285,7 +8285,7 @@
               <a:tr h="292608">
                 <a:tc>
                   <a:txBody>
-                    <a:bodyPr wrap="square"/>
+                    <a:bodyPr/>
                     <a:lstStyle/>
                     <a:p>
                       <a:pPr algn="l"/>
@@ -8308,7 +8308,7 @@
                 </a:tc>
                 <a:tc>
                   <a:txBody>
-                    <a:bodyPr wrap="square"/>
+                    <a:bodyPr/>
                     <a:lstStyle/>
                     <a:p>
                       <a:pPr algn="l"/>
@@ -8331,7 +8331,7 @@
                 </a:tc>
                 <a:tc>
                   <a:txBody>
-                    <a:bodyPr wrap="square"/>
+                    <a:bodyPr/>
                     <a:lstStyle/>
                     <a:p>
                       <a:pPr algn="l"/>
@@ -8354,7 +8354,7 @@
                 </a:tc>
                 <a:tc>
                   <a:txBody>
-                    <a:bodyPr wrap="square"/>
+                    <a:bodyPr/>
                     <a:lstStyle/>
                     <a:p>
                       <a:pPr algn="l"/>
@@ -8377,7 +8377,7 @@
                 </a:tc>
                 <a:tc>
                   <a:txBody>
-                    <a:bodyPr wrap="square"/>
+                    <a:bodyPr/>
                     <a:lstStyle/>
                     <a:p>
                       <a:pPr algn="l"/>
@@ -8400,7 +8400,7 @@
                 </a:tc>
                 <a:tc>
                   <a:txBody>
-                    <a:bodyPr wrap="square"/>
+                    <a:bodyPr/>
                     <a:lstStyle/>
                     <a:p>
                       <a:pPr algn="l"/>
@@ -8423,7 +8423,7 @@
                 </a:tc>
                 <a:tc>
                   <a:txBody>
-                    <a:bodyPr wrap="square"/>
+                    <a:bodyPr/>
                     <a:lstStyle/>
                     <a:p>
                       <a:pPr algn="l"/>
@@ -8448,7 +8448,7 @@
               <a:tr h="292608">
                 <a:tc>
                   <a:txBody>
-                    <a:bodyPr wrap="square"/>
+                    <a:bodyPr/>
                     <a:lstStyle/>
                     <a:p>
                       <a:pPr algn="l"/>
@@ -8471,7 +8471,7 @@
                 </a:tc>
                 <a:tc>
                   <a:txBody>
-                    <a:bodyPr wrap="square"/>
+                    <a:bodyPr/>
                     <a:lstStyle/>
                     <a:p>
                       <a:pPr algn="l"/>
@@ -8494,7 +8494,7 @@
                 </a:tc>
                 <a:tc>
                   <a:txBody>
-                    <a:bodyPr wrap="square"/>
+                    <a:bodyPr/>
                     <a:lstStyle/>
                     <a:p>
                       <a:pPr algn="l"/>
@@ -8517,7 +8517,7 @@
                 </a:tc>
                 <a:tc>
                   <a:txBody>
-                    <a:bodyPr wrap="square"/>
+                    <a:bodyPr/>
                     <a:lstStyle/>
                     <a:p>
                       <a:pPr algn="l"/>
@@ -8540,7 +8540,7 @@
                 </a:tc>
                 <a:tc>
                   <a:txBody>
-                    <a:bodyPr wrap="square"/>
+                    <a:bodyPr/>
                     <a:lstStyle/>
                     <a:p>
                       <a:pPr algn="l"/>
@@ -8563,7 +8563,7 @@
                 </a:tc>
                 <a:tc>
                   <a:txBody>
-                    <a:bodyPr wrap="square"/>
+                    <a:bodyPr/>
                     <a:lstStyle/>
                     <a:p>
                       <a:pPr algn="l"/>
@@ -8586,7 +8586,7 @@
                 </a:tc>
                 <a:tc>
                   <a:txBody>
-                    <a:bodyPr wrap="square"/>
+                    <a:bodyPr/>
                     <a:lstStyle/>
                     <a:p>
                       <a:pPr algn="l"/>
@@ -8611,7 +8611,7 @@
               <a:tr h="292608">
                 <a:tc>
                   <a:txBody>
-                    <a:bodyPr wrap="square"/>
+                    <a:bodyPr/>
                     <a:lstStyle/>
                     <a:p>
                       <a:pPr algn="l"/>
@@ -8634,7 +8634,7 @@
                 </a:tc>
                 <a:tc>
                   <a:txBody>
-                    <a:bodyPr wrap="square"/>
+                    <a:bodyPr/>
                     <a:lstStyle/>
                     <a:p>
                       <a:pPr algn="l"/>
@@ -8657,7 +8657,7 @@
                 </a:tc>
                 <a:tc>
                   <a:txBody>
-                    <a:bodyPr wrap="square"/>
+                    <a:bodyPr/>
                     <a:lstStyle/>
                     <a:p>
                       <a:pPr algn="l"/>
@@ -8680,7 +8680,7 @@
                 </a:tc>
                 <a:tc>
                   <a:txBody>
-                    <a:bodyPr wrap="square"/>
+                    <a:bodyPr/>
                     <a:lstStyle/>
                     <a:p>
                       <a:pPr algn="l"/>
@@ -8703,7 +8703,7 @@
                 </a:tc>
                 <a:tc>
                   <a:txBody>
-                    <a:bodyPr wrap="square"/>
+                    <a:bodyPr/>
                     <a:lstStyle/>
                     <a:p>
                       <a:pPr algn="l"/>
@@ -8726,7 +8726,7 @@
                 </a:tc>
                 <a:tc>
                   <a:txBody>
-                    <a:bodyPr wrap="square"/>
+                    <a:bodyPr/>
                     <a:lstStyle/>
                     <a:p>
                       <a:pPr algn="l"/>
@@ -8749,7 +8749,7 @@
                 </a:tc>
                 <a:tc>
                   <a:txBody>
-                    <a:bodyPr wrap="square"/>
+                    <a:bodyPr/>
                     <a:lstStyle/>
                     <a:p>
                       <a:pPr algn="l"/>
@@ -8774,7 +8774,7 @@
               <a:tr h="292608">
                 <a:tc>
                   <a:txBody>
-                    <a:bodyPr wrap="square"/>
+                    <a:bodyPr/>
                     <a:lstStyle/>
                     <a:p>
                       <a:pPr algn="l"/>
@@ -8797,7 +8797,7 @@
                 </a:tc>
                 <a:tc>
                   <a:txBody>
-                    <a:bodyPr wrap="square"/>
+                    <a:bodyPr/>
                     <a:lstStyle/>
                     <a:p>
                       <a:pPr algn="l"/>
@@ -8820,7 +8820,7 @@
                 </a:tc>
                 <a:tc>
                   <a:txBody>
-                    <a:bodyPr wrap="square"/>
+                    <a:bodyPr/>
                     <a:lstStyle/>
                     <a:p>
                       <a:pPr algn="l"/>
@@ -8843,7 +8843,7 @@
                 </a:tc>
                 <a:tc>
                   <a:txBody>
-                    <a:bodyPr wrap="square"/>
+                    <a:bodyPr/>
                     <a:lstStyle/>
                     <a:p>
                       <a:pPr algn="l"/>
@@ -8866,7 +8866,7 @@
                 </a:tc>
                 <a:tc>
                   <a:txBody>
-                    <a:bodyPr wrap="square"/>
+                    <a:bodyPr/>
                     <a:lstStyle/>
                     <a:p>
                       <a:pPr algn="l"/>
@@ -8889,7 +8889,7 @@
                 </a:tc>
                 <a:tc>
                   <a:txBody>
-                    <a:bodyPr wrap="square"/>
+                    <a:bodyPr/>
                     <a:lstStyle/>
                     <a:p>
                       <a:pPr algn="l"/>
@@ -8912,7 +8912,7 @@
                 </a:tc>
                 <a:tc>
                   <a:txBody>
-                    <a:bodyPr wrap="square"/>
+                    <a:bodyPr/>
                     <a:lstStyle/>
                     <a:p>
                       <a:pPr algn="l"/>
@@ -8937,7 +8937,7 @@
               <a:tr h="292608">
                 <a:tc>
                   <a:txBody>
-                    <a:bodyPr wrap="square"/>
+                    <a:bodyPr/>
                     <a:lstStyle/>
                     <a:p>
                       <a:pPr algn="l"/>
@@ -8960,7 +8960,7 @@
                 </a:tc>
                 <a:tc>
                   <a:txBody>
-                    <a:bodyPr wrap="square"/>
+                    <a:bodyPr/>
                     <a:lstStyle/>
                     <a:p>
                       <a:pPr algn="l"/>
@@ -8983,7 +8983,7 @@
                 </a:tc>
                 <a:tc>
                   <a:txBody>
-                    <a:bodyPr wrap="square"/>
+                    <a:bodyPr/>
                     <a:lstStyle/>
                     <a:p>
                       <a:pPr algn="l"/>
@@ -9006,7 +9006,7 @@
                 </a:tc>
                 <a:tc>
                   <a:txBody>
-                    <a:bodyPr wrap="square"/>
+                    <a:bodyPr/>
                     <a:lstStyle/>
                     <a:p>
                       <a:pPr algn="l"/>
@@ -9029,7 +9029,7 @@
                 </a:tc>
                 <a:tc>
                   <a:txBody>
-                    <a:bodyPr wrap="square"/>
+                    <a:bodyPr/>
                     <a:lstStyle/>
                     <a:p>
                       <a:pPr algn="l"/>
@@ -9052,7 +9052,7 @@
                 </a:tc>
                 <a:tc>
                   <a:txBody>
-                    <a:bodyPr wrap="square"/>
+                    <a:bodyPr/>
                     <a:lstStyle/>
                     <a:p>
                       <a:pPr algn="l"/>
@@ -9075,7 +9075,7 @@
                 </a:tc>
                 <a:tc>
                   <a:txBody>
-                    <a:bodyPr wrap="square"/>
+                    <a:bodyPr/>
                     <a:lstStyle/>
                     <a:p>
                       <a:pPr algn="l"/>
@@ -9100,7 +9100,7 @@
               <a:tr h="292608">
                 <a:tc>
                   <a:txBody>
-                    <a:bodyPr wrap="square"/>
+                    <a:bodyPr/>
                     <a:lstStyle/>
                     <a:p>
                       <a:pPr algn="l"/>
@@ -9123,18 +9123,18 @@
                 </a:tc>
                 <a:tc>
                   <a:txBody>
-                    <a:bodyPr wrap="square"/>
-                    <a:lstStyle/>
-                    <a:p>
-                      <a:pPr algn="l"/>
-                      <a:r>
-                        <a:rPr sz="1000" b="0">
-                          <a:solidFill>
-                            <a:srgbClr val="1D1B43"/>
-                          </a:solidFill>
-                          <a:latin typeface="Calibri"/>
-                        </a:rPr>
-                        <a:t>BRSL LOGISTICA LTDA - ITAJAI / SC</a:t>
+                    <a:bodyPr/>
+                    <a:lstStyle/>
+                    <a:p>
+                      <a:pPr algn="l"/>
+                      <a:r>
+                        <a:rPr sz="1000" b="0">
+                          <a:solidFill>
+                            <a:srgbClr val="1D1B43"/>
+                          </a:solidFill>
+                          <a:latin typeface="Calibri"/>
+                        </a:rPr>
+                        <a:t>JC ENCOMENDA EXPRESS - RECIFE / PE</a:t>
                       </a:r>
                     </a:p>
                   </a:txBody>
@@ -9146,18 +9146,18 @@
                 </a:tc>
                 <a:tc>
                   <a:txBody>
-                    <a:bodyPr wrap="square"/>
-                    <a:lstStyle/>
-                    <a:p>
-                      <a:pPr algn="l"/>
-                      <a:r>
-                        <a:rPr sz="1000" b="0">
-                          <a:solidFill>
-                            <a:srgbClr val="1D1B43"/>
-                          </a:solidFill>
-                          <a:latin typeface="Calibri"/>
-                        </a:rPr>
-                        <a:t>1</a:t>
+                    <a:bodyPr/>
+                    <a:lstStyle/>
+                    <a:p>
+                      <a:pPr algn="l"/>
+                      <a:r>
+                        <a:rPr sz="1000" b="0">
+                          <a:solidFill>
+                            <a:srgbClr val="1D1B43"/>
+                          </a:solidFill>
+                          <a:latin typeface="Calibri"/>
+                        </a:rPr>
+                        <a:t>2</a:t>
                       </a:r>
                     </a:p>
                   </a:txBody>
@@ -9169,18 +9169,18 @@
                 </a:tc>
                 <a:tc>
                   <a:txBody>
-                    <a:bodyPr wrap="square"/>
-                    <a:lstStyle/>
-                    <a:p>
-                      <a:pPr algn="l"/>
-                      <a:r>
-                        <a:rPr sz="1000" b="0">
-                          <a:solidFill>
-                            <a:srgbClr val="1D1B43"/>
-                          </a:solidFill>
-                          <a:latin typeface="Calibri"/>
-                        </a:rPr>
-                        <a:t>1</a:t>
+                    <a:bodyPr/>
+                    <a:lstStyle/>
+                    <a:p>
+                      <a:pPr algn="l"/>
+                      <a:r>
+                        <a:rPr sz="1000" b="0">
+                          <a:solidFill>
+                            <a:srgbClr val="1D1B43"/>
+                          </a:solidFill>
+                          <a:latin typeface="Calibri"/>
+                        </a:rPr>
+                        <a:t>2</a:t>
                       </a:r>
                     </a:p>
                   </a:txBody>
@@ -9192,7 +9192,7 @@
                 </a:tc>
                 <a:tc>
                   <a:txBody>
-                    <a:bodyPr wrap="square"/>
+                    <a:bodyPr/>
                     <a:lstStyle/>
                     <a:p>
                       <a:pPr algn="l"/>
@@ -9215,7 +9215,7 @@
                 </a:tc>
                 <a:tc>
                   <a:txBody>
-                    <a:bodyPr wrap="square"/>
+                    <a:bodyPr/>
                     <a:lstStyle/>
                     <a:p>
                       <a:pPr algn="l"/>
@@ -9238,7 +9238,7 @@
                 </a:tc>
                 <a:tc>
                   <a:txBody>
-                    <a:bodyPr wrap="square"/>
+                    <a:bodyPr/>
                     <a:lstStyle/>
                     <a:p>
                       <a:pPr algn="l"/>
@@ -9263,7 +9263,7 @@
               <a:tr h="292608">
                 <a:tc>
                   <a:txBody>
-                    <a:bodyPr wrap="square"/>
+                    <a:bodyPr/>
                     <a:lstStyle/>
                     <a:p>
                       <a:pPr algn="l"/>
@@ -9286,7 +9286,7 @@
                 </a:tc>
                 <a:tc>
                   <a:txBody>
-                    <a:bodyPr wrap="square"/>
+                    <a:bodyPr/>
                     <a:lstStyle/>
                     <a:p>
                       <a:pPr algn="l"/>
@@ -9309,7 +9309,7 @@
                 </a:tc>
                 <a:tc>
                   <a:txBody>
-                    <a:bodyPr wrap="square"/>
+                    <a:bodyPr/>
                     <a:lstStyle/>
                     <a:p>
                       <a:pPr algn="l"/>
@@ -9332,7 +9332,7 @@
                 </a:tc>
                 <a:tc>
                   <a:txBody>
-                    <a:bodyPr wrap="square"/>
+                    <a:bodyPr/>
                     <a:lstStyle/>
                     <a:p>
                       <a:pPr algn="l"/>
@@ -9355,7 +9355,7 @@
                 </a:tc>
                 <a:tc>
                   <a:txBody>
-                    <a:bodyPr wrap="square"/>
+                    <a:bodyPr/>
                     <a:lstStyle/>
                     <a:p>
                       <a:pPr algn="l"/>
@@ -9378,7 +9378,7 @@
                 </a:tc>
                 <a:tc>
                   <a:txBody>
-                    <a:bodyPr wrap="square"/>
+                    <a:bodyPr/>
                     <a:lstStyle/>
                     <a:p>
                       <a:pPr algn="l"/>
@@ -9401,7 +9401,7 @@
                 </a:tc>
                 <a:tc>
                   <a:txBody>
-                    <a:bodyPr wrap="square"/>
+                    <a:bodyPr/>
                     <a:lstStyle/>
                     <a:p>
                       <a:pPr algn="l"/>
@@ -9426,7 +9426,7 @@
               <a:tr h="292608">
                 <a:tc>
                   <a:txBody>
-                    <a:bodyPr wrap="square"/>
+                    <a:bodyPr/>
                     <a:lstStyle/>
                     <a:p>
                       <a:pPr algn="l"/>
@@ -9449,7 +9449,7 @@
                 </a:tc>
                 <a:tc>
                   <a:txBody>
-                    <a:bodyPr wrap="square"/>
+                    <a:bodyPr/>
                     <a:lstStyle/>
                     <a:p>
                       <a:pPr algn="l"/>
@@ -9472,7 +9472,7 @@
                 </a:tc>
                 <a:tc>
                   <a:txBody>
-                    <a:bodyPr wrap="square"/>
+                    <a:bodyPr/>
                     <a:lstStyle/>
                     <a:p>
                       <a:pPr algn="l"/>
@@ -9495,7 +9495,7 @@
                 </a:tc>
                 <a:tc>
                   <a:txBody>
-                    <a:bodyPr wrap="square"/>
+                    <a:bodyPr/>
                     <a:lstStyle/>
                     <a:p>
                       <a:pPr algn="l"/>
@@ -9518,7 +9518,7 @@
                 </a:tc>
                 <a:tc>
                   <a:txBody>
-                    <a:bodyPr wrap="square"/>
+                    <a:bodyPr/>
                     <a:lstStyle/>
                     <a:p>
                       <a:pPr algn="l"/>
@@ -9541,7 +9541,7 @@
                 </a:tc>
                 <a:tc>
                   <a:txBody>
-                    <a:bodyPr wrap="square"/>
+                    <a:bodyPr/>
                     <a:lstStyle/>
                     <a:p>
                       <a:pPr algn="l"/>
@@ -9564,7 +9564,7 @@
                 </a:tc>
                 <a:tc>
                   <a:txBody>
-                    <a:bodyPr wrap="square"/>
+                    <a:bodyPr/>
                     <a:lstStyle/>
                     <a:p>
                       <a:pPr algn="l"/>
@@ -9589,7 +9589,7 @@
               <a:tr h="292608">
                 <a:tc>
                   <a:txBody>
-                    <a:bodyPr wrap="square"/>
+                    <a:bodyPr/>
                     <a:lstStyle/>
                     <a:p>
                       <a:pPr algn="l"/>
@@ -9612,7 +9612,7 @@
                 </a:tc>
                 <a:tc>
                   <a:txBody>
-                    <a:bodyPr wrap="square"/>
+                    <a:bodyPr/>
                     <a:lstStyle/>
                     <a:p>
                       <a:pPr algn="l"/>
@@ -9635,7 +9635,7 @@
                 </a:tc>
                 <a:tc>
                   <a:txBody>
-                    <a:bodyPr wrap="square"/>
+                    <a:bodyPr/>
                     <a:lstStyle/>
                     <a:p>
                       <a:pPr algn="l"/>
@@ -9658,7 +9658,7 @@
                 </a:tc>
                 <a:tc>
                   <a:txBody>
-                    <a:bodyPr wrap="square"/>
+                    <a:bodyPr/>
                     <a:lstStyle/>
                     <a:p>
                       <a:pPr algn="l"/>
@@ -9681,7 +9681,7 @@
                 </a:tc>
                 <a:tc>
                   <a:txBody>
-                    <a:bodyPr wrap="square"/>
+                    <a:bodyPr/>
                     <a:lstStyle/>
                     <a:p>
                       <a:pPr algn="l"/>
@@ -9704,7 +9704,7 @@
                 </a:tc>
                 <a:tc>
                   <a:txBody>
-                    <a:bodyPr wrap="square"/>
+                    <a:bodyPr/>
                     <a:lstStyle/>
                     <a:p>
                       <a:pPr algn="l"/>
@@ -9727,7 +9727,7 @@
                 </a:tc>
                 <a:tc>
                   <a:txBody>
-                    <a:bodyPr wrap="square"/>
+                    <a:bodyPr/>
                     <a:lstStyle/>
                     <a:p>
                       <a:pPr algn="l"/>
@@ -9752,7 +9752,7 @@
               <a:tr h="292608">
                 <a:tc>
                   <a:txBody>
-                    <a:bodyPr wrap="square"/>
+                    <a:bodyPr/>
                     <a:lstStyle/>
                     <a:p>
                       <a:pPr algn="l"/>
@@ -9775,18 +9775,18 @@
                 </a:tc>
                 <a:tc>
                   <a:txBody>
-                    <a:bodyPr wrap="square"/>
-                    <a:lstStyle/>
-                    <a:p>
-                      <a:pPr algn="l"/>
-                      <a:r>
-                        <a:rPr sz="1000" b="0">
-                          <a:solidFill>
-                            <a:srgbClr val="1D1B43"/>
-                          </a:solidFill>
-                          <a:latin typeface="Calibri"/>
-                        </a:rPr>
-                        <a:t>CORSUL COM E REPRESE - CAXIAS DO SUL / RS</a:t>
+                    <a:bodyPr/>
+                    <a:lstStyle/>
+                    <a:p>
+                      <a:pPr algn="l"/>
+                      <a:r>
+                        <a:rPr sz="1000" b="0">
+                          <a:solidFill>
+                            <a:srgbClr val="1D1B43"/>
+                          </a:solidFill>
+                          <a:latin typeface="Calibri"/>
+                        </a:rPr>
+                        <a:t>BRSL LOGISTICA LTDA - ITAJAI / SC</a:t>
                       </a:r>
                     </a:p>
                   </a:txBody>
@@ -9798,7 +9798,7 @@
                 </a:tc>
                 <a:tc>
                   <a:txBody>
-                    <a:bodyPr wrap="square"/>
+                    <a:bodyPr/>
                     <a:lstStyle/>
                     <a:p>
                       <a:pPr algn="l"/>
@@ -9821,7 +9821,30 @@
                 </a:tc>
                 <a:tc>
                   <a:txBody>
-                    <a:bodyPr wrap="square"/>
+                    <a:bodyPr/>
+                    <a:lstStyle/>
+                    <a:p>
+                      <a:pPr algn="l"/>
+                      <a:r>
+                        <a:rPr sz="1000" b="0">
+                          <a:solidFill>
+                            <a:srgbClr val="1D1B43"/>
+                          </a:solidFill>
+                          <a:latin typeface="Calibri"/>
+                        </a:rPr>
+                        <a:t>1</a:t>
+                      </a:r>
+                    </a:p>
+                  </a:txBody>
+                  <a:tcPr>
+                    <a:solidFill>
+                      <a:srgbClr val="F2F2F2"/>
+                    </a:solidFill>
+                  </a:tcPr>
+                </a:tc>
+                <a:tc>
+                  <a:txBody>
+                    <a:bodyPr/>
                     <a:lstStyle/>
                     <a:p>
                       <a:pPr algn="l"/>
@@ -9844,18 +9867,18 @@
                 </a:tc>
                 <a:tc>
                   <a:txBody>
-                    <a:bodyPr wrap="square"/>
-                    <a:lstStyle/>
-                    <a:p>
-                      <a:pPr algn="l"/>
-                      <a:r>
-                        <a:rPr sz="1000" b="0">
-                          <a:solidFill>
-                            <a:srgbClr val="1D1B43"/>
-                          </a:solidFill>
-                          <a:latin typeface="Calibri"/>
-                        </a:rPr>
-                        <a:t>1</a:t>
+                    <a:bodyPr/>
+                    <a:lstStyle/>
+                    <a:p>
+                      <a:pPr algn="l"/>
+                      <a:r>
+                        <a:rPr sz="1000" b="0">
+                          <a:solidFill>
+                            <a:srgbClr val="1D1B43"/>
+                          </a:solidFill>
+                          <a:latin typeface="Calibri"/>
+                        </a:rPr>
+                        <a:t>100.0%</a:t>
                       </a:r>
                     </a:p>
                   </a:txBody>
@@ -9867,41 +9890,18 @@
                 </a:tc>
                 <a:tc>
                   <a:txBody>
-                    <a:bodyPr wrap="square"/>
-                    <a:lstStyle/>
-                    <a:p>
-                      <a:pPr algn="l"/>
-                      <a:r>
-                        <a:rPr sz="1000" b="0">
-                          <a:solidFill>
-                            <a:srgbClr val="1D1B43"/>
-                          </a:solidFill>
-                          <a:latin typeface="Calibri"/>
-                        </a:rPr>
-                        <a:t>0.0%</a:t>
-                      </a:r>
-                    </a:p>
-                  </a:txBody>
-                  <a:tcPr>
-                    <a:solidFill>
-                      <a:srgbClr val="F2F2F2"/>
-                    </a:solidFill>
-                  </a:tcPr>
-                </a:tc>
-                <a:tc>
-                  <a:txBody>
-                    <a:bodyPr wrap="square"/>
-                    <a:lstStyle/>
-                    <a:p>
-                      <a:pPr algn="l"/>
-                      <a:r>
-                        <a:rPr sz="1000" b="0">
-                          <a:solidFill>
-                            <a:srgbClr val="1D1B43"/>
-                          </a:solidFill>
-                          <a:latin typeface="Calibri"/>
-                        </a:rPr>
-                        <a:t>Atencao</a:t>
+                    <a:bodyPr/>
+                    <a:lstStyle/>
+                    <a:p>
+                      <a:pPr algn="l"/>
+                      <a:r>
+                        <a:rPr sz="1000" b="0">
+                          <a:solidFill>
+                            <a:srgbClr val="1D1B43"/>
+                          </a:solidFill>
+                          <a:latin typeface="Calibri"/>
+                        </a:rPr>
+                        <a:t>Excelente</a:t>
                       </a:r>
                     </a:p>
                   </a:txBody>
@@ -9915,7 +9915,7 @@
               <a:tr h="292608">
                 <a:tc>
                   <a:txBody>
-                    <a:bodyPr wrap="square"/>
+                    <a:bodyPr/>
                     <a:lstStyle/>
                     <a:p>
                       <a:pPr algn="l"/>
@@ -9938,7 +9938,7 @@
                 </a:tc>
                 <a:tc>
                   <a:txBody>
-                    <a:bodyPr wrap="square"/>
+                    <a:bodyPr/>
                     <a:lstStyle/>
                     <a:p>
                       <a:pPr algn="l"/>
@@ -9961,7 +9961,7 @@
                 </a:tc>
                 <a:tc>
                   <a:txBody>
-                    <a:bodyPr wrap="square"/>
+                    <a:bodyPr/>
                     <a:lstStyle/>
                     <a:p>
                       <a:pPr algn="l"/>
@@ -9984,7 +9984,7 @@
                 </a:tc>
                 <a:tc>
                   <a:txBody>
-                    <a:bodyPr wrap="square"/>
+                    <a:bodyPr/>
                     <a:lstStyle/>
                     <a:p>
                       <a:pPr algn="l"/>
@@ -10007,7 +10007,7 @@
                 </a:tc>
                 <a:tc>
                   <a:txBody>
-                    <a:bodyPr wrap="square"/>
+                    <a:bodyPr/>
                     <a:lstStyle/>
                     <a:p>
                       <a:pPr algn="l"/>
@@ -10030,7 +10030,7 @@
                 </a:tc>
                 <a:tc>
                   <a:txBody>
-                    <a:bodyPr wrap="square"/>
+                    <a:bodyPr/>
                     <a:lstStyle/>
                     <a:p>
                       <a:pPr algn="l"/>
@@ -10053,7 +10053,7 @@
                 </a:tc>
                 <a:tc>
                   <a:txBody>
-                    <a:bodyPr wrap="square"/>
+                    <a:bodyPr/>
                     <a:lstStyle/>
                     <a:p>
                       <a:pPr algn="l"/>
@@ -10078,7 +10078,7 @@
               <a:tr h="292608">
                 <a:tc>
                   <a:txBody>
-                    <a:bodyPr wrap="square"/>
+                    <a:bodyPr/>
                     <a:lstStyle/>
                     <a:p>
                       <a:pPr algn="l"/>
@@ -10101,7 +10101,7 @@
                 </a:tc>
                 <a:tc>
                   <a:txBody>
-                    <a:bodyPr wrap="square"/>
+                    <a:bodyPr/>
                     <a:lstStyle/>
                     <a:p>
                       <a:pPr algn="l"/>
@@ -10124,7 +10124,7 @@
                 </a:tc>
                 <a:tc>
                   <a:txBody>
-                    <a:bodyPr wrap="square"/>
+                    <a:bodyPr/>
                     <a:lstStyle/>
                     <a:p>
                       <a:pPr algn="l"/>
@@ -10147,7 +10147,7 @@
                 </a:tc>
                 <a:tc>
                   <a:txBody>
-                    <a:bodyPr wrap="square"/>
+                    <a:bodyPr/>
                     <a:lstStyle/>
                     <a:p>
                       <a:pPr algn="l"/>
@@ -10170,7 +10170,7 @@
                 </a:tc>
                 <a:tc>
                   <a:txBody>
-                    <a:bodyPr wrap="square"/>
+                    <a:bodyPr/>
                     <a:lstStyle/>
                     <a:p>
                       <a:pPr algn="l"/>
@@ -10193,7 +10193,7 @@
                 </a:tc>
                 <a:tc>
                   <a:txBody>
-                    <a:bodyPr wrap="square"/>
+                    <a:bodyPr/>
                     <a:lstStyle/>
                     <a:p>
                       <a:pPr algn="l"/>
@@ -10216,7 +10216,7 @@
                 </a:tc>
                 <a:tc>
                   <a:txBody>
-                    <a:bodyPr wrap="square"/>
+                    <a:bodyPr/>
                     <a:lstStyle/>
                     <a:p>
                       <a:pPr algn="l"/>
@@ -10241,7 +10241,7 @@
               <a:tr h="292608">
                 <a:tc>
                   <a:txBody>
-                    <a:bodyPr wrap="square"/>
+                    <a:bodyPr/>
                     <a:lstStyle/>
                     <a:p>
                       <a:pPr algn="l"/>
@@ -10264,7 +10264,7 @@
                 </a:tc>
                 <a:tc>
                   <a:txBody>
-                    <a:bodyPr wrap="square"/>
+                    <a:bodyPr/>
                     <a:lstStyle/>
                     <a:p>
                       <a:pPr algn="l"/>
@@ -10287,7 +10287,7 @@
                 </a:tc>
                 <a:tc>
                   <a:txBody>
-                    <a:bodyPr wrap="square"/>
+                    <a:bodyPr/>
                     <a:lstStyle/>
                     <a:p>
                       <a:pPr algn="l"/>
@@ -10310,7 +10310,7 @@
                 </a:tc>
                 <a:tc>
                   <a:txBody>
-                    <a:bodyPr wrap="square"/>
+                    <a:bodyPr/>
                     <a:lstStyle/>
                     <a:p>
                       <a:pPr algn="l"/>
@@ -10333,7 +10333,7 @@
                 </a:tc>
                 <a:tc>
                   <a:txBody>
-                    <a:bodyPr wrap="square"/>
+                    <a:bodyPr/>
                     <a:lstStyle/>
                     <a:p>
                       <a:pPr algn="l"/>
@@ -10356,7 +10356,7 @@
                 </a:tc>
                 <a:tc>
                   <a:txBody>
-                    <a:bodyPr wrap="square"/>
+                    <a:bodyPr/>
                     <a:lstStyle/>
                     <a:p>
                       <a:pPr algn="l"/>
@@ -10379,7 +10379,7 @@
                 </a:tc>
                 <a:tc>
                   <a:txBody>
-                    <a:bodyPr wrap="square"/>
+                    <a:bodyPr/>
                     <a:lstStyle/>
                     <a:p>
                       <a:pPr algn="l"/>
@@ -10404,7 +10404,7 @@
               <a:tr h="292608">
                 <a:tc>
                   <a:txBody>
-                    <a:bodyPr wrap="square"/>
+                    <a:bodyPr/>
                     <a:lstStyle/>
                     <a:p>
                       <a:pPr algn="l"/>
@@ -10427,7 +10427,7 @@
                 </a:tc>
                 <a:tc>
                   <a:txBody>
-                    <a:bodyPr wrap="square"/>
+                    <a:bodyPr/>
                     <a:lstStyle/>
                     <a:p>
                       <a:pPr algn="l"/>
@@ -10450,7 +10450,7 @@
                 </a:tc>
                 <a:tc>
                   <a:txBody>
-                    <a:bodyPr wrap="square"/>
+                    <a:bodyPr/>
                     <a:lstStyle/>
                     <a:p>
                       <a:pPr algn="l"/>
@@ -10473,7 +10473,7 @@
                 </a:tc>
                 <a:tc>
                   <a:txBody>
-                    <a:bodyPr wrap="square"/>
+                    <a:bodyPr/>
                     <a:lstStyle/>
                     <a:p>
                       <a:pPr algn="l"/>
@@ -10496,7 +10496,7 @@
                 </a:tc>
                 <a:tc>
                   <a:txBody>
-                    <a:bodyPr wrap="square"/>
+                    <a:bodyPr/>
                     <a:lstStyle/>
                     <a:p>
                       <a:pPr algn="l"/>
@@ -10519,7 +10519,7 @@
                 </a:tc>
                 <a:tc>
                   <a:txBody>
-                    <a:bodyPr wrap="square"/>
+                    <a:bodyPr/>
                     <a:lstStyle/>
                     <a:p>
                       <a:pPr algn="l"/>
@@ -10542,7 +10542,7 @@
                 </a:tc>
                 <a:tc>
                   <a:txBody>
-                    <a:bodyPr wrap="square"/>
+                    <a:bodyPr/>
                     <a:lstStyle/>
                     <a:p>
                       <a:pPr algn="l"/>

--- a/PORTOEXPRESS_LOGISTICA_LTDA.pptx
+++ b/PORTOEXPRESS_LOGISTICA_LTDA.pptx
@@ -147,10 +147,10 @@
               <c:strCache>
                 <c:ptCount val="2"/>
                 <c:pt idx="0">
-                  <c:v>Marco 2026</c:v>
+                  <c:v>Abril 2026</c:v>
                 </c:pt>
                 <c:pt idx="1">
-                  <c:v>Abril 2026</c:v>
+                  <c:v>Maio 2026</c:v>
                 </c:pt>
               </c:strCache>
             </c:strRef>
@@ -162,10 +162,10 @@
                 <c:formatCode>General</c:formatCode>
                 <c:ptCount val="2"/>
                 <c:pt idx="0">
-                  <c:v>0</c:v>
+                  <c:v>38</c:v>
                 </c:pt>
                 <c:pt idx="1">
-                  <c:v>32</c:v>
+                  <c:v>108</c:v>
                 </c:pt>
               </c:numCache>
             </c:numRef>
@@ -196,10 +196,10 @@
               <c:strCache>
                 <c:ptCount val="2"/>
                 <c:pt idx="0">
-                  <c:v>Marco 2026</c:v>
+                  <c:v>Abril 2026</c:v>
                 </c:pt>
                 <c:pt idx="1">
-                  <c:v>Abril 2026</c:v>
+                  <c:v>Maio 2026</c:v>
                 </c:pt>
               </c:strCache>
             </c:strRef>
@@ -211,10 +211,10 @@
                 <c:formatCode>General</c:formatCode>
                 <c:ptCount val="2"/>
                 <c:pt idx="0">
-                  <c:v>0</c:v>
+                  <c:v>1</c:v>
                 </c:pt>
                 <c:pt idx="1">
-                  <c:v>8</c:v>
+                  <c:v>9</c:v>
                 </c:pt>
               </c:numCache>
             </c:numRef>
@@ -3387,7 +3387,7 @@
                 </a:solidFill>
                 <a:latin typeface="Calibri"/>
               </a:rPr>
-              <a:t>INDICADORES ABRIL 2026</a:t>
+              <a:t>INDICADORES MAIO 2026</a:t>
             </a:r>
           </a:p>
         </p:txBody>
@@ -3709,7 +3709,7 @@
                 </a:solidFill>
                 <a:latin typeface="Calibri"/>
               </a:rPr>
-              <a:t>40</a:t>
+              <a:t>117</a:t>
             </a:r>
           </a:p>
         </p:txBody>
@@ -3824,7 +3824,7 @@
                 </a:solidFill>
                 <a:latin typeface="Calibri"/>
               </a:rPr>
-              <a:t>32</a:t>
+              <a:t>108</a:t>
             </a:r>
           </a:p>
         </p:txBody>
@@ -3939,7 +3939,7 @@
                 </a:solidFill>
                 <a:latin typeface="Calibri"/>
               </a:rPr>
-              <a:t>8</a:t>
+              <a:t>9</a:t>
             </a:r>
           </a:p>
         </p:txBody>
@@ -4050,11 +4050,11 @@
             <a:r>
               <a:rPr sz="2800" b="1">
                 <a:solidFill>
-                  <a:srgbClr val="EF4444"/>
+                  <a:srgbClr val="F59E0B"/>
                 </a:solidFill>
                 <a:latin typeface="Calibri"/>
               </a:rPr>
-              <a:t>80.0%</a:t>
+              <a:t>92.3%</a:t>
             </a:r>
           </a:p>
         </p:txBody>
@@ -4155,7 +4155,7 @@
                           </a:solidFill>
                           <a:latin typeface="Calibri"/>
                         </a:rPr>
-                        <a:t>Marco 2026</a:t>
+                        <a:t>Abril 2026</a:t>
                       </a:r>
                     </a:p>
                   </a:txBody>
@@ -4178,7 +4178,7 @@
                           </a:solidFill>
                           <a:latin typeface="Calibri"/>
                         </a:rPr>
-                        <a:t>Abril 2026</a:t>
+                        <a:t>Maio 2026</a:t>
                       </a:r>
                     </a:p>
                   </a:txBody>
@@ -4249,7 +4249,7 @@
                           </a:solidFill>
                           <a:latin typeface="Calibri"/>
                         </a:rPr>
-                        <a:t>0</a:t>
+                        <a:t>39</a:t>
                       </a:r>
                     </a:p>
                   </a:txBody>
@@ -4272,7 +4272,7 @@
                           </a:solidFill>
                           <a:latin typeface="Calibri"/>
                         </a:rPr>
-                        <a:t>40</a:t>
+                        <a:t>117</a:t>
                       </a:r>
                     </a:p>
                   </a:txBody>
@@ -4295,7 +4295,7 @@
                           </a:solidFill>
                           <a:latin typeface="Calibri"/>
                         </a:rPr>
-                        <a:t>+ 40</a:t>
+                        <a:t>+ 78</a:t>
                       </a:r>
                     </a:p>
                   </a:txBody>
@@ -4343,7 +4343,7 @@
                           </a:solidFill>
                           <a:latin typeface="Calibri"/>
                         </a:rPr>
-                        <a:t>0</a:t>
+                        <a:t>38</a:t>
                       </a:r>
                     </a:p>
                   </a:txBody>
@@ -4366,7 +4366,7 @@
                           </a:solidFill>
                           <a:latin typeface="Calibri"/>
                         </a:rPr>
-                        <a:t>32</a:t>
+                        <a:t>108</a:t>
                       </a:r>
                     </a:p>
                   </a:txBody>
@@ -4389,7 +4389,7 @@
                           </a:solidFill>
                           <a:latin typeface="Calibri"/>
                         </a:rPr>
-                        <a:t>+ 32</a:t>
+                        <a:t>+ 70</a:t>
                       </a:r>
                     </a:p>
                   </a:txBody>
@@ -4437,7 +4437,7 @@
                           </a:solidFill>
                           <a:latin typeface="Calibri"/>
                         </a:rPr>
-                        <a:t>0</a:t>
+                        <a:t>1</a:t>
                       </a:r>
                     </a:p>
                   </a:txBody>
@@ -4460,7 +4460,7 @@
                           </a:solidFill>
                           <a:latin typeface="Calibri"/>
                         </a:rPr>
-                        <a:t>8</a:t>
+                        <a:t>9</a:t>
                       </a:r>
                     </a:p>
                   </a:txBody>
@@ -4531,7 +4531,7 @@
                           </a:solidFill>
                           <a:latin typeface="Calibri"/>
                         </a:rPr>
-                        <a:t>80.0%</a:t>
+                        <a:t>97.4%</a:t>
                       </a:r>
                     </a:p>
                   </a:txBody>
@@ -4554,7 +4554,7 @@
                           </a:solidFill>
                           <a:latin typeface="Calibri"/>
                         </a:rPr>
-                        <a:t>80.0%</a:t>
+                        <a:t>92.3%</a:t>
                       </a:r>
                     </a:p>
                   </a:txBody>
@@ -4577,7 +4577,7 @@
                           </a:solidFill>
                           <a:latin typeface="Calibri"/>
                         </a:rPr>
-                        <a:t>+ 0.0pp</a:t>
+                        <a:t>- 5.1pp</a:t>
                       </a:r>
                     </a:p>
                   </a:txBody>
@@ -4894,7 +4894,7 @@
                           </a:solidFill>
                           <a:latin typeface="Calibri"/>
                         </a:rPr>
-                        <a:t>Marco 2026</a:t>
+                        <a:t>Abril 2026</a:t>
                       </a:r>
                     </a:p>
                   </a:txBody>
@@ -4917,7 +4917,7 @@
                           </a:solidFill>
                           <a:latin typeface="Calibri"/>
                         </a:rPr>
-                        <a:t>0</a:t>
+                        <a:t>39</a:t>
                       </a:r>
                     </a:p>
                   </a:txBody>
@@ -4940,7 +4940,7 @@
                           </a:solidFill>
                           <a:latin typeface="Calibri"/>
                         </a:rPr>
-                        <a:t>0</a:t>
+                        <a:t>38</a:t>
                       </a:r>
                     </a:p>
                   </a:txBody>
@@ -4963,7 +4963,7 @@
                           </a:solidFill>
                           <a:latin typeface="Calibri"/>
                         </a:rPr>
-                        <a:t>0</a:t>
+                        <a:t>1</a:t>
                       </a:r>
                     </a:p>
                   </a:txBody>
@@ -4986,7 +4986,7 @@
                           </a:solidFill>
                           <a:latin typeface="Calibri"/>
                         </a:rPr>
-                        <a:t>80.0%</a:t>
+                        <a:t>97.4%</a:t>
                       </a:r>
                     </a:p>
                   </a:txBody>
@@ -5011,7 +5011,7 @@
                           </a:solidFill>
                           <a:latin typeface="Calibri"/>
                         </a:rPr>
-                        <a:t>Abril 2026</a:t>
+                        <a:t>Maio 2026</a:t>
                       </a:r>
                     </a:p>
                   </a:txBody>
@@ -5034,7 +5034,7 @@
                           </a:solidFill>
                           <a:latin typeface="Calibri"/>
                         </a:rPr>
-                        <a:t>40</a:t>
+                        <a:t>117</a:t>
                       </a:r>
                     </a:p>
                   </a:txBody>
@@ -5057,7 +5057,7 @@
                           </a:solidFill>
                           <a:latin typeface="Calibri"/>
                         </a:rPr>
-                        <a:t>32</a:t>
+                        <a:t>108</a:t>
                       </a:r>
                     </a:p>
                   </a:txBody>
@@ -5080,7 +5080,7 @@
                           </a:solidFill>
                           <a:latin typeface="Calibri"/>
                         </a:rPr>
-                        <a:t>8</a:t>
+                        <a:t>9</a:t>
                       </a:r>
                     </a:p>
                   </a:txBody>
@@ -5103,7 +5103,7 @@
                           </a:solidFill>
                           <a:latin typeface="Calibri"/>
                         </a:rPr>
-                        <a:t>80.0%</a:t>
+                        <a:t>92.3%</a:t>
                       </a:r>
                     </a:p>
                   </a:txBody>
@@ -5191,7 +5191,7 @@
                 </a:solidFill>
                 <a:latin typeface="Calibri"/>
               </a:rPr>
-              <a:t>PERFORMANCE: 80.0% - ATENCAO</a:t>
+              <a:t>PERFORMANCE: 92.3% - REGULAR</a:t>
             </a:r>
           </a:p>
         </p:txBody>
@@ -5276,7 +5276,7 @@
                 </a:solidFill>
                 <a:latin typeface="Calibri"/>
               </a:rPr>
-              <a:t>OCORRENCIAS FORA DO PRAZO (8)</a:t>
+              <a:t>OCORRENCIAS FORA DO PRAZO (9)</a:t>
             </a:r>
           </a:p>
         </p:txBody>
@@ -5334,7 +5334,7 @@
         </p:nvGraphicFramePr>
         <p:xfrm>
           <a:off x="457200" y="1828800"/>
-          <a:ext cx="11429999" cy="3456432"/>
+          <a:ext cx="11429999" cy="3840480"/>
         </p:xfrm>
         <a:graphic>
           <a:graphicData uri="http://schemas.openxmlformats.org/drawingml/2006/table">
@@ -5480,7 +5480,7 @@
                           </a:solidFill>
                           <a:latin typeface="Calibri"/>
                         </a:rPr>
-                        <a:t>277207</a:t>
+                        <a:t>280624</a:t>
                       </a:r>
                     </a:p>
                   </a:txBody>
@@ -5503,7 +5503,7 @@
                           </a:solidFill>
                           <a:latin typeface="Calibri"/>
                         </a:rPr>
-                        <a:t>V A R DA SILVA - FRANCA / SP</a:t>
+                        <a:t>SOMA EXPRESS - LAURO DE FREITAS / BA</a:t>
                       </a:r>
                     </a:p>
                   </a:txBody>
@@ -5526,7 +5526,7 @@
                           </a:solidFill>
                           <a:latin typeface="Calibri"/>
                         </a:rPr>
-                        <a:t>FRANCA/SP</a:t>
+                        <a:t>LAURO DE FREITAS/BA</a:t>
                       </a:r>
                     </a:p>
                   </a:txBody>
@@ -5549,7 +5549,7 @@
                           </a:solidFill>
                           <a:latin typeface="Calibri"/>
                         </a:rPr>
-                        <a:t>06/04/2026</a:t>
+                        <a:t>04/05/2026</a:t>
                       </a:r>
                     </a:p>
                   </a:txBody>
@@ -5597,7 +5597,7 @@
                           </a:solidFill>
                           <a:latin typeface="Calibri"/>
                         </a:rPr>
-                        <a:t>278662</a:t>
+                        <a:t>282353</a:t>
                       </a:r>
                     </a:p>
                   </a:txBody>
@@ -5620,7 +5620,7 @@
                           </a:solidFill>
                           <a:latin typeface="Calibri"/>
                         </a:rPr>
-                        <a:t>HGS GAS E AGUA DO BR - RIO DE JANEIRO / RJ</a:t>
+                        <a:t>NORA TRANSPORTES E L - GOIANIA / GO</a:t>
                       </a:r>
                     </a:p>
                   </a:txBody>
@@ -5643,7 +5643,7 @@
                           </a:solidFill>
                           <a:latin typeface="Calibri"/>
                         </a:rPr>
-                        <a:t>RIO DE JANEIRO/RJ</a:t>
+                        <a:t>GOIANIA/GO</a:t>
                       </a:r>
                     </a:p>
                   </a:txBody>
@@ -5666,7 +5666,7 @@
                           </a:solidFill>
                           <a:latin typeface="Calibri"/>
                         </a:rPr>
-                        <a:t>16/04/2026</a:t>
+                        <a:t>13/05/2026</a:t>
                       </a:r>
                     </a:p>
                   </a:txBody>
@@ -5689,7 +5689,7 @@
                           </a:solidFill>
                           <a:latin typeface="Calibri"/>
                         </a:rPr>
-                        <a:t>ENTREGUE FORA DO PRAZO</a:t>
+                        <a:t>FORA DO PRAZO</a:t>
                       </a:r>
                     </a:p>
                   </a:txBody>
@@ -5714,7 +5714,7 @@
                           </a:solidFill>
                           <a:latin typeface="Calibri"/>
                         </a:rPr>
-                        <a:t>278678</a:t>
+                        <a:t>282739</a:t>
                       </a:r>
                     </a:p>
                   </a:txBody>
@@ -5737,7 +5737,7 @@
                           </a:solidFill>
                           <a:latin typeface="Calibri"/>
                         </a:rPr>
-                        <a:t>CKS INTERNATIONAL CO - ITAJAI / SC</a:t>
+                        <a:t>TACIELLY JOSEFINA DI - ITAJAI / SC</a:t>
                       </a:r>
                     </a:p>
                   </a:txBody>
@@ -5783,7 +5783,7 @@
                           </a:solidFill>
                           <a:latin typeface="Calibri"/>
                         </a:rPr>
-                        <a:t>10/04/2026</a:t>
+                        <a:t>15/05/2026</a:t>
                       </a:r>
                     </a:p>
                   </a:txBody>
@@ -5806,7 +5806,7 @@
                           </a:solidFill>
                           <a:latin typeface="Calibri"/>
                         </a:rPr>
-                        <a:t>ENTREGUE FORA DO PRAZO</a:t>
+                        <a:t>FORA DO PRAZO</a:t>
                       </a:r>
                     </a:p>
                   </a:txBody>
@@ -5831,7 +5831,7 @@
                           </a:solidFill>
                           <a:latin typeface="Calibri"/>
                         </a:rPr>
-                        <a:t>278830</a:t>
+                        <a:t>283026</a:t>
                       </a:r>
                     </a:p>
                   </a:txBody>
@@ -5854,7 +5854,7 @@
                           </a:solidFill>
                           <a:latin typeface="Calibri"/>
                         </a:rPr>
-                        <a:t>CORSUL COM E REPRESE - CAXIAS DO SUL / RS</a:t>
+                        <a:t>BRAVO ARMAZENS GERAI - UBERABA / MG</a:t>
                       </a:r>
                     </a:p>
                   </a:txBody>
@@ -5877,7 +5877,7 @@
                           </a:solidFill>
                           <a:latin typeface="Calibri"/>
                         </a:rPr>
-                        <a:t>CAXIAS DO SUL/RS</a:t>
+                        <a:t>UBERABA/MG</a:t>
                       </a:r>
                     </a:p>
                   </a:txBody>
@@ -5900,7 +5900,7 @@
                           </a:solidFill>
                           <a:latin typeface="Calibri"/>
                         </a:rPr>
-                        <a:t>17/04/2026</a:t>
+                        <a:t>19/05/2026</a:t>
                       </a:r>
                     </a:p>
                   </a:txBody>
@@ -5923,7 +5923,7 @@
                           </a:solidFill>
                           <a:latin typeface="Calibri"/>
                         </a:rPr>
-                        <a:t>ENTREGUE FORA DO PRAZO</a:t>
+                        <a:t>FORA DO PRAZO</a:t>
                       </a:r>
                     </a:p>
                   </a:txBody>
@@ -5948,7 +5948,7 @@
                           </a:solidFill>
                           <a:latin typeface="Calibri"/>
                         </a:rPr>
-                        <a:t>278837</a:t>
+                        <a:t>283355</a:t>
                       </a:r>
                     </a:p>
                   </a:txBody>
@@ -5971,7 +5971,7 @@
                           </a:solidFill>
                           <a:latin typeface="Calibri"/>
                         </a:rPr>
-                        <a:t>AEROPORTO INTERNACIO - GUARULHOS / SP</a:t>
+                        <a:t>BMB MATERIAL DE CONS - SAO PAULO / SP</a:t>
                       </a:r>
                     </a:p>
                   </a:txBody>
@@ -5994,7 +5994,7 @@
                           </a:solidFill>
                           <a:latin typeface="Calibri"/>
                         </a:rPr>
-                        <a:t>GUARULHOS/SP</a:t>
+                        <a:t>SAO PAULO/SP</a:t>
                       </a:r>
                     </a:p>
                   </a:txBody>
@@ -6017,7 +6017,7 @@
                           </a:solidFill>
                           <a:latin typeface="Calibri"/>
                         </a:rPr>
-                        <a:t>17/04/2026</a:t>
+                        <a:t>19/05/2026</a:t>
                       </a:r>
                     </a:p>
                   </a:txBody>
@@ -6040,7 +6040,7 @@
                           </a:solidFill>
                           <a:latin typeface="Calibri"/>
                         </a:rPr>
-                        <a:t>ENTREGUE FORA DO PRAZO</a:t>
+                        <a:t>FORA DO PRAZO</a:t>
                       </a:r>
                     </a:p>
                   </a:txBody>
@@ -6065,7 +6065,7 @@
                           </a:solidFill>
                           <a:latin typeface="Calibri"/>
                         </a:rPr>
-                        <a:t>279619</a:t>
+                        <a:t>283375</a:t>
                       </a:r>
                     </a:p>
                   </a:txBody>
@@ -6088,7 +6088,7 @@
                           </a:solidFill>
                           <a:latin typeface="Calibri"/>
                         </a:rPr>
-                        <a:t>COMERCIAL HUGEN - SAPUCAIA DO SUL / RS</a:t>
+                        <a:t>SAMSONITE BRASIL LTD - SAO PAULO / SP</a:t>
                       </a:r>
                     </a:p>
                   </a:txBody>
@@ -6111,7 +6111,7 @@
                           </a:solidFill>
                           <a:latin typeface="Calibri"/>
                         </a:rPr>
-                        <a:t>SAPUCAIA DO SUL/RS</a:t>
+                        <a:t>SAO PAULO/SP</a:t>
                       </a:r>
                     </a:p>
                   </a:txBody>
@@ -6134,7 +6134,7 @@
                           </a:solidFill>
                           <a:latin typeface="Calibri"/>
                         </a:rPr>
-                        <a:t>27/04/2026</a:t>
+                        <a:t>19/05/2026</a:t>
                       </a:r>
                     </a:p>
                   </a:txBody>
@@ -6182,7 +6182,7 @@
                           </a:solidFill>
                           <a:latin typeface="Calibri"/>
                         </a:rPr>
-                        <a:t>280526</a:t>
+                        <a:t>283376</a:t>
                       </a:r>
                     </a:p>
                   </a:txBody>
@@ -6205,7 +6205,7 @@
                           </a:solidFill>
                           <a:latin typeface="Calibri"/>
                         </a:rPr>
-                        <a:t>CHRISTIAN SIEGL - LAURO DE FREITAS / BA</a:t>
+                        <a:t>YANKE COMERCIO ELETR - RIO CLARO / SP</a:t>
                       </a:r>
                     </a:p>
                   </a:txBody>
@@ -6228,7 +6228,7 @@
                           </a:solidFill>
                           <a:latin typeface="Calibri"/>
                         </a:rPr>
-                        <a:t>LAURO DE FREITAS/BA</a:t>
+                        <a:t>RIO CLARO/SP</a:t>
                       </a:r>
                     </a:p>
                   </a:txBody>
@@ -6251,7 +6251,7 @@
                           </a:solidFill>
                           <a:latin typeface="Calibri"/>
                         </a:rPr>
-                        <a:t>30/04/2026</a:t>
+                        <a:t>14/05/2026</a:t>
                       </a:r>
                     </a:p>
                   </a:txBody>
@@ -6299,7 +6299,7 @@
                           </a:solidFill>
                           <a:latin typeface="Calibri"/>
                         </a:rPr>
-                        <a:t>280997</a:t>
+                        <a:t>283377</a:t>
                       </a:r>
                     </a:p>
                   </a:txBody>
@@ -6322,7 +6322,7 @@
                           </a:solidFill>
                           <a:latin typeface="Calibri"/>
                         </a:rPr>
-                        <a:t>FORTE LOGISTICA - ITAJAI / SC</a:t>
+                        <a:t>YANKE COMERCIO ELETR - RIO CLARO / SP</a:t>
                       </a:r>
                     </a:p>
                   </a:txBody>
@@ -6345,7 +6345,7 @@
                           </a:solidFill>
                           <a:latin typeface="Calibri"/>
                         </a:rPr>
-                        <a:t>ITAJAI/SC</a:t>
+                        <a:t>RIO CLARO/SP</a:t>
                       </a:r>
                     </a:p>
                   </a:txBody>
@@ -6368,7 +6368,7 @@
                           </a:solidFill>
                           <a:latin typeface="Calibri"/>
                         </a:rPr>
-                        <a:t>28/04/2026</a:t>
+                        <a:t>14/05/2026</a:t>
                       </a:r>
                     </a:p>
                   </a:txBody>
@@ -6391,13 +6391,130 @@
                           </a:solidFill>
                           <a:latin typeface="Calibri"/>
                         </a:rPr>
+                        <a:t>FORA DO PRAZO</a:t>
+                      </a:r>
+                    </a:p>
+                  </a:txBody>
+                  <a:tcPr>
+                    <a:solidFill>
+                      <a:srgbClr val="F2F2F2"/>
+                    </a:solidFill>
+                  </a:tcPr>
+                </a:tc>
+              </a:tr>
+              <a:tr h="384048">
+                <a:tc>
+                  <a:txBody>
+                    <a:bodyPr/>
+                    <a:lstStyle/>
+                    <a:p>
+                      <a:pPr algn="l"/>
+                      <a:r>
+                        <a:rPr sz="1000" b="0">
+                          <a:solidFill>
+                            <a:srgbClr val="1D1B43"/>
+                          </a:solidFill>
+                          <a:latin typeface="Calibri"/>
+                        </a:rPr>
+                        <a:t>283379</a:t>
+                      </a:r>
+                    </a:p>
+                  </a:txBody>
+                  <a:tcPr>
+                    <a:solidFill>
+                      <a:srgbClr val="FFFFFF"/>
+                    </a:solidFill>
+                  </a:tcPr>
+                </a:tc>
+                <a:tc>
+                  <a:txBody>
+                    <a:bodyPr/>
+                    <a:lstStyle/>
+                    <a:p>
+                      <a:pPr algn="l"/>
+                      <a:r>
+                        <a:rPr sz="1000" b="0">
+                          <a:solidFill>
+                            <a:srgbClr val="1D1B43"/>
+                          </a:solidFill>
+                          <a:latin typeface="Calibri"/>
+                        </a:rPr>
+                        <a:t>YANKE COMERCIO ELETR - RIO CLARO / SP</a:t>
+                      </a:r>
+                    </a:p>
+                  </a:txBody>
+                  <a:tcPr>
+                    <a:solidFill>
+                      <a:srgbClr val="FFFFFF"/>
+                    </a:solidFill>
+                  </a:tcPr>
+                </a:tc>
+                <a:tc>
+                  <a:txBody>
+                    <a:bodyPr/>
+                    <a:lstStyle/>
+                    <a:p>
+                      <a:pPr algn="l"/>
+                      <a:r>
+                        <a:rPr sz="1000" b="0">
+                          <a:solidFill>
+                            <a:srgbClr val="1D1B43"/>
+                          </a:solidFill>
+                          <a:latin typeface="Calibri"/>
+                        </a:rPr>
+                        <a:t>RIO CLARO/SP</a:t>
+                      </a:r>
+                    </a:p>
+                  </a:txBody>
+                  <a:tcPr>
+                    <a:solidFill>
+                      <a:srgbClr val="FFFFFF"/>
+                    </a:solidFill>
+                  </a:tcPr>
+                </a:tc>
+                <a:tc>
+                  <a:txBody>
+                    <a:bodyPr/>
+                    <a:lstStyle/>
+                    <a:p>
+                      <a:pPr algn="l"/>
+                      <a:r>
+                        <a:rPr sz="1000" b="0">
+                          <a:solidFill>
+                            <a:srgbClr val="1D1B43"/>
+                          </a:solidFill>
+                          <a:latin typeface="Calibri"/>
+                        </a:rPr>
+                        <a:t>14/05/2026</a:t>
+                      </a:r>
+                    </a:p>
+                  </a:txBody>
+                  <a:tcPr>
+                    <a:solidFill>
+                      <a:srgbClr val="FFFFFF"/>
+                    </a:solidFill>
+                  </a:tcPr>
+                </a:tc>
+                <a:tc>
+                  <a:txBody>
+                    <a:bodyPr/>
+                    <a:lstStyle/>
+                    <a:p>
+                      <a:pPr algn="l"/>
+                      <a:r>
+                        <a:rPr sz="1000" b="0">
+                          <a:solidFill>
+                            <a:srgbClr val="1D1B43"/>
+                          </a:solidFill>
+                          <a:latin typeface="Calibri"/>
+                        </a:rPr>
                         <a:t>ENTREGUE FORA DO PRAZO</a:t>
                       </a:r>
                     </a:p>
                   </a:txBody>
                   <a:tcPr>
                     <a:solidFill>
-                      <a:srgbClr val="F2F2F2"/>
+                      <a:srgbClr val="FFFFFF"/>
                     </a:solidFill>
                   </a:tcPr>
                 </a:tc>
@@ -6544,7 +6661,7 @@
         </p:nvGraphicFramePr>
         <p:xfrm>
           <a:off x="731520" y="1920240"/>
-          <a:ext cx="10698480" cy="4389120"/>
+          <a:ext cx="10698480" cy="4114800"/>
         </p:xfrm>
         <a:graphic>
           <a:graphicData uri="http://schemas.openxmlformats.org/drawingml/2006/table">
@@ -6560,7 +6677,7 @@
                 <a:gridCol w="1554480"/>
                 <a:gridCol w="3108960"/>
               </a:tblGrid>
-              <a:tr h="438912">
+              <a:tr h="457200">
                 <a:tc>
                   <a:txBody>
                     <a:bodyPr/>
@@ -6700,7 +6817,147 @@
                   </a:tcPr>
                 </a:tc>
               </a:tr>
-              <a:tr h="438912">
+              <a:tr h="457200">
+                <a:tc>
+                  <a:txBody>
+                    <a:bodyPr/>
+                    <a:lstStyle/>
+                    <a:p>
+                      <a:pPr algn="l"/>
+                      <a:r>
+                        <a:rPr sz="1000" b="0">
+                          <a:solidFill>
+                            <a:srgbClr val="1D1B43"/>
+                          </a:solidFill>
+                          <a:latin typeface="Calibri"/>
+                        </a:rPr>
+                        <a:t>SP</a:t>
+                      </a:r>
+                    </a:p>
+                  </a:txBody>
+                  <a:tcPr>
+                    <a:solidFill>
+                      <a:srgbClr val="FFFFFF"/>
+                    </a:solidFill>
+                  </a:tcPr>
+                </a:tc>
+                <a:tc>
+                  <a:txBody>
+                    <a:bodyPr/>
+                    <a:lstStyle/>
+                    <a:p>
+                      <a:pPr algn="l"/>
+                      <a:r>
+                        <a:rPr sz="1000" b="0">
+                          <a:solidFill>
+                            <a:srgbClr val="1D1B43"/>
+                          </a:solidFill>
+                          <a:latin typeface="Calibri"/>
+                        </a:rPr>
+                        <a:t>95</a:t>
+                      </a:r>
+                    </a:p>
+                  </a:txBody>
+                  <a:tcPr>
+                    <a:solidFill>
+                      <a:srgbClr val="FFFFFF"/>
+                    </a:solidFill>
+                  </a:tcPr>
+                </a:tc>
+                <a:tc>
+                  <a:txBody>
+                    <a:bodyPr/>
+                    <a:lstStyle/>
+                    <a:p>
+                      <a:pPr algn="l"/>
+                      <a:r>
+                        <a:rPr sz="1000" b="0">
+                          <a:solidFill>
+                            <a:srgbClr val="1D1B43"/>
+                          </a:solidFill>
+                          <a:latin typeface="Calibri"/>
+                        </a:rPr>
+                        <a:t>90</a:t>
+                      </a:r>
+                    </a:p>
+                  </a:txBody>
+                  <a:tcPr>
+                    <a:solidFill>
+                      <a:srgbClr val="FFFFFF"/>
+                    </a:solidFill>
+                  </a:tcPr>
+                </a:tc>
+                <a:tc>
+                  <a:txBody>
+                    <a:bodyPr/>
+                    <a:lstStyle/>
+                    <a:p>
+                      <a:pPr algn="l"/>
+                      <a:r>
+                        <a:rPr sz="1000" b="0">
+                          <a:solidFill>
+                            <a:srgbClr val="1D1B43"/>
+                          </a:solidFill>
+                          <a:latin typeface="Calibri"/>
+                        </a:rPr>
+                        <a:t>5</a:t>
+                      </a:r>
+                    </a:p>
+                  </a:txBody>
+                  <a:tcPr>
+                    <a:solidFill>
+                      <a:srgbClr val="FFFFFF"/>
+                    </a:solidFill>
+                  </a:tcPr>
+                </a:tc>
+                <a:tc>
+                  <a:txBody>
+                    <a:bodyPr/>
+                    <a:lstStyle/>
+                    <a:p>
+                      <a:pPr algn="l"/>
+                      <a:r>
+                        <a:rPr sz="1000" b="0">
+                          <a:solidFill>
+                            <a:srgbClr val="1D1B43"/>
+                          </a:solidFill>
+                          <a:latin typeface="Calibri"/>
+                        </a:rPr>
+                        <a:t>94.7%</a:t>
+                      </a:r>
+                    </a:p>
+                  </a:txBody>
+                  <a:tcPr>
+                    <a:solidFill>
+                      <a:srgbClr val="FFFFFF"/>
+                    </a:solidFill>
+                  </a:tcPr>
+                </a:tc>
+                <a:tc>
+                  <a:txBody>
+                    <a:bodyPr/>
+                    <a:lstStyle/>
+                    <a:p>
+                      <a:pPr algn="l"/>
+                      <a:r>
+                        <a:rPr sz="1000" b="0">
+                          <a:solidFill>
+                            <a:srgbClr val="1D1B43"/>
+                          </a:solidFill>
+                          <a:latin typeface="Calibri"/>
+                        </a:rPr>
+                        <a:t>Regular</a:t>
+                      </a:r>
+                    </a:p>
+                  </a:txBody>
+                  <a:tcPr>
+                    <a:solidFill>
+                      <a:srgbClr val="FFFFFF"/>
+                    </a:solidFill>
+                  </a:tcPr>
+                </a:tc>
+              </a:tr>
+              <a:tr h="457200">
                 <a:tc>
                   <a:txBody>
                     <a:bodyPr/>
@@ -6720,6 +6977,146 @@
                   </a:txBody>
                   <a:tcPr>
                     <a:solidFill>
+                      <a:srgbClr val="F2F2F2"/>
+                    </a:solidFill>
+                  </a:tcPr>
+                </a:tc>
+                <a:tc>
+                  <a:txBody>
+                    <a:bodyPr/>
+                    <a:lstStyle/>
+                    <a:p>
+                      <a:pPr algn="l"/>
+                      <a:r>
+                        <a:rPr sz="1000" b="0">
+                          <a:solidFill>
+                            <a:srgbClr val="1D1B43"/>
+                          </a:solidFill>
+                          <a:latin typeface="Calibri"/>
+                        </a:rPr>
+                        <a:t>13</a:t>
+                      </a:r>
+                    </a:p>
+                  </a:txBody>
+                  <a:tcPr>
+                    <a:solidFill>
+                      <a:srgbClr val="F2F2F2"/>
+                    </a:solidFill>
+                  </a:tcPr>
+                </a:tc>
+                <a:tc>
+                  <a:txBody>
+                    <a:bodyPr/>
+                    <a:lstStyle/>
+                    <a:p>
+                      <a:pPr algn="l"/>
+                      <a:r>
+                        <a:rPr sz="1000" b="0">
+                          <a:solidFill>
+                            <a:srgbClr val="1D1B43"/>
+                          </a:solidFill>
+                          <a:latin typeface="Calibri"/>
+                        </a:rPr>
+                        <a:t>12</a:t>
+                      </a:r>
+                    </a:p>
+                  </a:txBody>
+                  <a:tcPr>
+                    <a:solidFill>
+                      <a:srgbClr val="F2F2F2"/>
+                    </a:solidFill>
+                  </a:tcPr>
+                </a:tc>
+                <a:tc>
+                  <a:txBody>
+                    <a:bodyPr/>
+                    <a:lstStyle/>
+                    <a:p>
+                      <a:pPr algn="l"/>
+                      <a:r>
+                        <a:rPr sz="1000" b="0">
+                          <a:solidFill>
+                            <a:srgbClr val="1D1B43"/>
+                          </a:solidFill>
+                          <a:latin typeface="Calibri"/>
+                        </a:rPr>
+                        <a:t>1</a:t>
+                      </a:r>
+                    </a:p>
+                  </a:txBody>
+                  <a:tcPr>
+                    <a:solidFill>
+                      <a:srgbClr val="F2F2F2"/>
+                    </a:solidFill>
+                  </a:tcPr>
+                </a:tc>
+                <a:tc>
+                  <a:txBody>
+                    <a:bodyPr/>
+                    <a:lstStyle/>
+                    <a:p>
+                      <a:pPr algn="l"/>
+                      <a:r>
+                        <a:rPr sz="1000" b="0">
+                          <a:solidFill>
+                            <a:srgbClr val="1D1B43"/>
+                          </a:solidFill>
+                          <a:latin typeface="Calibri"/>
+                        </a:rPr>
+                        <a:t>92.3%</a:t>
+                      </a:r>
+                    </a:p>
+                  </a:txBody>
+                  <a:tcPr>
+                    <a:solidFill>
+                      <a:srgbClr val="F2F2F2"/>
+                    </a:solidFill>
+                  </a:tcPr>
+                </a:tc>
+                <a:tc>
+                  <a:txBody>
+                    <a:bodyPr/>
+                    <a:lstStyle/>
+                    <a:p>
+                      <a:pPr algn="l"/>
+                      <a:r>
+                        <a:rPr sz="1000" b="0">
+                          <a:solidFill>
+                            <a:srgbClr val="1D1B43"/>
+                          </a:solidFill>
+                          <a:latin typeface="Calibri"/>
+                        </a:rPr>
+                        <a:t>Regular</a:t>
+                      </a:r>
+                    </a:p>
+                  </a:txBody>
+                  <a:tcPr>
+                    <a:solidFill>
+                      <a:srgbClr val="F2F2F2"/>
+                    </a:solidFill>
+                  </a:tcPr>
+                </a:tc>
+              </a:tr>
+              <a:tr h="457200">
+                <a:tc>
+                  <a:txBody>
+                    <a:bodyPr/>
+                    <a:lstStyle/>
+                    <a:p>
+                      <a:pPr algn="l"/>
+                      <a:r>
+                        <a:rPr sz="1000" b="0">
+                          <a:solidFill>
+                            <a:srgbClr val="1D1B43"/>
+                          </a:solidFill>
+                          <a:latin typeface="Calibri"/>
+                        </a:rPr>
+                        <a:t>BA</a:t>
+                      </a:r>
+                    </a:p>
+                  </a:txBody>
+                  <a:tcPr>
+                    <a:solidFill>
                       <a:srgbClr val="FFFFFF"/>
                     </a:solidFill>
                   </a:tcPr>
@@ -6737,7 +7134,7 @@
                           </a:solidFill>
                           <a:latin typeface="Calibri"/>
                         </a:rPr>
-                        <a:t>16</a:t>
+                        <a:t>3</a:t>
                       </a:r>
                     </a:p>
                   </a:txBody>
@@ -6760,7 +7157,7 @@
                           </a:solidFill>
                           <a:latin typeface="Calibri"/>
                         </a:rPr>
-                        <a:t>14</a:t>
+                        <a:t>2</a:t>
                       </a:r>
                     </a:p>
                   </a:txBody>
@@ -6783,12 +7180,223 @@
                           </a:solidFill>
                           <a:latin typeface="Calibri"/>
                         </a:rPr>
+                        <a:t>1</a:t>
+                      </a:r>
+                    </a:p>
+                  </a:txBody>
+                  <a:tcPr>
+                    <a:solidFill>
+                      <a:srgbClr val="FFFFFF"/>
+                    </a:solidFill>
+                  </a:tcPr>
+                </a:tc>
+                <a:tc>
+                  <a:txBody>
+                    <a:bodyPr/>
+                    <a:lstStyle/>
+                    <a:p>
+                      <a:pPr algn="l"/>
+                      <a:r>
+                        <a:rPr sz="1000" b="0">
+                          <a:solidFill>
+                            <a:srgbClr val="1D1B43"/>
+                          </a:solidFill>
+                          <a:latin typeface="Calibri"/>
+                        </a:rPr>
+                        <a:t>66.7%</a:t>
+                      </a:r>
+                    </a:p>
+                  </a:txBody>
+                  <a:tcPr>
+                    <a:solidFill>
+                      <a:srgbClr val="FFFFFF"/>
+                    </a:solidFill>
+                  </a:tcPr>
+                </a:tc>
+                <a:tc>
+                  <a:txBody>
+                    <a:bodyPr/>
+                    <a:lstStyle/>
+                    <a:p>
+                      <a:pPr algn="l"/>
+                      <a:r>
+                        <a:rPr sz="1000" b="0">
+                          <a:solidFill>
+                            <a:srgbClr val="1D1B43"/>
+                          </a:solidFill>
+                          <a:latin typeface="Calibri"/>
+                        </a:rPr>
+                        <a:t>Atencao</a:t>
+                      </a:r>
+                    </a:p>
+                  </a:txBody>
+                  <a:tcPr>
+                    <a:solidFill>
+                      <a:srgbClr val="FFFFFF"/>
+                    </a:solidFill>
+                  </a:tcPr>
+                </a:tc>
+              </a:tr>
+              <a:tr h="457200">
+                <a:tc>
+                  <a:txBody>
+                    <a:bodyPr/>
+                    <a:lstStyle/>
+                    <a:p>
+                      <a:pPr algn="l"/>
+                      <a:r>
+                        <a:rPr sz="1000" b="0">
+                          <a:solidFill>
+                            <a:srgbClr val="1D1B43"/>
+                          </a:solidFill>
+                          <a:latin typeface="Calibri"/>
+                        </a:rPr>
+                        <a:t>GO</a:t>
+                      </a:r>
+                    </a:p>
+                  </a:txBody>
+                  <a:tcPr>
+                    <a:solidFill>
+                      <a:srgbClr val="F2F2F2"/>
+                    </a:solidFill>
+                  </a:tcPr>
+                </a:tc>
+                <a:tc>
+                  <a:txBody>
+                    <a:bodyPr/>
+                    <a:lstStyle/>
+                    <a:p>
+                      <a:pPr algn="l"/>
+                      <a:r>
+                        <a:rPr sz="1000" b="0">
+                          <a:solidFill>
+                            <a:srgbClr val="1D1B43"/>
+                          </a:solidFill>
+                          <a:latin typeface="Calibri"/>
+                        </a:rPr>
                         <a:t>2</a:t>
                       </a:r>
                     </a:p>
                   </a:txBody>
                   <a:tcPr>
                     <a:solidFill>
+                      <a:srgbClr val="F2F2F2"/>
+                    </a:solidFill>
+                  </a:tcPr>
+                </a:tc>
+                <a:tc>
+                  <a:txBody>
+                    <a:bodyPr/>
+                    <a:lstStyle/>
+                    <a:p>
+                      <a:pPr algn="l"/>
+                      <a:r>
+                        <a:rPr sz="1000" b="0">
+                          <a:solidFill>
+                            <a:srgbClr val="1D1B43"/>
+                          </a:solidFill>
+                          <a:latin typeface="Calibri"/>
+                        </a:rPr>
+                        <a:t>1</a:t>
+                      </a:r>
+                    </a:p>
+                  </a:txBody>
+                  <a:tcPr>
+                    <a:solidFill>
+                      <a:srgbClr val="F2F2F2"/>
+                    </a:solidFill>
+                  </a:tcPr>
+                </a:tc>
+                <a:tc>
+                  <a:txBody>
+                    <a:bodyPr/>
+                    <a:lstStyle/>
+                    <a:p>
+                      <a:pPr algn="l"/>
+                      <a:r>
+                        <a:rPr sz="1000" b="0">
+                          <a:solidFill>
+                            <a:srgbClr val="1D1B43"/>
+                          </a:solidFill>
+                          <a:latin typeface="Calibri"/>
+                        </a:rPr>
+                        <a:t>1</a:t>
+                      </a:r>
+                    </a:p>
+                  </a:txBody>
+                  <a:tcPr>
+                    <a:solidFill>
+                      <a:srgbClr val="F2F2F2"/>
+                    </a:solidFill>
+                  </a:tcPr>
+                </a:tc>
+                <a:tc>
+                  <a:txBody>
+                    <a:bodyPr/>
+                    <a:lstStyle/>
+                    <a:p>
+                      <a:pPr algn="l"/>
+                      <a:r>
+                        <a:rPr sz="1000" b="0">
+                          <a:solidFill>
+                            <a:srgbClr val="1D1B43"/>
+                          </a:solidFill>
+                          <a:latin typeface="Calibri"/>
+                        </a:rPr>
+                        <a:t>50.0%</a:t>
+                      </a:r>
+                    </a:p>
+                  </a:txBody>
+                  <a:tcPr>
+                    <a:solidFill>
+                      <a:srgbClr val="F2F2F2"/>
+                    </a:solidFill>
+                  </a:tcPr>
+                </a:tc>
+                <a:tc>
+                  <a:txBody>
+                    <a:bodyPr/>
+                    <a:lstStyle/>
+                    <a:p>
+                      <a:pPr algn="l"/>
+                      <a:r>
+                        <a:rPr sz="1000" b="0">
+                          <a:solidFill>
+                            <a:srgbClr val="1D1B43"/>
+                          </a:solidFill>
+                          <a:latin typeface="Calibri"/>
+                        </a:rPr>
+                        <a:t>Atencao</a:t>
+                      </a:r>
+                    </a:p>
+                  </a:txBody>
+                  <a:tcPr>
+                    <a:solidFill>
+                      <a:srgbClr val="F2F2F2"/>
+                    </a:solidFill>
+                  </a:tcPr>
+                </a:tc>
+              </a:tr>
+              <a:tr h="457200">
+                <a:tc>
+                  <a:txBody>
+                    <a:bodyPr/>
+                    <a:lstStyle/>
+                    <a:p>
+                      <a:pPr algn="l"/>
+                      <a:r>
+                        <a:rPr sz="1000" b="0">
+                          <a:solidFill>
+                            <a:srgbClr val="1D1B43"/>
+                          </a:solidFill>
+                          <a:latin typeface="Calibri"/>
+                        </a:rPr>
+                        <a:t>MT</a:t>
+                      </a:r>
+                    </a:p>
+                  </a:txBody>
+                  <a:tcPr>
+                    <a:solidFill>
                       <a:srgbClr val="FFFFFF"/>
                     </a:solidFill>
                   </a:tcPr>
@@ -6806,7 +7414,7 @@
                           </a:solidFill>
                           <a:latin typeface="Calibri"/>
                         </a:rPr>
-                        <a:t>87.5%</a:t>
+                        <a:t>1</a:t>
                       </a:r>
                     </a:p>
                   </a:txBody>
@@ -6829,7 +7437,7 @@
                           </a:solidFill>
                           <a:latin typeface="Calibri"/>
                         </a:rPr>
-                        <a:t>Regular</a:t>
+                        <a:t>1</a:t>
                       </a:r>
                     </a:p>
                   </a:txBody>
@@ -6839,22 +7447,91 @@
                     </a:solidFill>
                   </a:tcPr>
                 </a:tc>
+                <a:tc>
+                  <a:txBody>
+                    <a:bodyPr/>
+                    <a:lstStyle/>
+                    <a:p>
+                      <a:pPr algn="l"/>
+                      <a:r>
+                        <a:rPr sz="1000" b="0">
+                          <a:solidFill>
+                            <a:srgbClr val="1D1B43"/>
+                          </a:solidFill>
+                          <a:latin typeface="Calibri"/>
+                        </a:rPr>
+                        <a:t>0</a:t>
+                      </a:r>
+                    </a:p>
+                  </a:txBody>
+                  <a:tcPr>
+                    <a:solidFill>
+                      <a:srgbClr val="FFFFFF"/>
+                    </a:solidFill>
+                  </a:tcPr>
+                </a:tc>
+                <a:tc>
+                  <a:txBody>
+                    <a:bodyPr/>
+                    <a:lstStyle/>
+                    <a:p>
+                      <a:pPr algn="l"/>
+                      <a:r>
+                        <a:rPr sz="1000" b="0">
+                          <a:solidFill>
+                            <a:srgbClr val="1D1B43"/>
+                          </a:solidFill>
+                          <a:latin typeface="Calibri"/>
+                        </a:rPr>
+                        <a:t>100.0%</a:t>
+                      </a:r>
+                    </a:p>
+                  </a:txBody>
+                  <a:tcPr>
+                    <a:solidFill>
+                      <a:srgbClr val="FFFFFF"/>
+                    </a:solidFill>
+                  </a:tcPr>
+                </a:tc>
+                <a:tc>
+                  <a:txBody>
+                    <a:bodyPr/>
+                    <a:lstStyle/>
+                    <a:p>
+                      <a:pPr algn="l"/>
+                      <a:r>
+                        <a:rPr sz="1000" b="0">
+                          <a:solidFill>
+                            <a:srgbClr val="1D1B43"/>
+                          </a:solidFill>
+                          <a:latin typeface="Calibri"/>
+                        </a:rPr>
+                        <a:t>Excelente</a:t>
+                      </a:r>
+                    </a:p>
+                  </a:txBody>
+                  <a:tcPr>
+                    <a:solidFill>
+                      <a:srgbClr val="FFFFFF"/>
+                    </a:solidFill>
+                  </a:tcPr>
+                </a:tc>
               </a:tr>
-              <a:tr h="438912">
-                <a:tc>
-                  <a:txBody>
-                    <a:bodyPr/>
-                    <a:lstStyle/>
-                    <a:p>
-                      <a:pPr algn="l"/>
-                      <a:r>
-                        <a:rPr sz="1000" b="0">
-                          <a:solidFill>
-                            <a:srgbClr val="1D1B43"/>
-                          </a:solidFill>
-                          <a:latin typeface="Calibri"/>
-                        </a:rPr>
-                        <a:t>SP</a:t>
+              <a:tr h="457200">
+                <a:tc>
+                  <a:txBody>
+                    <a:bodyPr/>
+                    <a:lstStyle/>
+                    <a:p>
+                      <a:pPr algn="l"/>
+                      <a:r>
+                        <a:rPr sz="1000" b="0">
+                          <a:solidFill>
+                            <a:srgbClr val="1D1B43"/>
+                          </a:solidFill>
+                          <a:latin typeface="Calibri"/>
+                        </a:rPr>
+                        <a:t>MG</a:t>
                       </a:r>
                     </a:p>
                   </a:txBody>
@@ -6877,7 +7554,7 @@
                           </a:solidFill>
                           <a:latin typeface="Calibri"/>
                         </a:rPr>
-                        <a:t>7</a:t>
+                        <a:t>1</a:t>
                       </a:r>
                     </a:p>
                   </a:txBody>
@@ -6900,7 +7577,7 @@
                           </a:solidFill>
                           <a:latin typeface="Calibri"/>
                         </a:rPr>
-                        <a:t>5</a:t>
+                        <a:t>0</a:t>
                       </a:r>
                     </a:p>
                   </a:txBody>
@@ -6923,7 +7600,7 @@
                           </a:solidFill>
                           <a:latin typeface="Calibri"/>
                         </a:rPr>
-                        <a:t>2</a:t>
+                        <a:t>1</a:t>
                       </a:r>
                     </a:p>
                   </a:txBody>
@@ -6946,7 +7623,7 @@
                           </a:solidFill>
                           <a:latin typeface="Calibri"/>
                         </a:rPr>
-                        <a:t>71.4%</a:t>
+                        <a:t>0.0%</a:t>
                       </a:r>
                     </a:p>
                   </a:txBody>
@@ -6980,7 +7657,7 @@
                   </a:tcPr>
                 </a:tc>
               </a:tr>
-              <a:tr h="438912">
+              <a:tr h="457200">
                 <a:tc>
                   <a:txBody>
                     <a:bodyPr/>
@@ -7017,7 +7694,7 @@
                           </a:solidFill>
                           <a:latin typeface="Calibri"/>
                         </a:rPr>
-                        <a:t>4</a:t>
+                        <a:t>1</a:t>
                       </a:r>
                     </a:p>
                   </a:txBody>
@@ -7040,7 +7717,7 @@
                           </a:solidFill>
                           <a:latin typeface="Calibri"/>
                         </a:rPr>
-                        <a:t>4</a:t>
+                        <a:t>1</a:t>
                       </a:r>
                     </a:p>
                   </a:txBody>
@@ -7120,21 +7797,21 @@
                   </a:tcPr>
                 </a:tc>
               </a:tr>
-              <a:tr h="438912">
-                <a:tc>
-                  <a:txBody>
-                    <a:bodyPr/>
-                    <a:lstStyle/>
-                    <a:p>
-                      <a:pPr algn="l"/>
-                      <a:r>
-                        <a:rPr sz="1000" b="0">
-                          <a:solidFill>
-                            <a:srgbClr val="1D1B43"/>
-                          </a:solidFill>
-                          <a:latin typeface="Calibri"/>
-                        </a:rPr>
-                        <a:t>RJ</a:t>
+              <a:tr h="457200">
+                <a:tc>
+                  <a:txBody>
+                    <a:bodyPr/>
+                    <a:lstStyle/>
+                    <a:p>
+                      <a:pPr algn="l"/>
+                      <a:r>
+                        <a:rPr sz="1000" b="0">
+                          <a:solidFill>
+                            <a:srgbClr val="1D1B43"/>
+                          </a:solidFill>
+                          <a:latin typeface="Calibri"/>
+                        </a:rPr>
+                        <a:t>PB</a:t>
                       </a:r>
                     </a:p>
                   </a:txBody>
@@ -7157,7 +7834,7 @@
                           </a:solidFill>
                           <a:latin typeface="Calibri"/>
                         </a:rPr>
-                        <a:t>4</a:t>
+                        <a:t>1</a:t>
                       </a:r>
                     </a:p>
                   </a:txBody>
@@ -7180,7 +7857,7 @@
                           </a:solidFill>
                           <a:latin typeface="Calibri"/>
                         </a:rPr>
-                        <a:t>3</a:t>
+                        <a:t>1</a:t>
                       </a:r>
                     </a:p>
                   </a:txBody>
@@ -7203,7 +7880,7 @@
                           </a:solidFill>
                           <a:latin typeface="Calibri"/>
                         </a:rPr>
-                        <a:t>1</a:t>
+                        <a:t>0</a:t>
                       </a:r>
                     </a:p>
                   </a:txBody>
@@ -7226,7 +7903,7 @@
                           </a:solidFill>
                           <a:latin typeface="Calibri"/>
                         </a:rPr>
-                        <a:t>75.0%</a:t>
+                        <a:t>100.0%</a:t>
                       </a:r>
                     </a:p>
                   </a:txBody>
@@ -7249,713 +7926,13 @@
                           </a:solidFill>
                           <a:latin typeface="Calibri"/>
                         </a:rPr>
-                        <a:t>Atencao</a:t>
+                        <a:t>Excelente</a:t>
                       </a:r>
                     </a:p>
                   </a:txBody>
                   <a:tcPr>
                     <a:solidFill>
                       <a:srgbClr val="F2F2F2"/>
-                    </a:solidFill>
-                  </a:tcPr>
-                </a:tc>
-              </a:tr>
-              <a:tr h="438912">
-                <a:tc>
-                  <a:txBody>
-                    <a:bodyPr/>
-                    <a:lstStyle/>
-                    <a:p>
-                      <a:pPr algn="l"/>
-                      <a:r>
-                        <a:rPr sz="1000" b="0">
-                          <a:solidFill>
-                            <a:srgbClr val="1D1B43"/>
-                          </a:solidFill>
-                          <a:latin typeface="Calibri"/>
-                        </a:rPr>
-                        <a:t>BA</a:t>
-                      </a:r>
-                    </a:p>
-                  </a:txBody>
-                  <a:tcPr>
-                    <a:solidFill>
-                      <a:srgbClr val="FFFFFF"/>
-                    </a:solidFill>
-                  </a:tcPr>
-                </a:tc>
-                <a:tc>
-                  <a:txBody>
-                    <a:bodyPr/>
-                    <a:lstStyle/>
-                    <a:p>
-                      <a:pPr algn="l"/>
-                      <a:r>
-                        <a:rPr sz="1000" b="0">
-                          <a:solidFill>
-                            <a:srgbClr val="1D1B43"/>
-                          </a:solidFill>
-                          <a:latin typeface="Calibri"/>
-                        </a:rPr>
-                        <a:t>2</a:t>
-                      </a:r>
-                    </a:p>
-                  </a:txBody>
-                  <a:tcPr>
-                    <a:solidFill>
-                      <a:srgbClr val="FFFFFF"/>
-                    </a:solidFill>
-                  </a:tcPr>
-                </a:tc>
-                <a:tc>
-                  <a:txBody>
-                    <a:bodyPr/>
-                    <a:lstStyle/>
-                    <a:p>
-                      <a:pPr algn="l"/>
-                      <a:r>
-                        <a:rPr sz="1000" b="0">
-                          <a:solidFill>
-                            <a:srgbClr val="1D1B43"/>
-                          </a:solidFill>
-                          <a:latin typeface="Calibri"/>
-                        </a:rPr>
-                        <a:t>1</a:t>
-                      </a:r>
-                    </a:p>
-                  </a:txBody>
-                  <a:tcPr>
-                    <a:solidFill>
-                      <a:srgbClr val="FFFFFF"/>
-                    </a:solidFill>
-                  </a:tcPr>
-                </a:tc>
-                <a:tc>
-                  <a:txBody>
-                    <a:bodyPr/>
-                    <a:lstStyle/>
-                    <a:p>
-                      <a:pPr algn="l"/>
-                      <a:r>
-                        <a:rPr sz="1000" b="0">
-                          <a:solidFill>
-                            <a:srgbClr val="1D1B43"/>
-                          </a:solidFill>
-                          <a:latin typeface="Calibri"/>
-                        </a:rPr>
-                        <a:t>1</a:t>
-                      </a:r>
-                    </a:p>
-                  </a:txBody>
-                  <a:tcPr>
-                    <a:solidFill>
-                      <a:srgbClr val="FFFFFF"/>
-                    </a:solidFill>
-                  </a:tcPr>
-                </a:tc>
-                <a:tc>
-                  <a:txBody>
-                    <a:bodyPr/>
-                    <a:lstStyle/>
-                    <a:p>
-                      <a:pPr algn="l"/>
-                      <a:r>
-                        <a:rPr sz="1000" b="0">
-                          <a:solidFill>
-                            <a:srgbClr val="1D1B43"/>
-                          </a:solidFill>
-                          <a:latin typeface="Calibri"/>
-                        </a:rPr>
-                        <a:t>50.0%</a:t>
-                      </a:r>
-                    </a:p>
-                  </a:txBody>
-                  <a:tcPr>
-                    <a:solidFill>
-                      <a:srgbClr val="FFFFFF"/>
-                    </a:solidFill>
-                  </a:tcPr>
-                </a:tc>
-                <a:tc>
-                  <a:txBody>
-                    <a:bodyPr/>
-                    <a:lstStyle/>
-                    <a:p>
-                      <a:pPr algn="l"/>
-                      <a:r>
-                        <a:rPr sz="1000" b="0">
-                          <a:solidFill>
-                            <a:srgbClr val="1D1B43"/>
-                          </a:solidFill>
-                          <a:latin typeface="Calibri"/>
-                        </a:rPr>
-                        <a:t>Atencao</a:t>
-                      </a:r>
-                    </a:p>
-                  </a:txBody>
-                  <a:tcPr>
-                    <a:solidFill>
-                      <a:srgbClr val="FFFFFF"/>
-                    </a:solidFill>
-                  </a:tcPr>
-                </a:tc>
-              </a:tr>
-              <a:tr h="438912">
-                <a:tc>
-                  <a:txBody>
-                    <a:bodyPr/>
-                    <a:lstStyle/>
-                    <a:p>
-                      <a:pPr algn="l"/>
-                      <a:r>
-                        <a:rPr sz="1000" b="0">
-                          <a:solidFill>
-                            <a:srgbClr val="1D1B43"/>
-                          </a:solidFill>
-                          <a:latin typeface="Calibri"/>
-                        </a:rPr>
-                        <a:t>MG</a:t>
-                      </a:r>
-                    </a:p>
-                  </a:txBody>
-                  <a:tcPr>
-                    <a:solidFill>
-                      <a:srgbClr val="F2F2F2"/>
-                    </a:solidFill>
-                  </a:tcPr>
-                </a:tc>
-                <a:tc>
-                  <a:txBody>
-                    <a:bodyPr/>
-                    <a:lstStyle/>
-                    <a:p>
-                      <a:pPr algn="l"/>
-                      <a:r>
-                        <a:rPr sz="1000" b="0">
-                          <a:solidFill>
-                            <a:srgbClr val="1D1B43"/>
-                          </a:solidFill>
-                          <a:latin typeface="Calibri"/>
-                        </a:rPr>
-                        <a:t>2</a:t>
-                      </a:r>
-                    </a:p>
-                  </a:txBody>
-                  <a:tcPr>
-                    <a:solidFill>
-                      <a:srgbClr val="F2F2F2"/>
-                    </a:solidFill>
-                  </a:tcPr>
-                </a:tc>
-                <a:tc>
-                  <a:txBody>
-                    <a:bodyPr/>
-                    <a:lstStyle/>
-                    <a:p>
-                      <a:pPr algn="l"/>
-                      <a:r>
-                        <a:rPr sz="1000" b="0">
-                          <a:solidFill>
-                            <a:srgbClr val="1D1B43"/>
-                          </a:solidFill>
-                          <a:latin typeface="Calibri"/>
-                        </a:rPr>
-                        <a:t>2</a:t>
-                      </a:r>
-                    </a:p>
-                  </a:txBody>
-                  <a:tcPr>
-                    <a:solidFill>
-                      <a:srgbClr val="F2F2F2"/>
-                    </a:solidFill>
-                  </a:tcPr>
-                </a:tc>
-                <a:tc>
-                  <a:txBody>
-                    <a:bodyPr/>
-                    <a:lstStyle/>
-                    <a:p>
-                      <a:pPr algn="l"/>
-                      <a:r>
-                        <a:rPr sz="1000" b="0">
-                          <a:solidFill>
-                            <a:srgbClr val="1D1B43"/>
-                          </a:solidFill>
-                          <a:latin typeface="Calibri"/>
-                        </a:rPr>
-                        <a:t>0</a:t>
-                      </a:r>
-                    </a:p>
-                  </a:txBody>
-                  <a:tcPr>
-                    <a:solidFill>
-                      <a:srgbClr val="F2F2F2"/>
-                    </a:solidFill>
-                  </a:tcPr>
-                </a:tc>
-                <a:tc>
-                  <a:txBody>
-                    <a:bodyPr/>
-                    <a:lstStyle/>
-                    <a:p>
-                      <a:pPr algn="l"/>
-                      <a:r>
-                        <a:rPr sz="1000" b="0">
-                          <a:solidFill>
-                            <a:srgbClr val="1D1B43"/>
-                          </a:solidFill>
-                          <a:latin typeface="Calibri"/>
-                        </a:rPr>
-                        <a:t>100.0%</a:t>
-                      </a:r>
-                    </a:p>
-                  </a:txBody>
-                  <a:tcPr>
-                    <a:solidFill>
-                      <a:srgbClr val="F2F2F2"/>
-                    </a:solidFill>
-                  </a:tcPr>
-                </a:tc>
-                <a:tc>
-                  <a:txBody>
-                    <a:bodyPr/>
-                    <a:lstStyle/>
-                    <a:p>
-                      <a:pPr algn="l"/>
-                      <a:r>
-                        <a:rPr sz="1000" b="0">
-                          <a:solidFill>
-                            <a:srgbClr val="1D1B43"/>
-                          </a:solidFill>
-                          <a:latin typeface="Calibri"/>
-                        </a:rPr>
-                        <a:t>Excelente</a:t>
-                      </a:r>
-                    </a:p>
-                  </a:txBody>
-                  <a:tcPr>
-                    <a:solidFill>
-                      <a:srgbClr val="F2F2F2"/>
-                    </a:solidFill>
-                  </a:tcPr>
-                </a:tc>
-              </a:tr>
-              <a:tr h="438912">
-                <a:tc>
-                  <a:txBody>
-                    <a:bodyPr/>
-                    <a:lstStyle/>
-                    <a:p>
-                      <a:pPr algn="l"/>
-                      <a:r>
-                        <a:rPr sz="1000" b="0">
-                          <a:solidFill>
-                            <a:srgbClr val="1D1B43"/>
-                          </a:solidFill>
-                          <a:latin typeface="Calibri"/>
-                        </a:rPr>
-                        <a:t>PE</a:t>
-                      </a:r>
-                    </a:p>
-                  </a:txBody>
-                  <a:tcPr>
-                    <a:solidFill>
-                      <a:srgbClr val="FFFFFF"/>
-                    </a:solidFill>
-                  </a:tcPr>
-                </a:tc>
-                <a:tc>
-                  <a:txBody>
-                    <a:bodyPr/>
-                    <a:lstStyle/>
-                    <a:p>
-                      <a:pPr algn="l"/>
-                      <a:r>
-                        <a:rPr sz="1000" b="0">
-                          <a:solidFill>
-                            <a:srgbClr val="1D1B43"/>
-                          </a:solidFill>
-                          <a:latin typeface="Calibri"/>
-                        </a:rPr>
-                        <a:t>2</a:t>
-                      </a:r>
-                    </a:p>
-                  </a:txBody>
-                  <a:tcPr>
-                    <a:solidFill>
-                      <a:srgbClr val="FFFFFF"/>
-                    </a:solidFill>
-                  </a:tcPr>
-                </a:tc>
-                <a:tc>
-                  <a:txBody>
-                    <a:bodyPr/>
-                    <a:lstStyle/>
-                    <a:p>
-                      <a:pPr algn="l"/>
-                      <a:r>
-                        <a:rPr sz="1000" b="0">
-                          <a:solidFill>
-                            <a:srgbClr val="1D1B43"/>
-                          </a:solidFill>
-                          <a:latin typeface="Calibri"/>
-                        </a:rPr>
-                        <a:t>2</a:t>
-                      </a:r>
-                    </a:p>
-                  </a:txBody>
-                  <a:tcPr>
-                    <a:solidFill>
-                      <a:srgbClr val="FFFFFF"/>
-                    </a:solidFill>
-                  </a:tcPr>
-                </a:tc>
-                <a:tc>
-                  <a:txBody>
-                    <a:bodyPr/>
-                    <a:lstStyle/>
-                    <a:p>
-                      <a:pPr algn="l"/>
-                      <a:r>
-                        <a:rPr sz="1000" b="0">
-                          <a:solidFill>
-                            <a:srgbClr val="1D1B43"/>
-                          </a:solidFill>
-                          <a:latin typeface="Calibri"/>
-                        </a:rPr>
-                        <a:t>0</a:t>
-                      </a:r>
-                    </a:p>
-                  </a:txBody>
-                  <a:tcPr>
-                    <a:solidFill>
-                      <a:srgbClr val="FFFFFF"/>
-                    </a:solidFill>
-                  </a:tcPr>
-                </a:tc>
-                <a:tc>
-                  <a:txBody>
-                    <a:bodyPr/>
-                    <a:lstStyle/>
-                    <a:p>
-                      <a:pPr algn="l"/>
-                      <a:r>
-                        <a:rPr sz="1000" b="0">
-                          <a:solidFill>
-                            <a:srgbClr val="1D1B43"/>
-                          </a:solidFill>
-                          <a:latin typeface="Calibri"/>
-                        </a:rPr>
-                        <a:t>100.0%</a:t>
-                      </a:r>
-                    </a:p>
-                  </a:txBody>
-                  <a:tcPr>
-                    <a:solidFill>
-                      <a:srgbClr val="FFFFFF"/>
-                    </a:solidFill>
-                  </a:tcPr>
-                </a:tc>
-                <a:tc>
-                  <a:txBody>
-                    <a:bodyPr/>
-                    <a:lstStyle/>
-                    <a:p>
-                      <a:pPr algn="l"/>
-                      <a:r>
-                        <a:rPr sz="1000" b="0">
-                          <a:solidFill>
-                            <a:srgbClr val="1D1B43"/>
-                          </a:solidFill>
-                          <a:latin typeface="Calibri"/>
-                        </a:rPr>
-                        <a:t>Excelente</a:t>
-                      </a:r>
-                    </a:p>
-                  </a:txBody>
-                  <a:tcPr>
-                    <a:solidFill>
-                      <a:srgbClr val="FFFFFF"/>
-                    </a:solidFill>
-                  </a:tcPr>
-                </a:tc>
-              </a:tr>
-              <a:tr h="438912">
-                <a:tc>
-                  <a:txBody>
-                    <a:bodyPr/>
-                    <a:lstStyle/>
-                    <a:p>
-                      <a:pPr algn="l"/>
-                      <a:r>
-                        <a:rPr sz="1000" b="0">
-                          <a:solidFill>
-                            <a:srgbClr val="1D1B43"/>
-                          </a:solidFill>
-                          <a:latin typeface="Calibri"/>
-                        </a:rPr>
-                        <a:t>RS</a:t>
-                      </a:r>
-                    </a:p>
-                  </a:txBody>
-                  <a:tcPr>
-                    <a:solidFill>
-                      <a:srgbClr val="F2F2F2"/>
-                    </a:solidFill>
-                  </a:tcPr>
-                </a:tc>
-                <a:tc>
-                  <a:txBody>
-                    <a:bodyPr/>
-                    <a:lstStyle/>
-                    <a:p>
-                      <a:pPr algn="l"/>
-                      <a:r>
-                        <a:rPr sz="1000" b="0">
-                          <a:solidFill>
-                            <a:srgbClr val="1D1B43"/>
-                          </a:solidFill>
-                          <a:latin typeface="Calibri"/>
-                        </a:rPr>
-                        <a:t>2</a:t>
-                      </a:r>
-                    </a:p>
-                  </a:txBody>
-                  <a:tcPr>
-                    <a:solidFill>
-                      <a:srgbClr val="F2F2F2"/>
-                    </a:solidFill>
-                  </a:tcPr>
-                </a:tc>
-                <a:tc>
-                  <a:txBody>
-                    <a:bodyPr/>
-                    <a:lstStyle/>
-                    <a:p>
-                      <a:pPr algn="l"/>
-                      <a:r>
-                        <a:rPr sz="1000" b="0">
-                          <a:solidFill>
-                            <a:srgbClr val="1D1B43"/>
-                          </a:solidFill>
-                          <a:latin typeface="Calibri"/>
-                        </a:rPr>
-                        <a:t>0</a:t>
-                      </a:r>
-                    </a:p>
-                  </a:txBody>
-                  <a:tcPr>
-                    <a:solidFill>
-                      <a:srgbClr val="F2F2F2"/>
-                    </a:solidFill>
-                  </a:tcPr>
-                </a:tc>
-                <a:tc>
-                  <a:txBody>
-                    <a:bodyPr/>
-                    <a:lstStyle/>
-                    <a:p>
-                      <a:pPr algn="l"/>
-                      <a:r>
-                        <a:rPr sz="1000" b="0">
-                          <a:solidFill>
-                            <a:srgbClr val="1D1B43"/>
-                          </a:solidFill>
-                          <a:latin typeface="Calibri"/>
-                        </a:rPr>
-                        <a:t>2</a:t>
-                      </a:r>
-                    </a:p>
-                  </a:txBody>
-                  <a:tcPr>
-                    <a:solidFill>
-                      <a:srgbClr val="F2F2F2"/>
-                    </a:solidFill>
-                  </a:tcPr>
-                </a:tc>
-                <a:tc>
-                  <a:txBody>
-                    <a:bodyPr/>
-                    <a:lstStyle/>
-                    <a:p>
-                      <a:pPr algn="l"/>
-                      <a:r>
-                        <a:rPr sz="1000" b="0">
-                          <a:solidFill>
-                            <a:srgbClr val="1D1B43"/>
-                          </a:solidFill>
-                          <a:latin typeface="Calibri"/>
-                        </a:rPr>
-                        <a:t>0.0%</a:t>
-                      </a:r>
-                    </a:p>
-                  </a:txBody>
-                  <a:tcPr>
-                    <a:solidFill>
-                      <a:srgbClr val="F2F2F2"/>
-                    </a:solidFill>
-                  </a:tcPr>
-                </a:tc>
-                <a:tc>
-                  <a:txBody>
-                    <a:bodyPr/>
-                    <a:lstStyle/>
-                    <a:p>
-                      <a:pPr algn="l"/>
-                      <a:r>
-                        <a:rPr sz="1000" b="0">
-                          <a:solidFill>
-                            <a:srgbClr val="1D1B43"/>
-                          </a:solidFill>
-                          <a:latin typeface="Calibri"/>
-                        </a:rPr>
-                        <a:t>Atencao</a:t>
-                      </a:r>
-                    </a:p>
-                  </a:txBody>
-                  <a:tcPr>
-                    <a:solidFill>
-                      <a:srgbClr val="F2F2F2"/>
-                    </a:solidFill>
-                  </a:tcPr>
-                </a:tc>
-              </a:tr>
-              <a:tr h="438912">
-                <a:tc>
-                  <a:txBody>
-                    <a:bodyPr/>
-                    <a:lstStyle/>
-                    <a:p>
-                      <a:pPr algn="l"/>
-                      <a:r>
-                        <a:rPr sz="1000" b="0">
-                          <a:solidFill>
-                            <a:srgbClr val="1D1B43"/>
-                          </a:solidFill>
-                          <a:latin typeface="Calibri"/>
-                        </a:rPr>
-                        <a:t>GO</a:t>
-                      </a:r>
-                    </a:p>
-                  </a:txBody>
-                  <a:tcPr>
-                    <a:solidFill>
-                      <a:srgbClr val="FFFFFF"/>
-                    </a:solidFill>
-                  </a:tcPr>
-                </a:tc>
-                <a:tc>
-                  <a:txBody>
-                    <a:bodyPr/>
-                    <a:lstStyle/>
-                    <a:p>
-                      <a:pPr algn="l"/>
-                      <a:r>
-                        <a:rPr sz="1000" b="0">
-                          <a:solidFill>
-                            <a:srgbClr val="1D1B43"/>
-                          </a:solidFill>
-                          <a:latin typeface="Calibri"/>
-                        </a:rPr>
-                        <a:t>1</a:t>
-                      </a:r>
-                    </a:p>
-                  </a:txBody>
-                  <a:tcPr>
-                    <a:solidFill>
-                      <a:srgbClr val="FFFFFF"/>
-                    </a:solidFill>
-                  </a:tcPr>
-                </a:tc>
-                <a:tc>
-                  <a:txBody>
-                    <a:bodyPr/>
-                    <a:lstStyle/>
-                    <a:p>
-                      <a:pPr algn="l"/>
-                      <a:r>
-                        <a:rPr sz="1000" b="0">
-                          <a:solidFill>
-                            <a:srgbClr val="1D1B43"/>
-                          </a:solidFill>
-                          <a:latin typeface="Calibri"/>
-                        </a:rPr>
-                        <a:t>1</a:t>
-                      </a:r>
-                    </a:p>
-                  </a:txBody>
-                  <a:tcPr>
-                    <a:solidFill>
-                      <a:srgbClr val="FFFFFF"/>
-                    </a:solidFill>
-                  </a:tcPr>
-                </a:tc>
-                <a:tc>
-                  <a:txBody>
-                    <a:bodyPr/>
-                    <a:lstStyle/>
-                    <a:p>
-                      <a:pPr algn="l"/>
-                      <a:r>
-                        <a:rPr sz="1000" b="0">
-                          <a:solidFill>
-                            <a:srgbClr val="1D1B43"/>
-                          </a:solidFill>
-                          <a:latin typeface="Calibri"/>
-                        </a:rPr>
-                        <a:t>0</a:t>
-                      </a:r>
-                    </a:p>
-                  </a:txBody>
-                  <a:tcPr>
-                    <a:solidFill>
-                      <a:srgbClr val="FFFFFF"/>
-                    </a:solidFill>
-                  </a:tcPr>
-                </a:tc>
-                <a:tc>
-                  <a:txBody>
-                    <a:bodyPr/>
-                    <a:lstStyle/>
-                    <a:p>
-                      <a:pPr algn="l"/>
-                      <a:r>
-                        <a:rPr sz="1000" b="0">
-                          <a:solidFill>
-                            <a:srgbClr val="1D1B43"/>
-                          </a:solidFill>
-                          <a:latin typeface="Calibri"/>
-                        </a:rPr>
-                        <a:t>100.0%</a:t>
-                      </a:r>
-                    </a:p>
-                  </a:txBody>
-                  <a:tcPr>
-                    <a:solidFill>
-                      <a:srgbClr val="FFFFFF"/>
-                    </a:solidFill>
-                  </a:tcPr>
-                </a:tc>
-                <a:tc>
-                  <a:txBody>
-                    <a:bodyPr/>
-                    <a:lstStyle/>
-                    <a:p>
-                      <a:pPr algn="l"/>
-                      <a:r>
-                        <a:rPr sz="1000" b="0">
-                          <a:solidFill>
-                            <a:srgbClr val="1D1B43"/>
-                          </a:solidFill>
-                          <a:latin typeface="Calibri"/>
-                        </a:rPr>
-                        <a:t>Excelente</a:t>
-                      </a:r>
-                    </a:p>
-                  </a:txBody>
-                  <a:tcPr>
-                    <a:solidFill>
-                      <a:srgbClr val="FFFFFF"/>
                     </a:solidFill>
                   </a:tcPr>
                 </a:tc>
@@ -8044,7 +8021,7 @@
                 </a:solidFill>
                 <a:latin typeface="Calibri"/>
               </a:rPr>
-              <a:t>TOP DESTINATARIOS (29 pontos)</a:t>
+              <a:t>TOP DESTINATARIOS (83 pontos)</a:t>
             </a:r>
           </a:p>
         </p:txBody>
@@ -8342,7 +8319,7 @@
                           </a:solidFill>
                           <a:latin typeface="Calibri"/>
                         </a:rPr>
-                        <a:t>7</a:t>
+                        <a:t>8</a:t>
                       </a:r>
                     </a:p>
                   </a:txBody>
@@ -8365,7 +8342,7 @@
                           </a:solidFill>
                           <a:latin typeface="Calibri"/>
                         </a:rPr>
-                        <a:t>7</a:t>
+                        <a:t>8</a:t>
                       </a:r>
                     </a:p>
                   </a:txBody>
@@ -8482,7 +8459,7 @@
                           </a:solidFill>
                           <a:latin typeface="Calibri"/>
                         </a:rPr>
-                        <a:t>CKS INTERNATIONAL CO - ITAJAI / SC</a:t>
+                        <a:t>BRAFT DO BRASIL IMPO - GUARULHOS / SP</a:t>
                       </a:r>
                     </a:p>
                   </a:txBody>
@@ -8505,7 +8482,7 @@
                           </a:solidFill>
                           <a:latin typeface="Calibri"/>
                         </a:rPr>
-                        <a:t>2</a:t>
+                        <a:t>5</a:t>
                       </a:r>
                     </a:p>
                   </a:txBody>
@@ -8528,7 +8505,7 @@
                           </a:solidFill>
                           <a:latin typeface="Calibri"/>
                         </a:rPr>
-                        <a:t>1</a:t>
+                        <a:t>5</a:t>
                       </a:r>
                     </a:p>
                   </a:txBody>
@@ -8551,7 +8528,7 @@
                           </a:solidFill>
                           <a:latin typeface="Calibri"/>
                         </a:rPr>
-                        <a:t>1</a:t>
+                        <a:t>0</a:t>
                       </a:r>
                     </a:p>
                   </a:txBody>
@@ -8574,7 +8551,7 @@
                           </a:solidFill>
                           <a:latin typeface="Calibri"/>
                         </a:rPr>
-                        <a:t>50.0%</a:t>
+                        <a:t>100.0%</a:t>
                       </a:r>
                     </a:p>
                   </a:txBody>
@@ -8597,7 +8574,7 @@
                           </a:solidFill>
                           <a:latin typeface="Calibri"/>
                         </a:rPr>
-                        <a:t>Atencao</a:t>
+                        <a:t>Excelente</a:t>
                       </a:r>
                     </a:p>
                   </a:txBody>
@@ -8645,7 +8622,7 @@
                           </a:solidFill>
                           <a:latin typeface="Calibri"/>
                         </a:rPr>
-                        <a:t>MATTEL DO BRASIL LTD - NAVEGANTES / SC</a:t>
+                        <a:t>ANDRA S A ELECTRIC S - CAJAMAR / SP</a:t>
                       </a:r>
                     </a:p>
                   </a:txBody>
@@ -8668,7 +8645,7 @@
                           </a:solidFill>
                           <a:latin typeface="Calibri"/>
                         </a:rPr>
-                        <a:t>2</a:t>
+                        <a:t>4</a:t>
                       </a:r>
                     </a:p>
                   </a:txBody>
@@ -8691,7 +8668,7 @@
                           </a:solidFill>
                           <a:latin typeface="Calibri"/>
                         </a:rPr>
-                        <a:t>2</a:t>
+                        <a:t>4</a:t>
                       </a:r>
                     </a:p>
                   </a:txBody>
@@ -8808,7 +8785,7 @@
                           </a:solidFill>
                           <a:latin typeface="Calibri"/>
                         </a:rPr>
-                        <a:t>HGS GAS E AGUA DO BR - RIO DE JANEIRO / RJ</a:t>
+                        <a:t>PORTOEXPRESS LOGISTI - SAO PAULO / SP</a:t>
                       </a:r>
                     </a:p>
                   </a:txBody>
@@ -8831,7 +8808,7 @@
                           </a:solidFill>
                           <a:latin typeface="Calibri"/>
                         </a:rPr>
-                        <a:t>2</a:t>
+                        <a:t>4</a:t>
                       </a:r>
                     </a:p>
                   </a:txBody>
@@ -8854,7 +8831,7 @@
                           </a:solidFill>
                           <a:latin typeface="Calibri"/>
                         </a:rPr>
-                        <a:t>1</a:t>
+                        <a:t>4</a:t>
                       </a:r>
                     </a:p>
                   </a:txBody>
@@ -8877,7 +8854,7 @@
                           </a:solidFill>
                           <a:latin typeface="Calibri"/>
                         </a:rPr>
-                        <a:t>1</a:t>
+                        <a:t>0</a:t>
                       </a:r>
                     </a:p>
                   </a:txBody>
@@ -8900,7 +8877,7 @@
                           </a:solidFill>
                           <a:latin typeface="Calibri"/>
                         </a:rPr>
-                        <a:t>50.0%</a:t>
+                        <a:t>100.0%</a:t>
                       </a:r>
                     </a:p>
                   </a:txBody>
@@ -8923,7 +8900,7 @@
                           </a:solidFill>
                           <a:latin typeface="Calibri"/>
                         </a:rPr>
-                        <a:t>Atencao</a:t>
+                        <a:t>Excelente</a:t>
                       </a:r>
                     </a:p>
                   </a:txBody>
@@ -8971,7 +8948,7 @@
                           </a:solidFill>
                           <a:latin typeface="Calibri"/>
                         </a:rPr>
-                        <a:t>CHRISTIAN SIEGL - LAURO DE FREITAS / BA</a:t>
+                        <a:t>YANKE COMERCIO ELETR - RIO CLARO / SP</a:t>
                       </a:r>
                     </a:p>
                   </a:txBody>
@@ -8994,7 +8971,7 @@
                           </a:solidFill>
                           <a:latin typeface="Calibri"/>
                         </a:rPr>
-                        <a:t>2</a:t>
+                        <a:t>4</a:t>
                       </a:r>
                     </a:p>
                   </a:txBody>
@@ -9040,7 +9017,7 @@
                           </a:solidFill>
                           <a:latin typeface="Calibri"/>
                         </a:rPr>
-                        <a:t>1</a:t>
+                        <a:t>3</a:t>
                       </a:r>
                     </a:p>
                   </a:txBody>
@@ -9063,7 +9040,7 @@
                           </a:solidFill>
                           <a:latin typeface="Calibri"/>
                         </a:rPr>
-                        <a:t>50.0%</a:t>
+                        <a:t>25.0%</a:t>
                       </a:r>
                     </a:p>
                   </a:txBody>
@@ -9134,7 +9111,7 @@
                           </a:solidFill>
                           <a:latin typeface="Calibri"/>
                         </a:rPr>
-                        <a:t>JC ENCOMENDA EXPRESS - RECIFE / PE</a:t>
+                        <a:t>NAMASTE SERVICOS LTD - SAO PAULO / SP</a:t>
                       </a:r>
                     </a:p>
                   </a:txBody>
@@ -9157,7 +9134,7 @@
                           </a:solidFill>
                           <a:latin typeface="Calibri"/>
                         </a:rPr>
-                        <a:t>2</a:t>
+                        <a:t>3</a:t>
                       </a:r>
                     </a:p>
                   </a:txBody>
@@ -9180,7 +9157,7 @@
                           </a:solidFill>
                           <a:latin typeface="Calibri"/>
                         </a:rPr>
-                        <a:t>2</a:t>
+                        <a:t>3</a:t>
                       </a:r>
                     </a:p>
                   </a:txBody>
@@ -9297,7 +9274,7 @@
                           </a:solidFill>
                           <a:latin typeface="Calibri"/>
                         </a:rPr>
-                        <a:t>BLUE BAY COMERCIAL - SAO FRANCISCO DO SUL / SC</a:t>
+                        <a:t>TERMACO LOGISTICA - GUARULHOS / SP</a:t>
                       </a:r>
                     </a:p>
                   </a:txBody>
@@ -9320,7 +9297,7 @@
                           </a:solidFill>
                           <a:latin typeface="Calibri"/>
                         </a:rPr>
-                        <a:t>1</a:t>
+                        <a:t>3</a:t>
                       </a:r>
                     </a:p>
                   </a:txBody>
@@ -9343,7 +9320,7 @@
                           </a:solidFill>
                           <a:latin typeface="Calibri"/>
                         </a:rPr>
-                        <a:t>1</a:t>
+                        <a:t>3</a:t>
                       </a:r>
                     </a:p>
                   </a:txBody>
@@ -9460,7 +9437,7 @@
                           </a:solidFill>
                           <a:latin typeface="Calibri"/>
                         </a:rPr>
-                        <a:t>CAJADAN TEXTIL LTDA. - JOINVILLE / SC</a:t>
+                        <a:t>CHRISTIAN SIEGL - LAURO DE FREITAS / BA</a:t>
                       </a:r>
                     </a:p>
                   </a:txBody>
@@ -9483,7 +9460,7 @@
                           </a:solidFill>
                           <a:latin typeface="Calibri"/>
                         </a:rPr>
-                        <a:t>1</a:t>
+                        <a:t>2</a:t>
                       </a:r>
                     </a:p>
                   </a:txBody>
@@ -9506,7 +9483,7 @@
                           </a:solidFill>
                           <a:latin typeface="Calibri"/>
                         </a:rPr>
-                        <a:t>1</a:t>
+                        <a:t>2</a:t>
                       </a:r>
                     </a:p>
                   </a:txBody>
@@ -9623,7 +9600,7 @@
                           </a:solidFill>
                           <a:latin typeface="Calibri"/>
                         </a:rPr>
-                        <a:t>COMERCIAL HUGEN - SAPUCAIA DO SUL / RS</a:t>
+                        <a:t>KUKA PRODUTOS INFANT - SAO PAULO / SP</a:t>
                       </a:r>
                     </a:p>
                   </a:txBody>
@@ -9646,7 +9623,7 @@
                           </a:solidFill>
                           <a:latin typeface="Calibri"/>
                         </a:rPr>
-                        <a:t>1</a:t>
+                        <a:t>2</a:t>
                       </a:r>
                     </a:p>
                   </a:txBody>
@@ -9669,6 +9646,29 @@
                           </a:solidFill>
                           <a:latin typeface="Calibri"/>
                         </a:rPr>
+                        <a:t>2</a:t>
+                      </a:r>
+                    </a:p>
+                  </a:txBody>
+                  <a:tcPr>
+                    <a:solidFill>
+                      <a:srgbClr val="FFFFFF"/>
+                    </a:solidFill>
+                  </a:tcPr>
+                </a:tc>
+                <a:tc>
+                  <a:txBody>
+                    <a:bodyPr/>
+                    <a:lstStyle/>
+                    <a:p>
+                      <a:pPr algn="l"/>
+                      <a:r>
+                        <a:rPr sz="1000" b="0">
+                          <a:solidFill>
+                            <a:srgbClr val="1D1B43"/>
+                          </a:solidFill>
+                          <a:latin typeface="Calibri"/>
+                        </a:rPr>
                         <a:t>0</a:t>
                       </a:r>
                     </a:p>
@@ -9692,7 +9692,7 @@
                           </a:solidFill>
                           <a:latin typeface="Calibri"/>
                         </a:rPr>
-                        <a:t>1</a:t>
+                        <a:t>100.0%</a:t>
                       </a:r>
                     </a:p>
                   </a:txBody>
@@ -9715,30 +9715,7 @@
                           </a:solidFill>
                           <a:latin typeface="Calibri"/>
                         </a:rPr>
-                        <a:t>0.0%</a:t>
-                      </a:r>
-                    </a:p>
-                  </a:txBody>
-                  <a:tcPr>
-                    <a:solidFill>
-                      <a:srgbClr val="FFFFFF"/>
-                    </a:solidFill>
-                  </a:tcPr>
-                </a:tc>
-                <a:tc>
-                  <a:txBody>
-                    <a:bodyPr/>
-                    <a:lstStyle/>
-                    <a:p>
-                      <a:pPr algn="l"/>
-                      <a:r>
-                        <a:rPr sz="1000" b="0">
-                          <a:solidFill>
-                            <a:srgbClr val="1D1B43"/>
-                          </a:solidFill>
-                          <a:latin typeface="Calibri"/>
-                        </a:rPr>
-                        <a:t>Atencao</a:t>
+                        <a:t>Excelente</a:t>
                       </a:r>
                     </a:p>
                   </a:txBody>
@@ -9786,7 +9763,7 @@
                           </a:solidFill>
                           <a:latin typeface="Calibri"/>
                         </a:rPr>
-                        <a:t>BRSL LOGISTICA LTDA - ITAJAI / SC</a:t>
+                        <a:t>DUO SP COMERCIO DE V - SAO PAULO / SP</a:t>
                       </a:r>
                     </a:p>
                   </a:txBody>
@@ -9809,7 +9786,7 @@
                           </a:solidFill>
                           <a:latin typeface="Calibri"/>
                         </a:rPr>
-                        <a:t>1</a:t>
+                        <a:t>2</a:t>
                       </a:r>
                     </a:p>
                   </a:txBody>
@@ -9832,7 +9809,7 @@
                           </a:solidFill>
                           <a:latin typeface="Calibri"/>
                         </a:rPr>
-                        <a:t>1</a:t>
+                        <a:t>2</a:t>
                       </a:r>
                     </a:p>
                   </a:txBody>
@@ -9949,7 +9926,7 @@
                           </a:solidFill>
                           <a:latin typeface="Calibri"/>
                         </a:rPr>
-                        <a:t>ANNA CAROLLYNE ALEXA - TURVANIA / GO</a:t>
+                        <a:t>NSNA SOCIOAMBIENTAL - SAO PAULO / SP</a:t>
                       </a:r>
                     </a:p>
                   </a:txBody>
@@ -9972,7 +9949,7 @@
                           </a:solidFill>
                           <a:latin typeface="Calibri"/>
                         </a:rPr>
-                        <a:t>1</a:t>
+                        <a:t>2</a:t>
                       </a:r>
                     </a:p>
                   </a:txBody>
@@ -9995,7 +9972,7 @@
                           </a:solidFill>
                           <a:latin typeface="Calibri"/>
                         </a:rPr>
-                        <a:t>1</a:t>
+                        <a:t>2</a:t>
                       </a:r>
                     </a:p>
                   </a:txBody>
@@ -10112,7 +10089,7 @@
                           </a:solidFill>
                           <a:latin typeface="Calibri"/>
                         </a:rPr>
-                        <a:t>AMAZON SERVICOS DE V - BETIM / MG</a:t>
+                        <a:t>GIRO CERTO CARGAS E - GUARULHOS / SP</a:t>
                       </a:r>
                     </a:p>
                   </a:txBody>
@@ -10135,7 +10112,7 @@
                           </a:solidFill>
                           <a:latin typeface="Calibri"/>
                         </a:rPr>
-                        <a:t>1</a:t>
+                        <a:t>2</a:t>
                       </a:r>
                     </a:p>
                   </a:txBody>
@@ -10158,7 +10135,7 @@
                           </a:solidFill>
                           <a:latin typeface="Calibri"/>
                         </a:rPr>
-                        <a:t>1</a:t>
+                        <a:t>2</a:t>
                       </a:r>
                     </a:p>
                   </a:txBody>
@@ -10275,7 +10252,7 @@
                           </a:solidFill>
                           <a:latin typeface="Calibri"/>
                         </a:rPr>
-                        <a:t>AEROPORTO INTERNACIO - GUARULHOS / SP</a:t>
+                        <a:t>VICTOR HUGO TAVARES - DIADEMA / SP</a:t>
                       </a:r>
                     </a:p>
                   </a:txBody>
@@ -10298,7 +10275,7 @@
                           </a:solidFill>
                           <a:latin typeface="Calibri"/>
                         </a:rPr>
-                        <a:t>1</a:t>
+                        <a:t>2</a:t>
                       </a:r>
                     </a:p>
                   </a:txBody>
@@ -10321,6 +10298,29 @@
                           </a:solidFill>
                           <a:latin typeface="Calibri"/>
                         </a:rPr>
+                        <a:t>2</a:t>
+                      </a:r>
+                    </a:p>
+                  </a:txBody>
+                  <a:tcPr>
+                    <a:solidFill>
+                      <a:srgbClr val="FFFFFF"/>
+                    </a:solidFill>
+                  </a:tcPr>
+                </a:tc>
+                <a:tc>
+                  <a:txBody>
+                    <a:bodyPr/>
+                    <a:lstStyle/>
+                    <a:p>
+                      <a:pPr algn="l"/>
+                      <a:r>
+                        <a:rPr sz="1000" b="0">
+                          <a:solidFill>
+                            <a:srgbClr val="1D1B43"/>
+                          </a:solidFill>
+                          <a:latin typeface="Calibri"/>
+                        </a:rPr>
                         <a:t>0</a:t>
                       </a:r>
                     </a:p>
@@ -10344,7 +10344,7 @@
                           </a:solidFill>
                           <a:latin typeface="Calibri"/>
                         </a:rPr>
-                        <a:t>1</a:t>
+                        <a:t>100.0%</a:t>
                       </a:r>
                     </a:p>
                   </a:txBody>
@@ -10367,30 +10367,7 @@
                           </a:solidFill>
                           <a:latin typeface="Calibri"/>
                         </a:rPr>
-                        <a:t>0.0%</a:t>
-                      </a:r>
-                    </a:p>
-                  </a:txBody>
-                  <a:tcPr>
-                    <a:solidFill>
-                      <a:srgbClr val="FFFFFF"/>
-                    </a:solidFill>
-                  </a:tcPr>
-                </a:tc>
-                <a:tc>
-                  <a:txBody>
-                    <a:bodyPr/>
-                    <a:lstStyle/>
-                    <a:p>
-                      <a:pPr algn="l"/>
-                      <a:r>
-                        <a:rPr sz="1000" b="0">
-                          <a:solidFill>
-                            <a:srgbClr val="1D1B43"/>
-                          </a:solidFill>
-                          <a:latin typeface="Calibri"/>
-                        </a:rPr>
-                        <a:t>Atencao</a:t>
+                        <a:t>Excelente</a:t>
                       </a:r>
                     </a:p>
                   </a:txBody>
@@ -10438,7 +10415,7 @@
                           </a:solidFill>
                           <a:latin typeface="Calibri"/>
                         </a:rPr>
-                        <a:t>GATTO LOG - RIBEIRAO PRETO / SP</a:t>
+                        <a:t>RAFAEL PAULISTA DE C - OSASCO / SP</a:t>
                       </a:r>
                     </a:p>
                   </a:txBody>
@@ -10461,7 +10438,7 @@
                           </a:solidFill>
                           <a:latin typeface="Calibri"/>
                         </a:rPr>
-                        <a:t>1</a:t>
+                        <a:t>2</a:t>
                       </a:r>
                     </a:p>
                   </a:txBody>
@@ -10484,7 +10461,7 @@
                           </a:solidFill>
                           <a:latin typeface="Calibri"/>
                         </a:rPr>
-                        <a:t>1</a:t>
+                        <a:t>2</a:t>
                       </a:r>
                     </a:p>
                   </a:txBody>

--- a/PORTOEXPRESS_LOGISTICA_LTDA.pptx
+++ b/PORTOEXPRESS_LOGISTICA_LTDA.pptx
@@ -143,29 +143,23 @@
           </c:spPr>
           <c:cat>
             <c:strRef>
-              <c:f>Sheet1!$A$2:$A$3</c:f>
+              <c:f>Sheet1!$A$2:$A$2</c:f>
               <c:strCache>
-                <c:ptCount val="2"/>
+                <c:ptCount val="1"/>
                 <c:pt idx="0">
                   <c:v>Abril 2026</c:v>
-                </c:pt>
-                <c:pt idx="1">
-                  <c:v>Maio 2026</c:v>
                 </c:pt>
               </c:strCache>
             </c:strRef>
           </c:cat>
           <c:val>
             <c:numRef>
-              <c:f>Sheet1!$B$2:$B$3</c:f>
+              <c:f>Sheet1!$B$2:$B$2</c:f>
               <c:numCache>
                 <c:formatCode>General</c:formatCode>
-                <c:ptCount val="2"/>
+                <c:ptCount val="1"/>
                 <c:pt idx="0">
-                  <c:v>38</c:v>
-                </c:pt>
-                <c:pt idx="1">
-                  <c:v>108</c:v>
+                  <c:v>39</c:v>
                 </c:pt>
               </c:numCache>
             </c:numRef>
@@ -192,29 +186,23 @@
           </c:spPr>
           <c:cat>
             <c:strRef>
-              <c:f>Sheet1!$A$2:$A$3</c:f>
+              <c:f>Sheet1!$A$2:$A$2</c:f>
               <c:strCache>
-                <c:ptCount val="2"/>
+                <c:ptCount val="1"/>
                 <c:pt idx="0">
                   <c:v>Abril 2026</c:v>
-                </c:pt>
-                <c:pt idx="1">
-                  <c:v>Maio 2026</c:v>
                 </c:pt>
               </c:strCache>
             </c:strRef>
           </c:cat>
           <c:val>
             <c:numRef>
-              <c:f>Sheet1!$C$2:$C$3</c:f>
+              <c:f>Sheet1!$C$2:$C$2</c:f>
               <c:numCache>
                 <c:formatCode>General</c:formatCode>
-                <c:ptCount val="2"/>
+                <c:ptCount val="1"/>
                 <c:pt idx="0">
                   <c:v>1</c:v>
-                </c:pt>
-                <c:pt idx="1">
-                  <c:v>9</c:v>
                 </c:pt>
               </c:numCache>
             </c:numRef>
@@ -3387,7 +3375,7 @@
                 </a:solidFill>
                 <a:latin typeface="Calibri"/>
               </a:rPr>
-              <a:t>INDICADORES MAIO 2026</a:t>
+              <a:t>INDICADORES ABRIL 2026</a:t>
             </a:r>
           </a:p>
         </p:txBody>
@@ -3494,14 +3482,13 @@
           <a:p>
             <a:pPr algn="ctr"/>
             <a:r>
-              <a:rPr sz="1600" b="1">
+              <a:rPr sz="1400" b="1">
                 <a:solidFill>
                   <a:srgbClr val="FFFFFF"/>
                 </a:solidFill>
                 <a:latin typeface="Calibri"/>
               </a:rPr>
-              <a:t>Nossa rota e ir alem das
-entregas!</a:t>
+              <a:t>Nossa rota e ir alem das entregas!</a:t>
             </a:r>
           </a:p>
         </p:txBody>
@@ -3709,7 +3696,7 @@
                 </a:solidFill>
                 <a:latin typeface="Calibri"/>
               </a:rPr>
-              <a:t>117</a:t>
+              <a:t>40</a:t>
             </a:r>
           </a:p>
         </p:txBody>
@@ -3824,7 +3811,7 @@
                 </a:solidFill>
                 <a:latin typeface="Calibri"/>
               </a:rPr>
-              <a:t>108</a:t>
+              <a:t>39</a:t>
             </a:r>
           </a:p>
         </p:txBody>
@@ -3939,7 +3926,7 @@
                 </a:solidFill>
                 <a:latin typeface="Calibri"/>
               </a:rPr>
-              <a:t>9</a:t>
+              <a:t>1</a:t>
             </a:r>
           </a:p>
         </p:txBody>
@@ -4050,11 +4037,11 @@
             <a:r>
               <a:rPr sz="2800" b="1">
                 <a:solidFill>
-                  <a:srgbClr val="F59E0B"/>
+                  <a:srgbClr val="10B981"/>
                 </a:solidFill>
                 <a:latin typeface="Calibri"/>
               </a:rPr>
-              <a:t>92.3%</a:t>
+              <a:t>97.5%</a:t>
             </a:r>
           </a:p>
         </p:txBody>
@@ -4155,30 +4142,30 @@
                           </a:solidFill>
                           <a:latin typeface="Calibri"/>
                         </a:rPr>
+                        <a:t>Marco 2026</a:t>
+                      </a:r>
+                    </a:p>
+                  </a:txBody>
+                  <a:tcPr>
+                    <a:solidFill>
+                      <a:srgbClr val="1D1B43"/>
+                    </a:solidFill>
+                  </a:tcPr>
+                </a:tc>
+                <a:tc>
+                  <a:txBody>
+                    <a:bodyPr/>
+                    <a:lstStyle/>
+                    <a:p>
+                      <a:pPr algn="ctr"/>
+                      <a:r>
+                        <a:rPr sz="1100" b="1">
+                          <a:solidFill>
+                            <a:srgbClr val="FFFFFF"/>
+                          </a:solidFill>
+                          <a:latin typeface="Calibri"/>
+                        </a:rPr>
                         <a:t>Abril 2026</a:t>
-                      </a:r>
-                    </a:p>
-                  </a:txBody>
-                  <a:tcPr>
-                    <a:solidFill>
-                      <a:srgbClr val="1D1B43"/>
-                    </a:solidFill>
-                  </a:tcPr>
-                </a:tc>
-                <a:tc>
-                  <a:txBody>
-                    <a:bodyPr/>
-                    <a:lstStyle/>
-                    <a:p>
-                      <a:pPr algn="ctr"/>
-                      <a:r>
-                        <a:rPr sz="1100" b="1">
-                          <a:solidFill>
-                            <a:srgbClr val="FFFFFF"/>
-                          </a:solidFill>
-                          <a:latin typeface="Calibri"/>
-                        </a:rPr>
-                        <a:t>Maio 2026</a:t>
                       </a:r>
                     </a:p>
                   </a:txBody>
@@ -4249,7 +4236,7 @@
                           </a:solidFill>
                           <a:latin typeface="Calibri"/>
                         </a:rPr>
-                        <a:t>39</a:t>
+                        <a:t>-</a:t>
                       </a:r>
                     </a:p>
                   </a:txBody>
@@ -4272,7 +4259,7 @@
                           </a:solidFill>
                           <a:latin typeface="Calibri"/>
                         </a:rPr>
-                        <a:t>117</a:t>
+                        <a:t>40</a:t>
                       </a:r>
                     </a:p>
                   </a:txBody>
@@ -4295,7 +4282,7 @@
                           </a:solidFill>
                           <a:latin typeface="Calibri"/>
                         </a:rPr>
-                        <a:t>+ 78</a:t>
+                        <a:t>-</a:t>
                       </a:r>
                     </a:p>
                   </a:txBody>
@@ -4343,7 +4330,7 @@
                           </a:solidFill>
                           <a:latin typeface="Calibri"/>
                         </a:rPr>
-                        <a:t>38</a:t>
+                        <a:t>-</a:t>
                       </a:r>
                     </a:p>
                   </a:txBody>
@@ -4366,7 +4353,7 @@
                           </a:solidFill>
                           <a:latin typeface="Calibri"/>
                         </a:rPr>
-                        <a:t>108</a:t>
+                        <a:t>39</a:t>
                       </a:r>
                     </a:p>
                   </a:txBody>
@@ -4389,7 +4376,7 @@
                           </a:solidFill>
                           <a:latin typeface="Calibri"/>
                         </a:rPr>
-                        <a:t>+ 70</a:t>
+                        <a:t>-</a:t>
                       </a:r>
                     </a:p>
                   </a:txBody>
@@ -4437,6 +4424,29 @@
                           </a:solidFill>
                           <a:latin typeface="Calibri"/>
                         </a:rPr>
+                        <a:t>-</a:t>
+                      </a:r>
+                    </a:p>
+                  </a:txBody>
+                  <a:tcPr>
+                    <a:solidFill>
+                      <a:srgbClr val="FFFFFF"/>
+                    </a:solidFill>
+                  </a:tcPr>
+                </a:tc>
+                <a:tc>
+                  <a:txBody>
+                    <a:bodyPr/>
+                    <a:lstStyle/>
+                    <a:p>
+                      <a:pPr algn="l"/>
+                      <a:r>
+                        <a:rPr sz="1000" b="0">
+                          <a:solidFill>
+                            <a:srgbClr val="1D1B43"/>
+                          </a:solidFill>
+                          <a:latin typeface="Calibri"/>
+                        </a:rPr>
                         <a:t>1</a:t>
                       </a:r>
                     </a:p>
@@ -4460,30 +4470,7 @@
                           </a:solidFill>
                           <a:latin typeface="Calibri"/>
                         </a:rPr>
-                        <a:t>9</a:t>
-                      </a:r>
-                    </a:p>
-                  </a:txBody>
-                  <a:tcPr>
-                    <a:solidFill>
-                      <a:srgbClr val="FFFFFF"/>
-                    </a:solidFill>
-                  </a:tcPr>
-                </a:tc>
-                <a:tc>
-                  <a:txBody>
-                    <a:bodyPr/>
-                    <a:lstStyle/>
-                    <a:p>
-                      <a:pPr algn="l"/>
-                      <a:r>
-                        <a:rPr sz="1000" b="0">
-                          <a:solidFill>
-                            <a:srgbClr val="1D1B43"/>
-                          </a:solidFill>
-                          <a:latin typeface="Calibri"/>
-                        </a:rPr>
-                        <a:t>+ 8</a:t>
+                        <a:t>-</a:t>
                       </a:r>
                     </a:p>
                   </a:txBody>
@@ -4531,7 +4518,7 @@
                           </a:solidFill>
                           <a:latin typeface="Calibri"/>
                         </a:rPr>
-                        <a:t>97.4%</a:t>
+                        <a:t>-</a:t>
                       </a:r>
                     </a:p>
                   </a:txBody>
@@ -4554,7 +4541,7 @@
                           </a:solidFill>
                           <a:latin typeface="Calibri"/>
                         </a:rPr>
-                        <a:t>92.3%</a:t>
+                        <a:t>97.5%</a:t>
                       </a:r>
                     </a:p>
                   </a:txBody>
@@ -4577,7 +4564,7 @@
                           </a:solidFill>
                           <a:latin typeface="Calibri"/>
                         </a:rPr>
-                        <a:t>- 5.1pp</a:t>
+                        <a:t>-</a:t>
                       </a:r>
                     </a:p>
                   </a:txBody>
@@ -4748,7 +4735,7 @@
         </p:nvGraphicFramePr>
         <p:xfrm>
           <a:off x="7955279" y="2286000"/>
-          <a:ext cx="4480560" cy="1316736"/>
+          <a:ext cx="4480560" cy="877824"/>
         </p:xfrm>
         <a:graphic>
           <a:graphicData uri="http://schemas.openxmlformats.org/drawingml/2006/table">
@@ -4917,6 +4904,29 @@
                           </a:solidFill>
                           <a:latin typeface="Calibri"/>
                         </a:rPr>
+                        <a:t>40</a:t>
+                      </a:r>
+                    </a:p>
+                  </a:txBody>
+                  <a:tcPr>
+                    <a:solidFill>
+                      <a:srgbClr val="FFFFFF"/>
+                    </a:solidFill>
+                  </a:tcPr>
+                </a:tc>
+                <a:tc>
+                  <a:txBody>
+                    <a:bodyPr/>
+                    <a:lstStyle/>
+                    <a:p>
+                      <a:pPr algn="l"/>
+                      <a:r>
+                        <a:rPr sz="1000" b="0">
+                          <a:solidFill>
+                            <a:srgbClr val="1D1B43"/>
+                          </a:solidFill>
+                          <a:latin typeface="Calibri"/>
+                        </a:rPr>
                         <a:t>39</a:t>
                       </a:r>
                     </a:p>
@@ -4940,7 +4950,7 @@
                           </a:solidFill>
                           <a:latin typeface="Calibri"/>
                         </a:rPr>
-                        <a:t>38</a:t>
+                        <a:t>1</a:t>
                       </a:r>
                     </a:p>
                   </a:txBody>
@@ -4963,153 +4973,13 @@
                           </a:solidFill>
                           <a:latin typeface="Calibri"/>
                         </a:rPr>
-                        <a:t>1</a:t>
+                        <a:t>97.5%</a:t>
                       </a:r>
                     </a:p>
                   </a:txBody>
                   <a:tcPr>
                     <a:solidFill>
                       <a:srgbClr val="FFFFFF"/>
-                    </a:solidFill>
-                  </a:tcPr>
-                </a:tc>
-                <a:tc>
-                  <a:txBody>
-                    <a:bodyPr/>
-                    <a:lstStyle/>
-                    <a:p>
-                      <a:pPr algn="l"/>
-                      <a:r>
-                        <a:rPr sz="1000" b="0">
-                          <a:solidFill>
-                            <a:srgbClr val="1D1B43"/>
-                          </a:solidFill>
-                          <a:latin typeface="Calibri"/>
-                        </a:rPr>
-                        <a:t>97.4%</a:t>
-                      </a:r>
-                    </a:p>
-                  </a:txBody>
-                  <a:tcPr>
-                    <a:solidFill>
-                      <a:srgbClr val="FFFFFF"/>
-                    </a:solidFill>
-                  </a:tcPr>
-                </a:tc>
-              </a:tr>
-              <a:tr h="438912">
-                <a:tc>
-                  <a:txBody>
-                    <a:bodyPr/>
-                    <a:lstStyle/>
-                    <a:p>
-                      <a:pPr algn="l"/>
-                      <a:r>
-                        <a:rPr sz="1000" b="0">
-                          <a:solidFill>
-                            <a:srgbClr val="1D1B43"/>
-                          </a:solidFill>
-                          <a:latin typeface="Calibri"/>
-                        </a:rPr>
-                        <a:t>Maio 2026</a:t>
-                      </a:r>
-                    </a:p>
-                  </a:txBody>
-                  <a:tcPr>
-                    <a:solidFill>
-                      <a:srgbClr val="F2F2F2"/>
-                    </a:solidFill>
-                  </a:tcPr>
-                </a:tc>
-                <a:tc>
-                  <a:txBody>
-                    <a:bodyPr/>
-                    <a:lstStyle/>
-                    <a:p>
-                      <a:pPr algn="l"/>
-                      <a:r>
-                        <a:rPr sz="1000" b="0">
-                          <a:solidFill>
-                            <a:srgbClr val="1D1B43"/>
-                          </a:solidFill>
-                          <a:latin typeface="Calibri"/>
-                        </a:rPr>
-                        <a:t>117</a:t>
-                      </a:r>
-                    </a:p>
-                  </a:txBody>
-                  <a:tcPr>
-                    <a:solidFill>
-                      <a:srgbClr val="F2F2F2"/>
-                    </a:solidFill>
-                  </a:tcPr>
-                </a:tc>
-                <a:tc>
-                  <a:txBody>
-                    <a:bodyPr/>
-                    <a:lstStyle/>
-                    <a:p>
-                      <a:pPr algn="l"/>
-                      <a:r>
-                        <a:rPr sz="1000" b="0">
-                          <a:solidFill>
-                            <a:srgbClr val="1D1B43"/>
-                          </a:solidFill>
-                          <a:latin typeface="Calibri"/>
-                        </a:rPr>
-                        <a:t>108</a:t>
-                      </a:r>
-                    </a:p>
-                  </a:txBody>
-                  <a:tcPr>
-                    <a:solidFill>
-                      <a:srgbClr val="F2F2F2"/>
-                    </a:solidFill>
-                  </a:tcPr>
-                </a:tc>
-                <a:tc>
-                  <a:txBody>
-                    <a:bodyPr/>
-                    <a:lstStyle/>
-                    <a:p>
-                      <a:pPr algn="l"/>
-                      <a:r>
-                        <a:rPr sz="1000" b="0">
-                          <a:solidFill>
-                            <a:srgbClr val="1D1B43"/>
-                          </a:solidFill>
-                          <a:latin typeface="Calibri"/>
-                        </a:rPr>
-                        <a:t>9</a:t>
-                      </a:r>
-                    </a:p>
-                  </a:txBody>
-                  <a:tcPr>
-                    <a:solidFill>
-                      <a:srgbClr val="F2F2F2"/>
-                    </a:solidFill>
-                  </a:tcPr>
-                </a:tc>
-                <a:tc>
-                  <a:txBody>
-                    <a:bodyPr/>
-                    <a:lstStyle/>
-                    <a:p>
-                      <a:pPr algn="l"/>
-                      <a:r>
-                        <a:rPr sz="1000" b="0">
-                          <a:solidFill>
-                            <a:srgbClr val="1D1B43"/>
-                          </a:solidFill>
-                          <a:latin typeface="Calibri"/>
-                        </a:rPr>
-                        <a:t>92.3%</a:t>
-                      </a:r>
-                    </a:p>
-                  </a:txBody>
-                  <a:tcPr>
-                    <a:solidFill>
-                      <a:srgbClr val="F2F2F2"/>
                     </a:solidFill>
                   </a:tcPr>
                 </a:tc>
@@ -5191,7 +5061,7 @@
                 </a:solidFill>
                 <a:latin typeface="Calibri"/>
               </a:rPr>
-              <a:t>PERFORMANCE: 92.3% - REGULAR</a:t>
+              <a:t>PERFORMANCE: 97.5% - EXCELENTE</a:t>
             </a:r>
           </a:p>
         </p:txBody>
@@ -5276,7 +5146,7 @@
                 </a:solidFill>
                 <a:latin typeface="Calibri"/>
               </a:rPr>
-              <a:t>OCORRENCIAS FORA DO PRAZO (9)</a:t>
+              <a:t>OCORRENCIAS FORA DO PRAZO (1)</a:t>
             </a:r>
           </a:p>
         </p:txBody>
@@ -5334,7 +5204,7 @@
         </p:nvGraphicFramePr>
         <p:xfrm>
           <a:off x="457200" y="1828800"/>
-          <a:ext cx="11429999" cy="3840480"/>
+          <a:ext cx="11429999" cy="768096"/>
         </p:xfrm>
         <a:graphic>
           <a:graphicData uri="http://schemas.openxmlformats.org/drawingml/2006/table">
@@ -5480,7 +5350,7 @@
                           </a:solidFill>
                           <a:latin typeface="Calibri"/>
                         </a:rPr>
-                        <a:t>280624</a:t>
+                        <a:t>278662</a:t>
                       </a:r>
                     </a:p>
                   </a:txBody>
@@ -5503,7 +5373,7 @@
                           </a:solidFill>
                           <a:latin typeface="Calibri"/>
                         </a:rPr>
-                        <a:t>SOMA EXPRESS - LAURO DE FREITAS / BA</a:t>
+                        <a:t>HGS GAS E AGUA DO BR - RIO DE JANEIRO / RJ</a:t>
                       </a:r>
                     </a:p>
                   </a:txBody>
@@ -5526,7 +5396,7 @@
                           </a:solidFill>
                           <a:latin typeface="Calibri"/>
                         </a:rPr>
-                        <a:t>LAURO DE FREITAS/BA</a:t>
+                        <a:t>RIO DE JANEIRO/RJ</a:t>
                       </a:r>
                     </a:p>
                   </a:txBody>
@@ -5549,943 +5419,7 @@
                           </a:solidFill>
                           <a:latin typeface="Calibri"/>
                         </a:rPr>
-                        <a:t>04/05/2026</a:t>
-                      </a:r>
-                    </a:p>
-                  </a:txBody>
-                  <a:tcPr>
-                    <a:solidFill>
-                      <a:srgbClr val="FFFFFF"/>
-                    </a:solidFill>
-                  </a:tcPr>
-                </a:tc>
-                <a:tc>
-                  <a:txBody>
-                    <a:bodyPr/>
-                    <a:lstStyle/>
-                    <a:p>
-                      <a:pPr algn="l"/>
-                      <a:r>
-                        <a:rPr sz="1000" b="0">
-                          <a:solidFill>
-                            <a:srgbClr val="1D1B43"/>
-                          </a:solidFill>
-                          <a:latin typeface="Calibri"/>
-                        </a:rPr>
-                        <a:t>ENTREGUE FORA DO PRAZO</a:t>
-                      </a:r>
-                    </a:p>
-                  </a:txBody>
-                  <a:tcPr>
-                    <a:solidFill>
-                      <a:srgbClr val="FFFFFF"/>
-                    </a:solidFill>
-                  </a:tcPr>
-                </a:tc>
-              </a:tr>
-              <a:tr h="384048">
-                <a:tc>
-                  <a:txBody>
-                    <a:bodyPr/>
-                    <a:lstStyle/>
-                    <a:p>
-                      <a:pPr algn="l"/>
-                      <a:r>
-                        <a:rPr sz="1000" b="0">
-                          <a:solidFill>
-                            <a:srgbClr val="1D1B43"/>
-                          </a:solidFill>
-                          <a:latin typeface="Calibri"/>
-                        </a:rPr>
-                        <a:t>282353</a:t>
-                      </a:r>
-                    </a:p>
-                  </a:txBody>
-                  <a:tcPr>
-                    <a:solidFill>
-                      <a:srgbClr val="F2F2F2"/>
-                    </a:solidFill>
-                  </a:tcPr>
-                </a:tc>
-                <a:tc>
-                  <a:txBody>
-                    <a:bodyPr/>
-                    <a:lstStyle/>
-                    <a:p>
-                      <a:pPr algn="l"/>
-                      <a:r>
-                        <a:rPr sz="1000" b="0">
-                          <a:solidFill>
-                            <a:srgbClr val="1D1B43"/>
-                          </a:solidFill>
-                          <a:latin typeface="Calibri"/>
-                        </a:rPr>
-                        <a:t>NORA TRANSPORTES E L - GOIANIA / GO</a:t>
-                      </a:r>
-                    </a:p>
-                  </a:txBody>
-                  <a:tcPr>
-                    <a:solidFill>
-                      <a:srgbClr val="F2F2F2"/>
-                    </a:solidFill>
-                  </a:tcPr>
-                </a:tc>
-                <a:tc>
-                  <a:txBody>
-                    <a:bodyPr/>
-                    <a:lstStyle/>
-                    <a:p>
-                      <a:pPr algn="l"/>
-                      <a:r>
-                        <a:rPr sz="1000" b="0">
-                          <a:solidFill>
-                            <a:srgbClr val="1D1B43"/>
-                          </a:solidFill>
-                          <a:latin typeface="Calibri"/>
-                        </a:rPr>
-                        <a:t>GOIANIA/GO</a:t>
-                      </a:r>
-                    </a:p>
-                  </a:txBody>
-                  <a:tcPr>
-                    <a:solidFill>
-                      <a:srgbClr val="F2F2F2"/>
-                    </a:solidFill>
-                  </a:tcPr>
-                </a:tc>
-                <a:tc>
-                  <a:txBody>
-                    <a:bodyPr/>
-                    <a:lstStyle/>
-                    <a:p>
-                      <a:pPr algn="l"/>
-                      <a:r>
-                        <a:rPr sz="1000" b="0">
-                          <a:solidFill>
-                            <a:srgbClr val="1D1B43"/>
-                          </a:solidFill>
-                          <a:latin typeface="Calibri"/>
-                        </a:rPr>
-                        <a:t>13/05/2026</a:t>
-                      </a:r>
-                    </a:p>
-                  </a:txBody>
-                  <a:tcPr>
-                    <a:solidFill>
-                      <a:srgbClr val="F2F2F2"/>
-                    </a:solidFill>
-                  </a:tcPr>
-                </a:tc>
-                <a:tc>
-                  <a:txBody>
-                    <a:bodyPr/>
-                    <a:lstStyle/>
-                    <a:p>
-                      <a:pPr algn="l"/>
-                      <a:r>
-                        <a:rPr sz="1000" b="0">
-                          <a:solidFill>
-                            <a:srgbClr val="1D1B43"/>
-                          </a:solidFill>
-                          <a:latin typeface="Calibri"/>
-                        </a:rPr>
-                        <a:t>FORA DO PRAZO</a:t>
-                      </a:r>
-                    </a:p>
-                  </a:txBody>
-                  <a:tcPr>
-                    <a:solidFill>
-                      <a:srgbClr val="F2F2F2"/>
-                    </a:solidFill>
-                  </a:tcPr>
-                </a:tc>
-              </a:tr>
-              <a:tr h="384048">
-                <a:tc>
-                  <a:txBody>
-                    <a:bodyPr/>
-                    <a:lstStyle/>
-                    <a:p>
-                      <a:pPr algn="l"/>
-                      <a:r>
-                        <a:rPr sz="1000" b="0">
-                          <a:solidFill>
-                            <a:srgbClr val="1D1B43"/>
-                          </a:solidFill>
-                          <a:latin typeface="Calibri"/>
-                        </a:rPr>
-                        <a:t>282739</a:t>
-                      </a:r>
-                    </a:p>
-                  </a:txBody>
-                  <a:tcPr>
-                    <a:solidFill>
-                      <a:srgbClr val="FFFFFF"/>
-                    </a:solidFill>
-                  </a:tcPr>
-                </a:tc>
-                <a:tc>
-                  <a:txBody>
-                    <a:bodyPr/>
-                    <a:lstStyle/>
-                    <a:p>
-                      <a:pPr algn="l"/>
-                      <a:r>
-                        <a:rPr sz="1000" b="0">
-                          <a:solidFill>
-                            <a:srgbClr val="1D1B43"/>
-                          </a:solidFill>
-                          <a:latin typeface="Calibri"/>
-                        </a:rPr>
-                        <a:t>TACIELLY JOSEFINA DI - ITAJAI / SC</a:t>
-                      </a:r>
-                    </a:p>
-                  </a:txBody>
-                  <a:tcPr>
-                    <a:solidFill>
-                      <a:srgbClr val="FFFFFF"/>
-                    </a:solidFill>
-                  </a:tcPr>
-                </a:tc>
-                <a:tc>
-                  <a:txBody>
-                    <a:bodyPr/>
-                    <a:lstStyle/>
-                    <a:p>
-                      <a:pPr algn="l"/>
-                      <a:r>
-                        <a:rPr sz="1000" b="0">
-                          <a:solidFill>
-                            <a:srgbClr val="1D1B43"/>
-                          </a:solidFill>
-                          <a:latin typeface="Calibri"/>
-                        </a:rPr>
-                        <a:t>ITAJAI/SC</a:t>
-                      </a:r>
-                    </a:p>
-                  </a:txBody>
-                  <a:tcPr>
-                    <a:solidFill>
-                      <a:srgbClr val="FFFFFF"/>
-                    </a:solidFill>
-                  </a:tcPr>
-                </a:tc>
-                <a:tc>
-                  <a:txBody>
-                    <a:bodyPr/>
-                    <a:lstStyle/>
-                    <a:p>
-                      <a:pPr algn="l"/>
-                      <a:r>
-                        <a:rPr sz="1000" b="0">
-                          <a:solidFill>
-                            <a:srgbClr val="1D1B43"/>
-                          </a:solidFill>
-                          <a:latin typeface="Calibri"/>
-                        </a:rPr>
-                        <a:t>15/05/2026</a:t>
-                      </a:r>
-                    </a:p>
-                  </a:txBody>
-                  <a:tcPr>
-                    <a:solidFill>
-                      <a:srgbClr val="FFFFFF"/>
-                    </a:solidFill>
-                  </a:tcPr>
-                </a:tc>
-                <a:tc>
-                  <a:txBody>
-                    <a:bodyPr/>
-                    <a:lstStyle/>
-                    <a:p>
-                      <a:pPr algn="l"/>
-                      <a:r>
-                        <a:rPr sz="1000" b="0">
-                          <a:solidFill>
-                            <a:srgbClr val="1D1B43"/>
-                          </a:solidFill>
-                          <a:latin typeface="Calibri"/>
-                        </a:rPr>
-                        <a:t>FORA DO PRAZO</a:t>
-                      </a:r>
-                    </a:p>
-                  </a:txBody>
-                  <a:tcPr>
-                    <a:solidFill>
-                      <a:srgbClr val="FFFFFF"/>
-                    </a:solidFill>
-                  </a:tcPr>
-                </a:tc>
-              </a:tr>
-              <a:tr h="384048">
-                <a:tc>
-                  <a:txBody>
-                    <a:bodyPr/>
-                    <a:lstStyle/>
-                    <a:p>
-                      <a:pPr algn="l"/>
-                      <a:r>
-                        <a:rPr sz="1000" b="0">
-                          <a:solidFill>
-                            <a:srgbClr val="1D1B43"/>
-                          </a:solidFill>
-                          <a:latin typeface="Calibri"/>
-                        </a:rPr>
-                        <a:t>283026</a:t>
-                      </a:r>
-                    </a:p>
-                  </a:txBody>
-                  <a:tcPr>
-                    <a:solidFill>
-                      <a:srgbClr val="F2F2F2"/>
-                    </a:solidFill>
-                  </a:tcPr>
-                </a:tc>
-                <a:tc>
-                  <a:txBody>
-                    <a:bodyPr/>
-                    <a:lstStyle/>
-                    <a:p>
-                      <a:pPr algn="l"/>
-                      <a:r>
-                        <a:rPr sz="1000" b="0">
-                          <a:solidFill>
-                            <a:srgbClr val="1D1B43"/>
-                          </a:solidFill>
-                          <a:latin typeface="Calibri"/>
-                        </a:rPr>
-                        <a:t>BRAVO ARMAZENS GERAI - UBERABA / MG</a:t>
-                      </a:r>
-                    </a:p>
-                  </a:txBody>
-                  <a:tcPr>
-                    <a:solidFill>
-                      <a:srgbClr val="F2F2F2"/>
-                    </a:solidFill>
-                  </a:tcPr>
-                </a:tc>
-                <a:tc>
-                  <a:txBody>
-                    <a:bodyPr/>
-                    <a:lstStyle/>
-                    <a:p>
-                      <a:pPr algn="l"/>
-                      <a:r>
-                        <a:rPr sz="1000" b="0">
-                          <a:solidFill>
-                            <a:srgbClr val="1D1B43"/>
-                          </a:solidFill>
-                          <a:latin typeface="Calibri"/>
-                        </a:rPr>
-                        <a:t>UBERABA/MG</a:t>
-                      </a:r>
-                    </a:p>
-                  </a:txBody>
-                  <a:tcPr>
-                    <a:solidFill>
-                      <a:srgbClr val="F2F2F2"/>
-                    </a:solidFill>
-                  </a:tcPr>
-                </a:tc>
-                <a:tc>
-                  <a:txBody>
-                    <a:bodyPr/>
-                    <a:lstStyle/>
-                    <a:p>
-                      <a:pPr algn="l"/>
-                      <a:r>
-                        <a:rPr sz="1000" b="0">
-                          <a:solidFill>
-                            <a:srgbClr val="1D1B43"/>
-                          </a:solidFill>
-                          <a:latin typeface="Calibri"/>
-                        </a:rPr>
-                        <a:t>19/05/2026</a:t>
-                      </a:r>
-                    </a:p>
-                  </a:txBody>
-                  <a:tcPr>
-                    <a:solidFill>
-                      <a:srgbClr val="F2F2F2"/>
-                    </a:solidFill>
-                  </a:tcPr>
-                </a:tc>
-                <a:tc>
-                  <a:txBody>
-                    <a:bodyPr/>
-                    <a:lstStyle/>
-                    <a:p>
-                      <a:pPr algn="l"/>
-                      <a:r>
-                        <a:rPr sz="1000" b="0">
-                          <a:solidFill>
-                            <a:srgbClr val="1D1B43"/>
-                          </a:solidFill>
-                          <a:latin typeface="Calibri"/>
-                        </a:rPr>
-                        <a:t>FORA DO PRAZO</a:t>
-                      </a:r>
-                    </a:p>
-                  </a:txBody>
-                  <a:tcPr>
-                    <a:solidFill>
-                      <a:srgbClr val="F2F2F2"/>
-                    </a:solidFill>
-                  </a:tcPr>
-                </a:tc>
-              </a:tr>
-              <a:tr h="384048">
-                <a:tc>
-                  <a:txBody>
-                    <a:bodyPr/>
-                    <a:lstStyle/>
-                    <a:p>
-                      <a:pPr algn="l"/>
-                      <a:r>
-                        <a:rPr sz="1000" b="0">
-                          <a:solidFill>
-                            <a:srgbClr val="1D1B43"/>
-                          </a:solidFill>
-                          <a:latin typeface="Calibri"/>
-                        </a:rPr>
-                        <a:t>283355</a:t>
-                      </a:r>
-                    </a:p>
-                  </a:txBody>
-                  <a:tcPr>
-                    <a:solidFill>
-                      <a:srgbClr val="FFFFFF"/>
-                    </a:solidFill>
-                  </a:tcPr>
-                </a:tc>
-                <a:tc>
-                  <a:txBody>
-                    <a:bodyPr/>
-                    <a:lstStyle/>
-                    <a:p>
-                      <a:pPr algn="l"/>
-                      <a:r>
-                        <a:rPr sz="1000" b="0">
-                          <a:solidFill>
-                            <a:srgbClr val="1D1B43"/>
-                          </a:solidFill>
-                          <a:latin typeface="Calibri"/>
-                        </a:rPr>
-                        <a:t>BMB MATERIAL DE CONS - SAO PAULO / SP</a:t>
-                      </a:r>
-                    </a:p>
-                  </a:txBody>
-                  <a:tcPr>
-                    <a:solidFill>
-                      <a:srgbClr val="FFFFFF"/>
-                    </a:solidFill>
-                  </a:tcPr>
-                </a:tc>
-                <a:tc>
-                  <a:txBody>
-                    <a:bodyPr/>
-                    <a:lstStyle/>
-                    <a:p>
-                      <a:pPr algn="l"/>
-                      <a:r>
-                        <a:rPr sz="1000" b="0">
-                          <a:solidFill>
-                            <a:srgbClr val="1D1B43"/>
-                          </a:solidFill>
-                          <a:latin typeface="Calibri"/>
-                        </a:rPr>
-                        <a:t>SAO PAULO/SP</a:t>
-                      </a:r>
-                    </a:p>
-                  </a:txBody>
-                  <a:tcPr>
-                    <a:solidFill>
-                      <a:srgbClr val="FFFFFF"/>
-                    </a:solidFill>
-                  </a:tcPr>
-                </a:tc>
-                <a:tc>
-                  <a:txBody>
-                    <a:bodyPr/>
-                    <a:lstStyle/>
-                    <a:p>
-                      <a:pPr algn="l"/>
-                      <a:r>
-                        <a:rPr sz="1000" b="0">
-                          <a:solidFill>
-                            <a:srgbClr val="1D1B43"/>
-                          </a:solidFill>
-                          <a:latin typeface="Calibri"/>
-                        </a:rPr>
-                        <a:t>19/05/2026</a:t>
-                      </a:r>
-                    </a:p>
-                  </a:txBody>
-                  <a:tcPr>
-                    <a:solidFill>
-                      <a:srgbClr val="FFFFFF"/>
-                    </a:solidFill>
-                  </a:tcPr>
-                </a:tc>
-                <a:tc>
-                  <a:txBody>
-                    <a:bodyPr/>
-                    <a:lstStyle/>
-                    <a:p>
-                      <a:pPr algn="l"/>
-                      <a:r>
-                        <a:rPr sz="1000" b="0">
-                          <a:solidFill>
-                            <a:srgbClr val="1D1B43"/>
-                          </a:solidFill>
-                          <a:latin typeface="Calibri"/>
-                        </a:rPr>
-                        <a:t>FORA DO PRAZO</a:t>
-                      </a:r>
-                    </a:p>
-                  </a:txBody>
-                  <a:tcPr>
-                    <a:solidFill>
-                      <a:srgbClr val="FFFFFF"/>
-                    </a:solidFill>
-                  </a:tcPr>
-                </a:tc>
-              </a:tr>
-              <a:tr h="384048">
-                <a:tc>
-                  <a:txBody>
-                    <a:bodyPr/>
-                    <a:lstStyle/>
-                    <a:p>
-                      <a:pPr algn="l"/>
-                      <a:r>
-                        <a:rPr sz="1000" b="0">
-                          <a:solidFill>
-                            <a:srgbClr val="1D1B43"/>
-                          </a:solidFill>
-                          <a:latin typeface="Calibri"/>
-                        </a:rPr>
-                        <a:t>283375</a:t>
-                      </a:r>
-                    </a:p>
-                  </a:txBody>
-                  <a:tcPr>
-                    <a:solidFill>
-                      <a:srgbClr val="F2F2F2"/>
-                    </a:solidFill>
-                  </a:tcPr>
-                </a:tc>
-                <a:tc>
-                  <a:txBody>
-                    <a:bodyPr/>
-                    <a:lstStyle/>
-                    <a:p>
-                      <a:pPr algn="l"/>
-                      <a:r>
-                        <a:rPr sz="1000" b="0">
-                          <a:solidFill>
-                            <a:srgbClr val="1D1B43"/>
-                          </a:solidFill>
-                          <a:latin typeface="Calibri"/>
-                        </a:rPr>
-                        <a:t>SAMSONITE BRASIL LTD - SAO PAULO / SP</a:t>
-                      </a:r>
-                    </a:p>
-                  </a:txBody>
-                  <a:tcPr>
-                    <a:solidFill>
-                      <a:srgbClr val="F2F2F2"/>
-                    </a:solidFill>
-                  </a:tcPr>
-                </a:tc>
-                <a:tc>
-                  <a:txBody>
-                    <a:bodyPr/>
-                    <a:lstStyle/>
-                    <a:p>
-                      <a:pPr algn="l"/>
-                      <a:r>
-                        <a:rPr sz="1000" b="0">
-                          <a:solidFill>
-                            <a:srgbClr val="1D1B43"/>
-                          </a:solidFill>
-                          <a:latin typeface="Calibri"/>
-                        </a:rPr>
-                        <a:t>SAO PAULO/SP</a:t>
-                      </a:r>
-                    </a:p>
-                  </a:txBody>
-                  <a:tcPr>
-                    <a:solidFill>
-                      <a:srgbClr val="F2F2F2"/>
-                    </a:solidFill>
-                  </a:tcPr>
-                </a:tc>
-                <a:tc>
-                  <a:txBody>
-                    <a:bodyPr/>
-                    <a:lstStyle/>
-                    <a:p>
-                      <a:pPr algn="l"/>
-                      <a:r>
-                        <a:rPr sz="1000" b="0">
-                          <a:solidFill>
-                            <a:srgbClr val="1D1B43"/>
-                          </a:solidFill>
-                          <a:latin typeface="Calibri"/>
-                        </a:rPr>
-                        <a:t>19/05/2026</a:t>
-                      </a:r>
-                    </a:p>
-                  </a:txBody>
-                  <a:tcPr>
-                    <a:solidFill>
-                      <a:srgbClr val="F2F2F2"/>
-                    </a:solidFill>
-                  </a:tcPr>
-                </a:tc>
-                <a:tc>
-                  <a:txBody>
-                    <a:bodyPr/>
-                    <a:lstStyle/>
-                    <a:p>
-                      <a:pPr algn="l"/>
-                      <a:r>
-                        <a:rPr sz="1000" b="0">
-                          <a:solidFill>
-                            <a:srgbClr val="1D1B43"/>
-                          </a:solidFill>
-                          <a:latin typeface="Calibri"/>
-                        </a:rPr>
-                        <a:t>FORA DO PRAZO</a:t>
-                      </a:r>
-                    </a:p>
-                  </a:txBody>
-                  <a:tcPr>
-                    <a:solidFill>
-                      <a:srgbClr val="F2F2F2"/>
-                    </a:solidFill>
-                  </a:tcPr>
-                </a:tc>
-              </a:tr>
-              <a:tr h="384048">
-                <a:tc>
-                  <a:txBody>
-                    <a:bodyPr/>
-                    <a:lstStyle/>
-                    <a:p>
-                      <a:pPr algn="l"/>
-                      <a:r>
-                        <a:rPr sz="1000" b="0">
-                          <a:solidFill>
-                            <a:srgbClr val="1D1B43"/>
-                          </a:solidFill>
-                          <a:latin typeface="Calibri"/>
-                        </a:rPr>
-                        <a:t>283376</a:t>
-                      </a:r>
-                    </a:p>
-                  </a:txBody>
-                  <a:tcPr>
-                    <a:solidFill>
-                      <a:srgbClr val="FFFFFF"/>
-                    </a:solidFill>
-                  </a:tcPr>
-                </a:tc>
-                <a:tc>
-                  <a:txBody>
-                    <a:bodyPr/>
-                    <a:lstStyle/>
-                    <a:p>
-                      <a:pPr algn="l"/>
-                      <a:r>
-                        <a:rPr sz="1000" b="0">
-                          <a:solidFill>
-                            <a:srgbClr val="1D1B43"/>
-                          </a:solidFill>
-                          <a:latin typeface="Calibri"/>
-                        </a:rPr>
-                        <a:t>YANKE COMERCIO ELETR - RIO CLARO / SP</a:t>
-                      </a:r>
-                    </a:p>
-                  </a:txBody>
-                  <a:tcPr>
-                    <a:solidFill>
-                      <a:srgbClr val="FFFFFF"/>
-                    </a:solidFill>
-                  </a:tcPr>
-                </a:tc>
-                <a:tc>
-                  <a:txBody>
-                    <a:bodyPr/>
-                    <a:lstStyle/>
-                    <a:p>
-                      <a:pPr algn="l"/>
-                      <a:r>
-                        <a:rPr sz="1000" b="0">
-                          <a:solidFill>
-                            <a:srgbClr val="1D1B43"/>
-                          </a:solidFill>
-                          <a:latin typeface="Calibri"/>
-                        </a:rPr>
-                        <a:t>RIO CLARO/SP</a:t>
-                      </a:r>
-                    </a:p>
-                  </a:txBody>
-                  <a:tcPr>
-                    <a:solidFill>
-                      <a:srgbClr val="FFFFFF"/>
-                    </a:solidFill>
-                  </a:tcPr>
-                </a:tc>
-                <a:tc>
-                  <a:txBody>
-                    <a:bodyPr/>
-                    <a:lstStyle/>
-                    <a:p>
-                      <a:pPr algn="l"/>
-                      <a:r>
-                        <a:rPr sz="1000" b="0">
-                          <a:solidFill>
-                            <a:srgbClr val="1D1B43"/>
-                          </a:solidFill>
-                          <a:latin typeface="Calibri"/>
-                        </a:rPr>
-                        <a:t>14/05/2026</a:t>
-                      </a:r>
-                    </a:p>
-                  </a:txBody>
-                  <a:tcPr>
-                    <a:solidFill>
-                      <a:srgbClr val="FFFFFF"/>
-                    </a:solidFill>
-                  </a:tcPr>
-                </a:tc>
-                <a:tc>
-                  <a:txBody>
-                    <a:bodyPr/>
-                    <a:lstStyle/>
-                    <a:p>
-                      <a:pPr algn="l"/>
-                      <a:r>
-                        <a:rPr sz="1000" b="0">
-                          <a:solidFill>
-                            <a:srgbClr val="1D1B43"/>
-                          </a:solidFill>
-                          <a:latin typeface="Calibri"/>
-                        </a:rPr>
-                        <a:t>ENTREGUE FORA DO PRAZO</a:t>
-                      </a:r>
-                    </a:p>
-                  </a:txBody>
-                  <a:tcPr>
-                    <a:solidFill>
-                      <a:srgbClr val="FFFFFF"/>
-                    </a:solidFill>
-                  </a:tcPr>
-                </a:tc>
-              </a:tr>
-              <a:tr h="384048">
-                <a:tc>
-                  <a:txBody>
-                    <a:bodyPr/>
-                    <a:lstStyle/>
-                    <a:p>
-                      <a:pPr algn="l"/>
-                      <a:r>
-                        <a:rPr sz="1000" b="0">
-                          <a:solidFill>
-                            <a:srgbClr val="1D1B43"/>
-                          </a:solidFill>
-                          <a:latin typeface="Calibri"/>
-                        </a:rPr>
-                        <a:t>283377</a:t>
-                      </a:r>
-                    </a:p>
-                  </a:txBody>
-                  <a:tcPr>
-                    <a:solidFill>
-                      <a:srgbClr val="F2F2F2"/>
-                    </a:solidFill>
-                  </a:tcPr>
-                </a:tc>
-                <a:tc>
-                  <a:txBody>
-                    <a:bodyPr/>
-                    <a:lstStyle/>
-                    <a:p>
-                      <a:pPr algn="l"/>
-                      <a:r>
-                        <a:rPr sz="1000" b="0">
-                          <a:solidFill>
-                            <a:srgbClr val="1D1B43"/>
-                          </a:solidFill>
-                          <a:latin typeface="Calibri"/>
-                        </a:rPr>
-                        <a:t>YANKE COMERCIO ELETR - RIO CLARO / SP</a:t>
-                      </a:r>
-                    </a:p>
-                  </a:txBody>
-                  <a:tcPr>
-                    <a:solidFill>
-                      <a:srgbClr val="F2F2F2"/>
-                    </a:solidFill>
-                  </a:tcPr>
-                </a:tc>
-                <a:tc>
-                  <a:txBody>
-                    <a:bodyPr/>
-                    <a:lstStyle/>
-                    <a:p>
-                      <a:pPr algn="l"/>
-                      <a:r>
-                        <a:rPr sz="1000" b="0">
-                          <a:solidFill>
-                            <a:srgbClr val="1D1B43"/>
-                          </a:solidFill>
-                          <a:latin typeface="Calibri"/>
-                        </a:rPr>
-                        <a:t>RIO CLARO/SP</a:t>
-                      </a:r>
-                    </a:p>
-                  </a:txBody>
-                  <a:tcPr>
-                    <a:solidFill>
-                      <a:srgbClr val="F2F2F2"/>
-                    </a:solidFill>
-                  </a:tcPr>
-                </a:tc>
-                <a:tc>
-                  <a:txBody>
-                    <a:bodyPr/>
-                    <a:lstStyle/>
-                    <a:p>
-                      <a:pPr algn="l"/>
-                      <a:r>
-                        <a:rPr sz="1000" b="0">
-                          <a:solidFill>
-                            <a:srgbClr val="1D1B43"/>
-                          </a:solidFill>
-                          <a:latin typeface="Calibri"/>
-                        </a:rPr>
-                        <a:t>14/05/2026</a:t>
-                      </a:r>
-                    </a:p>
-                  </a:txBody>
-                  <a:tcPr>
-                    <a:solidFill>
-                      <a:srgbClr val="F2F2F2"/>
-                    </a:solidFill>
-                  </a:tcPr>
-                </a:tc>
-                <a:tc>
-                  <a:txBody>
-                    <a:bodyPr/>
-                    <a:lstStyle/>
-                    <a:p>
-                      <a:pPr algn="l"/>
-                      <a:r>
-                        <a:rPr sz="1000" b="0">
-                          <a:solidFill>
-                            <a:srgbClr val="1D1B43"/>
-                          </a:solidFill>
-                          <a:latin typeface="Calibri"/>
-                        </a:rPr>
-                        <a:t>FORA DO PRAZO</a:t>
-                      </a:r>
-                    </a:p>
-                  </a:txBody>
-                  <a:tcPr>
-                    <a:solidFill>
-                      <a:srgbClr val="F2F2F2"/>
-                    </a:solidFill>
-                  </a:tcPr>
-                </a:tc>
-              </a:tr>
-              <a:tr h="384048">
-                <a:tc>
-                  <a:txBody>
-                    <a:bodyPr/>
-                    <a:lstStyle/>
-                    <a:p>
-                      <a:pPr algn="l"/>
-                      <a:r>
-                        <a:rPr sz="1000" b="0">
-                          <a:solidFill>
-                            <a:srgbClr val="1D1B43"/>
-                          </a:solidFill>
-                          <a:latin typeface="Calibri"/>
-                        </a:rPr>
-                        <a:t>283379</a:t>
-                      </a:r>
-                    </a:p>
-                  </a:txBody>
-                  <a:tcPr>
-                    <a:solidFill>
-                      <a:srgbClr val="FFFFFF"/>
-                    </a:solidFill>
-                  </a:tcPr>
-                </a:tc>
-                <a:tc>
-                  <a:txBody>
-                    <a:bodyPr/>
-                    <a:lstStyle/>
-                    <a:p>
-                      <a:pPr algn="l"/>
-                      <a:r>
-                        <a:rPr sz="1000" b="0">
-                          <a:solidFill>
-                            <a:srgbClr val="1D1B43"/>
-                          </a:solidFill>
-                          <a:latin typeface="Calibri"/>
-                        </a:rPr>
-                        <a:t>YANKE COMERCIO ELETR - RIO CLARO / SP</a:t>
-                      </a:r>
-                    </a:p>
-                  </a:txBody>
-                  <a:tcPr>
-                    <a:solidFill>
-                      <a:srgbClr val="FFFFFF"/>
-                    </a:solidFill>
-                  </a:tcPr>
-                </a:tc>
-                <a:tc>
-                  <a:txBody>
-                    <a:bodyPr/>
-                    <a:lstStyle/>
-                    <a:p>
-                      <a:pPr algn="l"/>
-                      <a:r>
-                        <a:rPr sz="1000" b="0">
-                          <a:solidFill>
-                            <a:srgbClr val="1D1B43"/>
-                          </a:solidFill>
-                          <a:latin typeface="Calibri"/>
-                        </a:rPr>
-                        <a:t>RIO CLARO/SP</a:t>
-                      </a:r>
-                    </a:p>
-                  </a:txBody>
-                  <a:tcPr>
-                    <a:solidFill>
-                      <a:srgbClr val="FFFFFF"/>
-                    </a:solidFill>
-                  </a:tcPr>
-                </a:tc>
-                <a:tc>
-                  <a:txBody>
-                    <a:bodyPr/>
-                    <a:lstStyle/>
-                    <a:p>
-                      <a:pPr algn="l"/>
-                      <a:r>
-                        <a:rPr sz="1000" b="0">
-                          <a:solidFill>
-                            <a:srgbClr val="1D1B43"/>
-                          </a:solidFill>
-                          <a:latin typeface="Calibri"/>
-                        </a:rPr>
-                        <a:t>14/05/2026</a:t>
+                        <a:t>16/04/2026</a:t>
                       </a:r>
                     </a:p>
                   </a:txBody>
@@ -6661,7 +5595,7 @@
         </p:nvGraphicFramePr>
         <p:xfrm>
           <a:off x="731520" y="1920240"/>
-          <a:ext cx="10698480" cy="4114800"/>
+          <a:ext cx="10698480" cy="4389120"/>
         </p:xfrm>
         <a:graphic>
           <a:graphicData uri="http://schemas.openxmlformats.org/drawingml/2006/table">
@@ -6677,7 +5611,7 @@
                 <a:gridCol w="1554480"/>
                 <a:gridCol w="3108960"/>
               </a:tblGrid>
-              <a:tr h="457200">
+              <a:tr h="438912">
                 <a:tc>
                   <a:txBody>
                     <a:bodyPr/>
@@ -6817,7 +5751,147 @@
                   </a:tcPr>
                 </a:tc>
               </a:tr>
-              <a:tr h="457200">
+              <a:tr h="438912">
+                <a:tc>
+                  <a:txBody>
+                    <a:bodyPr/>
+                    <a:lstStyle/>
+                    <a:p>
+                      <a:pPr algn="l"/>
+                      <a:r>
+                        <a:rPr sz="1000" b="0">
+                          <a:solidFill>
+                            <a:srgbClr val="1D1B43"/>
+                          </a:solidFill>
+                          <a:latin typeface="Calibri"/>
+                        </a:rPr>
+                        <a:t>SC</a:t>
+                      </a:r>
+                    </a:p>
+                  </a:txBody>
+                  <a:tcPr>
+                    <a:solidFill>
+                      <a:srgbClr val="FFFFFF"/>
+                    </a:solidFill>
+                  </a:tcPr>
+                </a:tc>
+                <a:tc>
+                  <a:txBody>
+                    <a:bodyPr/>
+                    <a:lstStyle/>
+                    <a:p>
+                      <a:pPr algn="l"/>
+                      <a:r>
+                        <a:rPr sz="1000" b="0">
+                          <a:solidFill>
+                            <a:srgbClr val="1D1B43"/>
+                          </a:solidFill>
+                          <a:latin typeface="Calibri"/>
+                        </a:rPr>
+                        <a:t>16</a:t>
+                      </a:r>
+                    </a:p>
+                  </a:txBody>
+                  <a:tcPr>
+                    <a:solidFill>
+                      <a:srgbClr val="FFFFFF"/>
+                    </a:solidFill>
+                  </a:tcPr>
+                </a:tc>
+                <a:tc>
+                  <a:txBody>
+                    <a:bodyPr/>
+                    <a:lstStyle/>
+                    <a:p>
+                      <a:pPr algn="l"/>
+                      <a:r>
+                        <a:rPr sz="1000" b="0">
+                          <a:solidFill>
+                            <a:srgbClr val="1D1B43"/>
+                          </a:solidFill>
+                          <a:latin typeface="Calibri"/>
+                        </a:rPr>
+                        <a:t>16</a:t>
+                      </a:r>
+                    </a:p>
+                  </a:txBody>
+                  <a:tcPr>
+                    <a:solidFill>
+                      <a:srgbClr val="FFFFFF"/>
+                    </a:solidFill>
+                  </a:tcPr>
+                </a:tc>
+                <a:tc>
+                  <a:txBody>
+                    <a:bodyPr/>
+                    <a:lstStyle/>
+                    <a:p>
+                      <a:pPr algn="l"/>
+                      <a:r>
+                        <a:rPr sz="1000" b="0">
+                          <a:solidFill>
+                            <a:srgbClr val="1D1B43"/>
+                          </a:solidFill>
+                          <a:latin typeface="Calibri"/>
+                        </a:rPr>
+                        <a:t>0</a:t>
+                      </a:r>
+                    </a:p>
+                  </a:txBody>
+                  <a:tcPr>
+                    <a:solidFill>
+                      <a:srgbClr val="FFFFFF"/>
+                    </a:solidFill>
+                  </a:tcPr>
+                </a:tc>
+                <a:tc>
+                  <a:txBody>
+                    <a:bodyPr/>
+                    <a:lstStyle/>
+                    <a:p>
+                      <a:pPr algn="l"/>
+                      <a:r>
+                        <a:rPr sz="1000" b="0">
+                          <a:solidFill>
+                            <a:srgbClr val="1D1B43"/>
+                          </a:solidFill>
+                          <a:latin typeface="Calibri"/>
+                        </a:rPr>
+                        <a:t>100.0%</a:t>
+                      </a:r>
+                    </a:p>
+                  </a:txBody>
+                  <a:tcPr>
+                    <a:solidFill>
+                      <a:srgbClr val="FFFFFF"/>
+                    </a:solidFill>
+                  </a:tcPr>
+                </a:tc>
+                <a:tc>
+                  <a:txBody>
+                    <a:bodyPr/>
+                    <a:lstStyle/>
+                    <a:p>
+                      <a:pPr algn="l"/>
+                      <a:r>
+                        <a:rPr sz="1000" b="0">
+                          <a:solidFill>
+                            <a:srgbClr val="1D1B43"/>
+                          </a:solidFill>
+                          <a:latin typeface="Calibri"/>
+                        </a:rPr>
+                        <a:t>Excelente</a:t>
+                      </a:r>
+                    </a:p>
+                  </a:txBody>
+                  <a:tcPr>
+                    <a:solidFill>
+                      <a:srgbClr val="FFFFFF"/>
+                    </a:solidFill>
+                  </a:tcPr>
+                </a:tc>
+              </a:tr>
+              <a:tr h="438912">
                 <a:tc>
                   <a:txBody>
                     <a:bodyPr/>
@@ -6837,6 +5911,146 @@
                   </a:txBody>
                   <a:tcPr>
                     <a:solidFill>
+                      <a:srgbClr val="F2F2F2"/>
+                    </a:solidFill>
+                  </a:tcPr>
+                </a:tc>
+                <a:tc>
+                  <a:txBody>
+                    <a:bodyPr/>
+                    <a:lstStyle/>
+                    <a:p>
+                      <a:pPr algn="l"/>
+                      <a:r>
+                        <a:rPr sz="1000" b="0">
+                          <a:solidFill>
+                            <a:srgbClr val="1D1B43"/>
+                          </a:solidFill>
+                          <a:latin typeface="Calibri"/>
+                        </a:rPr>
+                        <a:t>7</a:t>
+                      </a:r>
+                    </a:p>
+                  </a:txBody>
+                  <a:tcPr>
+                    <a:solidFill>
+                      <a:srgbClr val="F2F2F2"/>
+                    </a:solidFill>
+                  </a:tcPr>
+                </a:tc>
+                <a:tc>
+                  <a:txBody>
+                    <a:bodyPr/>
+                    <a:lstStyle/>
+                    <a:p>
+                      <a:pPr algn="l"/>
+                      <a:r>
+                        <a:rPr sz="1000" b="0">
+                          <a:solidFill>
+                            <a:srgbClr val="1D1B43"/>
+                          </a:solidFill>
+                          <a:latin typeface="Calibri"/>
+                        </a:rPr>
+                        <a:t>7</a:t>
+                      </a:r>
+                    </a:p>
+                  </a:txBody>
+                  <a:tcPr>
+                    <a:solidFill>
+                      <a:srgbClr val="F2F2F2"/>
+                    </a:solidFill>
+                  </a:tcPr>
+                </a:tc>
+                <a:tc>
+                  <a:txBody>
+                    <a:bodyPr/>
+                    <a:lstStyle/>
+                    <a:p>
+                      <a:pPr algn="l"/>
+                      <a:r>
+                        <a:rPr sz="1000" b="0">
+                          <a:solidFill>
+                            <a:srgbClr val="1D1B43"/>
+                          </a:solidFill>
+                          <a:latin typeface="Calibri"/>
+                        </a:rPr>
+                        <a:t>0</a:t>
+                      </a:r>
+                    </a:p>
+                  </a:txBody>
+                  <a:tcPr>
+                    <a:solidFill>
+                      <a:srgbClr val="F2F2F2"/>
+                    </a:solidFill>
+                  </a:tcPr>
+                </a:tc>
+                <a:tc>
+                  <a:txBody>
+                    <a:bodyPr/>
+                    <a:lstStyle/>
+                    <a:p>
+                      <a:pPr algn="l"/>
+                      <a:r>
+                        <a:rPr sz="1000" b="0">
+                          <a:solidFill>
+                            <a:srgbClr val="1D1B43"/>
+                          </a:solidFill>
+                          <a:latin typeface="Calibri"/>
+                        </a:rPr>
+                        <a:t>100.0%</a:t>
+                      </a:r>
+                    </a:p>
+                  </a:txBody>
+                  <a:tcPr>
+                    <a:solidFill>
+                      <a:srgbClr val="F2F2F2"/>
+                    </a:solidFill>
+                  </a:tcPr>
+                </a:tc>
+                <a:tc>
+                  <a:txBody>
+                    <a:bodyPr/>
+                    <a:lstStyle/>
+                    <a:p>
+                      <a:pPr algn="l"/>
+                      <a:r>
+                        <a:rPr sz="1000" b="0">
+                          <a:solidFill>
+                            <a:srgbClr val="1D1B43"/>
+                          </a:solidFill>
+                          <a:latin typeface="Calibri"/>
+                        </a:rPr>
+                        <a:t>Excelente</a:t>
+                      </a:r>
+                    </a:p>
+                  </a:txBody>
+                  <a:tcPr>
+                    <a:solidFill>
+                      <a:srgbClr val="F2F2F2"/>
+                    </a:solidFill>
+                  </a:tcPr>
+                </a:tc>
+              </a:tr>
+              <a:tr h="438912">
+                <a:tc>
+                  <a:txBody>
+                    <a:bodyPr/>
+                    <a:lstStyle/>
+                    <a:p>
+                      <a:pPr algn="l"/>
+                      <a:r>
+                        <a:rPr sz="1000" b="0">
+                          <a:solidFill>
+                            <a:srgbClr val="1D1B43"/>
+                          </a:solidFill>
+                          <a:latin typeface="Calibri"/>
+                        </a:rPr>
+                        <a:t>PR</a:t>
+                      </a:r>
+                    </a:p>
+                  </a:txBody>
+                  <a:tcPr>
+                    <a:solidFill>
                       <a:srgbClr val="FFFFFF"/>
                     </a:solidFill>
                   </a:tcPr>
@@ -6854,7 +6068,7 @@
                           </a:solidFill>
                           <a:latin typeface="Calibri"/>
                         </a:rPr>
-                        <a:t>95</a:t>
+                        <a:t>4</a:t>
                       </a:r>
                     </a:p>
                   </a:txBody>
@@ -6877,7 +6091,7 @@
                           </a:solidFill>
                           <a:latin typeface="Calibri"/>
                         </a:rPr>
-                        <a:t>90</a:t>
+                        <a:t>4</a:t>
                       </a:r>
                     </a:p>
                   </a:txBody>
@@ -6900,7 +6114,7 @@
                           </a:solidFill>
                           <a:latin typeface="Calibri"/>
                         </a:rPr>
-                        <a:t>5</a:t>
+                        <a:t>0</a:t>
                       </a:r>
                     </a:p>
                   </a:txBody>
@@ -6923,7 +6137,7 @@
                           </a:solidFill>
                           <a:latin typeface="Calibri"/>
                         </a:rPr>
-                        <a:t>94.7%</a:t>
+                        <a:t>100.0%</a:t>
                       </a:r>
                     </a:p>
                   </a:txBody>
@@ -6946,7 +6160,7 @@
                           </a:solidFill>
                           <a:latin typeface="Calibri"/>
                         </a:rPr>
-                        <a:t>Regular</a:t>
+                        <a:t>Excelente</a:t>
                       </a:r>
                     </a:p>
                   </a:txBody>
@@ -6957,21 +6171,21 @@
                   </a:tcPr>
                 </a:tc>
               </a:tr>
-              <a:tr h="457200">
-                <a:tc>
-                  <a:txBody>
-                    <a:bodyPr/>
-                    <a:lstStyle/>
-                    <a:p>
-                      <a:pPr algn="l"/>
-                      <a:r>
-                        <a:rPr sz="1000" b="0">
-                          <a:solidFill>
-                            <a:srgbClr val="1D1B43"/>
-                          </a:solidFill>
-                          <a:latin typeface="Calibri"/>
-                        </a:rPr>
-                        <a:t>SC</a:t>
+              <a:tr h="438912">
+                <a:tc>
+                  <a:txBody>
+                    <a:bodyPr/>
+                    <a:lstStyle/>
+                    <a:p>
+                      <a:pPr algn="l"/>
+                      <a:r>
+                        <a:rPr sz="1000" b="0">
+                          <a:solidFill>
+                            <a:srgbClr val="1D1B43"/>
+                          </a:solidFill>
+                          <a:latin typeface="Calibri"/>
+                        </a:rPr>
+                        <a:t>RJ</a:t>
                       </a:r>
                     </a:p>
                   </a:txBody>
@@ -6994,7 +6208,7 @@
                           </a:solidFill>
                           <a:latin typeface="Calibri"/>
                         </a:rPr>
-                        <a:t>13</a:t>
+                        <a:t>4</a:t>
                       </a:r>
                     </a:p>
                   </a:txBody>
@@ -7017,7 +6231,7 @@
                           </a:solidFill>
                           <a:latin typeface="Calibri"/>
                         </a:rPr>
-                        <a:t>12</a:t>
+                        <a:t>3</a:t>
                       </a:r>
                     </a:p>
                   </a:txBody>
@@ -7063,7 +6277,7 @@
                           </a:solidFill>
                           <a:latin typeface="Calibri"/>
                         </a:rPr>
-                        <a:t>92.3%</a:t>
+                        <a:t>75.0%</a:t>
                       </a:r>
                     </a:p>
                   </a:txBody>
@@ -7086,7 +6300,7 @@
                           </a:solidFill>
                           <a:latin typeface="Calibri"/>
                         </a:rPr>
-                        <a:t>Regular</a:t>
+                        <a:t>Atencao</a:t>
                       </a:r>
                     </a:p>
                   </a:txBody>
@@ -7097,7 +6311,7 @@
                   </a:tcPr>
                 </a:tc>
               </a:tr>
-              <a:tr h="457200">
+              <a:tr h="438912">
                 <a:tc>
                   <a:txBody>
                     <a:bodyPr/>
@@ -7134,7 +6348,7 @@
                           </a:solidFill>
                           <a:latin typeface="Calibri"/>
                         </a:rPr>
-                        <a:t>3</a:t>
+                        <a:t>2</a:t>
                       </a:r>
                     </a:p>
                   </a:txBody>
@@ -7180,6 +6394,520 @@
                           </a:solidFill>
                           <a:latin typeface="Calibri"/>
                         </a:rPr>
+                        <a:t>0</a:t>
+                      </a:r>
+                    </a:p>
+                  </a:txBody>
+                  <a:tcPr>
+                    <a:solidFill>
+                      <a:srgbClr val="FFFFFF"/>
+                    </a:solidFill>
+                  </a:tcPr>
+                </a:tc>
+                <a:tc>
+                  <a:txBody>
+                    <a:bodyPr/>
+                    <a:lstStyle/>
+                    <a:p>
+                      <a:pPr algn="l"/>
+                      <a:r>
+                        <a:rPr sz="1000" b="0">
+                          <a:solidFill>
+                            <a:srgbClr val="1D1B43"/>
+                          </a:solidFill>
+                          <a:latin typeface="Calibri"/>
+                        </a:rPr>
+                        <a:t>100.0%</a:t>
+                      </a:r>
+                    </a:p>
+                  </a:txBody>
+                  <a:tcPr>
+                    <a:solidFill>
+                      <a:srgbClr val="FFFFFF"/>
+                    </a:solidFill>
+                  </a:tcPr>
+                </a:tc>
+                <a:tc>
+                  <a:txBody>
+                    <a:bodyPr/>
+                    <a:lstStyle/>
+                    <a:p>
+                      <a:pPr algn="l"/>
+                      <a:r>
+                        <a:rPr sz="1000" b="0">
+                          <a:solidFill>
+                            <a:srgbClr val="1D1B43"/>
+                          </a:solidFill>
+                          <a:latin typeface="Calibri"/>
+                        </a:rPr>
+                        <a:t>Excelente</a:t>
+                      </a:r>
+                    </a:p>
+                  </a:txBody>
+                  <a:tcPr>
+                    <a:solidFill>
+                      <a:srgbClr val="FFFFFF"/>
+                    </a:solidFill>
+                  </a:tcPr>
+                </a:tc>
+              </a:tr>
+              <a:tr h="438912">
+                <a:tc>
+                  <a:txBody>
+                    <a:bodyPr/>
+                    <a:lstStyle/>
+                    <a:p>
+                      <a:pPr algn="l"/>
+                      <a:r>
+                        <a:rPr sz="1000" b="0">
+                          <a:solidFill>
+                            <a:srgbClr val="1D1B43"/>
+                          </a:solidFill>
+                          <a:latin typeface="Calibri"/>
+                        </a:rPr>
+                        <a:t>MG</a:t>
+                      </a:r>
+                    </a:p>
+                  </a:txBody>
+                  <a:tcPr>
+                    <a:solidFill>
+                      <a:srgbClr val="F2F2F2"/>
+                    </a:solidFill>
+                  </a:tcPr>
+                </a:tc>
+                <a:tc>
+                  <a:txBody>
+                    <a:bodyPr/>
+                    <a:lstStyle/>
+                    <a:p>
+                      <a:pPr algn="l"/>
+                      <a:r>
+                        <a:rPr sz="1000" b="0">
+                          <a:solidFill>
+                            <a:srgbClr val="1D1B43"/>
+                          </a:solidFill>
+                          <a:latin typeface="Calibri"/>
+                        </a:rPr>
+                        <a:t>2</a:t>
+                      </a:r>
+                    </a:p>
+                  </a:txBody>
+                  <a:tcPr>
+                    <a:solidFill>
+                      <a:srgbClr val="F2F2F2"/>
+                    </a:solidFill>
+                  </a:tcPr>
+                </a:tc>
+                <a:tc>
+                  <a:txBody>
+                    <a:bodyPr/>
+                    <a:lstStyle/>
+                    <a:p>
+                      <a:pPr algn="l"/>
+                      <a:r>
+                        <a:rPr sz="1000" b="0">
+                          <a:solidFill>
+                            <a:srgbClr val="1D1B43"/>
+                          </a:solidFill>
+                          <a:latin typeface="Calibri"/>
+                        </a:rPr>
+                        <a:t>2</a:t>
+                      </a:r>
+                    </a:p>
+                  </a:txBody>
+                  <a:tcPr>
+                    <a:solidFill>
+                      <a:srgbClr val="F2F2F2"/>
+                    </a:solidFill>
+                  </a:tcPr>
+                </a:tc>
+                <a:tc>
+                  <a:txBody>
+                    <a:bodyPr/>
+                    <a:lstStyle/>
+                    <a:p>
+                      <a:pPr algn="l"/>
+                      <a:r>
+                        <a:rPr sz="1000" b="0">
+                          <a:solidFill>
+                            <a:srgbClr val="1D1B43"/>
+                          </a:solidFill>
+                          <a:latin typeface="Calibri"/>
+                        </a:rPr>
+                        <a:t>0</a:t>
+                      </a:r>
+                    </a:p>
+                  </a:txBody>
+                  <a:tcPr>
+                    <a:solidFill>
+                      <a:srgbClr val="F2F2F2"/>
+                    </a:solidFill>
+                  </a:tcPr>
+                </a:tc>
+                <a:tc>
+                  <a:txBody>
+                    <a:bodyPr/>
+                    <a:lstStyle/>
+                    <a:p>
+                      <a:pPr algn="l"/>
+                      <a:r>
+                        <a:rPr sz="1000" b="0">
+                          <a:solidFill>
+                            <a:srgbClr val="1D1B43"/>
+                          </a:solidFill>
+                          <a:latin typeface="Calibri"/>
+                        </a:rPr>
+                        <a:t>100.0%</a:t>
+                      </a:r>
+                    </a:p>
+                  </a:txBody>
+                  <a:tcPr>
+                    <a:solidFill>
+                      <a:srgbClr val="F2F2F2"/>
+                    </a:solidFill>
+                  </a:tcPr>
+                </a:tc>
+                <a:tc>
+                  <a:txBody>
+                    <a:bodyPr/>
+                    <a:lstStyle/>
+                    <a:p>
+                      <a:pPr algn="l"/>
+                      <a:r>
+                        <a:rPr sz="1000" b="0">
+                          <a:solidFill>
+                            <a:srgbClr val="1D1B43"/>
+                          </a:solidFill>
+                          <a:latin typeface="Calibri"/>
+                        </a:rPr>
+                        <a:t>Excelente</a:t>
+                      </a:r>
+                    </a:p>
+                  </a:txBody>
+                  <a:tcPr>
+                    <a:solidFill>
+                      <a:srgbClr val="F2F2F2"/>
+                    </a:solidFill>
+                  </a:tcPr>
+                </a:tc>
+              </a:tr>
+              <a:tr h="438912">
+                <a:tc>
+                  <a:txBody>
+                    <a:bodyPr/>
+                    <a:lstStyle/>
+                    <a:p>
+                      <a:pPr algn="l"/>
+                      <a:r>
+                        <a:rPr sz="1000" b="0">
+                          <a:solidFill>
+                            <a:srgbClr val="1D1B43"/>
+                          </a:solidFill>
+                          <a:latin typeface="Calibri"/>
+                        </a:rPr>
+                        <a:t>PE</a:t>
+                      </a:r>
+                    </a:p>
+                  </a:txBody>
+                  <a:tcPr>
+                    <a:solidFill>
+                      <a:srgbClr val="FFFFFF"/>
+                    </a:solidFill>
+                  </a:tcPr>
+                </a:tc>
+                <a:tc>
+                  <a:txBody>
+                    <a:bodyPr/>
+                    <a:lstStyle/>
+                    <a:p>
+                      <a:pPr algn="l"/>
+                      <a:r>
+                        <a:rPr sz="1000" b="0">
+                          <a:solidFill>
+                            <a:srgbClr val="1D1B43"/>
+                          </a:solidFill>
+                          <a:latin typeface="Calibri"/>
+                        </a:rPr>
+                        <a:t>2</a:t>
+                      </a:r>
+                    </a:p>
+                  </a:txBody>
+                  <a:tcPr>
+                    <a:solidFill>
+                      <a:srgbClr val="FFFFFF"/>
+                    </a:solidFill>
+                  </a:tcPr>
+                </a:tc>
+                <a:tc>
+                  <a:txBody>
+                    <a:bodyPr/>
+                    <a:lstStyle/>
+                    <a:p>
+                      <a:pPr algn="l"/>
+                      <a:r>
+                        <a:rPr sz="1000" b="0">
+                          <a:solidFill>
+                            <a:srgbClr val="1D1B43"/>
+                          </a:solidFill>
+                          <a:latin typeface="Calibri"/>
+                        </a:rPr>
+                        <a:t>2</a:t>
+                      </a:r>
+                    </a:p>
+                  </a:txBody>
+                  <a:tcPr>
+                    <a:solidFill>
+                      <a:srgbClr val="FFFFFF"/>
+                    </a:solidFill>
+                  </a:tcPr>
+                </a:tc>
+                <a:tc>
+                  <a:txBody>
+                    <a:bodyPr/>
+                    <a:lstStyle/>
+                    <a:p>
+                      <a:pPr algn="l"/>
+                      <a:r>
+                        <a:rPr sz="1000" b="0">
+                          <a:solidFill>
+                            <a:srgbClr val="1D1B43"/>
+                          </a:solidFill>
+                          <a:latin typeface="Calibri"/>
+                        </a:rPr>
+                        <a:t>0</a:t>
+                      </a:r>
+                    </a:p>
+                  </a:txBody>
+                  <a:tcPr>
+                    <a:solidFill>
+                      <a:srgbClr val="FFFFFF"/>
+                    </a:solidFill>
+                  </a:tcPr>
+                </a:tc>
+                <a:tc>
+                  <a:txBody>
+                    <a:bodyPr/>
+                    <a:lstStyle/>
+                    <a:p>
+                      <a:pPr algn="l"/>
+                      <a:r>
+                        <a:rPr sz="1000" b="0">
+                          <a:solidFill>
+                            <a:srgbClr val="1D1B43"/>
+                          </a:solidFill>
+                          <a:latin typeface="Calibri"/>
+                        </a:rPr>
+                        <a:t>100.0%</a:t>
+                      </a:r>
+                    </a:p>
+                  </a:txBody>
+                  <a:tcPr>
+                    <a:solidFill>
+                      <a:srgbClr val="FFFFFF"/>
+                    </a:solidFill>
+                  </a:tcPr>
+                </a:tc>
+                <a:tc>
+                  <a:txBody>
+                    <a:bodyPr/>
+                    <a:lstStyle/>
+                    <a:p>
+                      <a:pPr algn="l"/>
+                      <a:r>
+                        <a:rPr sz="1000" b="0">
+                          <a:solidFill>
+                            <a:srgbClr val="1D1B43"/>
+                          </a:solidFill>
+                          <a:latin typeface="Calibri"/>
+                        </a:rPr>
+                        <a:t>Excelente</a:t>
+                      </a:r>
+                    </a:p>
+                  </a:txBody>
+                  <a:tcPr>
+                    <a:solidFill>
+                      <a:srgbClr val="FFFFFF"/>
+                    </a:solidFill>
+                  </a:tcPr>
+                </a:tc>
+              </a:tr>
+              <a:tr h="438912">
+                <a:tc>
+                  <a:txBody>
+                    <a:bodyPr/>
+                    <a:lstStyle/>
+                    <a:p>
+                      <a:pPr algn="l"/>
+                      <a:r>
+                        <a:rPr sz="1000" b="0">
+                          <a:solidFill>
+                            <a:srgbClr val="1D1B43"/>
+                          </a:solidFill>
+                          <a:latin typeface="Calibri"/>
+                        </a:rPr>
+                        <a:t>RS</a:t>
+                      </a:r>
+                    </a:p>
+                  </a:txBody>
+                  <a:tcPr>
+                    <a:solidFill>
+                      <a:srgbClr val="F2F2F2"/>
+                    </a:solidFill>
+                  </a:tcPr>
+                </a:tc>
+                <a:tc>
+                  <a:txBody>
+                    <a:bodyPr/>
+                    <a:lstStyle/>
+                    <a:p>
+                      <a:pPr algn="l"/>
+                      <a:r>
+                        <a:rPr sz="1000" b="0">
+                          <a:solidFill>
+                            <a:srgbClr val="1D1B43"/>
+                          </a:solidFill>
+                          <a:latin typeface="Calibri"/>
+                        </a:rPr>
+                        <a:t>2</a:t>
+                      </a:r>
+                    </a:p>
+                  </a:txBody>
+                  <a:tcPr>
+                    <a:solidFill>
+                      <a:srgbClr val="F2F2F2"/>
+                    </a:solidFill>
+                  </a:tcPr>
+                </a:tc>
+                <a:tc>
+                  <a:txBody>
+                    <a:bodyPr/>
+                    <a:lstStyle/>
+                    <a:p>
+                      <a:pPr algn="l"/>
+                      <a:r>
+                        <a:rPr sz="1000" b="0">
+                          <a:solidFill>
+                            <a:srgbClr val="1D1B43"/>
+                          </a:solidFill>
+                          <a:latin typeface="Calibri"/>
+                        </a:rPr>
+                        <a:t>2</a:t>
+                      </a:r>
+                    </a:p>
+                  </a:txBody>
+                  <a:tcPr>
+                    <a:solidFill>
+                      <a:srgbClr val="F2F2F2"/>
+                    </a:solidFill>
+                  </a:tcPr>
+                </a:tc>
+                <a:tc>
+                  <a:txBody>
+                    <a:bodyPr/>
+                    <a:lstStyle/>
+                    <a:p>
+                      <a:pPr algn="l"/>
+                      <a:r>
+                        <a:rPr sz="1000" b="0">
+                          <a:solidFill>
+                            <a:srgbClr val="1D1B43"/>
+                          </a:solidFill>
+                          <a:latin typeface="Calibri"/>
+                        </a:rPr>
+                        <a:t>0</a:t>
+                      </a:r>
+                    </a:p>
+                  </a:txBody>
+                  <a:tcPr>
+                    <a:solidFill>
+                      <a:srgbClr val="F2F2F2"/>
+                    </a:solidFill>
+                  </a:tcPr>
+                </a:tc>
+                <a:tc>
+                  <a:txBody>
+                    <a:bodyPr/>
+                    <a:lstStyle/>
+                    <a:p>
+                      <a:pPr algn="l"/>
+                      <a:r>
+                        <a:rPr sz="1000" b="0">
+                          <a:solidFill>
+                            <a:srgbClr val="1D1B43"/>
+                          </a:solidFill>
+                          <a:latin typeface="Calibri"/>
+                        </a:rPr>
+                        <a:t>100.0%</a:t>
+                      </a:r>
+                    </a:p>
+                  </a:txBody>
+                  <a:tcPr>
+                    <a:solidFill>
+                      <a:srgbClr val="F2F2F2"/>
+                    </a:solidFill>
+                  </a:tcPr>
+                </a:tc>
+                <a:tc>
+                  <a:txBody>
+                    <a:bodyPr/>
+                    <a:lstStyle/>
+                    <a:p>
+                      <a:pPr algn="l"/>
+                      <a:r>
+                        <a:rPr sz="1000" b="0">
+                          <a:solidFill>
+                            <a:srgbClr val="1D1B43"/>
+                          </a:solidFill>
+                          <a:latin typeface="Calibri"/>
+                        </a:rPr>
+                        <a:t>Excelente</a:t>
+                      </a:r>
+                    </a:p>
+                  </a:txBody>
+                  <a:tcPr>
+                    <a:solidFill>
+                      <a:srgbClr val="F2F2F2"/>
+                    </a:solidFill>
+                  </a:tcPr>
+                </a:tc>
+              </a:tr>
+              <a:tr h="438912">
+                <a:tc>
+                  <a:txBody>
+                    <a:bodyPr/>
+                    <a:lstStyle/>
+                    <a:p>
+                      <a:pPr algn="l"/>
+                      <a:r>
+                        <a:rPr sz="1000" b="0">
+                          <a:solidFill>
+                            <a:srgbClr val="1D1B43"/>
+                          </a:solidFill>
+                          <a:latin typeface="Calibri"/>
+                        </a:rPr>
+                        <a:t>GO</a:t>
+                      </a:r>
+                    </a:p>
+                  </a:txBody>
+                  <a:tcPr>
+                    <a:solidFill>
+                      <a:srgbClr val="FFFFFF"/>
+                    </a:solidFill>
+                  </a:tcPr>
+                </a:tc>
+                <a:tc>
+                  <a:txBody>
+                    <a:bodyPr/>
+                    <a:lstStyle/>
+                    <a:p>
+                      <a:pPr algn="l"/>
+                      <a:r>
+                        <a:rPr sz="1000" b="0">
+                          <a:solidFill>
+                            <a:srgbClr val="1D1B43"/>
+                          </a:solidFill>
+                          <a:latin typeface="Calibri"/>
+                        </a:rPr>
                         <a:t>1</a:t>
                       </a:r>
                     </a:p>
@@ -7203,7 +6931,7 @@
                           </a:solidFill>
                           <a:latin typeface="Calibri"/>
                         </a:rPr>
-                        <a:t>66.7%</a:t>
+                        <a:t>1</a:t>
                       </a:r>
                     </a:p>
                   </a:txBody>
@@ -7226,7 +6954,7 @@
                           </a:solidFill>
                           <a:latin typeface="Calibri"/>
                         </a:rPr>
-                        <a:t>Atencao</a:t>
+                        <a:t>0</a:t>
                       </a:r>
                     </a:p>
                   </a:txBody>
@@ -7236,162 +6964,20 @@
                     </a:solidFill>
                   </a:tcPr>
                 </a:tc>
-              </a:tr>
-              <a:tr h="457200">
-                <a:tc>
-                  <a:txBody>
-                    <a:bodyPr/>
-                    <a:lstStyle/>
-                    <a:p>
-                      <a:pPr algn="l"/>
-                      <a:r>
-                        <a:rPr sz="1000" b="0">
-                          <a:solidFill>
-                            <a:srgbClr val="1D1B43"/>
-                          </a:solidFill>
-                          <a:latin typeface="Calibri"/>
-                        </a:rPr>
-                        <a:t>GO</a:t>
-                      </a:r>
-                    </a:p>
-                  </a:txBody>
-                  <a:tcPr>
-                    <a:solidFill>
-                      <a:srgbClr val="F2F2F2"/>
-                    </a:solidFill>
-                  </a:tcPr>
-                </a:tc>
-                <a:tc>
-                  <a:txBody>
-                    <a:bodyPr/>
-                    <a:lstStyle/>
-                    <a:p>
-                      <a:pPr algn="l"/>
-                      <a:r>
-                        <a:rPr sz="1000" b="0">
-                          <a:solidFill>
-                            <a:srgbClr val="1D1B43"/>
-                          </a:solidFill>
-                          <a:latin typeface="Calibri"/>
-                        </a:rPr>
-                        <a:t>2</a:t>
-                      </a:r>
-                    </a:p>
-                  </a:txBody>
-                  <a:tcPr>
-                    <a:solidFill>
-                      <a:srgbClr val="F2F2F2"/>
-                    </a:solidFill>
-                  </a:tcPr>
-                </a:tc>
-                <a:tc>
-                  <a:txBody>
-                    <a:bodyPr/>
-                    <a:lstStyle/>
-                    <a:p>
-                      <a:pPr algn="l"/>
-                      <a:r>
-                        <a:rPr sz="1000" b="0">
-                          <a:solidFill>
-                            <a:srgbClr val="1D1B43"/>
-                          </a:solidFill>
-                          <a:latin typeface="Calibri"/>
-                        </a:rPr>
-                        <a:t>1</a:t>
-                      </a:r>
-                    </a:p>
-                  </a:txBody>
-                  <a:tcPr>
-                    <a:solidFill>
-                      <a:srgbClr val="F2F2F2"/>
-                    </a:solidFill>
-                  </a:tcPr>
-                </a:tc>
-                <a:tc>
-                  <a:txBody>
-                    <a:bodyPr/>
-                    <a:lstStyle/>
-                    <a:p>
-                      <a:pPr algn="l"/>
-                      <a:r>
-                        <a:rPr sz="1000" b="0">
-                          <a:solidFill>
-                            <a:srgbClr val="1D1B43"/>
-                          </a:solidFill>
-                          <a:latin typeface="Calibri"/>
-                        </a:rPr>
-                        <a:t>1</a:t>
-                      </a:r>
-                    </a:p>
-                  </a:txBody>
-                  <a:tcPr>
-                    <a:solidFill>
-                      <a:srgbClr val="F2F2F2"/>
-                    </a:solidFill>
-                  </a:tcPr>
-                </a:tc>
-                <a:tc>
-                  <a:txBody>
-                    <a:bodyPr/>
-                    <a:lstStyle/>
-                    <a:p>
-                      <a:pPr algn="l"/>
-                      <a:r>
-                        <a:rPr sz="1000" b="0">
-                          <a:solidFill>
-                            <a:srgbClr val="1D1B43"/>
-                          </a:solidFill>
-                          <a:latin typeface="Calibri"/>
-                        </a:rPr>
-                        <a:t>50.0%</a:t>
-                      </a:r>
-                    </a:p>
-                  </a:txBody>
-                  <a:tcPr>
-                    <a:solidFill>
-                      <a:srgbClr val="F2F2F2"/>
-                    </a:solidFill>
-                  </a:tcPr>
-                </a:tc>
-                <a:tc>
-                  <a:txBody>
-                    <a:bodyPr/>
-                    <a:lstStyle/>
-                    <a:p>
-                      <a:pPr algn="l"/>
-                      <a:r>
-                        <a:rPr sz="1000" b="0">
-                          <a:solidFill>
-                            <a:srgbClr val="1D1B43"/>
-                          </a:solidFill>
-                          <a:latin typeface="Calibri"/>
-                        </a:rPr>
-                        <a:t>Atencao</a:t>
-                      </a:r>
-                    </a:p>
-                  </a:txBody>
-                  <a:tcPr>
-                    <a:solidFill>
-                      <a:srgbClr val="F2F2F2"/>
-                    </a:solidFill>
-                  </a:tcPr>
-                </a:tc>
-              </a:tr>
-              <a:tr h="457200">
-                <a:tc>
-                  <a:txBody>
-                    <a:bodyPr/>
-                    <a:lstStyle/>
-                    <a:p>
-                      <a:pPr algn="l"/>
-                      <a:r>
-                        <a:rPr sz="1000" b="0">
-                          <a:solidFill>
-                            <a:srgbClr val="1D1B43"/>
-                          </a:solidFill>
-                          <a:latin typeface="Calibri"/>
-                        </a:rPr>
-                        <a:t>MT</a:t>
+                <a:tc>
+                  <a:txBody>
+                    <a:bodyPr/>
+                    <a:lstStyle/>
+                    <a:p>
+                      <a:pPr algn="l"/>
+                      <a:r>
+                        <a:rPr sz="1000" b="0">
+                          <a:solidFill>
+                            <a:srgbClr val="1D1B43"/>
+                          </a:solidFill>
+                          <a:latin typeface="Calibri"/>
+                        </a:rPr>
+                        <a:t>100.0%</a:t>
                       </a:r>
                     </a:p>
                   </a:txBody>
@@ -7414,525 +7000,13 @@
                           </a:solidFill>
                           <a:latin typeface="Calibri"/>
                         </a:rPr>
-                        <a:t>1</a:t>
+                        <a:t>Excelente</a:t>
                       </a:r>
                     </a:p>
                   </a:txBody>
                   <a:tcPr>
                     <a:solidFill>
                       <a:srgbClr val="FFFFFF"/>
-                    </a:solidFill>
-                  </a:tcPr>
-                </a:tc>
-                <a:tc>
-                  <a:txBody>
-                    <a:bodyPr/>
-                    <a:lstStyle/>
-                    <a:p>
-                      <a:pPr algn="l"/>
-                      <a:r>
-                        <a:rPr sz="1000" b="0">
-                          <a:solidFill>
-                            <a:srgbClr val="1D1B43"/>
-                          </a:solidFill>
-                          <a:latin typeface="Calibri"/>
-                        </a:rPr>
-                        <a:t>1</a:t>
-                      </a:r>
-                    </a:p>
-                  </a:txBody>
-                  <a:tcPr>
-                    <a:solidFill>
-                      <a:srgbClr val="FFFFFF"/>
-                    </a:solidFill>
-                  </a:tcPr>
-                </a:tc>
-                <a:tc>
-                  <a:txBody>
-                    <a:bodyPr/>
-                    <a:lstStyle/>
-                    <a:p>
-                      <a:pPr algn="l"/>
-                      <a:r>
-                        <a:rPr sz="1000" b="0">
-                          <a:solidFill>
-                            <a:srgbClr val="1D1B43"/>
-                          </a:solidFill>
-                          <a:latin typeface="Calibri"/>
-                        </a:rPr>
-                        <a:t>0</a:t>
-                      </a:r>
-                    </a:p>
-                  </a:txBody>
-                  <a:tcPr>
-                    <a:solidFill>
-                      <a:srgbClr val="FFFFFF"/>
-                    </a:solidFill>
-                  </a:tcPr>
-                </a:tc>
-                <a:tc>
-                  <a:txBody>
-                    <a:bodyPr/>
-                    <a:lstStyle/>
-                    <a:p>
-                      <a:pPr algn="l"/>
-                      <a:r>
-                        <a:rPr sz="1000" b="0">
-                          <a:solidFill>
-                            <a:srgbClr val="1D1B43"/>
-                          </a:solidFill>
-                          <a:latin typeface="Calibri"/>
-                        </a:rPr>
-                        <a:t>100.0%</a:t>
-                      </a:r>
-                    </a:p>
-                  </a:txBody>
-                  <a:tcPr>
-                    <a:solidFill>
-                      <a:srgbClr val="FFFFFF"/>
-                    </a:solidFill>
-                  </a:tcPr>
-                </a:tc>
-                <a:tc>
-                  <a:txBody>
-                    <a:bodyPr/>
-                    <a:lstStyle/>
-                    <a:p>
-                      <a:pPr algn="l"/>
-                      <a:r>
-                        <a:rPr sz="1000" b="0">
-                          <a:solidFill>
-                            <a:srgbClr val="1D1B43"/>
-                          </a:solidFill>
-                          <a:latin typeface="Calibri"/>
-                        </a:rPr>
-                        <a:t>Excelente</a:t>
-                      </a:r>
-                    </a:p>
-                  </a:txBody>
-                  <a:tcPr>
-                    <a:solidFill>
-                      <a:srgbClr val="FFFFFF"/>
-                    </a:solidFill>
-                  </a:tcPr>
-                </a:tc>
-              </a:tr>
-              <a:tr h="457200">
-                <a:tc>
-                  <a:txBody>
-                    <a:bodyPr/>
-                    <a:lstStyle/>
-                    <a:p>
-                      <a:pPr algn="l"/>
-                      <a:r>
-                        <a:rPr sz="1000" b="0">
-                          <a:solidFill>
-                            <a:srgbClr val="1D1B43"/>
-                          </a:solidFill>
-                          <a:latin typeface="Calibri"/>
-                        </a:rPr>
-                        <a:t>MG</a:t>
-                      </a:r>
-                    </a:p>
-                  </a:txBody>
-                  <a:tcPr>
-                    <a:solidFill>
-                      <a:srgbClr val="F2F2F2"/>
-                    </a:solidFill>
-                  </a:tcPr>
-                </a:tc>
-                <a:tc>
-                  <a:txBody>
-                    <a:bodyPr/>
-                    <a:lstStyle/>
-                    <a:p>
-                      <a:pPr algn="l"/>
-                      <a:r>
-                        <a:rPr sz="1000" b="0">
-                          <a:solidFill>
-                            <a:srgbClr val="1D1B43"/>
-                          </a:solidFill>
-                          <a:latin typeface="Calibri"/>
-                        </a:rPr>
-                        <a:t>1</a:t>
-                      </a:r>
-                    </a:p>
-                  </a:txBody>
-                  <a:tcPr>
-                    <a:solidFill>
-                      <a:srgbClr val="F2F2F2"/>
-                    </a:solidFill>
-                  </a:tcPr>
-                </a:tc>
-                <a:tc>
-                  <a:txBody>
-                    <a:bodyPr/>
-                    <a:lstStyle/>
-                    <a:p>
-                      <a:pPr algn="l"/>
-                      <a:r>
-                        <a:rPr sz="1000" b="0">
-                          <a:solidFill>
-                            <a:srgbClr val="1D1B43"/>
-                          </a:solidFill>
-                          <a:latin typeface="Calibri"/>
-                        </a:rPr>
-                        <a:t>0</a:t>
-                      </a:r>
-                    </a:p>
-                  </a:txBody>
-                  <a:tcPr>
-                    <a:solidFill>
-                      <a:srgbClr val="F2F2F2"/>
-                    </a:solidFill>
-                  </a:tcPr>
-                </a:tc>
-                <a:tc>
-                  <a:txBody>
-                    <a:bodyPr/>
-                    <a:lstStyle/>
-                    <a:p>
-                      <a:pPr algn="l"/>
-                      <a:r>
-                        <a:rPr sz="1000" b="0">
-                          <a:solidFill>
-                            <a:srgbClr val="1D1B43"/>
-                          </a:solidFill>
-                          <a:latin typeface="Calibri"/>
-                        </a:rPr>
-                        <a:t>1</a:t>
-                      </a:r>
-                    </a:p>
-                  </a:txBody>
-                  <a:tcPr>
-                    <a:solidFill>
-                      <a:srgbClr val="F2F2F2"/>
-                    </a:solidFill>
-                  </a:tcPr>
-                </a:tc>
-                <a:tc>
-                  <a:txBody>
-                    <a:bodyPr/>
-                    <a:lstStyle/>
-                    <a:p>
-                      <a:pPr algn="l"/>
-                      <a:r>
-                        <a:rPr sz="1000" b="0">
-                          <a:solidFill>
-                            <a:srgbClr val="1D1B43"/>
-                          </a:solidFill>
-                          <a:latin typeface="Calibri"/>
-                        </a:rPr>
-                        <a:t>0.0%</a:t>
-                      </a:r>
-                    </a:p>
-                  </a:txBody>
-                  <a:tcPr>
-                    <a:solidFill>
-                      <a:srgbClr val="F2F2F2"/>
-                    </a:solidFill>
-                  </a:tcPr>
-                </a:tc>
-                <a:tc>
-                  <a:txBody>
-                    <a:bodyPr/>
-                    <a:lstStyle/>
-                    <a:p>
-                      <a:pPr algn="l"/>
-                      <a:r>
-                        <a:rPr sz="1000" b="0">
-                          <a:solidFill>
-                            <a:srgbClr val="1D1B43"/>
-                          </a:solidFill>
-                          <a:latin typeface="Calibri"/>
-                        </a:rPr>
-                        <a:t>Atencao</a:t>
-                      </a:r>
-                    </a:p>
-                  </a:txBody>
-                  <a:tcPr>
-                    <a:solidFill>
-                      <a:srgbClr val="F2F2F2"/>
-                    </a:solidFill>
-                  </a:tcPr>
-                </a:tc>
-              </a:tr>
-              <a:tr h="457200">
-                <a:tc>
-                  <a:txBody>
-                    <a:bodyPr/>
-                    <a:lstStyle/>
-                    <a:p>
-                      <a:pPr algn="l"/>
-                      <a:r>
-                        <a:rPr sz="1000" b="0">
-                          <a:solidFill>
-                            <a:srgbClr val="1D1B43"/>
-                          </a:solidFill>
-                          <a:latin typeface="Calibri"/>
-                        </a:rPr>
-                        <a:t>PR</a:t>
-                      </a:r>
-                    </a:p>
-                  </a:txBody>
-                  <a:tcPr>
-                    <a:solidFill>
-                      <a:srgbClr val="FFFFFF"/>
-                    </a:solidFill>
-                  </a:tcPr>
-                </a:tc>
-                <a:tc>
-                  <a:txBody>
-                    <a:bodyPr/>
-                    <a:lstStyle/>
-                    <a:p>
-                      <a:pPr algn="l"/>
-                      <a:r>
-                        <a:rPr sz="1000" b="0">
-                          <a:solidFill>
-                            <a:srgbClr val="1D1B43"/>
-                          </a:solidFill>
-                          <a:latin typeface="Calibri"/>
-                        </a:rPr>
-                        <a:t>1</a:t>
-                      </a:r>
-                    </a:p>
-                  </a:txBody>
-                  <a:tcPr>
-                    <a:solidFill>
-                      <a:srgbClr val="FFFFFF"/>
-                    </a:solidFill>
-                  </a:tcPr>
-                </a:tc>
-                <a:tc>
-                  <a:txBody>
-                    <a:bodyPr/>
-                    <a:lstStyle/>
-                    <a:p>
-                      <a:pPr algn="l"/>
-                      <a:r>
-                        <a:rPr sz="1000" b="0">
-                          <a:solidFill>
-                            <a:srgbClr val="1D1B43"/>
-                          </a:solidFill>
-                          <a:latin typeface="Calibri"/>
-                        </a:rPr>
-                        <a:t>1</a:t>
-                      </a:r>
-                    </a:p>
-                  </a:txBody>
-                  <a:tcPr>
-                    <a:solidFill>
-                      <a:srgbClr val="FFFFFF"/>
-                    </a:solidFill>
-                  </a:tcPr>
-                </a:tc>
-                <a:tc>
-                  <a:txBody>
-                    <a:bodyPr/>
-                    <a:lstStyle/>
-                    <a:p>
-                      <a:pPr algn="l"/>
-                      <a:r>
-                        <a:rPr sz="1000" b="0">
-                          <a:solidFill>
-                            <a:srgbClr val="1D1B43"/>
-                          </a:solidFill>
-                          <a:latin typeface="Calibri"/>
-                        </a:rPr>
-                        <a:t>0</a:t>
-                      </a:r>
-                    </a:p>
-                  </a:txBody>
-                  <a:tcPr>
-                    <a:solidFill>
-                      <a:srgbClr val="FFFFFF"/>
-                    </a:solidFill>
-                  </a:tcPr>
-                </a:tc>
-                <a:tc>
-                  <a:txBody>
-                    <a:bodyPr/>
-                    <a:lstStyle/>
-                    <a:p>
-                      <a:pPr algn="l"/>
-                      <a:r>
-                        <a:rPr sz="1000" b="0">
-                          <a:solidFill>
-                            <a:srgbClr val="1D1B43"/>
-                          </a:solidFill>
-                          <a:latin typeface="Calibri"/>
-                        </a:rPr>
-                        <a:t>100.0%</a:t>
-                      </a:r>
-                    </a:p>
-                  </a:txBody>
-                  <a:tcPr>
-                    <a:solidFill>
-                      <a:srgbClr val="FFFFFF"/>
-                    </a:solidFill>
-                  </a:tcPr>
-                </a:tc>
-                <a:tc>
-                  <a:txBody>
-                    <a:bodyPr/>
-                    <a:lstStyle/>
-                    <a:p>
-                      <a:pPr algn="l"/>
-                      <a:r>
-                        <a:rPr sz="1000" b="0">
-                          <a:solidFill>
-                            <a:srgbClr val="1D1B43"/>
-                          </a:solidFill>
-                          <a:latin typeface="Calibri"/>
-                        </a:rPr>
-                        <a:t>Excelente</a:t>
-                      </a:r>
-                    </a:p>
-                  </a:txBody>
-                  <a:tcPr>
-                    <a:solidFill>
-                      <a:srgbClr val="FFFFFF"/>
-                    </a:solidFill>
-                  </a:tcPr>
-                </a:tc>
-              </a:tr>
-              <a:tr h="457200">
-                <a:tc>
-                  <a:txBody>
-                    <a:bodyPr/>
-                    <a:lstStyle/>
-                    <a:p>
-                      <a:pPr algn="l"/>
-                      <a:r>
-                        <a:rPr sz="1000" b="0">
-                          <a:solidFill>
-                            <a:srgbClr val="1D1B43"/>
-                          </a:solidFill>
-                          <a:latin typeface="Calibri"/>
-                        </a:rPr>
-                        <a:t>PB</a:t>
-                      </a:r>
-                    </a:p>
-                  </a:txBody>
-                  <a:tcPr>
-                    <a:solidFill>
-                      <a:srgbClr val="F2F2F2"/>
-                    </a:solidFill>
-                  </a:tcPr>
-                </a:tc>
-                <a:tc>
-                  <a:txBody>
-                    <a:bodyPr/>
-                    <a:lstStyle/>
-                    <a:p>
-                      <a:pPr algn="l"/>
-                      <a:r>
-                        <a:rPr sz="1000" b="0">
-                          <a:solidFill>
-                            <a:srgbClr val="1D1B43"/>
-                          </a:solidFill>
-                          <a:latin typeface="Calibri"/>
-                        </a:rPr>
-                        <a:t>1</a:t>
-                      </a:r>
-                    </a:p>
-                  </a:txBody>
-                  <a:tcPr>
-                    <a:solidFill>
-                      <a:srgbClr val="F2F2F2"/>
-                    </a:solidFill>
-                  </a:tcPr>
-                </a:tc>
-                <a:tc>
-                  <a:txBody>
-                    <a:bodyPr/>
-                    <a:lstStyle/>
-                    <a:p>
-                      <a:pPr algn="l"/>
-                      <a:r>
-                        <a:rPr sz="1000" b="0">
-                          <a:solidFill>
-                            <a:srgbClr val="1D1B43"/>
-                          </a:solidFill>
-                          <a:latin typeface="Calibri"/>
-                        </a:rPr>
-                        <a:t>1</a:t>
-                      </a:r>
-                    </a:p>
-                  </a:txBody>
-                  <a:tcPr>
-                    <a:solidFill>
-                      <a:srgbClr val="F2F2F2"/>
-                    </a:solidFill>
-                  </a:tcPr>
-                </a:tc>
-                <a:tc>
-                  <a:txBody>
-                    <a:bodyPr/>
-                    <a:lstStyle/>
-                    <a:p>
-                      <a:pPr algn="l"/>
-                      <a:r>
-                        <a:rPr sz="1000" b="0">
-                          <a:solidFill>
-                            <a:srgbClr val="1D1B43"/>
-                          </a:solidFill>
-                          <a:latin typeface="Calibri"/>
-                        </a:rPr>
-                        <a:t>0</a:t>
-                      </a:r>
-                    </a:p>
-                  </a:txBody>
-                  <a:tcPr>
-                    <a:solidFill>
-                      <a:srgbClr val="F2F2F2"/>
-                    </a:solidFill>
-                  </a:tcPr>
-                </a:tc>
-                <a:tc>
-                  <a:txBody>
-                    <a:bodyPr/>
-                    <a:lstStyle/>
-                    <a:p>
-                      <a:pPr algn="l"/>
-                      <a:r>
-                        <a:rPr sz="1000" b="0">
-                          <a:solidFill>
-                            <a:srgbClr val="1D1B43"/>
-                          </a:solidFill>
-                          <a:latin typeface="Calibri"/>
-                        </a:rPr>
-                        <a:t>100.0%</a:t>
-                      </a:r>
-                    </a:p>
-                  </a:txBody>
-                  <a:tcPr>
-                    <a:solidFill>
-                      <a:srgbClr val="F2F2F2"/>
-                    </a:solidFill>
-                  </a:tcPr>
-                </a:tc>
-                <a:tc>
-                  <a:txBody>
-                    <a:bodyPr/>
-                    <a:lstStyle/>
-                    <a:p>
-                      <a:pPr algn="l"/>
-                      <a:r>
-                        <a:rPr sz="1000" b="0">
-                          <a:solidFill>
-                            <a:srgbClr val="1D1B43"/>
-                          </a:solidFill>
-                          <a:latin typeface="Calibri"/>
-                        </a:rPr>
-                        <a:t>Excelente</a:t>
-                      </a:r>
-                    </a:p>
-                  </a:txBody>
-                  <a:tcPr>
-                    <a:solidFill>
-                      <a:srgbClr val="F2F2F2"/>
                     </a:solidFill>
                   </a:tcPr>
                 </a:tc>
@@ -8021,7 +7095,7 @@
                 </a:solidFill>
                 <a:latin typeface="Calibri"/>
               </a:rPr>
-              <a:t>TOP DESTINATARIOS (83 pontos)</a:t>
+              <a:t>TOP DESTINATARIOS (29 pontos)</a:t>
             </a:r>
           </a:p>
         </p:txBody>
@@ -8319,7 +7393,7 @@
                           </a:solidFill>
                           <a:latin typeface="Calibri"/>
                         </a:rPr>
-                        <a:t>8</a:t>
+                        <a:t>7</a:t>
                       </a:r>
                     </a:p>
                   </a:txBody>
@@ -8342,7 +7416,7 @@
                           </a:solidFill>
                           <a:latin typeface="Calibri"/>
                         </a:rPr>
-                        <a:t>8</a:t>
+                        <a:t>7</a:t>
                       </a:r>
                     </a:p>
                   </a:txBody>
@@ -8459,7 +7533,7 @@
                           </a:solidFill>
                           <a:latin typeface="Calibri"/>
                         </a:rPr>
-                        <a:t>BRAFT DO BRASIL IMPO - GUARULHOS / SP</a:t>
+                        <a:t>CKS INTERNATIONAL CO - ITAJAI / SC</a:t>
                       </a:r>
                     </a:p>
                   </a:txBody>
@@ -8482,7 +7556,7 @@
                           </a:solidFill>
                           <a:latin typeface="Calibri"/>
                         </a:rPr>
-                        <a:t>5</a:t>
+                        <a:t>2</a:t>
                       </a:r>
                     </a:p>
                   </a:txBody>
@@ -8505,7 +7579,7 @@
                           </a:solidFill>
                           <a:latin typeface="Calibri"/>
                         </a:rPr>
-                        <a:t>5</a:t>
+                        <a:t>2</a:t>
                       </a:r>
                     </a:p>
                   </a:txBody>
@@ -8622,7 +7696,7 @@
                           </a:solidFill>
                           <a:latin typeface="Calibri"/>
                         </a:rPr>
-                        <a:t>ANDRA S A ELECTRIC S - CAJAMAR / SP</a:t>
+                        <a:t>MATTEL DO BRASIL LTD - NAVEGANTES / SC</a:t>
                       </a:r>
                     </a:p>
                   </a:txBody>
@@ -8645,7 +7719,7 @@
                           </a:solidFill>
                           <a:latin typeface="Calibri"/>
                         </a:rPr>
-                        <a:t>4</a:t>
+                        <a:t>2</a:t>
                       </a:r>
                     </a:p>
                   </a:txBody>
@@ -8668,7 +7742,7 @@
                           </a:solidFill>
                           <a:latin typeface="Calibri"/>
                         </a:rPr>
-                        <a:t>4</a:t>
+                        <a:t>2</a:t>
                       </a:r>
                     </a:p>
                   </a:txBody>
@@ -8785,7 +7859,7 @@
                           </a:solidFill>
                           <a:latin typeface="Calibri"/>
                         </a:rPr>
-                        <a:t>PORTOEXPRESS LOGISTI - SAO PAULO / SP</a:t>
+                        <a:t>HGS GAS E AGUA DO BR - RIO DE JANEIRO / RJ</a:t>
                       </a:r>
                     </a:p>
                   </a:txBody>
@@ -8808,7 +7882,7 @@
                           </a:solidFill>
                           <a:latin typeface="Calibri"/>
                         </a:rPr>
-                        <a:t>4</a:t>
+                        <a:t>2</a:t>
                       </a:r>
                     </a:p>
                   </a:txBody>
@@ -8831,7 +7905,7 @@
                           </a:solidFill>
                           <a:latin typeface="Calibri"/>
                         </a:rPr>
-                        <a:t>4</a:t>
+                        <a:t>1</a:t>
                       </a:r>
                     </a:p>
                   </a:txBody>
@@ -8854,7 +7928,7 @@
                           </a:solidFill>
                           <a:latin typeface="Calibri"/>
                         </a:rPr>
-                        <a:t>0</a:t>
+                        <a:t>1</a:t>
                       </a:r>
                     </a:p>
                   </a:txBody>
@@ -8877,7 +7951,7 @@
                           </a:solidFill>
                           <a:latin typeface="Calibri"/>
                         </a:rPr>
-                        <a:t>100.0%</a:t>
+                        <a:t>50.0%</a:t>
                       </a:r>
                     </a:p>
                   </a:txBody>
@@ -8900,7 +7974,7 @@
                           </a:solidFill>
                           <a:latin typeface="Calibri"/>
                         </a:rPr>
-                        <a:t>Excelente</a:t>
+                        <a:t>Atencao</a:t>
                       </a:r>
                     </a:p>
                   </a:txBody>
@@ -8948,7 +8022,7 @@
                           </a:solidFill>
                           <a:latin typeface="Calibri"/>
                         </a:rPr>
-                        <a:t>YANKE COMERCIO ELETR - RIO CLARO / SP</a:t>
+                        <a:t>CHRISTIAN SIEGL - LAURO DE FREITAS / BA</a:t>
                       </a:r>
                     </a:p>
                   </a:txBody>
@@ -8971,7 +8045,7 @@
                           </a:solidFill>
                           <a:latin typeface="Calibri"/>
                         </a:rPr>
-                        <a:t>4</a:t>
+                        <a:t>2</a:t>
                       </a:r>
                     </a:p>
                   </a:txBody>
@@ -8994,7 +8068,7 @@
                           </a:solidFill>
                           <a:latin typeface="Calibri"/>
                         </a:rPr>
-                        <a:t>1</a:t>
+                        <a:t>2</a:t>
                       </a:r>
                     </a:p>
                   </a:txBody>
@@ -9017,7 +8091,7 @@
                           </a:solidFill>
                           <a:latin typeface="Calibri"/>
                         </a:rPr>
-                        <a:t>3</a:t>
+                        <a:t>0</a:t>
                       </a:r>
                     </a:p>
                   </a:txBody>
@@ -9040,7 +8114,7 @@
                           </a:solidFill>
                           <a:latin typeface="Calibri"/>
                         </a:rPr>
-                        <a:t>25.0%</a:t>
+                        <a:t>100.0%</a:t>
                       </a:r>
                     </a:p>
                   </a:txBody>
@@ -9063,7 +8137,7 @@
                           </a:solidFill>
                           <a:latin typeface="Calibri"/>
                         </a:rPr>
-                        <a:t>Atencao</a:t>
+                        <a:t>Excelente</a:t>
                       </a:r>
                     </a:p>
                   </a:txBody>
@@ -9111,7 +8185,7 @@
                           </a:solidFill>
                           <a:latin typeface="Calibri"/>
                         </a:rPr>
-                        <a:t>NAMASTE SERVICOS LTD - SAO PAULO / SP</a:t>
+                        <a:t>JC ENCOMENDA EXPRESS - RECIFE / PE</a:t>
                       </a:r>
                     </a:p>
                   </a:txBody>
@@ -9134,7 +8208,7 @@
                           </a:solidFill>
                           <a:latin typeface="Calibri"/>
                         </a:rPr>
-                        <a:t>3</a:t>
+                        <a:t>2</a:t>
                       </a:r>
                     </a:p>
                   </a:txBody>
@@ -9157,7 +8231,7 @@
                           </a:solidFill>
                           <a:latin typeface="Calibri"/>
                         </a:rPr>
-                        <a:t>3</a:t>
+                        <a:t>2</a:t>
                       </a:r>
                     </a:p>
                   </a:txBody>
@@ -9274,7 +8348,7 @@
                           </a:solidFill>
                           <a:latin typeface="Calibri"/>
                         </a:rPr>
-                        <a:t>TERMACO LOGISTICA - GUARULHOS / SP</a:t>
+                        <a:t>BLUE BAY COMERCIAL - SAO FRANCISCO DO SUL / SC</a:t>
                       </a:r>
                     </a:p>
                   </a:txBody>
@@ -9297,7 +8371,7 @@
                           </a:solidFill>
                           <a:latin typeface="Calibri"/>
                         </a:rPr>
-                        <a:t>3</a:t>
+                        <a:t>1</a:t>
                       </a:r>
                     </a:p>
                   </a:txBody>
@@ -9320,7 +8394,7 @@
                           </a:solidFill>
                           <a:latin typeface="Calibri"/>
                         </a:rPr>
-                        <a:t>3</a:t>
+                        <a:t>1</a:t>
                       </a:r>
                     </a:p>
                   </a:txBody>
@@ -9437,7 +8511,7 @@
                           </a:solidFill>
                           <a:latin typeface="Calibri"/>
                         </a:rPr>
-                        <a:t>CHRISTIAN SIEGL - LAURO DE FREITAS / BA</a:t>
+                        <a:t>CAJADAN TEXTIL LTDA. - JOINVILLE / SC</a:t>
                       </a:r>
                     </a:p>
                   </a:txBody>
@@ -9460,7 +8534,7 @@
                           </a:solidFill>
                           <a:latin typeface="Calibri"/>
                         </a:rPr>
-                        <a:t>2</a:t>
+                        <a:t>1</a:t>
                       </a:r>
                     </a:p>
                   </a:txBody>
@@ -9483,7 +8557,7 @@
                           </a:solidFill>
                           <a:latin typeface="Calibri"/>
                         </a:rPr>
-                        <a:t>2</a:t>
+                        <a:t>1</a:t>
                       </a:r>
                     </a:p>
                   </a:txBody>
@@ -9600,7 +8674,7 @@
                           </a:solidFill>
                           <a:latin typeface="Calibri"/>
                         </a:rPr>
-                        <a:t>KUKA PRODUTOS INFANT - SAO PAULO / SP</a:t>
+                        <a:t>COMERCIAL HUGEN - SAPUCAIA DO SUL / RS</a:t>
                       </a:r>
                     </a:p>
                   </a:txBody>
@@ -9623,7 +8697,7 @@
                           </a:solidFill>
                           <a:latin typeface="Calibri"/>
                         </a:rPr>
-                        <a:t>2</a:t>
+                        <a:t>1</a:t>
                       </a:r>
                     </a:p>
                   </a:txBody>
@@ -9646,7 +8720,7 @@
                           </a:solidFill>
                           <a:latin typeface="Calibri"/>
                         </a:rPr>
-                        <a:t>2</a:t>
+                        <a:t>1</a:t>
                       </a:r>
                     </a:p>
                   </a:txBody>
@@ -9763,7 +8837,7 @@
                           </a:solidFill>
                           <a:latin typeface="Calibri"/>
                         </a:rPr>
-                        <a:t>DUO SP COMERCIO DE V - SAO PAULO / SP</a:t>
+                        <a:t>BRSL LOGISTICA LTDA - ITAJAI / SC</a:t>
                       </a:r>
                     </a:p>
                   </a:txBody>
@@ -9786,7 +8860,7 @@
                           </a:solidFill>
                           <a:latin typeface="Calibri"/>
                         </a:rPr>
-                        <a:t>2</a:t>
+                        <a:t>1</a:t>
                       </a:r>
                     </a:p>
                   </a:txBody>
@@ -9809,7 +8883,7 @@
                           </a:solidFill>
                           <a:latin typeface="Calibri"/>
                         </a:rPr>
-                        <a:t>2</a:t>
+                        <a:t>1</a:t>
                       </a:r>
                     </a:p>
                   </a:txBody>
@@ -9926,7 +9000,7 @@
                           </a:solidFill>
                           <a:latin typeface="Calibri"/>
                         </a:rPr>
-                        <a:t>NSNA SOCIOAMBIENTAL - SAO PAULO / SP</a:t>
+                        <a:t>ANNA CAROLLYNE ALEXA - TURVANIA / GO</a:t>
                       </a:r>
                     </a:p>
                   </a:txBody>
@@ -9949,7 +9023,7 @@
                           </a:solidFill>
                           <a:latin typeface="Calibri"/>
                         </a:rPr>
-                        <a:t>2</a:t>
+                        <a:t>1</a:t>
                       </a:r>
                     </a:p>
                   </a:txBody>
@@ -9972,7 +9046,7 @@
                           </a:solidFill>
                           <a:latin typeface="Calibri"/>
                         </a:rPr>
-                        <a:t>2</a:t>
+                        <a:t>1</a:t>
                       </a:r>
                     </a:p>
                   </a:txBody>
@@ -10089,7 +9163,7 @@
                           </a:solidFill>
                           <a:latin typeface="Calibri"/>
                         </a:rPr>
-                        <a:t>GIRO CERTO CARGAS E - GUARULHOS / SP</a:t>
+                        <a:t>AMAZON SERVICOS DE V - BETIM / MG</a:t>
                       </a:r>
                     </a:p>
                   </a:txBody>
@@ -10112,7 +9186,7 @@
                           </a:solidFill>
                           <a:latin typeface="Calibri"/>
                         </a:rPr>
-                        <a:t>2</a:t>
+                        <a:t>1</a:t>
                       </a:r>
                     </a:p>
                   </a:txBody>
@@ -10135,7 +9209,7 @@
                           </a:solidFill>
                           <a:latin typeface="Calibri"/>
                         </a:rPr>
-                        <a:t>2</a:t>
+                        <a:t>1</a:t>
                       </a:r>
                     </a:p>
                   </a:txBody>
@@ -10252,7 +9326,7 @@
                           </a:solidFill>
                           <a:latin typeface="Calibri"/>
                         </a:rPr>
-                        <a:t>VICTOR HUGO TAVARES - DIADEMA / SP</a:t>
+                        <a:t>AEROPORTO INTERNACIO - GUARULHOS / SP</a:t>
                       </a:r>
                     </a:p>
                   </a:txBody>
@@ -10275,7 +9349,7 @@
                           </a:solidFill>
                           <a:latin typeface="Calibri"/>
                         </a:rPr>
-                        <a:t>2</a:t>
+                        <a:t>1</a:t>
                       </a:r>
                     </a:p>
                   </a:txBody>
@@ -10298,7 +9372,7 @@
                           </a:solidFill>
                           <a:latin typeface="Calibri"/>
                         </a:rPr>
-                        <a:t>2</a:t>
+                        <a:t>1</a:t>
                       </a:r>
                     </a:p>
                   </a:txBody>
@@ -10415,7 +9489,7 @@
                           </a:solidFill>
                           <a:latin typeface="Calibri"/>
                         </a:rPr>
-                        <a:t>RAFAEL PAULISTA DE C - OSASCO / SP</a:t>
+                        <a:t>GATTO LOG - RIBEIRAO PRETO / SP</a:t>
                       </a:r>
                     </a:p>
                   </a:txBody>
@@ -10438,7 +9512,7 @@
                           </a:solidFill>
                           <a:latin typeface="Calibri"/>
                         </a:rPr>
-                        <a:t>2</a:t>
+                        <a:t>1</a:t>
                       </a:r>
                     </a:p>
                   </a:txBody>
@@ -10461,7 +9535,7 @@
                           </a:solidFill>
                           <a:latin typeface="Calibri"/>
                         </a:rPr>
-                        <a:t>2</a:t>
+                        <a:t>1</a:t>
                       </a:r>
                     </a:p>
                   </a:txBody>

--- a/PORTOEXPRESS_LOGISTICA_LTDA.pptx
+++ b/PORTOEXPRESS_LOGISTICA_LTDA.pptx
@@ -143,10 +143,13 @@
           </c:spPr>
           <c:cat>
             <c:strRef>
-              <c:f>Sheet1!$A$2:$A$2</c:f>
+              <c:f>Sheet1!$A$2:$A$3</c:f>
               <c:strCache>
-                <c:ptCount val="1"/>
+                <c:ptCount val="2"/>
                 <c:pt idx="0">
+                  <c:v>Maio 2026</c:v>
+                </c:pt>
+                <c:pt idx="1">
                   <c:v>Abril 2026</c:v>
                 </c:pt>
               </c:strCache>
@@ -154,11 +157,14 @@
           </c:cat>
           <c:val>
             <c:numRef>
-              <c:f>Sheet1!$B$2:$B$2</c:f>
+              <c:f>Sheet1!$B$2:$B$3</c:f>
               <c:numCache>
                 <c:formatCode>General</c:formatCode>
-                <c:ptCount val="1"/>
+                <c:ptCount val="2"/>
                 <c:pt idx="0">
+                  <c:v>107</c:v>
+                </c:pt>
+                <c:pt idx="1">
                   <c:v>39</c:v>
                 </c:pt>
               </c:numCache>
@@ -186,10 +192,13 @@
           </c:spPr>
           <c:cat>
             <c:strRef>
-              <c:f>Sheet1!$A$2:$A$2</c:f>
+              <c:f>Sheet1!$A$2:$A$3</c:f>
               <c:strCache>
-                <c:ptCount val="1"/>
+                <c:ptCount val="2"/>
                 <c:pt idx="0">
+                  <c:v>Maio 2026</c:v>
+                </c:pt>
+                <c:pt idx="1">
                   <c:v>Abril 2026</c:v>
                 </c:pt>
               </c:strCache>
@@ -197,11 +206,14 @@
           </c:cat>
           <c:val>
             <c:numRef>
-              <c:f>Sheet1!$C$2:$C$2</c:f>
+              <c:f>Sheet1!$C$2:$C$3</c:f>
               <c:numCache>
                 <c:formatCode>General</c:formatCode>
-                <c:ptCount val="1"/>
+                <c:ptCount val="2"/>
                 <c:pt idx="0">
+                  <c:v>9</c:v>
+                </c:pt>
+                <c:pt idx="1">
                   <c:v>1</c:v>
                 </c:pt>
               </c:numCache>
@@ -4142,7 +4154,7 @@
                           </a:solidFill>
                           <a:latin typeface="Calibri"/>
                         </a:rPr>
-                        <a:t>Marco 2026</a:t>
+                        <a:t>Maio 2026</a:t>
                       </a:r>
                     </a:p>
                   </a:txBody>
@@ -4236,7 +4248,7 @@
                           </a:solidFill>
                           <a:latin typeface="Calibri"/>
                         </a:rPr>
-                        <a:t>-</a:t>
+                        <a:t>116</a:t>
                       </a:r>
                     </a:p>
                   </a:txBody>
@@ -4282,7 +4294,7 @@
                           </a:solidFill>
                           <a:latin typeface="Calibri"/>
                         </a:rPr>
-                        <a:t>-</a:t>
+                        <a:t>- 76</a:t>
                       </a:r>
                     </a:p>
                   </a:txBody>
@@ -4330,7 +4342,7 @@
                           </a:solidFill>
                           <a:latin typeface="Calibri"/>
                         </a:rPr>
-                        <a:t>-</a:t>
+                        <a:t>107</a:t>
                       </a:r>
                     </a:p>
                   </a:txBody>
@@ -4376,7 +4388,7 @@
                           </a:solidFill>
                           <a:latin typeface="Calibri"/>
                         </a:rPr>
-                        <a:t>-</a:t>
+                        <a:t>- 68</a:t>
                       </a:r>
                     </a:p>
                   </a:txBody>
@@ -4424,7 +4436,7 @@
                           </a:solidFill>
                           <a:latin typeface="Calibri"/>
                         </a:rPr>
-                        <a:t>-</a:t>
+                        <a:t>9</a:t>
                       </a:r>
                     </a:p>
                   </a:txBody>
@@ -4470,7 +4482,7 @@
                           </a:solidFill>
                           <a:latin typeface="Calibri"/>
                         </a:rPr>
-                        <a:t>-</a:t>
+                        <a:t>- 8</a:t>
                       </a:r>
                     </a:p>
                   </a:txBody>
@@ -4518,7 +4530,7 @@
                           </a:solidFill>
                           <a:latin typeface="Calibri"/>
                         </a:rPr>
-                        <a:t>-</a:t>
+                        <a:t>92.2%</a:t>
                       </a:r>
                     </a:p>
                   </a:txBody>
@@ -4564,7 +4576,7 @@
                           </a:solidFill>
                           <a:latin typeface="Calibri"/>
                         </a:rPr>
-                        <a:t>-</a:t>
+                        <a:t>+ 5.3pp</a:t>
                       </a:r>
                     </a:p>
                   </a:txBody>
@@ -4735,7 +4747,7 @@
         </p:nvGraphicFramePr>
         <p:xfrm>
           <a:off x="7955279" y="2286000"/>
-          <a:ext cx="4480560" cy="877824"/>
+          <a:ext cx="4480560" cy="1316736"/>
         </p:xfrm>
         <a:graphic>
           <a:graphicData uri="http://schemas.openxmlformats.org/drawingml/2006/table">
@@ -4881,13 +4893,130 @@
                           </a:solidFill>
                           <a:latin typeface="Calibri"/>
                         </a:rPr>
+                        <a:t>Maio 2026</a:t>
+                      </a:r>
+                    </a:p>
+                  </a:txBody>
+                  <a:tcPr>
+                    <a:solidFill>
+                      <a:srgbClr val="FFFFFF"/>
+                    </a:solidFill>
+                  </a:tcPr>
+                </a:tc>
+                <a:tc>
+                  <a:txBody>
+                    <a:bodyPr/>
+                    <a:lstStyle/>
+                    <a:p>
+                      <a:pPr algn="l"/>
+                      <a:r>
+                        <a:rPr sz="1000" b="0">
+                          <a:solidFill>
+                            <a:srgbClr val="1D1B43"/>
+                          </a:solidFill>
+                          <a:latin typeface="Calibri"/>
+                        </a:rPr>
+                        <a:t>116</a:t>
+                      </a:r>
+                    </a:p>
+                  </a:txBody>
+                  <a:tcPr>
+                    <a:solidFill>
+                      <a:srgbClr val="FFFFFF"/>
+                    </a:solidFill>
+                  </a:tcPr>
+                </a:tc>
+                <a:tc>
+                  <a:txBody>
+                    <a:bodyPr/>
+                    <a:lstStyle/>
+                    <a:p>
+                      <a:pPr algn="l"/>
+                      <a:r>
+                        <a:rPr sz="1000" b="0">
+                          <a:solidFill>
+                            <a:srgbClr val="1D1B43"/>
+                          </a:solidFill>
+                          <a:latin typeface="Calibri"/>
+                        </a:rPr>
+                        <a:t>107</a:t>
+                      </a:r>
+                    </a:p>
+                  </a:txBody>
+                  <a:tcPr>
+                    <a:solidFill>
+                      <a:srgbClr val="FFFFFF"/>
+                    </a:solidFill>
+                  </a:tcPr>
+                </a:tc>
+                <a:tc>
+                  <a:txBody>
+                    <a:bodyPr/>
+                    <a:lstStyle/>
+                    <a:p>
+                      <a:pPr algn="l"/>
+                      <a:r>
+                        <a:rPr sz="1000" b="0">
+                          <a:solidFill>
+                            <a:srgbClr val="1D1B43"/>
+                          </a:solidFill>
+                          <a:latin typeface="Calibri"/>
+                        </a:rPr>
+                        <a:t>9</a:t>
+                      </a:r>
+                    </a:p>
+                  </a:txBody>
+                  <a:tcPr>
+                    <a:solidFill>
+                      <a:srgbClr val="FFFFFF"/>
+                    </a:solidFill>
+                  </a:tcPr>
+                </a:tc>
+                <a:tc>
+                  <a:txBody>
+                    <a:bodyPr/>
+                    <a:lstStyle/>
+                    <a:p>
+                      <a:pPr algn="l"/>
+                      <a:r>
+                        <a:rPr sz="1000" b="0">
+                          <a:solidFill>
+                            <a:srgbClr val="1D1B43"/>
+                          </a:solidFill>
+                          <a:latin typeface="Calibri"/>
+                        </a:rPr>
+                        <a:t>92.2%</a:t>
+                      </a:r>
+                    </a:p>
+                  </a:txBody>
+                  <a:tcPr>
+                    <a:solidFill>
+                      <a:srgbClr val="FFFFFF"/>
+                    </a:solidFill>
+                  </a:tcPr>
+                </a:tc>
+              </a:tr>
+              <a:tr h="438912">
+                <a:tc>
+                  <a:txBody>
+                    <a:bodyPr/>
+                    <a:lstStyle/>
+                    <a:p>
+                      <a:pPr algn="l"/>
+                      <a:r>
+                        <a:rPr sz="1000" b="0">
+                          <a:solidFill>
+                            <a:srgbClr val="1D1B43"/>
+                          </a:solidFill>
+                          <a:latin typeface="Calibri"/>
+                        </a:rPr>
                         <a:t>Abril 2026</a:t>
                       </a:r>
                     </a:p>
                   </a:txBody>
                   <a:tcPr>
                     <a:solidFill>
-                      <a:srgbClr val="FFFFFF"/>
+                      <a:srgbClr val="F2F2F2"/>
                     </a:solidFill>
                   </a:tcPr>
                 </a:tc>
@@ -4910,7 +5039,7 @@
                   </a:txBody>
                   <a:tcPr>
                     <a:solidFill>
-                      <a:srgbClr val="FFFFFF"/>
+                      <a:srgbClr val="F2F2F2"/>
                     </a:solidFill>
                   </a:tcPr>
                 </a:tc>
@@ -4933,7 +5062,7 @@
                   </a:txBody>
                   <a:tcPr>
                     <a:solidFill>
-                      <a:srgbClr val="FFFFFF"/>
+                      <a:srgbClr val="F2F2F2"/>
                     </a:solidFill>
                   </a:tcPr>
                 </a:tc>
@@ -4956,7 +5085,7 @@
                   </a:txBody>
                   <a:tcPr>
                     <a:solidFill>
-                      <a:srgbClr val="FFFFFF"/>
+                      <a:srgbClr val="F2F2F2"/>
                     </a:solidFill>
                   </a:tcPr>
                 </a:tc>
@@ -4979,7 +5108,7 @@
                   </a:txBody>
                   <a:tcPr>
                     <a:solidFill>
-                      <a:srgbClr val="FFFFFF"/>
+                      <a:srgbClr val="F2F2F2"/>
                     </a:solidFill>
                   </a:tcPr>
                 </a:tc>

--- a/PORTOEXPRESS_LOGISTICA_LTDA.pptx
+++ b/PORTOEXPRESS_LOGISTICA_LTDA.pptx
@@ -162,7 +162,7 @@
                 <c:formatCode>General</c:formatCode>
                 <c:ptCount val="2"/>
                 <c:pt idx="0">
-                  <c:v>107</c:v>
+                  <c:v>143</c:v>
                 </c:pt>
                 <c:pt idx="1">
                   <c:v>39</c:v>
@@ -211,7 +211,7 @@
                 <c:formatCode>General</c:formatCode>
                 <c:ptCount val="2"/>
                 <c:pt idx="0">
-                  <c:v>9</c:v>
+                  <c:v>7</c:v>
                 </c:pt>
                 <c:pt idx="1">
                   <c:v>1</c:v>
@@ -4248,7 +4248,7 @@
                           </a:solidFill>
                           <a:latin typeface="Calibri"/>
                         </a:rPr>
-                        <a:t>116</a:t>
+                        <a:t>150</a:t>
                       </a:r>
                     </a:p>
                   </a:txBody>
@@ -4294,7 +4294,7 @@
                           </a:solidFill>
                           <a:latin typeface="Calibri"/>
                         </a:rPr>
-                        <a:t>- 76</a:t>
+                        <a:t>- 110</a:t>
                       </a:r>
                     </a:p>
                   </a:txBody>
@@ -4342,7 +4342,7 @@
                           </a:solidFill>
                           <a:latin typeface="Calibri"/>
                         </a:rPr>
-                        <a:t>107</a:t>
+                        <a:t>143</a:t>
                       </a:r>
                     </a:p>
                   </a:txBody>
@@ -4388,7 +4388,7 @@
                           </a:solidFill>
                           <a:latin typeface="Calibri"/>
                         </a:rPr>
-                        <a:t>- 68</a:t>
+                        <a:t>- 104</a:t>
                       </a:r>
                     </a:p>
                   </a:txBody>
@@ -4436,7 +4436,7 @@
                           </a:solidFill>
                           <a:latin typeface="Calibri"/>
                         </a:rPr>
-                        <a:t>9</a:t>
+                        <a:t>7</a:t>
                       </a:r>
                     </a:p>
                   </a:txBody>
@@ -4482,7 +4482,7 @@
                           </a:solidFill>
                           <a:latin typeface="Calibri"/>
                         </a:rPr>
-                        <a:t>- 8</a:t>
+                        <a:t>- 6</a:t>
                       </a:r>
                     </a:p>
                   </a:txBody>
@@ -4530,7 +4530,7 @@
                           </a:solidFill>
                           <a:latin typeface="Calibri"/>
                         </a:rPr>
-                        <a:t>92.2%</a:t>
+                        <a:t>95.3%</a:t>
                       </a:r>
                     </a:p>
                   </a:txBody>
@@ -4576,7 +4576,7 @@
                           </a:solidFill>
                           <a:latin typeface="Calibri"/>
                         </a:rPr>
-                        <a:t>+ 5.3pp</a:t>
+                        <a:t>+ 2.2pp</a:t>
                       </a:r>
                     </a:p>
                   </a:txBody>
@@ -4916,7 +4916,7 @@
                           </a:solidFill>
                           <a:latin typeface="Calibri"/>
                         </a:rPr>
-                        <a:t>116</a:t>
+                        <a:t>150</a:t>
                       </a:r>
                     </a:p>
                   </a:txBody>
@@ -4939,7 +4939,7 @@
                           </a:solidFill>
                           <a:latin typeface="Calibri"/>
                         </a:rPr>
-                        <a:t>107</a:t>
+                        <a:t>143</a:t>
                       </a:r>
                     </a:p>
                   </a:txBody>
@@ -4962,7 +4962,7 @@
                           </a:solidFill>
                           <a:latin typeface="Calibri"/>
                         </a:rPr>
-                        <a:t>9</a:t>
+                        <a:t>7</a:t>
                       </a:r>
                     </a:p>
                   </a:txBody>
@@ -4985,7 +4985,7 @@
                           </a:solidFill>
                           <a:latin typeface="Calibri"/>
                         </a:rPr>
-                        <a:t>92.2%</a:t>
+                        <a:t>95.3%</a:t>
                       </a:r>
                     </a:p>
                   </a:txBody>

--- a/PORTOEXPRESS_LOGISTICA_LTDA.pptx
+++ b/PORTOEXPRESS_LOGISTICA_LTDA.pptx
@@ -147,10 +147,10 @@
               <c:strCache>
                 <c:ptCount val="2"/>
                 <c:pt idx="0">
-                  <c:v>Maio 2026</c:v>
+                  <c:v>Abril 2026</c:v>
                 </c:pt>
                 <c:pt idx="1">
-                  <c:v>Abril 2026</c:v>
+                  <c:v>Maio 2026</c:v>
                 </c:pt>
               </c:strCache>
             </c:strRef>
@@ -162,10 +162,10 @@
                 <c:formatCode>General</c:formatCode>
                 <c:ptCount val="2"/>
                 <c:pt idx="0">
-                  <c:v>143</c:v>
+                  <c:v>39</c:v>
                 </c:pt>
                 <c:pt idx="1">
-                  <c:v>39</c:v>
+                  <c:v>148</c:v>
                 </c:pt>
               </c:numCache>
             </c:numRef>
@@ -196,10 +196,10 @@
               <c:strCache>
                 <c:ptCount val="2"/>
                 <c:pt idx="0">
-                  <c:v>Maio 2026</c:v>
+                  <c:v>Abril 2026</c:v>
                 </c:pt>
                 <c:pt idx="1">
-                  <c:v>Abril 2026</c:v>
+                  <c:v>Maio 2026</c:v>
                 </c:pt>
               </c:strCache>
             </c:strRef>
@@ -211,10 +211,10 @@
                 <c:formatCode>General</c:formatCode>
                 <c:ptCount val="2"/>
                 <c:pt idx="0">
-                  <c:v>7</c:v>
+                  <c:v>1</c:v>
                 </c:pt>
                 <c:pt idx="1">
-                  <c:v>1</c:v>
+                  <c:v>11</c:v>
                 </c:pt>
               </c:numCache>
             </c:numRef>
@@ -3387,7 +3387,7 @@
                 </a:solidFill>
                 <a:latin typeface="Calibri"/>
               </a:rPr>
-              <a:t>INDICADORES ABRIL 2026</a:t>
+              <a:t>INDICADORES MAIO 2026</a:t>
             </a:r>
           </a:p>
         </p:txBody>
@@ -3708,7 +3708,7 @@
                 </a:solidFill>
                 <a:latin typeface="Calibri"/>
               </a:rPr>
-              <a:t>40</a:t>
+              <a:t>159</a:t>
             </a:r>
           </a:p>
         </p:txBody>
@@ -3823,7 +3823,7 @@
                 </a:solidFill>
                 <a:latin typeface="Calibri"/>
               </a:rPr>
-              <a:t>39</a:t>
+              <a:t>148</a:t>
             </a:r>
           </a:p>
         </p:txBody>
@@ -3938,7 +3938,7 @@
                 </a:solidFill>
                 <a:latin typeface="Calibri"/>
               </a:rPr>
-              <a:t>1</a:t>
+              <a:t>11</a:t>
             </a:r>
           </a:p>
         </p:txBody>
@@ -4049,11 +4049,11 @@
             <a:r>
               <a:rPr sz="2800" b="1">
                 <a:solidFill>
-                  <a:srgbClr val="10B981"/>
+                  <a:srgbClr val="F59E0B"/>
                 </a:solidFill>
                 <a:latin typeface="Calibri"/>
               </a:rPr>
-              <a:t>97.5%</a:t>
+              <a:t>93.1%</a:t>
             </a:r>
           </a:p>
         </p:txBody>
@@ -4154,30 +4154,30 @@
                           </a:solidFill>
                           <a:latin typeface="Calibri"/>
                         </a:rPr>
+                        <a:t>Abril 2026</a:t>
+                      </a:r>
+                    </a:p>
+                  </a:txBody>
+                  <a:tcPr>
+                    <a:solidFill>
+                      <a:srgbClr val="1D1B43"/>
+                    </a:solidFill>
+                  </a:tcPr>
+                </a:tc>
+                <a:tc>
+                  <a:txBody>
+                    <a:bodyPr/>
+                    <a:lstStyle/>
+                    <a:p>
+                      <a:pPr algn="ctr"/>
+                      <a:r>
+                        <a:rPr sz="1100" b="1">
+                          <a:solidFill>
+                            <a:srgbClr val="FFFFFF"/>
+                          </a:solidFill>
+                          <a:latin typeface="Calibri"/>
+                        </a:rPr>
                         <a:t>Maio 2026</a:t>
-                      </a:r>
-                    </a:p>
-                  </a:txBody>
-                  <a:tcPr>
-                    <a:solidFill>
-                      <a:srgbClr val="1D1B43"/>
-                    </a:solidFill>
-                  </a:tcPr>
-                </a:tc>
-                <a:tc>
-                  <a:txBody>
-                    <a:bodyPr/>
-                    <a:lstStyle/>
-                    <a:p>
-                      <a:pPr algn="ctr"/>
-                      <a:r>
-                        <a:rPr sz="1100" b="1">
-                          <a:solidFill>
-                            <a:srgbClr val="FFFFFF"/>
-                          </a:solidFill>
-                          <a:latin typeface="Calibri"/>
-                        </a:rPr>
-                        <a:t>Abril 2026</a:t>
                       </a:r>
                     </a:p>
                   </a:txBody>
@@ -4248,29 +4248,6 @@
                           </a:solidFill>
                           <a:latin typeface="Calibri"/>
                         </a:rPr>
-                        <a:t>150</a:t>
-                      </a:r>
-                    </a:p>
-                  </a:txBody>
-                  <a:tcPr>
-                    <a:solidFill>
-                      <a:srgbClr val="FFFFFF"/>
-                    </a:solidFill>
-                  </a:tcPr>
-                </a:tc>
-                <a:tc>
-                  <a:txBody>
-                    <a:bodyPr/>
-                    <a:lstStyle/>
-                    <a:p>
-                      <a:pPr algn="l"/>
-                      <a:r>
-                        <a:rPr sz="1000" b="0">
-                          <a:solidFill>
-                            <a:srgbClr val="1D1B43"/>
-                          </a:solidFill>
-                          <a:latin typeface="Calibri"/>
-                        </a:rPr>
                         <a:t>40</a:t>
                       </a:r>
                     </a:p>
@@ -4294,7 +4271,30 @@
                           </a:solidFill>
                           <a:latin typeface="Calibri"/>
                         </a:rPr>
-                        <a:t>- 110</a:t>
+                        <a:t>159</a:t>
+                      </a:r>
+                    </a:p>
+                  </a:txBody>
+                  <a:tcPr>
+                    <a:solidFill>
+                      <a:srgbClr val="FFFFFF"/>
+                    </a:solidFill>
+                  </a:tcPr>
+                </a:tc>
+                <a:tc>
+                  <a:txBody>
+                    <a:bodyPr/>
+                    <a:lstStyle/>
+                    <a:p>
+                      <a:pPr algn="l"/>
+                      <a:r>
+                        <a:rPr sz="1000" b="0">
+                          <a:solidFill>
+                            <a:srgbClr val="1D1B43"/>
+                          </a:solidFill>
+                          <a:latin typeface="Calibri"/>
+                        </a:rPr>
+                        <a:t>+ 119</a:t>
                       </a:r>
                     </a:p>
                   </a:txBody>
@@ -4342,7 +4342,7 @@
                           </a:solidFill>
                           <a:latin typeface="Calibri"/>
                         </a:rPr>
-                        <a:t>143</a:t>
+                        <a:t>39</a:t>
                       </a:r>
                     </a:p>
                   </a:txBody>
@@ -4365,7 +4365,7 @@
                           </a:solidFill>
                           <a:latin typeface="Calibri"/>
                         </a:rPr>
-                        <a:t>39</a:t>
+                        <a:t>148</a:t>
                       </a:r>
                     </a:p>
                   </a:txBody>
@@ -4388,7 +4388,7 @@
                           </a:solidFill>
                           <a:latin typeface="Calibri"/>
                         </a:rPr>
-                        <a:t>- 104</a:t>
+                        <a:t>+ 109</a:t>
                       </a:r>
                     </a:p>
                   </a:txBody>
@@ -4436,29 +4436,6 @@
                           </a:solidFill>
                           <a:latin typeface="Calibri"/>
                         </a:rPr>
-                        <a:t>7</a:t>
-                      </a:r>
-                    </a:p>
-                  </a:txBody>
-                  <a:tcPr>
-                    <a:solidFill>
-                      <a:srgbClr val="FFFFFF"/>
-                    </a:solidFill>
-                  </a:tcPr>
-                </a:tc>
-                <a:tc>
-                  <a:txBody>
-                    <a:bodyPr/>
-                    <a:lstStyle/>
-                    <a:p>
-                      <a:pPr algn="l"/>
-                      <a:r>
-                        <a:rPr sz="1000" b="0">
-                          <a:solidFill>
-                            <a:srgbClr val="1D1B43"/>
-                          </a:solidFill>
-                          <a:latin typeface="Calibri"/>
-                        </a:rPr>
                         <a:t>1</a:t>
                       </a:r>
                     </a:p>
@@ -4482,7 +4459,30 @@
                           </a:solidFill>
                           <a:latin typeface="Calibri"/>
                         </a:rPr>
-                        <a:t>- 6</a:t>
+                        <a:t>11</a:t>
+                      </a:r>
+                    </a:p>
+                  </a:txBody>
+                  <a:tcPr>
+                    <a:solidFill>
+                      <a:srgbClr val="FFFFFF"/>
+                    </a:solidFill>
+                  </a:tcPr>
+                </a:tc>
+                <a:tc>
+                  <a:txBody>
+                    <a:bodyPr/>
+                    <a:lstStyle/>
+                    <a:p>
+                      <a:pPr algn="l"/>
+                      <a:r>
+                        <a:rPr sz="1000" b="0">
+                          <a:solidFill>
+                            <a:srgbClr val="1D1B43"/>
+                          </a:solidFill>
+                          <a:latin typeface="Calibri"/>
+                        </a:rPr>
+                        <a:t>+ 10</a:t>
                       </a:r>
                     </a:p>
                   </a:txBody>
@@ -4530,7 +4530,7 @@
                           </a:solidFill>
                           <a:latin typeface="Calibri"/>
                         </a:rPr>
-                        <a:t>95.3%</a:t>
+                        <a:t>97.5%</a:t>
                       </a:r>
                     </a:p>
                   </a:txBody>
@@ -4553,7 +4553,7 @@
                           </a:solidFill>
                           <a:latin typeface="Calibri"/>
                         </a:rPr>
-                        <a:t>97.5%</a:t>
+                        <a:t>93.1%</a:t>
                       </a:r>
                     </a:p>
                   </a:txBody>
@@ -4576,7 +4576,7 @@
                           </a:solidFill>
                           <a:latin typeface="Calibri"/>
                         </a:rPr>
-                        <a:t>+ 2.2pp</a:t>
+                        <a:t>- 4.4pp</a:t>
                       </a:r>
                     </a:p>
                   </a:txBody>
@@ -4893,99 +4893,99 @@
                           </a:solidFill>
                           <a:latin typeface="Calibri"/>
                         </a:rPr>
-                        <a:t>Maio 2026</a:t>
-                      </a:r>
-                    </a:p>
-                  </a:txBody>
-                  <a:tcPr>
-                    <a:solidFill>
-                      <a:srgbClr val="FFFFFF"/>
-                    </a:solidFill>
-                  </a:tcPr>
-                </a:tc>
-                <a:tc>
-                  <a:txBody>
-                    <a:bodyPr/>
-                    <a:lstStyle/>
-                    <a:p>
-                      <a:pPr algn="l"/>
-                      <a:r>
-                        <a:rPr sz="1000" b="0">
-                          <a:solidFill>
-                            <a:srgbClr val="1D1B43"/>
-                          </a:solidFill>
-                          <a:latin typeface="Calibri"/>
-                        </a:rPr>
-                        <a:t>150</a:t>
-                      </a:r>
-                    </a:p>
-                  </a:txBody>
-                  <a:tcPr>
-                    <a:solidFill>
-                      <a:srgbClr val="FFFFFF"/>
-                    </a:solidFill>
-                  </a:tcPr>
-                </a:tc>
-                <a:tc>
-                  <a:txBody>
-                    <a:bodyPr/>
-                    <a:lstStyle/>
-                    <a:p>
-                      <a:pPr algn="l"/>
-                      <a:r>
-                        <a:rPr sz="1000" b="0">
-                          <a:solidFill>
-                            <a:srgbClr val="1D1B43"/>
-                          </a:solidFill>
-                          <a:latin typeface="Calibri"/>
-                        </a:rPr>
-                        <a:t>143</a:t>
-                      </a:r>
-                    </a:p>
-                  </a:txBody>
-                  <a:tcPr>
-                    <a:solidFill>
-                      <a:srgbClr val="FFFFFF"/>
-                    </a:solidFill>
-                  </a:tcPr>
-                </a:tc>
-                <a:tc>
-                  <a:txBody>
-                    <a:bodyPr/>
-                    <a:lstStyle/>
-                    <a:p>
-                      <a:pPr algn="l"/>
-                      <a:r>
-                        <a:rPr sz="1000" b="0">
-                          <a:solidFill>
-                            <a:srgbClr val="1D1B43"/>
-                          </a:solidFill>
-                          <a:latin typeface="Calibri"/>
-                        </a:rPr>
-                        <a:t>7</a:t>
-                      </a:r>
-                    </a:p>
-                  </a:txBody>
-                  <a:tcPr>
-                    <a:solidFill>
-                      <a:srgbClr val="FFFFFF"/>
-                    </a:solidFill>
-                  </a:tcPr>
-                </a:tc>
-                <a:tc>
-                  <a:txBody>
-                    <a:bodyPr/>
-                    <a:lstStyle/>
-                    <a:p>
-                      <a:pPr algn="l"/>
-                      <a:r>
-                        <a:rPr sz="1000" b="0">
-                          <a:solidFill>
-                            <a:srgbClr val="1D1B43"/>
-                          </a:solidFill>
-                          <a:latin typeface="Calibri"/>
-                        </a:rPr>
-                        <a:t>95.3%</a:t>
+                        <a:t>Abril 2026</a:t>
+                      </a:r>
+                    </a:p>
+                  </a:txBody>
+                  <a:tcPr>
+                    <a:solidFill>
+                      <a:srgbClr val="FFFFFF"/>
+                    </a:solidFill>
+                  </a:tcPr>
+                </a:tc>
+                <a:tc>
+                  <a:txBody>
+                    <a:bodyPr/>
+                    <a:lstStyle/>
+                    <a:p>
+                      <a:pPr algn="l"/>
+                      <a:r>
+                        <a:rPr sz="1000" b="0">
+                          <a:solidFill>
+                            <a:srgbClr val="1D1B43"/>
+                          </a:solidFill>
+                          <a:latin typeface="Calibri"/>
+                        </a:rPr>
+                        <a:t>40</a:t>
+                      </a:r>
+                    </a:p>
+                  </a:txBody>
+                  <a:tcPr>
+                    <a:solidFill>
+                      <a:srgbClr val="FFFFFF"/>
+                    </a:solidFill>
+                  </a:tcPr>
+                </a:tc>
+                <a:tc>
+                  <a:txBody>
+                    <a:bodyPr/>
+                    <a:lstStyle/>
+                    <a:p>
+                      <a:pPr algn="l"/>
+                      <a:r>
+                        <a:rPr sz="1000" b="0">
+                          <a:solidFill>
+                            <a:srgbClr val="1D1B43"/>
+                          </a:solidFill>
+                          <a:latin typeface="Calibri"/>
+                        </a:rPr>
+                        <a:t>39</a:t>
+                      </a:r>
+                    </a:p>
+                  </a:txBody>
+                  <a:tcPr>
+                    <a:solidFill>
+                      <a:srgbClr val="FFFFFF"/>
+                    </a:solidFill>
+                  </a:tcPr>
+                </a:tc>
+                <a:tc>
+                  <a:txBody>
+                    <a:bodyPr/>
+                    <a:lstStyle/>
+                    <a:p>
+                      <a:pPr algn="l"/>
+                      <a:r>
+                        <a:rPr sz="1000" b="0">
+                          <a:solidFill>
+                            <a:srgbClr val="1D1B43"/>
+                          </a:solidFill>
+                          <a:latin typeface="Calibri"/>
+                        </a:rPr>
+                        <a:t>1</a:t>
+                      </a:r>
+                    </a:p>
+                  </a:txBody>
+                  <a:tcPr>
+                    <a:solidFill>
+                      <a:srgbClr val="FFFFFF"/>
+                    </a:solidFill>
+                  </a:tcPr>
+                </a:tc>
+                <a:tc>
+                  <a:txBody>
+                    <a:bodyPr/>
+                    <a:lstStyle/>
+                    <a:p>
+                      <a:pPr algn="l"/>
+                      <a:r>
+                        <a:rPr sz="1000" b="0">
+                          <a:solidFill>
+                            <a:srgbClr val="1D1B43"/>
+                          </a:solidFill>
+                          <a:latin typeface="Calibri"/>
+                        </a:rPr>
+                        <a:t>97.5%</a:t>
                       </a:r>
                     </a:p>
                   </a:txBody>
@@ -5010,7 +5010,7 @@
                           </a:solidFill>
                           <a:latin typeface="Calibri"/>
                         </a:rPr>
-                        <a:t>Abril 2026</a:t>
+                        <a:t>Maio 2026</a:t>
                       </a:r>
                     </a:p>
                   </a:txBody>
@@ -5033,7 +5033,7 @@
                           </a:solidFill>
                           <a:latin typeface="Calibri"/>
                         </a:rPr>
-                        <a:t>40</a:t>
+                        <a:t>159</a:t>
                       </a:r>
                     </a:p>
                   </a:txBody>
@@ -5056,7 +5056,7 @@
                           </a:solidFill>
                           <a:latin typeface="Calibri"/>
                         </a:rPr>
-                        <a:t>39</a:t>
+                        <a:t>148</a:t>
                       </a:r>
                     </a:p>
                   </a:txBody>
@@ -5079,7 +5079,7 @@
                           </a:solidFill>
                           <a:latin typeface="Calibri"/>
                         </a:rPr>
-                        <a:t>1</a:t>
+                        <a:t>11</a:t>
                       </a:r>
                     </a:p>
                   </a:txBody>
@@ -5102,7 +5102,7 @@
                           </a:solidFill>
                           <a:latin typeface="Calibri"/>
                         </a:rPr>
-                        <a:t>97.5%</a:t>
+                        <a:t>93.1%</a:t>
                       </a:r>
                     </a:p>
                   </a:txBody>
@@ -5190,7 +5190,7 @@
                 </a:solidFill>
                 <a:latin typeface="Calibri"/>
               </a:rPr>
-              <a:t>PERFORMANCE: 97.5% - EXCELENTE</a:t>
+              <a:t>PERFORMANCE: 93.1% - REGULAR</a:t>
             </a:r>
           </a:p>
         </p:txBody>
@@ -5275,7 +5275,7 @@
                 </a:solidFill>
                 <a:latin typeface="Calibri"/>
               </a:rPr>
-              <a:t>OCORRENCIAS FORA DO PRAZO (1)</a:t>
+              <a:t>OCORRENCIAS FORA DO PRAZO (11)</a:t>
             </a:r>
           </a:p>
         </p:txBody>
@@ -5333,7 +5333,7 @@
         </p:nvGraphicFramePr>
         <p:xfrm>
           <a:off x="457200" y="1828800"/>
-          <a:ext cx="11429999" cy="768096"/>
+          <a:ext cx="11429999" cy="4572000"/>
         </p:xfrm>
         <a:graphic>
           <a:graphicData uri="http://schemas.openxmlformats.org/drawingml/2006/table">
@@ -5348,7 +5348,7 @@
                 <a:gridCol w="1554480"/>
                 <a:gridCol w="2743200"/>
               </a:tblGrid>
-              <a:tr h="384048">
+              <a:tr h="381000">
                 <a:tc>
                   <a:txBody>
                     <a:bodyPr/>
@@ -5465,90 +5465,90 @@
                   </a:tcPr>
                 </a:tc>
               </a:tr>
-              <a:tr h="384048">
-                <a:tc>
-                  <a:txBody>
-                    <a:bodyPr/>
-                    <a:lstStyle/>
-                    <a:p>
-                      <a:pPr algn="l"/>
-                      <a:r>
-                        <a:rPr sz="1000" b="0">
-                          <a:solidFill>
-                            <a:srgbClr val="1D1B43"/>
-                          </a:solidFill>
-                          <a:latin typeface="Calibri"/>
-                        </a:rPr>
-                        <a:t>278662</a:t>
-                      </a:r>
-                    </a:p>
-                  </a:txBody>
-                  <a:tcPr>
-                    <a:solidFill>
-                      <a:srgbClr val="FFFFFF"/>
-                    </a:solidFill>
-                  </a:tcPr>
-                </a:tc>
-                <a:tc>
-                  <a:txBody>
-                    <a:bodyPr/>
-                    <a:lstStyle/>
-                    <a:p>
-                      <a:pPr algn="l"/>
-                      <a:r>
-                        <a:rPr sz="1000" b="0">
-                          <a:solidFill>
-                            <a:srgbClr val="1D1B43"/>
-                          </a:solidFill>
-                          <a:latin typeface="Calibri"/>
-                        </a:rPr>
-                        <a:t>HGS GAS E AGUA DO BR - RIO DE JANEIRO / RJ</a:t>
-                      </a:r>
-                    </a:p>
-                  </a:txBody>
-                  <a:tcPr>
-                    <a:solidFill>
-                      <a:srgbClr val="FFFFFF"/>
-                    </a:solidFill>
-                  </a:tcPr>
-                </a:tc>
-                <a:tc>
-                  <a:txBody>
-                    <a:bodyPr/>
-                    <a:lstStyle/>
-                    <a:p>
-                      <a:pPr algn="l"/>
-                      <a:r>
-                        <a:rPr sz="1000" b="0">
-                          <a:solidFill>
-                            <a:srgbClr val="1D1B43"/>
-                          </a:solidFill>
-                          <a:latin typeface="Calibri"/>
-                        </a:rPr>
-                        <a:t>RIO DE JANEIRO/RJ</a:t>
-                      </a:r>
-                    </a:p>
-                  </a:txBody>
-                  <a:tcPr>
-                    <a:solidFill>
-                      <a:srgbClr val="FFFFFF"/>
-                    </a:solidFill>
-                  </a:tcPr>
-                </a:tc>
-                <a:tc>
-                  <a:txBody>
-                    <a:bodyPr/>
-                    <a:lstStyle/>
-                    <a:p>
-                      <a:pPr algn="l"/>
-                      <a:r>
-                        <a:rPr sz="1000" b="0">
-                          <a:solidFill>
-                            <a:srgbClr val="1D1B43"/>
-                          </a:solidFill>
-                          <a:latin typeface="Calibri"/>
-                        </a:rPr>
-                        <a:t>16/04/2026</a:t>
+              <a:tr h="381000">
+                <a:tc>
+                  <a:txBody>
+                    <a:bodyPr/>
+                    <a:lstStyle/>
+                    <a:p>
+                      <a:pPr algn="l"/>
+                      <a:r>
+                        <a:rPr sz="1000" b="0">
+                          <a:solidFill>
+                            <a:srgbClr val="1D1B43"/>
+                          </a:solidFill>
+                          <a:latin typeface="Calibri"/>
+                        </a:rPr>
+                        <a:t>283376</a:t>
+                      </a:r>
+                    </a:p>
+                  </a:txBody>
+                  <a:tcPr>
+                    <a:solidFill>
+                      <a:srgbClr val="FFFFFF"/>
+                    </a:solidFill>
+                  </a:tcPr>
+                </a:tc>
+                <a:tc>
+                  <a:txBody>
+                    <a:bodyPr/>
+                    <a:lstStyle/>
+                    <a:p>
+                      <a:pPr algn="l"/>
+                      <a:r>
+                        <a:rPr sz="1000" b="0">
+                          <a:solidFill>
+                            <a:srgbClr val="1D1B43"/>
+                          </a:solidFill>
+                          <a:latin typeface="Calibri"/>
+                        </a:rPr>
+                        <a:t>YANKE COMERCIO ELETR - RIO CLARO / SP</a:t>
+                      </a:r>
+                    </a:p>
+                  </a:txBody>
+                  <a:tcPr>
+                    <a:solidFill>
+                      <a:srgbClr val="FFFFFF"/>
+                    </a:solidFill>
+                  </a:tcPr>
+                </a:tc>
+                <a:tc>
+                  <a:txBody>
+                    <a:bodyPr/>
+                    <a:lstStyle/>
+                    <a:p>
+                      <a:pPr algn="l"/>
+                      <a:r>
+                        <a:rPr sz="1000" b="0">
+                          <a:solidFill>
+                            <a:srgbClr val="1D1B43"/>
+                          </a:solidFill>
+                          <a:latin typeface="Calibri"/>
+                        </a:rPr>
+                        <a:t>RIO CLARO/SP</a:t>
+                      </a:r>
+                    </a:p>
+                  </a:txBody>
+                  <a:tcPr>
+                    <a:solidFill>
+                      <a:srgbClr val="FFFFFF"/>
+                    </a:solidFill>
+                  </a:tcPr>
+                </a:tc>
+                <a:tc>
+                  <a:txBody>
+                    <a:bodyPr/>
+                    <a:lstStyle/>
+                    <a:p>
+                      <a:pPr algn="l"/>
+                      <a:r>
+                        <a:rPr sz="1000" b="0">
+                          <a:solidFill>
+                            <a:srgbClr val="1D1B43"/>
+                          </a:solidFill>
+                          <a:latin typeface="Calibri"/>
+                        </a:rPr>
+                        <a:t>14/05/2026</a:t>
                       </a:r>
                     </a:p>
                   </a:txBody>
@@ -5572,6 +5572,1176 @@
                           <a:latin typeface="Calibri"/>
                         </a:rPr>
                         <a:t>ENTREGUE FORA DO PRAZO</a:t>
+                      </a:r>
+                    </a:p>
+                  </a:txBody>
+                  <a:tcPr>
+                    <a:solidFill>
+                      <a:srgbClr val="FFFFFF"/>
+                    </a:solidFill>
+                  </a:tcPr>
+                </a:tc>
+              </a:tr>
+              <a:tr h="381000">
+                <a:tc>
+                  <a:txBody>
+                    <a:bodyPr/>
+                    <a:lstStyle/>
+                    <a:p>
+                      <a:pPr algn="l"/>
+                      <a:r>
+                        <a:rPr sz="1000" b="0">
+                          <a:solidFill>
+                            <a:srgbClr val="1D1B43"/>
+                          </a:solidFill>
+                          <a:latin typeface="Calibri"/>
+                        </a:rPr>
+                        <a:t>283379</a:t>
+                      </a:r>
+                    </a:p>
+                  </a:txBody>
+                  <a:tcPr>
+                    <a:solidFill>
+                      <a:srgbClr val="F2F2F2"/>
+                    </a:solidFill>
+                  </a:tcPr>
+                </a:tc>
+                <a:tc>
+                  <a:txBody>
+                    <a:bodyPr/>
+                    <a:lstStyle/>
+                    <a:p>
+                      <a:pPr algn="l"/>
+                      <a:r>
+                        <a:rPr sz="1000" b="0">
+                          <a:solidFill>
+                            <a:srgbClr val="1D1B43"/>
+                          </a:solidFill>
+                          <a:latin typeface="Calibri"/>
+                        </a:rPr>
+                        <a:t>YANKE COMERCIO ELETR - RIO CLARO / SP</a:t>
+                      </a:r>
+                    </a:p>
+                  </a:txBody>
+                  <a:tcPr>
+                    <a:solidFill>
+                      <a:srgbClr val="F2F2F2"/>
+                    </a:solidFill>
+                  </a:tcPr>
+                </a:tc>
+                <a:tc>
+                  <a:txBody>
+                    <a:bodyPr/>
+                    <a:lstStyle/>
+                    <a:p>
+                      <a:pPr algn="l"/>
+                      <a:r>
+                        <a:rPr sz="1000" b="0">
+                          <a:solidFill>
+                            <a:srgbClr val="1D1B43"/>
+                          </a:solidFill>
+                          <a:latin typeface="Calibri"/>
+                        </a:rPr>
+                        <a:t>RIO CLARO/SP</a:t>
+                      </a:r>
+                    </a:p>
+                  </a:txBody>
+                  <a:tcPr>
+                    <a:solidFill>
+                      <a:srgbClr val="F2F2F2"/>
+                    </a:solidFill>
+                  </a:tcPr>
+                </a:tc>
+                <a:tc>
+                  <a:txBody>
+                    <a:bodyPr/>
+                    <a:lstStyle/>
+                    <a:p>
+                      <a:pPr algn="l"/>
+                      <a:r>
+                        <a:rPr sz="1000" b="0">
+                          <a:solidFill>
+                            <a:srgbClr val="1D1B43"/>
+                          </a:solidFill>
+                          <a:latin typeface="Calibri"/>
+                        </a:rPr>
+                        <a:t>14/05/2026</a:t>
+                      </a:r>
+                    </a:p>
+                  </a:txBody>
+                  <a:tcPr>
+                    <a:solidFill>
+                      <a:srgbClr val="F2F2F2"/>
+                    </a:solidFill>
+                  </a:tcPr>
+                </a:tc>
+                <a:tc>
+                  <a:txBody>
+                    <a:bodyPr/>
+                    <a:lstStyle/>
+                    <a:p>
+                      <a:pPr algn="l"/>
+                      <a:r>
+                        <a:rPr sz="1000" b="0">
+                          <a:solidFill>
+                            <a:srgbClr val="1D1B43"/>
+                          </a:solidFill>
+                          <a:latin typeface="Calibri"/>
+                        </a:rPr>
+                        <a:t>ENTREGUE FORA DO PRAZO</a:t>
+                      </a:r>
+                    </a:p>
+                  </a:txBody>
+                  <a:tcPr>
+                    <a:solidFill>
+                      <a:srgbClr val="F2F2F2"/>
+                    </a:solidFill>
+                  </a:tcPr>
+                </a:tc>
+              </a:tr>
+              <a:tr h="381000">
+                <a:tc>
+                  <a:txBody>
+                    <a:bodyPr/>
+                    <a:lstStyle/>
+                    <a:p>
+                      <a:pPr algn="l"/>
+                      <a:r>
+                        <a:rPr sz="1000" b="0">
+                          <a:solidFill>
+                            <a:srgbClr val="1D1B43"/>
+                          </a:solidFill>
+                          <a:latin typeface="Calibri"/>
+                        </a:rPr>
+                        <a:t>283582</a:t>
+                      </a:r>
+                    </a:p>
+                  </a:txBody>
+                  <a:tcPr>
+                    <a:solidFill>
+                      <a:srgbClr val="FFFFFF"/>
+                    </a:solidFill>
+                  </a:tcPr>
+                </a:tc>
+                <a:tc>
+                  <a:txBody>
+                    <a:bodyPr/>
+                    <a:lstStyle/>
+                    <a:p>
+                      <a:pPr algn="l"/>
+                      <a:r>
+                        <a:rPr sz="1000" b="0">
+                          <a:solidFill>
+                            <a:srgbClr val="1D1B43"/>
+                          </a:solidFill>
+                          <a:latin typeface="Calibri"/>
+                        </a:rPr>
+                        <a:t>23.734.548 CRISTIANO - ANAPOLIS / GO</a:t>
+                      </a:r>
+                    </a:p>
+                  </a:txBody>
+                  <a:tcPr>
+                    <a:solidFill>
+                      <a:srgbClr val="FFFFFF"/>
+                    </a:solidFill>
+                  </a:tcPr>
+                </a:tc>
+                <a:tc>
+                  <a:txBody>
+                    <a:bodyPr/>
+                    <a:lstStyle/>
+                    <a:p>
+                      <a:pPr algn="l"/>
+                      <a:r>
+                        <a:rPr sz="1000" b="0">
+                          <a:solidFill>
+                            <a:srgbClr val="1D1B43"/>
+                          </a:solidFill>
+                          <a:latin typeface="Calibri"/>
+                        </a:rPr>
+                        <a:t>ANAPOLIS/GO</a:t>
+                      </a:r>
+                    </a:p>
+                  </a:txBody>
+                  <a:tcPr>
+                    <a:solidFill>
+                      <a:srgbClr val="FFFFFF"/>
+                    </a:solidFill>
+                  </a:tcPr>
+                </a:tc>
+                <a:tc>
+                  <a:txBody>
+                    <a:bodyPr/>
+                    <a:lstStyle/>
+                    <a:p>
+                      <a:pPr algn="l"/>
+                      <a:r>
+                        <a:rPr sz="1000" b="0">
+                          <a:solidFill>
+                            <a:srgbClr val="1D1B43"/>
+                          </a:solidFill>
+                          <a:latin typeface="Calibri"/>
+                        </a:rPr>
+                        <a:t>22/05/2026</a:t>
+                      </a:r>
+                    </a:p>
+                  </a:txBody>
+                  <a:tcPr>
+                    <a:solidFill>
+                      <a:srgbClr val="FFFFFF"/>
+                    </a:solidFill>
+                  </a:tcPr>
+                </a:tc>
+                <a:tc>
+                  <a:txBody>
+                    <a:bodyPr/>
+                    <a:lstStyle/>
+                    <a:p>
+                      <a:pPr algn="l"/>
+                      <a:r>
+                        <a:rPr sz="1000" b="0">
+                          <a:solidFill>
+                            <a:srgbClr val="1D1B43"/>
+                          </a:solidFill>
+                          <a:latin typeface="Calibri"/>
+                        </a:rPr>
+                        <a:t>FORA DO PRAZO</a:t>
+                      </a:r>
+                    </a:p>
+                  </a:txBody>
+                  <a:tcPr>
+                    <a:solidFill>
+                      <a:srgbClr val="FFFFFF"/>
+                    </a:solidFill>
+                  </a:tcPr>
+                </a:tc>
+              </a:tr>
+              <a:tr h="381000">
+                <a:tc>
+                  <a:txBody>
+                    <a:bodyPr/>
+                    <a:lstStyle/>
+                    <a:p>
+                      <a:pPr algn="l"/>
+                      <a:r>
+                        <a:rPr sz="1000" b="0">
+                          <a:solidFill>
+                            <a:srgbClr val="1D1B43"/>
+                          </a:solidFill>
+                          <a:latin typeface="Calibri"/>
+                        </a:rPr>
+                        <a:t>283706</a:t>
+                      </a:r>
+                    </a:p>
+                  </a:txBody>
+                  <a:tcPr>
+                    <a:solidFill>
+                      <a:srgbClr val="F2F2F2"/>
+                    </a:solidFill>
+                  </a:tcPr>
+                </a:tc>
+                <a:tc>
+                  <a:txBody>
+                    <a:bodyPr/>
+                    <a:lstStyle/>
+                    <a:p>
+                      <a:pPr algn="l"/>
+                      <a:r>
+                        <a:rPr sz="1000" b="0">
+                          <a:solidFill>
+                            <a:srgbClr val="1D1B43"/>
+                          </a:solidFill>
+                          <a:latin typeface="Calibri"/>
+                        </a:rPr>
+                        <a:t>PORTOEXPRESS LOGISTI - ITAJAI / SC</a:t>
+                      </a:r>
+                    </a:p>
+                  </a:txBody>
+                  <a:tcPr>
+                    <a:solidFill>
+                      <a:srgbClr val="F2F2F2"/>
+                    </a:solidFill>
+                  </a:tcPr>
+                </a:tc>
+                <a:tc>
+                  <a:txBody>
+                    <a:bodyPr/>
+                    <a:lstStyle/>
+                    <a:p>
+                      <a:pPr algn="l"/>
+                      <a:r>
+                        <a:rPr sz="1000" b="0">
+                          <a:solidFill>
+                            <a:srgbClr val="1D1B43"/>
+                          </a:solidFill>
+                          <a:latin typeface="Calibri"/>
+                        </a:rPr>
+                        <a:t>ITAJAI/SC</a:t>
+                      </a:r>
+                    </a:p>
+                  </a:txBody>
+                  <a:tcPr>
+                    <a:solidFill>
+                      <a:srgbClr val="F2F2F2"/>
+                    </a:solidFill>
+                  </a:tcPr>
+                </a:tc>
+                <a:tc>
+                  <a:txBody>
+                    <a:bodyPr/>
+                    <a:lstStyle/>
+                    <a:p>
+                      <a:pPr algn="l"/>
+                      <a:r>
+                        <a:rPr sz="1000" b="0">
+                          <a:solidFill>
+                            <a:srgbClr val="1D1B43"/>
+                          </a:solidFill>
+                          <a:latin typeface="Calibri"/>
+                        </a:rPr>
+                        <a:t>22/05/2026</a:t>
+                      </a:r>
+                    </a:p>
+                  </a:txBody>
+                  <a:tcPr>
+                    <a:solidFill>
+                      <a:srgbClr val="F2F2F2"/>
+                    </a:solidFill>
+                  </a:tcPr>
+                </a:tc>
+                <a:tc>
+                  <a:txBody>
+                    <a:bodyPr/>
+                    <a:lstStyle/>
+                    <a:p>
+                      <a:pPr algn="l"/>
+                      <a:r>
+                        <a:rPr sz="1000" b="0">
+                          <a:solidFill>
+                            <a:srgbClr val="1D1B43"/>
+                          </a:solidFill>
+                          <a:latin typeface="Calibri"/>
+                        </a:rPr>
+                        <a:t>ENTREGUE FORA DO PRAZO</a:t>
+                      </a:r>
+                    </a:p>
+                  </a:txBody>
+                  <a:tcPr>
+                    <a:solidFill>
+                      <a:srgbClr val="F2F2F2"/>
+                    </a:solidFill>
+                  </a:tcPr>
+                </a:tc>
+              </a:tr>
+              <a:tr h="381000">
+                <a:tc>
+                  <a:txBody>
+                    <a:bodyPr/>
+                    <a:lstStyle/>
+                    <a:p>
+                      <a:pPr algn="l"/>
+                      <a:r>
+                        <a:rPr sz="1000" b="0">
+                          <a:solidFill>
+                            <a:srgbClr val="1D1B43"/>
+                          </a:solidFill>
+                          <a:latin typeface="Calibri"/>
+                        </a:rPr>
+                        <a:t>283921</a:t>
+                      </a:r>
+                    </a:p>
+                  </a:txBody>
+                  <a:tcPr>
+                    <a:solidFill>
+                      <a:srgbClr val="FFFFFF"/>
+                    </a:solidFill>
+                  </a:tcPr>
+                </a:tc>
+                <a:tc>
+                  <a:txBody>
+                    <a:bodyPr/>
+                    <a:lstStyle/>
+                    <a:p>
+                      <a:pPr algn="l"/>
+                      <a:r>
+                        <a:rPr sz="1000" b="0">
+                          <a:solidFill>
+                            <a:srgbClr val="1D1B43"/>
+                          </a:solidFill>
+                          <a:latin typeface="Calibri"/>
+                        </a:rPr>
+                        <a:t>RI HAPPY BRINQUEDOS - CUIABA / MT</a:t>
+                      </a:r>
+                    </a:p>
+                  </a:txBody>
+                  <a:tcPr>
+                    <a:solidFill>
+                      <a:srgbClr val="FFFFFF"/>
+                    </a:solidFill>
+                  </a:tcPr>
+                </a:tc>
+                <a:tc>
+                  <a:txBody>
+                    <a:bodyPr/>
+                    <a:lstStyle/>
+                    <a:p>
+                      <a:pPr algn="l"/>
+                      <a:r>
+                        <a:rPr sz="1000" b="0">
+                          <a:solidFill>
+                            <a:srgbClr val="1D1B43"/>
+                          </a:solidFill>
+                          <a:latin typeface="Calibri"/>
+                        </a:rPr>
+                        <a:t>CUIABA/MT</a:t>
+                      </a:r>
+                    </a:p>
+                  </a:txBody>
+                  <a:tcPr>
+                    <a:solidFill>
+                      <a:srgbClr val="FFFFFF"/>
+                    </a:solidFill>
+                  </a:tcPr>
+                </a:tc>
+                <a:tc>
+                  <a:txBody>
+                    <a:bodyPr/>
+                    <a:lstStyle/>
+                    <a:p>
+                      <a:pPr algn="l"/>
+                      <a:r>
+                        <a:rPr sz="1000" b="0">
+                          <a:solidFill>
+                            <a:srgbClr val="1D1B43"/>
+                          </a:solidFill>
+                          <a:latin typeface="Calibri"/>
+                        </a:rPr>
+                        <a:t>25/05/2026</a:t>
+                      </a:r>
+                    </a:p>
+                  </a:txBody>
+                  <a:tcPr>
+                    <a:solidFill>
+                      <a:srgbClr val="FFFFFF"/>
+                    </a:solidFill>
+                  </a:tcPr>
+                </a:tc>
+                <a:tc>
+                  <a:txBody>
+                    <a:bodyPr/>
+                    <a:lstStyle/>
+                    <a:p>
+                      <a:pPr algn="l"/>
+                      <a:r>
+                        <a:rPr sz="1000" b="0">
+                          <a:solidFill>
+                            <a:srgbClr val="1D1B43"/>
+                          </a:solidFill>
+                          <a:latin typeface="Calibri"/>
+                        </a:rPr>
+                        <a:t>FORA DO PRAZO</a:t>
+                      </a:r>
+                    </a:p>
+                  </a:txBody>
+                  <a:tcPr>
+                    <a:solidFill>
+                      <a:srgbClr val="FFFFFF"/>
+                    </a:solidFill>
+                  </a:tcPr>
+                </a:tc>
+              </a:tr>
+              <a:tr h="381000">
+                <a:tc>
+                  <a:txBody>
+                    <a:bodyPr/>
+                    <a:lstStyle/>
+                    <a:p>
+                      <a:pPr algn="l"/>
+                      <a:r>
+                        <a:rPr sz="1000" b="0">
+                          <a:solidFill>
+                            <a:srgbClr val="1D1B43"/>
+                          </a:solidFill>
+                          <a:latin typeface="Calibri"/>
+                        </a:rPr>
+                        <a:t>284094</a:t>
+                      </a:r>
+                    </a:p>
+                  </a:txBody>
+                  <a:tcPr>
+                    <a:solidFill>
+                      <a:srgbClr val="F2F2F2"/>
+                    </a:solidFill>
+                  </a:tcPr>
+                </a:tc>
+                <a:tc>
+                  <a:txBody>
+                    <a:bodyPr/>
+                    <a:lstStyle/>
+                    <a:p>
+                      <a:pPr algn="l"/>
+                      <a:r>
+                        <a:rPr sz="1000" b="0">
+                          <a:solidFill>
+                            <a:srgbClr val="1D1B43"/>
+                          </a:solidFill>
+                          <a:latin typeface="Calibri"/>
+                        </a:rPr>
+                        <a:t>KUKA PRODUTOS INFANT - SAO PAULO / SP</a:t>
+                      </a:r>
+                    </a:p>
+                  </a:txBody>
+                  <a:tcPr>
+                    <a:solidFill>
+                      <a:srgbClr val="F2F2F2"/>
+                    </a:solidFill>
+                  </a:tcPr>
+                </a:tc>
+                <a:tc>
+                  <a:txBody>
+                    <a:bodyPr/>
+                    <a:lstStyle/>
+                    <a:p>
+                      <a:pPr algn="l"/>
+                      <a:r>
+                        <a:rPr sz="1000" b="0">
+                          <a:solidFill>
+                            <a:srgbClr val="1D1B43"/>
+                          </a:solidFill>
+                          <a:latin typeface="Calibri"/>
+                        </a:rPr>
+                        <a:t>SAO PAULO/SP</a:t>
+                      </a:r>
+                    </a:p>
+                  </a:txBody>
+                  <a:tcPr>
+                    <a:solidFill>
+                      <a:srgbClr val="F2F2F2"/>
+                    </a:solidFill>
+                  </a:tcPr>
+                </a:tc>
+                <a:tc>
+                  <a:txBody>
+                    <a:bodyPr/>
+                    <a:lstStyle/>
+                    <a:p>
+                      <a:pPr algn="l"/>
+                      <a:r>
+                        <a:rPr sz="1000" b="0">
+                          <a:solidFill>
+                            <a:srgbClr val="1D1B43"/>
+                          </a:solidFill>
+                          <a:latin typeface="Calibri"/>
+                        </a:rPr>
+                        <a:t>20/05/2026</a:t>
+                      </a:r>
+                    </a:p>
+                  </a:txBody>
+                  <a:tcPr>
+                    <a:solidFill>
+                      <a:srgbClr val="F2F2F2"/>
+                    </a:solidFill>
+                  </a:tcPr>
+                </a:tc>
+                <a:tc>
+                  <a:txBody>
+                    <a:bodyPr/>
+                    <a:lstStyle/>
+                    <a:p>
+                      <a:pPr algn="l"/>
+                      <a:r>
+                        <a:rPr sz="1000" b="0">
+                          <a:solidFill>
+                            <a:srgbClr val="1D1B43"/>
+                          </a:solidFill>
+                          <a:latin typeface="Calibri"/>
+                        </a:rPr>
+                        <a:t>ENTREGUE FORA DO PRAZO</a:t>
+                      </a:r>
+                    </a:p>
+                  </a:txBody>
+                  <a:tcPr>
+                    <a:solidFill>
+                      <a:srgbClr val="F2F2F2"/>
+                    </a:solidFill>
+                  </a:tcPr>
+                </a:tc>
+              </a:tr>
+              <a:tr h="381000">
+                <a:tc>
+                  <a:txBody>
+                    <a:bodyPr/>
+                    <a:lstStyle/>
+                    <a:p>
+                      <a:pPr algn="l"/>
+                      <a:r>
+                        <a:rPr sz="1000" b="0">
+                          <a:solidFill>
+                            <a:srgbClr val="1D1B43"/>
+                          </a:solidFill>
+                          <a:latin typeface="Calibri"/>
+                        </a:rPr>
+                        <a:t>284345</a:t>
+                      </a:r>
+                    </a:p>
+                  </a:txBody>
+                  <a:tcPr>
+                    <a:solidFill>
+                      <a:srgbClr val="FFFFFF"/>
+                    </a:solidFill>
+                  </a:tcPr>
+                </a:tc>
+                <a:tc>
+                  <a:txBody>
+                    <a:bodyPr/>
+                    <a:lstStyle/>
+                    <a:p>
+                      <a:pPr algn="l"/>
+                      <a:r>
+                        <a:rPr sz="1000" b="0">
+                          <a:solidFill>
+                            <a:srgbClr val="1D1B43"/>
+                          </a:solidFill>
+                          <a:latin typeface="Calibri"/>
+                        </a:rPr>
+                        <a:t>MAC FER INDUSTRIA E - EMBU / SP</a:t>
+                      </a:r>
+                    </a:p>
+                  </a:txBody>
+                  <a:tcPr>
+                    <a:solidFill>
+                      <a:srgbClr val="FFFFFF"/>
+                    </a:solidFill>
+                  </a:tcPr>
+                </a:tc>
+                <a:tc>
+                  <a:txBody>
+                    <a:bodyPr/>
+                    <a:lstStyle/>
+                    <a:p>
+                      <a:pPr algn="l"/>
+                      <a:r>
+                        <a:rPr sz="1000" b="0">
+                          <a:solidFill>
+                            <a:srgbClr val="1D1B43"/>
+                          </a:solidFill>
+                          <a:latin typeface="Calibri"/>
+                        </a:rPr>
+                        <a:t>EMBU/SP</a:t>
+                      </a:r>
+                    </a:p>
+                  </a:txBody>
+                  <a:tcPr>
+                    <a:solidFill>
+                      <a:srgbClr val="FFFFFF"/>
+                    </a:solidFill>
+                  </a:tcPr>
+                </a:tc>
+                <a:tc>
+                  <a:txBody>
+                    <a:bodyPr/>
+                    <a:lstStyle/>
+                    <a:p>
+                      <a:pPr algn="l"/>
+                      <a:r>
+                        <a:rPr sz="1000" b="0">
+                          <a:solidFill>
+                            <a:srgbClr val="1D1B43"/>
+                          </a:solidFill>
+                          <a:latin typeface="Calibri"/>
+                        </a:rPr>
+                        <a:t>27/05/2026</a:t>
+                      </a:r>
+                    </a:p>
+                  </a:txBody>
+                  <a:tcPr>
+                    <a:solidFill>
+                      <a:srgbClr val="FFFFFF"/>
+                    </a:solidFill>
+                  </a:tcPr>
+                </a:tc>
+                <a:tc>
+                  <a:txBody>
+                    <a:bodyPr/>
+                    <a:lstStyle/>
+                    <a:p>
+                      <a:pPr algn="l"/>
+                      <a:r>
+                        <a:rPr sz="1000" b="0">
+                          <a:solidFill>
+                            <a:srgbClr val="1D1B43"/>
+                          </a:solidFill>
+                          <a:latin typeface="Calibri"/>
+                        </a:rPr>
+                        <a:t>FORA DO PRAZO</a:t>
+                      </a:r>
+                    </a:p>
+                  </a:txBody>
+                  <a:tcPr>
+                    <a:solidFill>
+                      <a:srgbClr val="FFFFFF"/>
+                    </a:solidFill>
+                  </a:tcPr>
+                </a:tc>
+              </a:tr>
+              <a:tr h="381000">
+                <a:tc>
+                  <a:txBody>
+                    <a:bodyPr/>
+                    <a:lstStyle/>
+                    <a:p>
+                      <a:pPr algn="l"/>
+                      <a:r>
+                        <a:rPr sz="1000" b="0">
+                          <a:solidFill>
+                            <a:srgbClr val="1D1B43"/>
+                          </a:solidFill>
+                          <a:latin typeface="Calibri"/>
+                        </a:rPr>
+                        <a:t>284397</a:t>
+                      </a:r>
+                    </a:p>
+                  </a:txBody>
+                  <a:tcPr>
+                    <a:solidFill>
+                      <a:srgbClr val="F2F2F2"/>
+                    </a:solidFill>
+                  </a:tcPr>
+                </a:tc>
+                <a:tc>
+                  <a:txBody>
+                    <a:bodyPr/>
+                    <a:lstStyle/>
+                    <a:p>
+                      <a:pPr algn="l"/>
+                      <a:r>
+                        <a:rPr sz="1000" b="0">
+                          <a:solidFill>
+                            <a:srgbClr val="1D1B43"/>
+                          </a:solidFill>
+                          <a:latin typeface="Calibri"/>
+                        </a:rPr>
+                        <a:t>ADALBERTO BOLAINO - COTIA / SP</a:t>
+                      </a:r>
+                    </a:p>
+                  </a:txBody>
+                  <a:tcPr>
+                    <a:solidFill>
+                      <a:srgbClr val="F2F2F2"/>
+                    </a:solidFill>
+                  </a:tcPr>
+                </a:tc>
+                <a:tc>
+                  <a:txBody>
+                    <a:bodyPr/>
+                    <a:lstStyle/>
+                    <a:p>
+                      <a:pPr algn="l"/>
+                      <a:r>
+                        <a:rPr sz="1000" b="0">
+                          <a:solidFill>
+                            <a:srgbClr val="1D1B43"/>
+                          </a:solidFill>
+                          <a:latin typeface="Calibri"/>
+                        </a:rPr>
+                        <a:t>COTIA/SP</a:t>
+                      </a:r>
+                    </a:p>
+                  </a:txBody>
+                  <a:tcPr>
+                    <a:solidFill>
+                      <a:srgbClr val="F2F2F2"/>
+                    </a:solidFill>
+                  </a:tcPr>
+                </a:tc>
+                <a:tc>
+                  <a:txBody>
+                    <a:bodyPr/>
+                    <a:lstStyle/>
+                    <a:p>
+                      <a:pPr algn="l"/>
+                      <a:r>
+                        <a:rPr sz="1000" b="0">
+                          <a:solidFill>
+                            <a:srgbClr val="1D1B43"/>
+                          </a:solidFill>
+                          <a:latin typeface="Calibri"/>
+                        </a:rPr>
+                        <a:t>28/05/2026</a:t>
+                      </a:r>
+                    </a:p>
+                  </a:txBody>
+                  <a:tcPr>
+                    <a:solidFill>
+                      <a:srgbClr val="F2F2F2"/>
+                    </a:solidFill>
+                  </a:tcPr>
+                </a:tc>
+                <a:tc>
+                  <a:txBody>
+                    <a:bodyPr/>
+                    <a:lstStyle/>
+                    <a:p>
+                      <a:pPr algn="l"/>
+                      <a:r>
+                        <a:rPr sz="1000" b="0">
+                          <a:solidFill>
+                            <a:srgbClr val="1D1B43"/>
+                          </a:solidFill>
+                          <a:latin typeface="Calibri"/>
+                        </a:rPr>
+                        <a:t>FORA DO PRAZO</a:t>
+                      </a:r>
+                    </a:p>
+                  </a:txBody>
+                  <a:tcPr>
+                    <a:solidFill>
+                      <a:srgbClr val="F2F2F2"/>
+                    </a:solidFill>
+                  </a:tcPr>
+                </a:tc>
+              </a:tr>
+              <a:tr h="381000">
+                <a:tc>
+                  <a:txBody>
+                    <a:bodyPr/>
+                    <a:lstStyle/>
+                    <a:p>
+                      <a:pPr algn="l"/>
+                      <a:r>
+                        <a:rPr sz="1000" b="0">
+                          <a:solidFill>
+                            <a:srgbClr val="1D1B43"/>
+                          </a:solidFill>
+                          <a:latin typeface="Calibri"/>
+                        </a:rPr>
+                        <a:t>284756</a:t>
+                      </a:r>
+                    </a:p>
+                  </a:txBody>
+                  <a:tcPr>
+                    <a:solidFill>
+                      <a:srgbClr val="FFFFFF"/>
+                    </a:solidFill>
+                  </a:tcPr>
+                </a:tc>
+                <a:tc>
+                  <a:txBody>
+                    <a:bodyPr/>
+                    <a:lstStyle/>
+                    <a:p>
+                      <a:pPr algn="l"/>
+                      <a:r>
+                        <a:rPr sz="1000" b="0">
+                          <a:solidFill>
+                            <a:srgbClr val="1D1B43"/>
+                          </a:solidFill>
+                          <a:latin typeface="Calibri"/>
+                        </a:rPr>
+                        <a:t>DIRCEU TAMANHO - ITA / SC</a:t>
+                      </a:r>
+                    </a:p>
+                  </a:txBody>
+                  <a:tcPr>
+                    <a:solidFill>
+                      <a:srgbClr val="FFFFFF"/>
+                    </a:solidFill>
+                  </a:tcPr>
+                </a:tc>
+                <a:tc>
+                  <a:txBody>
+                    <a:bodyPr/>
+                    <a:lstStyle/>
+                    <a:p>
+                      <a:pPr algn="l"/>
+                      <a:r>
+                        <a:rPr sz="1000" b="0">
+                          <a:solidFill>
+                            <a:srgbClr val="1D1B43"/>
+                          </a:solidFill>
+                          <a:latin typeface="Calibri"/>
+                        </a:rPr>
+                        <a:t>ITA/SC</a:t>
+                      </a:r>
+                    </a:p>
+                  </a:txBody>
+                  <a:tcPr>
+                    <a:solidFill>
+                      <a:srgbClr val="FFFFFF"/>
+                    </a:solidFill>
+                  </a:tcPr>
+                </a:tc>
+                <a:tc>
+                  <a:txBody>
+                    <a:bodyPr/>
+                    <a:lstStyle/>
+                    <a:p>
+                      <a:pPr algn="l"/>
+                      <a:r>
+                        <a:rPr sz="1000" b="0">
+                          <a:solidFill>
+                            <a:srgbClr val="1D1B43"/>
+                          </a:solidFill>
+                          <a:latin typeface="Calibri"/>
+                        </a:rPr>
+                        <a:t>29/05/2026</a:t>
+                      </a:r>
+                    </a:p>
+                  </a:txBody>
+                  <a:tcPr>
+                    <a:solidFill>
+                      <a:srgbClr val="FFFFFF"/>
+                    </a:solidFill>
+                  </a:tcPr>
+                </a:tc>
+                <a:tc>
+                  <a:txBody>
+                    <a:bodyPr/>
+                    <a:lstStyle/>
+                    <a:p>
+                      <a:pPr algn="l"/>
+                      <a:r>
+                        <a:rPr sz="1000" b="0">
+                          <a:solidFill>
+                            <a:srgbClr val="1D1B43"/>
+                          </a:solidFill>
+                          <a:latin typeface="Calibri"/>
+                        </a:rPr>
+                        <a:t>FORA DO PRAZO</a:t>
+                      </a:r>
+                    </a:p>
+                  </a:txBody>
+                  <a:tcPr>
+                    <a:solidFill>
+                      <a:srgbClr val="FFFFFF"/>
+                    </a:solidFill>
+                  </a:tcPr>
+                </a:tc>
+              </a:tr>
+              <a:tr h="381000">
+                <a:tc>
+                  <a:txBody>
+                    <a:bodyPr/>
+                    <a:lstStyle/>
+                    <a:p>
+                      <a:pPr algn="l"/>
+                      <a:r>
+                        <a:rPr sz="1000" b="0">
+                          <a:solidFill>
+                            <a:srgbClr val="1D1B43"/>
+                          </a:solidFill>
+                          <a:latin typeface="Calibri"/>
+                        </a:rPr>
+                        <a:t>285519</a:t>
+                      </a:r>
+                    </a:p>
+                  </a:txBody>
+                  <a:tcPr>
+                    <a:solidFill>
+                      <a:srgbClr val="F2F2F2"/>
+                    </a:solidFill>
+                  </a:tcPr>
+                </a:tc>
+                <a:tc>
+                  <a:txBody>
+                    <a:bodyPr/>
+                    <a:lstStyle/>
+                    <a:p>
+                      <a:pPr algn="l"/>
+                      <a:r>
+                        <a:rPr sz="1000" b="0">
+                          <a:solidFill>
+                            <a:srgbClr val="1D1B43"/>
+                          </a:solidFill>
+                          <a:latin typeface="Calibri"/>
+                        </a:rPr>
+                        <a:t>ABECOM ROLAMENTOS E - SAO PAULO / SP</a:t>
+                      </a:r>
+                    </a:p>
+                  </a:txBody>
+                  <a:tcPr>
+                    <a:solidFill>
+                      <a:srgbClr val="F2F2F2"/>
+                    </a:solidFill>
+                  </a:tcPr>
+                </a:tc>
+                <a:tc>
+                  <a:txBody>
+                    <a:bodyPr/>
+                    <a:lstStyle/>
+                    <a:p>
+                      <a:pPr algn="l"/>
+                      <a:r>
+                        <a:rPr sz="1000" b="0">
+                          <a:solidFill>
+                            <a:srgbClr val="1D1B43"/>
+                          </a:solidFill>
+                          <a:latin typeface="Calibri"/>
+                        </a:rPr>
+                        <a:t>SAO PAULO/SP</a:t>
+                      </a:r>
+                    </a:p>
+                  </a:txBody>
+                  <a:tcPr>
+                    <a:solidFill>
+                      <a:srgbClr val="F2F2F2"/>
+                    </a:solidFill>
+                  </a:tcPr>
+                </a:tc>
+                <a:tc>
+                  <a:txBody>
+                    <a:bodyPr/>
+                    <a:lstStyle/>
+                    <a:p>
+                      <a:pPr algn="l"/>
+                      <a:r>
+                        <a:rPr sz="1000" b="0">
+                          <a:solidFill>
+                            <a:srgbClr val="1D1B43"/>
+                          </a:solidFill>
+                          <a:latin typeface="Calibri"/>
+                        </a:rPr>
+                        <a:t>28/05/2026</a:t>
+                      </a:r>
+                    </a:p>
+                  </a:txBody>
+                  <a:tcPr>
+                    <a:solidFill>
+                      <a:srgbClr val="F2F2F2"/>
+                    </a:solidFill>
+                  </a:tcPr>
+                </a:tc>
+                <a:tc>
+                  <a:txBody>
+                    <a:bodyPr/>
+                    <a:lstStyle/>
+                    <a:p>
+                      <a:pPr algn="l"/>
+                      <a:r>
+                        <a:rPr sz="1000" b="0">
+                          <a:solidFill>
+                            <a:srgbClr val="1D1B43"/>
+                          </a:solidFill>
+                          <a:latin typeface="Calibri"/>
+                        </a:rPr>
+                        <a:t>ENTREGUE FORA DO PRAZO</a:t>
+                      </a:r>
+                    </a:p>
+                  </a:txBody>
+                  <a:tcPr>
+                    <a:solidFill>
+                      <a:srgbClr val="F2F2F2"/>
+                    </a:solidFill>
+                  </a:tcPr>
+                </a:tc>
+              </a:tr>
+              <a:tr h="381000">
+                <a:tc>
+                  <a:txBody>
+                    <a:bodyPr/>
+                    <a:lstStyle/>
+                    <a:p>
+                      <a:pPr algn="l"/>
+                      <a:r>
+                        <a:rPr sz="1000" b="0">
+                          <a:solidFill>
+                            <a:srgbClr val="1D1B43"/>
+                          </a:solidFill>
+                          <a:latin typeface="Calibri"/>
+                        </a:rPr>
+                        <a:t>285685</a:t>
+                      </a:r>
+                    </a:p>
+                  </a:txBody>
+                  <a:tcPr>
+                    <a:solidFill>
+                      <a:srgbClr val="FFFFFF"/>
+                    </a:solidFill>
+                  </a:tcPr>
+                </a:tc>
+                <a:tc>
+                  <a:txBody>
+                    <a:bodyPr/>
+                    <a:lstStyle/>
+                    <a:p>
+                      <a:pPr algn="l"/>
+                      <a:r>
+                        <a:rPr sz="1000" b="0">
+                          <a:solidFill>
+                            <a:srgbClr val="1D1B43"/>
+                          </a:solidFill>
+                          <a:latin typeface="Calibri"/>
+                        </a:rPr>
+                        <a:t>PORTOEX SP - SAO PAULO / SP</a:t>
+                      </a:r>
+                    </a:p>
+                  </a:txBody>
+                  <a:tcPr>
+                    <a:solidFill>
+                      <a:srgbClr val="FFFFFF"/>
+                    </a:solidFill>
+                  </a:tcPr>
+                </a:tc>
+                <a:tc>
+                  <a:txBody>
+                    <a:bodyPr/>
+                    <a:lstStyle/>
+                    <a:p>
+                      <a:pPr algn="l"/>
+                      <a:r>
+                        <a:rPr sz="1000" b="0">
+                          <a:solidFill>
+                            <a:srgbClr val="1D1B43"/>
+                          </a:solidFill>
+                          <a:latin typeface="Calibri"/>
+                        </a:rPr>
+                        <a:t>SAO PAULO/SP</a:t>
+                      </a:r>
+                    </a:p>
+                  </a:txBody>
+                  <a:tcPr>
+                    <a:solidFill>
+                      <a:srgbClr val="FFFFFF"/>
+                    </a:solidFill>
+                  </a:tcPr>
+                </a:tc>
+                <a:tc>
+                  <a:txBody>
+                    <a:bodyPr/>
+                    <a:lstStyle/>
+                    <a:p>
+                      <a:pPr algn="l"/>
+                      <a:r>
+                        <a:rPr sz="1000" b="0">
+                          <a:solidFill>
+                            <a:srgbClr val="1D1B43"/>
+                          </a:solidFill>
+                          <a:latin typeface="Calibri"/>
+                        </a:rPr>
+                        <a:t>29/05/2026</a:t>
+                      </a:r>
+                    </a:p>
+                  </a:txBody>
+                  <a:tcPr>
+                    <a:solidFill>
+                      <a:srgbClr val="FFFFFF"/>
+                    </a:solidFill>
+                  </a:tcPr>
+                </a:tc>
+                <a:tc>
+                  <a:txBody>
+                    <a:bodyPr/>
+                    <a:lstStyle/>
+                    <a:p>
+                      <a:pPr algn="l"/>
+                      <a:r>
+                        <a:rPr sz="1000" b="0">
+                          <a:solidFill>
+                            <a:srgbClr val="1D1B43"/>
+                          </a:solidFill>
+                          <a:latin typeface="Calibri"/>
+                        </a:rPr>
+                        <a:t>FORA DO PRAZO</a:t>
                       </a:r>
                     </a:p>
                   </a:txBody>
@@ -5724,7 +6894,7 @@
         </p:nvGraphicFramePr>
         <p:xfrm>
           <a:off x="731520" y="1920240"/>
-          <a:ext cx="10698480" cy="4389120"/>
+          <a:ext cx="10698480" cy="4389110"/>
         </p:xfrm>
         <a:graphic>
           <a:graphicData uri="http://schemas.openxmlformats.org/drawingml/2006/table">
@@ -5740,7 +6910,7 @@
                 <a:gridCol w="1554480"/>
                 <a:gridCol w="3108960"/>
               </a:tblGrid>
-              <a:tr h="438912">
+              <a:tr h="399010">
                 <a:tc>
                   <a:txBody>
                     <a:bodyPr/>
@@ -5880,7 +7050,147 @@
                   </a:tcPr>
                 </a:tc>
               </a:tr>
-              <a:tr h="438912">
+              <a:tr h="399010">
+                <a:tc>
+                  <a:txBody>
+                    <a:bodyPr/>
+                    <a:lstStyle/>
+                    <a:p>
+                      <a:pPr algn="l"/>
+                      <a:r>
+                        <a:rPr sz="1000" b="0">
+                          <a:solidFill>
+                            <a:srgbClr val="1D1B43"/>
+                          </a:solidFill>
+                          <a:latin typeface="Calibri"/>
+                        </a:rPr>
+                        <a:t>SP</a:t>
+                      </a:r>
+                    </a:p>
+                  </a:txBody>
+                  <a:tcPr>
+                    <a:solidFill>
+                      <a:srgbClr val="FFFFFF"/>
+                    </a:solidFill>
+                  </a:tcPr>
+                </a:tc>
+                <a:tc>
+                  <a:txBody>
+                    <a:bodyPr/>
+                    <a:lstStyle/>
+                    <a:p>
+                      <a:pPr algn="l"/>
+                      <a:r>
+                        <a:rPr sz="1000" b="0">
+                          <a:solidFill>
+                            <a:srgbClr val="1D1B43"/>
+                          </a:solidFill>
+                          <a:latin typeface="Calibri"/>
+                        </a:rPr>
+                        <a:t>125</a:t>
+                      </a:r>
+                    </a:p>
+                  </a:txBody>
+                  <a:tcPr>
+                    <a:solidFill>
+                      <a:srgbClr val="FFFFFF"/>
+                    </a:solidFill>
+                  </a:tcPr>
+                </a:tc>
+                <a:tc>
+                  <a:txBody>
+                    <a:bodyPr/>
+                    <a:lstStyle/>
+                    <a:p>
+                      <a:pPr algn="l"/>
+                      <a:r>
+                        <a:rPr sz="1000" b="0">
+                          <a:solidFill>
+                            <a:srgbClr val="1D1B43"/>
+                          </a:solidFill>
+                          <a:latin typeface="Calibri"/>
+                        </a:rPr>
+                        <a:t>118</a:t>
+                      </a:r>
+                    </a:p>
+                  </a:txBody>
+                  <a:tcPr>
+                    <a:solidFill>
+                      <a:srgbClr val="FFFFFF"/>
+                    </a:solidFill>
+                  </a:tcPr>
+                </a:tc>
+                <a:tc>
+                  <a:txBody>
+                    <a:bodyPr/>
+                    <a:lstStyle/>
+                    <a:p>
+                      <a:pPr algn="l"/>
+                      <a:r>
+                        <a:rPr sz="1000" b="0">
+                          <a:solidFill>
+                            <a:srgbClr val="1D1B43"/>
+                          </a:solidFill>
+                          <a:latin typeface="Calibri"/>
+                        </a:rPr>
+                        <a:t>7</a:t>
+                      </a:r>
+                    </a:p>
+                  </a:txBody>
+                  <a:tcPr>
+                    <a:solidFill>
+                      <a:srgbClr val="FFFFFF"/>
+                    </a:solidFill>
+                  </a:tcPr>
+                </a:tc>
+                <a:tc>
+                  <a:txBody>
+                    <a:bodyPr/>
+                    <a:lstStyle/>
+                    <a:p>
+                      <a:pPr algn="l"/>
+                      <a:r>
+                        <a:rPr sz="1000" b="0">
+                          <a:solidFill>
+                            <a:srgbClr val="1D1B43"/>
+                          </a:solidFill>
+                          <a:latin typeface="Calibri"/>
+                        </a:rPr>
+                        <a:t>94.4%</a:t>
+                      </a:r>
+                    </a:p>
+                  </a:txBody>
+                  <a:tcPr>
+                    <a:solidFill>
+                      <a:srgbClr val="FFFFFF"/>
+                    </a:solidFill>
+                  </a:tcPr>
+                </a:tc>
+                <a:tc>
+                  <a:txBody>
+                    <a:bodyPr/>
+                    <a:lstStyle/>
+                    <a:p>
+                      <a:pPr algn="l"/>
+                      <a:r>
+                        <a:rPr sz="1000" b="0">
+                          <a:solidFill>
+                            <a:srgbClr val="1D1B43"/>
+                          </a:solidFill>
+                          <a:latin typeface="Calibri"/>
+                        </a:rPr>
+                        <a:t>Regular</a:t>
+                      </a:r>
+                    </a:p>
+                  </a:txBody>
+                  <a:tcPr>
+                    <a:solidFill>
+                      <a:srgbClr val="FFFFFF"/>
+                    </a:solidFill>
+                  </a:tcPr>
+                </a:tc>
+              </a:tr>
+              <a:tr h="399010">
                 <a:tc>
                   <a:txBody>
                     <a:bodyPr/>
@@ -5900,53 +7210,333 @@
                   </a:txBody>
                   <a:tcPr>
                     <a:solidFill>
-                      <a:srgbClr val="FFFFFF"/>
-                    </a:solidFill>
-                  </a:tcPr>
-                </a:tc>
-                <a:tc>
-                  <a:txBody>
-                    <a:bodyPr/>
-                    <a:lstStyle/>
-                    <a:p>
-                      <a:pPr algn="l"/>
-                      <a:r>
-                        <a:rPr sz="1000" b="0">
-                          <a:solidFill>
-                            <a:srgbClr val="1D1B43"/>
-                          </a:solidFill>
-                          <a:latin typeface="Calibri"/>
-                        </a:rPr>
-                        <a:t>16</a:t>
-                      </a:r>
-                    </a:p>
-                  </a:txBody>
-                  <a:tcPr>
-                    <a:solidFill>
-                      <a:srgbClr val="FFFFFF"/>
-                    </a:solidFill>
-                  </a:tcPr>
-                </a:tc>
-                <a:tc>
-                  <a:txBody>
-                    <a:bodyPr/>
-                    <a:lstStyle/>
-                    <a:p>
-                      <a:pPr algn="l"/>
-                      <a:r>
-                        <a:rPr sz="1000" b="0">
-                          <a:solidFill>
-                            <a:srgbClr val="1D1B43"/>
-                          </a:solidFill>
-                          <a:latin typeface="Calibri"/>
-                        </a:rPr>
-                        <a:t>16</a:t>
-                      </a:r>
-                    </a:p>
-                  </a:txBody>
-                  <a:tcPr>
-                    <a:solidFill>
-                      <a:srgbClr val="FFFFFF"/>
+                      <a:srgbClr val="F2F2F2"/>
+                    </a:solidFill>
+                  </a:tcPr>
+                </a:tc>
+                <a:tc>
+                  <a:txBody>
+                    <a:bodyPr/>
+                    <a:lstStyle/>
+                    <a:p>
+                      <a:pPr algn="l"/>
+                      <a:r>
+                        <a:rPr sz="1000" b="0">
+                          <a:solidFill>
+                            <a:srgbClr val="1D1B43"/>
+                          </a:solidFill>
+                          <a:latin typeface="Calibri"/>
+                        </a:rPr>
+                        <a:t>20</a:t>
+                      </a:r>
+                    </a:p>
+                  </a:txBody>
+                  <a:tcPr>
+                    <a:solidFill>
+                      <a:srgbClr val="F2F2F2"/>
+                    </a:solidFill>
+                  </a:tcPr>
+                </a:tc>
+                <a:tc>
+                  <a:txBody>
+                    <a:bodyPr/>
+                    <a:lstStyle/>
+                    <a:p>
+                      <a:pPr algn="l"/>
+                      <a:r>
+                        <a:rPr sz="1000" b="0">
+                          <a:solidFill>
+                            <a:srgbClr val="1D1B43"/>
+                          </a:solidFill>
+                          <a:latin typeface="Calibri"/>
+                        </a:rPr>
+                        <a:t>18</a:t>
+                      </a:r>
+                    </a:p>
+                  </a:txBody>
+                  <a:tcPr>
+                    <a:solidFill>
+                      <a:srgbClr val="F2F2F2"/>
+                    </a:solidFill>
+                  </a:tcPr>
+                </a:tc>
+                <a:tc>
+                  <a:txBody>
+                    <a:bodyPr/>
+                    <a:lstStyle/>
+                    <a:p>
+                      <a:pPr algn="l"/>
+                      <a:r>
+                        <a:rPr sz="1000" b="0">
+                          <a:solidFill>
+                            <a:srgbClr val="1D1B43"/>
+                          </a:solidFill>
+                          <a:latin typeface="Calibri"/>
+                        </a:rPr>
+                        <a:t>2</a:t>
+                      </a:r>
+                    </a:p>
+                  </a:txBody>
+                  <a:tcPr>
+                    <a:solidFill>
+                      <a:srgbClr val="F2F2F2"/>
+                    </a:solidFill>
+                  </a:tcPr>
+                </a:tc>
+                <a:tc>
+                  <a:txBody>
+                    <a:bodyPr/>
+                    <a:lstStyle/>
+                    <a:p>
+                      <a:pPr algn="l"/>
+                      <a:r>
+                        <a:rPr sz="1000" b="0">
+                          <a:solidFill>
+                            <a:srgbClr val="1D1B43"/>
+                          </a:solidFill>
+                          <a:latin typeface="Calibri"/>
+                        </a:rPr>
+                        <a:t>90.0%</a:t>
+                      </a:r>
+                    </a:p>
+                  </a:txBody>
+                  <a:tcPr>
+                    <a:solidFill>
+                      <a:srgbClr val="F2F2F2"/>
+                    </a:solidFill>
+                  </a:tcPr>
+                </a:tc>
+                <a:tc>
+                  <a:txBody>
+                    <a:bodyPr/>
+                    <a:lstStyle/>
+                    <a:p>
+                      <a:pPr algn="l"/>
+                      <a:r>
+                        <a:rPr sz="1000" b="0">
+                          <a:solidFill>
+                            <a:srgbClr val="1D1B43"/>
+                          </a:solidFill>
+                          <a:latin typeface="Calibri"/>
+                        </a:rPr>
+                        <a:t>Regular</a:t>
+                      </a:r>
+                    </a:p>
+                  </a:txBody>
+                  <a:tcPr>
+                    <a:solidFill>
+                      <a:srgbClr val="F2F2F2"/>
+                    </a:solidFill>
+                  </a:tcPr>
+                </a:tc>
+              </a:tr>
+              <a:tr h="399010">
+                <a:tc>
+                  <a:txBody>
+                    <a:bodyPr/>
+                    <a:lstStyle/>
+                    <a:p>
+                      <a:pPr algn="l"/>
+                      <a:r>
+                        <a:rPr sz="1000" b="0">
+                          <a:solidFill>
+                            <a:srgbClr val="1D1B43"/>
+                          </a:solidFill>
+                          <a:latin typeface="Calibri"/>
+                        </a:rPr>
+                        <a:t>GO</a:t>
+                      </a:r>
+                    </a:p>
+                  </a:txBody>
+                  <a:tcPr>
+                    <a:solidFill>
+                      <a:srgbClr val="FFFFFF"/>
+                    </a:solidFill>
+                  </a:tcPr>
+                </a:tc>
+                <a:tc>
+                  <a:txBody>
+                    <a:bodyPr/>
+                    <a:lstStyle/>
+                    <a:p>
+                      <a:pPr algn="l"/>
+                      <a:r>
+                        <a:rPr sz="1000" b="0">
+                          <a:solidFill>
+                            <a:srgbClr val="1D1B43"/>
+                          </a:solidFill>
+                          <a:latin typeface="Calibri"/>
+                        </a:rPr>
+                        <a:t>4</a:t>
+                      </a:r>
+                    </a:p>
+                  </a:txBody>
+                  <a:tcPr>
+                    <a:solidFill>
+                      <a:srgbClr val="FFFFFF"/>
+                    </a:solidFill>
+                  </a:tcPr>
+                </a:tc>
+                <a:tc>
+                  <a:txBody>
+                    <a:bodyPr/>
+                    <a:lstStyle/>
+                    <a:p>
+                      <a:pPr algn="l"/>
+                      <a:r>
+                        <a:rPr sz="1000" b="0">
+                          <a:solidFill>
+                            <a:srgbClr val="1D1B43"/>
+                          </a:solidFill>
+                          <a:latin typeface="Calibri"/>
+                        </a:rPr>
+                        <a:t>3</a:t>
+                      </a:r>
+                    </a:p>
+                  </a:txBody>
+                  <a:tcPr>
+                    <a:solidFill>
+                      <a:srgbClr val="FFFFFF"/>
+                    </a:solidFill>
+                  </a:tcPr>
+                </a:tc>
+                <a:tc>
+                  <a:txBody>
+                    <a:bodyPr/>
+                    <a:lstStyle/>
+                    <a:p>
+                      <a:pPr algn="l"/>
+                      <a:r>
+                        <a:rPr sz="1000" b="0">
+                          <a:solidFill>
+                            <a:srgbClr val="1D1B43"/>
+                          </a:solidFill>
+                          <a:latin typeface="Calibri"/>
+                        </a:rPr>
+                        <a:t>1</a:t>
+                      </a:r>
+                    </a:p>
+                  </a:txBody>
+                  <a:tcPr>
+                    <a:solidFill>
+                      <a:srgbClr val="FFFFFF"/>
+                    </a:solidFill>
+                  </a:tcPr>
+                </a:tc>
+                <a:tc>
+                  <a:txBody>
+                    <a:bodyPr/>
+                    <a:lstStyle/>
+                    <a:p>
+                      <a:pPr algn="l"/>
+                      <a:r>
+                        <a:rPr sz="1000" b="0">
+                          <a:solidFill>
+                            <a:srgbClr val="1D1B43"/>
+                          </a:solidFill>
+                          <a:latin typeface="Calibri"/>
+                        </a:rPr>
+                        <a:t>75.0%</a:t>
+                      </a:r>
+                    </a:p>
+                  </a:txBody>
+                  <a:tcPr>
+                    <a:solidFill>
+                      <a:srgbClr val="FFFFFF"/>
+                    </a:solidFill>
+                  </a:tcPr>
+                </a:tc>
+                <a:tc>
+                  <a:txBody>
+                    <a:bodyPr/>
+                    <a:lstStyle/>
+                    <a:p>
+                      <a:pPr algn="l"/>
+                      <a:r>
+                        <a:rPr sz="1000" b="0">
+                          <a:solidFill>
+                            <a:srgbClr val="1D1B43"/>
+                          </a:solidFill>
+                          <a:latin typeface="Calibri"/>
+                        </a:rPr>
+                        <a:t>Atencao</a:t>
+                      </a:r>
+                    </a:p>
+                  </a:txBody>
+                  <a:tcPr>
+                    <a:solidFill>
+                      <a:srgbClr val="FFFFFF"/>
+                    </a:solidFill>
+                  </a:tcPr>
+                </a:tc>
+              </a:tr>
+              <a:tr h="399010">
+                <a:tc>
+                  <a:txBody>
+                    <a:bodyPr/>
+                    <a:lstStyle/>
+                    <a:p>
+                      <a:pPr algn="l"/>
+                      <a:r>
+                        <a:rPr sz="1000" b="0">
+                          <a:solidFill>
+                            <a:srgbClr val="1D1B43"/>
+                          </a:solidFill>
+                          <a:latin typeface="Calibri"/>
+                        </a:rPr>
+                        <a:t>BA</a:t>
+                      </a:r>
+                    </a:p>
+                  </a:txBody>
+                  <a:tcPr>
+                    <a:solidFill>
+                      <a:srgbClr val="F2F2F2"/>
+                    </a:solidFill>
+                  </a:tcPr>
+                </a:tc>
+                <a:tc>
+                  <a:txBody>
+                    <a:bodyPr/>
+                    <a:lstStyle/>
+                    <a:p>
+                      <a:pPr algn="l"/>
+                      <a:r>
+                        <a:rPr sz="1000" b="0">
+                          <a:solidFill>
+                            <a:srgbClr val="1D1B43"/>
+                          </a:solidFill>
+                          <a:latin typeface="Calibri"/>
+                        </a:rPr>
+                        <a:t>2</a:t>
+                      </a:r>
+                    </a:p>
+                  </a:txBody>
+                  <a:tcPr>
+                    <a:solidFill>
+                      <a:srgbClr val="F2F2F2"/>
+                    </a:solidFill>
+                  </a:tcPr>
+                </a:tc>
+                <a:tc>
+                  <a:txBody>
+                    <a:bodyPr/>
+                    <a:lstStyle/>
+                    <a:p>
+                      <a:pPr algn="l"/>
+                      <a:r>
+                        <a:rPr sz="1000" b="0">
+                          <a:solidFill>
+                            <a:srgbClr val="1D1B43"/>
+                          </a:solidFill>
+                          <a:latin typeface="Calibri"/>
+                        </a:rPr>
+                        <a:t>2</a:t>
+                      </a:r>
+                    </a:p>
+                  </a:txBody>
+                  <a:tcPr>
+                    <a:solidFill>
+                      <a:srgbClr val="F2F2F2"/>
                     </a:solidFill>
                   </a:tcPr>
                 </a:tc>
@@ -5969,7 +7559,7 @@
                   </a:txBody>
                   <a:tcPr>
                     <a:solidFill>
-                      <a:srgbClr val="FFFFFF"/>
+                      <a:srgbClr val="F2F2F2"/>
                     </a:solidFill>
                   </a:tcPr>
                 </a:tc>
@@ -5992,7 +7582,7 @@
                   </a:txBody>
                   <a:tcPr>
                     <a:solidFill>
-                      <a:srgbClr val="FFFFFF"/>
+                      <a:srgbClr val="F2F2F2"/>
                     </a:solidFill>
                   </a:tcPr>
                 </a:tc>
@@ -6015,26 +7605,166 @@
                   </a:txBody>
                   <a:tcPr>
                     <a:solidFill>
-                      <a:srgbClr val="FFFFFF"/>
+                      <a:srgbClr val="F2F2F2"/>
                     </a:solidFill>
                   </a:tcPr>
                 </a:tc>
               </a:tr>
-              <a:tr h="438912">
-                <a:tc>
-                  <a:txBody>
-                    <a:bodyPr/>
-                    <a:lstStyle/>
-                    <a:p>
-                      <a:pPr algn="l"/>
-                      <a:r>
-                        <a:rPr sz="1000" b="0">
-                          <a:solidFill>
-                            <a:srgbClr val="1D1B43"/>
-                          </a:solidFill>
-                          <a:latin typeface="Calibri"/>
-                        </a:rPr>
-                        <a:t>SP</a:t>
+              <a:tr h="399010">
+                <a:tc>
+                  <a:txBody>
+                    <a:bodyPr/>
+                    <a:lstStyle/>
+                    <a:p>
+                      <a:pPr algn="l"/>
+                      <a:r>
+                        <a:rPr sz="1000" b="0">
+                          <a:solidFill>
+                            <a:srgbClr val="1D1B43"/>
+                          </a:solidFill>
+                          <a:latin typeface="Calibri"/>
+                        </a:rPr>
+                        <a:t>MG</a:t>
+                      </a:r>
+                    </a:p>
+                  </a:txBody>
+                  <a:tcPr>
+                    <a:solidFill>
+                      <a:srgbClr val="FFFFFF"/>
+                    </a:solidFill>
+                  </a:tcPr>
+                </a:tc>
+                <a:tc>
+                  <a:txBody>
+                    <a:bodyPr/>
+                    <a:lstStyle/>
+                    <a:p>
+                      <a:pPr algn="l"/>
+                      <a:r>
+                        <a:rPr sz="1000" b="0">
+                          <a:solidFill>
+                            <a:srgbClr val="1D1B43"/>
+                          </a:solidFill>
+                          <a:latin typeface="Calibri"/>
+                        </a:rPr>
+                        <a:t>2</a:t>
+                      </a:r>
+                    </a:p>
+                  </a:txBody>
+                  <a:tcPr>
+                    <a:solidFill>
+                      <a:srgbClr val="FFFFFF"/>
+                    </a:solidFill>
+                  </a:tcPr>
+                </a:tc>
+                <a:tc>
+                  <a:txBody>
+                    <a:bodyPr/>
+                    <a:lstStyle/>
+                    <a:p>
+                      <a:pPr algn="l"/>
+                      <a:r>
+                        <a:rPr sz="1000" b="0">
+                          <a:solidFill>
+                            <a:srgbClr val="1D1B43"/>
+                          </a:solidFill>
+                          <a:latin typeface="Calibri"/>
+                        </a:rPr>
+                        <a:t>2</a:t>
+                      </a:r>
+                    </a:p>
+                  </a:txBody>
+                  <a:tcPr>
+                    <a:solidFill>
+                      <a:srgbClr val="FFFFFF"/>
+                    </a:solidFill>
+                  </a:tcPr>
+                </a:tc>
+                <a:tc>
+                  <a:txBody>
+                    <a:bodyPr/>
+                    <a:lstStyle/>
+                    <a:p>
+                      <a:pPr algn="l"/>
+                      <a:r>
+                        <a:rPr sz="1000" b="0">
+                          <a:solidFill>
+                            <a:srgbClr val="1D1B43"/>
+                          </a:solidFill>
+                          <a:latin typeface="Calibri"/>
+                        </a:rPr>
+                        <a:t>0</a:t>
+                      </a:r>
+                    </a:p>
+                  </a:txBody>
+                  <a:tcPr>
+                    <a:solidFill>
+                      <a:srgbClr val="FFFFFF"/>
+                    </a:solidFill>
+                  </a:tcPr>
+                </a:tc>
+                <a:tc>
+                  <a:txBody>
+                    <a:bodyPr/>
+                    <a:lstStyle/>
+                    <a:p>
+                      <a:pPr algn="l"/>
+                      <a:r>
+                        <a:rPr sz="1000" b="0">
+                          <a:solidFill>
+                            <a:srgbClr val="1D1B43"/>
+                          </a:solidFill>
+                          <a:latin typeface="Calibri"/>
+                        </a:rPr>
+                        <a:t>100.0%</a:t>
+                      </a:r>
+                    </a:p>
+                  </a:txBody>
+                  <a:tcPr>
+                    <a:solidFill>
+                      <a:srgbClr val="FFFFFF"/>
+                    </a:solidFill>
+                  </a:tcPr>
+                </a:tc>
+                <a:tc>
+                  <a:txBody>
+                    <a:bodyPr/>
+                    <a:lstStyle/>
+                    <a:p>
+                      <a:pPr algn="l"/>
+                      <a:r>
+                        <a:rPr sz="1000" b="0">
+                          <a:solidFill>
+                            <a:srgbClr val="1D1B43"/>
+                          </a:solidFill>
+                          <a:latin typeface="Calibri"/>
+                        </a:rPr>
+                        <a:t>Excelente</a:t>
+                      </a:r>
+                    </a:p>
+                  </a:txBody>
+                  <a:tcPr>
+                    <a:solidFill>
+                      <a:srgbClr val="FFFFFF"/>
+                    </a:solidFill>
+                  </a:tcPr>
+                </a:tc>
+              </a:tr>
+              <a:tr h="399010">
+                <a:tc>
+                  <a:txBody>
+                    <a:bodyPr/>
+                    <a:lstStyle/>
+                    <a:p>
+                      <a:pPr algn="l"/>
+                      <a:r>
+                        <a:rPr sz="1000" b="0">
+                          <a:solidFill>
+                            <a:srgbClr val="1D1B43"/>
+                          </a:solidFill>
+                          <a:latin typeface="Calibri"/>
+                        </a:rPr>
+                        <a:t>MT</a:t>
                       </a:r>
                     </a:p>
                   </a:txBody>
@@ -6057,7 +7787,7 @@
                           </a:solidFill>
                           <a:latin typeface="Calibri"/>
                         </a:rPr>
-                        <a:t>7</a:t>
+                        <a:t>2</a:t>
                       </a:r>
                     </a:p>
                   </a:txBody>
@@ -6080,7 +7810,7 @@
                           </a:solidFill>
                           <a:latin typeface="Calibri"/>
                         </a:rPr>
-                        <a:t>7</a:t>
+                        <a:t>1</a:t>
                       </a:r>
                     </a:p>
                   </a:txBody>
@@ -6103,12 +7833,223 @@
                           </a:solidFill>
                           <a:latin typeface="Calibri"/>
                         </a:rPr>
+                        <a:t>1</a:t>
+                      </a:r>
+                    </a:p>
+                  </a:txBody>
+                  <a:tcPr>
+                    <a:solidFill>
+                      <a:srgbClr val="F2F2F2"/>
+                    </a:solidFill>
+                  </a:tcPr>
+                </a:tc>
+                <a:tc>
+                  <a:txBody>
+                    <a:bodyPr/>
+                    <a:lstStyle/>
+                    <a:p>
+                      <a:pPr algn="l"/>
+                      <a:r>
+                        <a:rPr sz="1000" b="0">
+                          <a:solidFill>
+                            <a:srgbClr val="1D1B43"/>
+                          </a:solidFill>
+                          <a:latin typeface="Calibri"/>
+                        </a:rPr>
+                        <a:t>50.0%</a:t>
+                      </a:r>
+                    </a:p>
+                  </a:txBody>
+                  <a:tcPr>
+                    <a:solidFill>
+                      <a:srgbClr val="F2F2F2"/>
+                    </a:solidFill>
+                  </a:tcPr>
+                </a:tc>
+                <a:tc>
+                  <a:txBody>
+                    <a:bodyPr/>
+                    <a:lstStyle/>
+                    <a:p>
+                      <a:pPr algn="l"/>
+                      <a:r>
+                        <a:rPr sz="1000" b="0">
+                          <a:solidFill>
+                            <a:srgbClr val="1D1B43"/>
+                          </a:solidFill>
+                          <a:latin typeface="Calibri"/>
+                        </a:rPr>
+                        <a:t>Atencao</a:t>
+                      </a:r>
+                    </a:p>
+                  </a:txBody>
+                  <a:tcPr>
+                    <a:solidFill>
+                      <a:srgbClr val="F2F2F2"/>
+                    </a:solidFill>
+                  </a:tcPr>
+                </a:tc>
+              </a:tr>
+              <a:tr h="399010">
+                <a:tc>
+                  <a:txBody>
+                    <a:bodyPr/>
+                    <a:lstStyle/>
+                    <a:p>
+                      <a:pPr algn="l"/>
+                      <a:r>
+                        <a:rPr sz="1000" b="0">
+                          <a:solidFill>
+                            <a:srgbClr val="1D1B43"/>
+                          </a:solidFill>
+                          <a:latin typeface="Calibri"/>
+                        </a:rPr>
+                        <a:t>PR</a:t>
+                      </a:r>
+                    </a:p>
+                  </a:txBody>
+                  <a:tcPr>
+                    <a:solidFill>
+                      <a:srgbClr val="FFFFFF"/>
+                    </a:solidFill>
+                  </a:tcPr>
+                </a:tc>
+                <a:tc>
+                  <a:txBody>
+                    <a:bodyPr/>
+                    <a:lstStyle/>
+                    <a:p>
+                      <a:pPr algn="l"/>
+                      <a:r>
+                        <a:rPr sz="1000" b="0">
+                          <a:solidFill>
+                            <a:srgbClr val="1D1B43"/>
+                          </a:solidFill>
+                          <a:latin typeface="Calibri"/>
+                        </a:rPr>
+                        <a:t>1</a:t>
+                      </a:r>
+                    </a:p>
+                  </a:txBody>
+                  <a:tcPr>
+                    <a:solidFill>
+                      <a:srgbClr val="FFFFFF"/>
+                    </a:solidFill>
+                  </a:tcPr>
+                </a:tc>
+                <a:tc>
+                  <a:txBody>
+                    <a:bodyPr/>
+                    <a:lstStyle/>
+                    <a:p>
+                      <a:pPr algn="l"/>
+                      <a:r>
+                        <a:rPr sz="1000" b="0">
+                          <a:solidFill>
+                            <a:srgbClr val="1D1B43"/>
+                          </a:solidFill>
+                          <a:latin typeface="Calibri"/>
+                        </a:rPr>
+                        <a:t>1</a:t>
+                      </a:r>
+                    </a:p>
+                  </a:txBody>
+                  <a:tcPr>
+                    <a:solidFill>
+                      <a:srgbClr val="FFFFFF"/>
+                    </a:solidFill>
+                  </a:tcPr>
+                </a:tc>
+                <a:tc>
+                  <a:txBody>
+                    <a:bodyPr/>
+                    <a:lstStyle/>
+                    <a:p>
+                      <a:pPr algn="l"/>
+                      <a:r>
+                        <a:rPr sz="1000" b="0">
+                          <a:solidFill>
+                            <a:srgbClr val="1D1B43"/>
+                          </a:solidFill>
+                          <a:latin typeface="Calibri"/>
+                        </a:rPr>
                         <a:t>0</a:t>
                       </a:r>
                     </a:p>
                   </a:txBody>
                   <a:tcPr>
                     <a:solidFill>
+                      <a:srgbClr val="FFFFFF"/>
+                    </a:solidFill>
+                  </a:tcPr>
+                </a:tc>
+                <a:tc>
+                  <a:txBody>
+                    <a:bodyPr/>
+                    <a:lstStyle/>
+                    <a:p>
+                      <a:pPr algn="l"/>
+                      <a:r>
+                        <a:rPr sz="1000" b="0">
+                          <a:solidFill>
+                            <a:srgbClr val="1D1B43"/>
+                          </a:solidFill>
+                          <a:latin typeface="Calibri"/>
+                        </a:rPr>
+                        <a:t>100.0%</a:t>
+                      </a:r>
+                    </a:p>
+                  </a:txBody>
+                  <a:tcPr>
+                    <a:solidFill>
+                      <a:srgbClr val="FFFFFF"/>
+                    </a:solidFill>
+                  </a:tcPr>
+                </a:tc>
+                <a:tc>
+                  <a:txBody>
+                    <a:bodyPr/>
+                    <a:lstStyle/>
+                    <a:p>
+                      <a:pPr algn="l"/>
+                      <a:r>
+                        <a:rPr sz="1000" b="0">
+                          <a:solidFill>
+                            <a:srgbClr val="1D1B43"/>
+                          </a:solidFill>
+                          <a:latin typeface="Calibri"/>
+                        </a:rPr>
+                        <a:t>Excelente</a:t>
+                      </a:r>
+                    </a:p>
+                  </a:txBody>
+                  <a:tcPr>
+                    <a:solidFill>
+                      <a:srgbClr val="FFFFFF"/>
+                    </a:solidFill>
+                  </a:tcPr>
+                </a:tc>
+              </a:tr>
+              <a:tr h="399010">
+                <a:tc>
+                  <a:txBody>
+                    <a:bodyPr/>
+                    <a:lstStyle/>
+                    <a:p>
+                      <a:pPr algn="l"/>
+                      <a:r>
+                        <a:rPr sz="1000" b="0">
+                          <a:solidFill>
+                            <a:srgbClr val="1D1B43"/>
+                          </a:solidFill>
+                          <a:latin typeface="Calibri"/>
+                        </a:rPr>
+                        <a:t>PB</a:t>
+                      </a:r>
+                    </a:p>
+                  </a:txBody>
+                  <a:tcPr>
+                    <a:solidFill>
                       <a:srgbClr val="F2F2F2"/>
                     </a:solidFill>
                   </a:tcPr>
@@ -6126,6 +8067,75 @@
                           </a:solidFill>
                           <a:latin typeface="Calibri"/>
                         </a:rPr>
+                        <a:t>1</a:t>
+                      </a:r>
+                    </a:p>
+                  </a:txBody>
+                  <a:tcPr>
+                    <a:solidFill>
+                      <a:srgbClr val="F2F2F2"/>
+                    </a:solidFill>
+                  </a:tcPr>
+                </a:tc>
+                <a:tc>
+                  <a:txBody>
+                    <a:bodyPr/>
+                    <a:lstStyle/>
+                    <a:p>
+                      <a:pPr algn="l"/>
+                      <a:r>
+                        <a:rPr sz="1000" b="0">
+                          <a:solidFill>
+                            <a:srgbClr val="1D1B43"/>
+                          </a:solidFill>
+                          <a:latin typeface="Calibri"/>
+                        </a:rPr>
+                        <a:t>1</a:t>
+                      </a:r>
+                    </a:p>
+                  </a:txBody>
+                  <a:tcPr>
+                    <a:solidFill>
+                      <a:srgbClr val="F2F2F2"/>
+                    </a:solidFill>
+                  </a:tcPr>
+                </a:tc>
+                <a:tc>
+                  <a:txBody>
+                    <a:bodyPr/>
+                    <a:lstStyle/>
+                    <a:p>
+                      <a:pPr algn="l"/>
+                      <a:r>
+                        <a:rPr sz="1000" b="0">
+                          <a:solidFill>
+                            <a:srgbClr val="1D1B43"/>
+                          </a:solidFill>
+                          <a:latin typeface="Calibri"/>
+                        </a:rPr>
+                        <a:t>0</a:t>
+                      </a:r>
+                    </a:p>
+                  </a:txBody>
+                  <a:tcPr>
+                    <a:solidFill>
+                      <a:srgbClr val="F2F2F2"/>
+                    </a:solidFill>
+                  </a:tcPr>
+                </a:tc>
+                <a:tc>
+                  <a:txBody>
+                    <a:bodyPr/>
+                    <a:lstStyle/>
+                    <a:p>
+                      <a:pPr algn="l"/>
+                      <a:r>
+                        <a:rPr sz="1000" b="0">
+                          <a:solidFill>
+                            <a:srgbClr val="1D1B43"/>
+                          </a:solidFill>
+                          <a:latin typeface="Calibri"/>
+                        </a:rPr>
                         <a:t>100.0%</a:t>
                       </a:r>
                     </a:p>
@@ -6160,67 +8170,67 @@
                   </a:tcPr>
                 </a:tc>
               </a:tr>
-              <a:tr h="438912">
-                <a:tc>
-                  <a:txBody>
-                    <a:bodyPr/>
-                    <a:lstStyle/>
-                    <a:p>
-                      <a:pPr algn="l"/>
-                      <a:r>
-                        <a:rPr sz="1000" b="0">
-                          <a:solidFill>
-                            <a:srgbClr val="1D1B43"/>
-                          </a:solidFill>
-                          <a:latin typeface="Calibri"/>
-                        </a:rPr>
-                        <a:t>PR</a:t>
-                      </a:r>
-                    </a:p>
-                  </a:txBody>
-                  <a:tcPr>
-                    <a:solidFill>
-                      <a:srgbClr val="FFFFFF"/>
-                    </a:solidFill>
-                  </a:tcPr>
-                </a:tc>
-                <a:tc>
-                  <a:txBody>
-                    <a:bodyPr/>
-                    <a:lstStyle/>
-                    <a:p>
-                      <a:pPr algn="l"/>
-                      <a:r>
-                        <a:rPr sz="1000" b="0">
-                          <a:solidFill>
-                            <a:srgbClr val="1D1B43"/>
-                          </a:solidFill>
-                          <a:latin typeface="Calibri"/>
-                        </a:rPr>
-                        <a:t>4</a:t>
-                      </a:r>
-                    </a:p>
-                  </a:txBody>
-                  <a:tcPr>
-                    <a:solidFill>
-                      <a:srgbClr val="FFFFFF"/>
-                    </a:solidFill>
-                  </a:tcPr>
-                </a:tc>
-                <a:tc>
-                  <a:txBody>
-                    <a:bodyPr/>
-                    <a:lstStyle/>
-                    <a:p>
-                      <a:pPr algn="l"/>
-                      <a:r>
-                        <a:rPr sz="1000" b="0">
-                          <a:solidFill>
-                            <a:srgbClr val="1D1B43"/>
-                          </a:solidFill>
-                          <a:latin typeface="Calibri"/>
-                        </a:rPr>
-                        <a:t>4</a:t>
+              <a:tr h="399010">
+                <a:tc>
+                  <a:txBody>
+                    <a:bodyPr/>
+                    <a:lstStyle/>
+                    <a:p>
+                      <a:pPr algn="l"/>
+                      <a:r>
+                        <a:rPr sz="1000" b="0">
+                          <a:solidFill>
+                            <a:srgbClr val="1D1B43"/>
+                          </a:solidFill>
+                          <a:latin typeface="Calibri"/>
+                        </a:rPr>
+                        <a:t>RN</a:t>
+                      </a:r>
+                    </a:p>
+                  </a:txBody>
+                  <a:tcPr>
+                    <a:solidFill>
+                      <a:srgbClr val="FFFFFF"/>
+                    </a:solidFill>
+                  </a:tcPr>
+                </a:tc>
+                <a:tc>
+                  <a:txBody>
+                    <a:bodyPr/>
+                    <a:lstStyle/>
+                    <a:p>
+                      <a:pPr algn="l"/>
+                      <a:r>
+                        <a:rPr sz="1000" b="0">
+                          <a:solidFill>
+                            <a:srgbClr val="1D1B43"/>
+                          </a:solidFill>
+                          <a:latin typeface="Calibri"/>
+                        </a:rPr>
+                        <a:t>1</a:t>
+                      </a:r>
+                    </a:p>
+                  </a:txBody>
+                  <a:tcPr>
+                    <a:solidFill>
+                      <a:srgbClr val="FFFFFF"/>
+                    </a:solidFill>
+                  </a:tcPr>
+                </a:tc>
+                <a:tc>
+                  <a:txBody>
+                    <a:bodyPr/>
+                    <a:lstStyle/>
+                    <a:p>
+                      <a:pPr algn="l"/>
+                      <a:r>
+                        <a:rPr sz="1000" b="0">
+                          <a:solidFill>
+                            <a:srgbClr val="1D1B43"/>
+                          </a:solidFill>
+                          <a:latin typeface="Calibri"/>
+                        </a:rPr>
+                        <a:t>1</a:t>
                       </a:r>
                     </a:p>
                   </a:txBody>
@@ -6300,7 +8310,7 @@
                   </a:tcPr>
                 </a:tc>
               </a:tr>
-              <a:tr h="438912">
+              <a:tr h="399010">
                 <a:tc>
                   <a:txBody>
                     <a:bodyPr/>
@@ -6337,7 +8347,7 @@
                           </a:solidFill>
                           <a:latin typeface="Calibri"/>
                         </a:rPr>
-                        <a:t>4</a:t>
+                        <a:t>1</a:t>
                       </a:r>
                     </a:p>
                   </a:txBody>
@@ -6360,7 +8370,7 @@
                           </a:solidFill>
                           <a:latin typeface="Calibri"/>
                         </a:rPr>
-                        <a:t>3</a:t>
+                        <a:t>1</a:t>
                       </a:r>
                     </a:p>
                   </a:txBody>
@@ -6383,7 +8393,7 @@
                           </a:solidFill>
                           <a:latin typeface="Calibri"/>
                         </a:rPr>
-                        <a:t>1</a:t>
+                        <a:t>0</a:t>
                       </a:r>
                     </a:p>
                   </a:txBody>
@@ -6406,7 +8416,7 @@
                           </a:solidFill>
                           <a:latin typeface="Calibri"/>
                         </a:rPr>
-                        <a:t>75.0%</a:t>
+                        <a:t>100.0%</a:t>
                       </a:r>
                     </a:p>
                   </a:txBody>
@@ -6429,713 +8439,13 @@
                           </a:solidFill>
                           <a:latin typeface="Calibri"/>
                         </a:rPr>
-                        <a:t>Atencao</a:t>
+                        <a:t>Excelente</a:t>
                       </a:r>
                     </a:p>
                   </a:txBody>
                   <a:tcPr>
                     <a:solidFill>
                       <a:srgbClr val="F2F2F2"/>
-                    </a:solidFill>
-                  </a:tcPr>
-                </a:tc>
-              </a:tr>
-              <a:tr h="438912">
-                <a:tc>
-                  <a:txBody>
-                    <a:bodyPr/>
-                    <a:lstStyle/>
-                    <a:p>
-                      <a:pPr algn="l"/>
-                      <a:r>
-                        <a:rPr sz="1000" b="0">
-                          <a:solidFill>
-                            <a:srgbClr val="1D1B43"/>
-                          </a:solidFill>
-                          <a:latin typeface="Calibri"/>
-                        </a:rPr>
-                        <a:t>BA</a:t>
-                      </a:r>
-                    </a:p>
-                  </a:txBody>
-                  <a:tcPr>
-                    <a:solidFill>
-                      <a:srgbClr val="FFFFFF"/>
-                    </a:solidFill>
-                  </a:tcPr>
-                </a:tc>
-                <a:tc>
-                  <a:txBody>
-                    <a:bodyPr/>
-                    <a:lstStyle/>
-                    <a:p>
-                      <a:pPr algn="l"/>
-                      <a:r>
-                        <a:rPr sz="1000" b="0">
-                          <a:solidFill>
-                            <a:srgbClr val="1D1B43"/>
-                          </a:solidFill>
-                          <a:latin typeface="Calibri"/>
-                        </a:rPr>
-                        <a:t>2</a:t>
-                      </a:r>
-                    </a:p>
-                  </a:txBody>
-                  <a:tcPr>
-                    <a:solidFill>
-                      <a:srgbClr val="FFFFFF"/>
-                    </a:solidFill>
-                  </a:tcPr>
-                </a:tc>
-                <a:tc>
-                  <a:txBody>
-                    <a:bodyPr/>
-                    <a:lstStyle/>
-                    <a:p>
-                      <a:pPr algn="l"/>
-                      <a:r>
-                        <a:rPr sz="1000" b="0">
-                          <a:solidFill>
-                            <a:srgbClr val="1D1B43"/>
-                          </a:solidFill>
-                          <a:latin typeface="Calibri"/>
-                        </a:rPr>
-                        <a:t>2</a:t>
-                      </a:r>
-                    </a:p>
-                  </a:txBody>
-                  <a:tcPr>
-                    <a:solidFill>
-                      <a:srgbClr val="FFFFFF"/>
-                    </a:solidFill>
-                  </a:tcPr>
-                </a:tc>
-                <a:tc>
-                  <a:txBody>
-                    <a:bodyPr/>
-                    <a:lstStyle/>
-                    <a:p>
-                      <a:pPr algn="l"/>
-                      <a:r>
-                        <a:rPr sz="1000" b="0">
-                          <a:solidFill>
-                            <a:srgbClr val="1D1B43"/>
-                          </a:solidFill>
-                          <a:latin typeface="Calibri"/>
-                        </a:rPr>
-                        <a:t>0</a:t>
-                      </a:r>
-                    </a:p>
-                  </a:txBody>
-                  <a:tcPr>
-                    <a:solidFill>
-                      <a:srgbClr val="FFFFFF"/>
-                    </a:solidFill>
-                  </a:tcPr>
-                </a:tc>
-                <a:tc>
-                  <a:txBody>
-                    <a:bodyPr/>
-                    <a:lstStyle/>
-                    <a:p>
-                      <a:pPr algn="l"/>
-                      <a:r>
-                        <a:rPr sz="1000" b="0">
-                          <a:solidFill>
-                            <a:srgbClr val="1D1B43"/>
-                          </a:solidFill>
-                          <a:latin typeface="Calibri"/>
-                        </a:rPr>
-                        <a:t>100.0%</a:t>
-                      </a:r>
-                    </a:p>
-                  </a:txBody>
-                  <a:tcPr>
-                    <a:solidFill>
-                      <a:srgbClr val="FFFFFF"/>
-                    </a:solidFill>
-                  </a:tcPr>
-                </a:tc>
-                <a:tc>
-                  <a:txBody>
-                    <a:bodyPr/>
-                    <a:lstStyle/>
-                    <a:p>
-                      <a:pPr algn="l"/>
-                      <a:r>
-                        <a:rPr sz="1000" b="0">
-                          <a:solidFill>
-                            <a:srgbClr val="1D1B43"/>
-                          </a:solidFill>
-                          <a:latin typeface="Calibri"/>
-                        </a:rPr>
-                        <a:t>Excelente</a:t>
-                      </a:r>
-                    </a:p>
-                  </a:txBody>
-                  <a:tcPr>
-                    <a:solidFill>
-                      <a:srgbClr val="FFFFFF"/>
-                    </a:solidFill>
-                  </a:tcPr>
-                </a:tc>
-              </a:tr>
-              <a:tr h="438912">
-                <a:tc>
-                  <a:txBody>
-                    <a:bodyPr/>
-                    <a:lstStyle/>
-                    <a:p>
-                      <a:pPr algn="l"/>
-                      <a:r>
-                        <a:rPr sz="1000" b="0">
-                          <a:solidFill>
-                            <a:srgbClr val="1D1B43"/>
-                          </a:solidFill>
-                          <a:latin typeface="Calibri"/>
-                        </a:rPr>
-                        <a:t>MG</a:t>
-                      </a:r>
-                    </a:p>
-                  </a:txBody>
-                  <a:tcPr>
-                    <a:solidFill>
-                      <a:srgbClr val="F2F2F2"/>
-                    </a:solidFill>
-                  </a:tcPr>
-                </a:tc>
-                <a:tc>
-                  <a:txBody>
-                    <a:bodyPr/>
-                    <a:lstStyle/>
-                    <a:p>
-                      <a:pPr algn="l"/>
-                      <a:r>
-                        <a:rPr sz="1000" b="0">
-                          <a:solidFill>
-                            <a:srgbClr val="1D1B43"/>
-                          </a:solidFill>
-                          <a:latin typeface="Calibri"/>
-                        </a:rPr>
-                        <a:t>2</a:t>
-                      </a:r>
-                    </a:p>
-                  </a:txBody>
-                  <a:tcPr>
-                    <a:solidFill>
-                      <a:srgbClr val="F2F2F2"/>
-                    </a:solidFill>
-                  </a:tcPr>
-                </a:tc>
-                <a:tc>
-                  <a:txBody>
-                    <a:bodyPr/>
-                    <a:lstStyle/>
-                    <a:p>
-                      <a:pPr algn="l"/>
-                      <a:r>
-                        <a:rPr sz="1000" b="0">
-                          <a:solidFill>
-                            <a:srgbClr val="1D1B43"/>
-                          </a:solidFill>
-                          <a:latin typeface="Calibri"/>
-                        </a:rPr>
-                        <a:t>2</a:t>
-                      </a:r>
-                    </a:p>
-                  </a:txBody>
-                  <a:tcPr>
-                    <a:solidFill>
-                      <a:srgbClr val="F2F2F2"/>
-                    </a:solidFill>
-                  </a:tcPr>
-                </a:tc>
-                <a:tc>
-                  <a:txBody>
-                    <a:bodyPr/>
-                    <a:lstStyle/>
-                    <a:p>
-                      <a:pPr algn="l"/>
-                      <a:r>
-                        <a:rPr sz="1000" b="0">
-                          <a:solidFill>
-                            <a:srgbClr val="1D1B43"/>
-                          </a:solidFill>
-                          <a:latin typeface="Calibri"/>
-                        </a:rPr>
-                        <a:t>0</a:t>
-                      </a:r>
-                    </a:p>
-                  </a:txBody>
-                  <a:tcPr>
-                    <a:solidFill>
-                      <a:srgbClr val="F2F2F2"/>
-                    </a:solidFill>
-                  </a:tcPr>
-                </a:tc>
-                <a:tc>
-                  <a:txBody>
-                    <a:bodyPr/>
-                    <a:lstStyle/>
-                    <a:p>
-                      <a:pPr algn="l"/>
-                      <a:r>
-                        <a:rPr sz="1000" b="0">
-                          <a:solidFill>
-                            <a:srgbClr val="1D1B43"/>
-                          </a:solidFill>
-                          <a:latin typeface="Calibri"/>
-                        </a:rPr>
-                        <a:t>100.0%</a:t>
-                      </a:r>
-                    </a:p>
-                  </a:txBody>
-                  <a:tcPr>
-                    <a:solidFill>
-                      <a:srgbClr val="F2F2F2"/>
-                    </a:solidFill>
-                  </a:tcPr>
-                </a:tc>
-                <a:tc>
-                  <a:txBody>
-                    <a:bodyPr/>
-                    <a:lstStyle/>
-                    <a:p>
-                      <a:pPr algn="l"/>
-                      <a:r>
-                        <a:rPr sz="1000" b="0">
-                          <a:solidFill>
-                            <a:srgbClr val="1D1B43"/>
-                          </a:solidFill>
-                          <a:latin typeface="Calibri"/>
-                        </a:rPr>
-                        <a:t>Excelente</a:t>
-                      </a:r>
-                    </a:p>
-                  </a:txBody>
-                  <a:tcPr>
-                    <a:solidFill>
-                      <a:srgbClr val="F2F2F2"/>
-                    </a:solidFill>
-                  </a:tcPr>
-                </a:tc>
-              </a:tr>
-              <a:tr h="438912">
-                <a:tc>
-                  <a:txBody>
-                    <a:bodyPr/>
-                    <a:lstStyle/>
-                    <a:p>
-                      <a:pPr algn="l"/>
-                      <a:r>
-                        <a:rPr sz="1000" b="0">
-                          <a:solidFill>
-                            <a:srgbClr val="1D1B43"/>
-                          </a:solidFill>
-                          <a:latin typeface="Calibri"/>
-                        </a:rPr>
-                        <a:t>PE</a:t>
-                      </a:r>
-                    </a:p>
-                  </a:txBody>
-                  <a:tcPr>
-                    <a:solidFill>
-                      <a:srgbClr val="FFFFFF"/>
-                    </a:solidFill>
-                  </a:tcPr>
-                </a:tc>
-                <a:tc>
-                  <a:txBody>
-                    <a:bodyPr/>
-                    <a:lstStyle/>
-                    <a:p>
-                      <a:pPr algn="l"/>
-                      <a:r>
-                        <a:rPr sz="1000" b="0">
-                          <a:solidFill>
-                            <a:srgbClr val="1D1B43"/>
-                          </a:solidFill>
-                          <a:latin typeface="Calibri"/>
-                        </a:rPr>
-                        <a:t>2</a:t>
-                      </a:r>
-                    </a:p>
-                  </a:txBody>
-                  <a:tcPr>
-                    <a:solidFill>
-                      <a:srgbClr val="FFFFFF"/>
-                    </a:solidFill>
-                  </a:tcPr>
-                </a:tc>
-                <a:tc>
-                  <a:txBody>
-                    <a:bodyPr/>
-                    <a:lstStyle/>
-                    <a:p>
-                      <a:pPr algn="l"/>
-                      <a:r>
-                        <a:rPr sz="1000" b="0">
-                          <a:solidFill>
-                            <a:srgbClr val="1D1B43"/>
-                          </a:solidFill>
-                          <a:latin typeface="Calibri"/>
-                        </a:rPr>
-                        <a:t>2</a:t>
-                      </a:r>
-                    </a:p>
-                  </a:txBody>
-                  <a:tcPr>
-                    <a:solidFill>
-                      <a:srgbClr val="FFFFFF"/>
-                    </a:solidFill>
-                  </a:tcPr>
-                </a:tc>
-                <a:tc>
-                  <a:txBody>
-                    <a:bodyPr/>
-                    <a:lstStyle/>
-                    <a:p>
-                      <a:pPr algn="l"/>
-                      <a:r>
-                        <a:rPr sz="1000" b="0">
-                          <a:solidFill>
-                            <a:srgbClr val="1D1B43"/>
-                          </a:solidFill>
-                          <a:latin typeface="Calibri"/>
-                        </a:rPr>
-                        <a:t>0</a:t>
-                      </a:r>
-                    </a:p>
-                  </a:txBody>
-                  <a:tcPr>
-                    <a:solidFill>
-                      <a:srgbClr val="FFFFFF"/>
-                    </a:solidFill>
-                  </a:tcPr>
-                </a:tc>
-                <a:tc>
-                  <a:txBody>
-                    <a:bodyPr/>
-                    <a:lstStyle/>
-                    <a:p>
-                      <a:pPr algn="l"/>
-                      <a:r>
-                        <a:rPr sz="1000" b="0">
-                          <a:solidFill>
-                            <a:srgbClr val="1D1B43"/>
-                          </a:solidFill>
-                          <a:latin typeface="Calibri"/>
-                        </a:rPr>
-                        <a:t>100.0%</a:t>
-                      </a:r>
-                    </a:p>
-                  </a:txBody>
-                  <a:tcPr>
-                    <a:solidFill>
-                      <a:srgbClr val="FFFFFF"/>
-                    </a:solidFill>
-                  </a:tcPr>
-                </a:tc>
-                <a:tc>
-                  <a:txBody>
-                    <a:bodyPr/>
-                    <a:lstStyle/>
-                    <a:p>
-                      <a:pPr algn="l"/>
-                      <a:r>
-                        <a:rPr sz="1000" b="0">
-                          <a:solidFill>
-                            <a:srgbClr val="1D1B43"/>
-                          </a:solidFill>
-                          <a:latin typeface="Calibri"/>
-                        </a:rPr>
-                        <a:t>Excelente</a:t>
-                      </a:r>
-                    </a:p>
-                  </a:txBody>
-                  <a:tcPr>
-                    <a:solidFill>
-                      <a:srgbClr val="FFFFFF"/>
-                    </a:solidFill>
-                  </a:tcPr>
-                </a:tc>
-              </a:tr>
-              <a:tr h="438912">
-                <a:tc>
-                  <a:txBody>
-                    <a:bodyPr/>
-                    <a:lstStyle/>
-                    <a:p>
-                      <a:pPr algn="l"/>
-                      <a:r>
-                        <a:rPr sz="1000" b="0">
-                          <a:solidFill>
-                            <a:srgbClr val="1D1B43"/>
-                          </a:solidFill>
-                          <a:latin typeface="Calibri"/>
-                        </a:rPr>
-                        <a:t>RS</a:t>
-                      </a:r>
-                    </a:p>
-                  </a:txBody>
-                  <a:tcPr>
-                    <a:solidFill>
-                      <a:srgbClr val="F2F2F2"/>
-                    </a:solidFill>
-                  </a:tcPr>
-                </a:tc>
-                <a:tc>
-                  <a:txBody>
-                    <a:bodyPr/>
-                    <a:lstStyle/>
-                    <a:p>
-                      <a:pPr algn="l"/>
-                      <a:r>
-                        <a:rPr sz="1000" b="0">
-                          <a:solidFill>
-                            <a:srgbClr val="1D1B43"/>
-                          </a:solidFill>
-                          <a:latin typeface="Calibri"/>
-                        </a:rPr>
-                        <a:t>2</a:t>
-                      </a:r>
-                    </a:p>
-                  </a:txBody>
-                  <a:tcPr>
-                    <a:solidFill>
-                      <a:srgbClr val="F2F2F2"/>
-                    </a:solidFill>
-                  </a:tcPr>
-                </a:tc>
-                <a:tc>
-                  <a:txBody>
-                    <a:bodyPr/>
-                    <a:lstStyle/>
-                    <a:p>
-                      <a:pPr algn="l"/>
-                      <a:r>
-                        <a:rPr sz="1000" b="0">
-                          <a:solidFill>
-                            <a:srgbClr val="1D1B43"/>
-                          </a:solidFill>
-                          <a:latin typeface="Calibri"/>
-                        </a:rPr>
-                        <a:t>2</a:t>
-                      </a:r>
-                    </a:p>
-                  </a:txBody>
-                  <a:tcPr>
-                    <a:solidFill>
-                      <a:srgbClr val="F2F2F2"/>
-                    </a:solidFill>
-                  </a:tcPr>
-                </a:tc>
-                <a:tc>
-                  <a:txBody>
-                    <a:bodyPr/>
-                    <a:lstStyle/>
-                    <a:p>
-                      <a:pPr algn="l"/>
-                      <a:r>
-                        <a:rPr sz="1000" b="0">
-                          <a:solidFill>
-                            <a:srgbClr val="1D1B43"/>
-                          </a:solidFill>
-                          <a:latin typeface="Calibri"/>
-                        </a:rPr>
-                        <a:t>0</a:t>
-                      </a:r>
-                    </a:p>
-                  </a:txBody>
-                  <a:tcPr>
-                    <a:solidFill>
-                      <a:srgbClr val="F2F2F2"/>
-                    </a:solidFill>
-                  </a:tcPr>
-                </a:tc>
-                <a:tc>
-                  <a:txBody>
-                    <a:bodyPr/>
-                    <a:lstStyle/>
-                    <a:p>
-                      <a:pPr algn="l"/>
-                      <a:r>
-                        <a:rPr sz="1000" b="0">
-                          <a:solidFill>
-                            <a:srgbClr val="1D1B43"/>
-                          </a:solidFill>
-                          <a:latin typeface="Calibri"/>
-                        </a:rPr>
-                        <a:t>100.0%</a:t>
-                      </a:r>
-                    </a:p>
-                  </a:txBody>
-                  <a:tcPr>
-                    <a:solidFill>
-                      <a:srgbClr val="F2F2F2"/>
-                    </a:solidFill>
-                  </a:tcPr>
-                </a:tc>
-                <a:tc>
-                  <a:txBody>
-                    <a:bodyPr/>
-                    <a:lstStyle/>
-                    <a:p>
-                      <a:pPr algn="l"/>
-                      <a:r>
-                        <a:rPr sz="1000" b="0">
-                          <a:solidFill>
-                            <a:srgbClr val="1D1B43"/>
-                          </a:solidFill>
-                          <a:latin typeface="Calibri"/>
-                        </a:rPr>
-                        <a:t>Excelente</a:t>
-                      </a:r>
-                    </a:p>
-                  </a:txBody>
-                  <a:tcPr>
-                    <a:solidFill>
-                      <a:srgbClr val="F2F2F2"/>
-                    </a:solidFill>
-                  </a:tcPr>
-                </a:tc>
-              </a:tr>
-              <a:tr h="438912">
-                <a:tc>
-                  <a:txBody>
-                    <a:bodyPr/>
-                    <a:lstStyle/>
-                    <a:p>
-                      <a:pPr algn="l"/>
-                      <a:r>
-                        <a:rPr sz="1000" b="0">
-                          <a:solidFill>
-                            <a:srgbClr val="1D1B43"/>
-                          </a:solidFill>
-                          <a:latin typeface="Calibri"/>
-                        </a:rPr>
-                        <a:t>GO</a:t>
-                      </a:r>
-                    </a:p>
-                  </a:txBody>
-                  <a:tcPr>
-                    <a:solidFill>
-                      <a:srgbClr val="FFFFFF"/>
-                    </a:solidFill>
-                  </a:tcPr>
-                </a:tc>
-                <a:tc>
-                  <a:txBody>
-                    <a:bodyPr/>
-                    <a:lstStyle/>
-                    <a:p>
-                      <a:pPr algn="l"/>
-                      <a:r>
-                        <a:rPr sz="1000" b="0">
-                          <a:solidFill>
-                            <a:srgbClr val="1D1B43"/>
-                          </a:solidFill>
-                          <a:latin typeface="Calibri"/>
-                        </a:rPr>
-                        <a:t>1</a:t>
-                      </a:r>
-                    </a:p>
-                  </a:txBody>
-                  <a:tcPr>
-                    <a:solidFill>
-                      <a:srgbClr val="FFFFFF"/>
-                    </a:solidFill>
-                  </a:tcPr>
-                </a:tc>
-                <a:tc>
-                  <a:txBody>
-                    <a:bodyPr/>
-                    <a:lstStyle/>
-                    <a:p>
-                      <a:pPr algn="l"/>
-                      <a:r>
-                        <a:rPr sz="1000" b="0">
-                          <a:solidFill>
-                            <a:srgbClr val="1D1B43"/>
-                          </a:solidFill>
-                          <a:latin typeface="Calibri"/>
-                        </a:rPr>
-                        <a:t>1</a:t>
-                      </a:r>
-                    </a:p>
-                  </a:txBody>
-                  <a:tcPr>
-                    <a:solidFill>
-                      <a:srgbClr val="FFFFFF"/>
-                    </a:solidFill>
-                  </a:tcPr>
-                </a:tc>
-                <a:tc>
-                  <a:txBody>
-                    <a:bodyPr/>
-                    <a:lstStyle/>
-                    <a:p>
-                      <a:pPr algn="l"/>
-                      <a:r>
-                        <a:rPr sz="1000" b="0">
-                          <a:solidFill>
-                            <a:srgbClr val="1D1B43"/>
-                          </a:solidFill>
-                          <a:latin typeface="Calibri"/>
-                        </a:rPr>
-                        <a:t>0</a:t>
-                      </a:r>
-                    </a:p>
-                  </a:txBody>
-                  <a:tcPr>
-                    <a:solidFill>
-                      <a:srgbClr val="FFFFFF"/>
-                    </a:solidFill>
-                  </a:tcPr>
-                </a:tc>
-                <a:tc>
-                  <a:txBody>
-                    <a:bodyPr/>
-                    <a:lstStyle/>
-                    <a:p>
-                      <a:pPr algn="l"/>
-                      <a:r>
-                        <a:rPr sz="1000" b="0">
-                          <a:solidFill>
-                            <a:srgbClr val="1D1B43"/>
-                          </a:solidFill>
-                          <a:latin typeface="Calibri"/>
-                        </a:rPr>
-                        <a:t>100.0%</a:t>
-                      </a:r>
-                    </a:p>
-                  </a:txBody>
-                  <a:tcPr>
-                    <a:solidFill>
-                      <a:srgbClr val="FFFFFF"/>
-                    </a:solidFill>
-                  </a:tcPr>
-                </a:tc>
-                <a:tc>
-                  <a:txBody>
-                    <a:bodyPr/>
-                    <a:lstStyle/>
-                    <a:p>
-                      <a:pPr algn="l"/>
-                      <a:r>
-                        <a:rPr sz="1000" b="0">
-                          <a:solidFill>
-                            <a:srgbClr val="1D1B43"/>
-                          </a:solidFill>
-                          <a:latin typeface="Calibri"/>
-                        </a:rPr>
-                        <a:t>Excelente</a:t>
-                      </a:r>
-                    </a:p>
-                  </a:txBody>
-                  <a:tcPr>
-                    <a:solidFill>
-                      <a:srgbClr val="FFFFFF"/>
                     </a:solidFill>
                   </a:tcPr>
                 </a:tc>
@@ -7224,7 +8534,7 @@
                 </a:solidFill>
                 <a:latin typeface="Calibri"/>
               </a:rPr>
-              <a:t>TOP DESTINATARIOS (29 pontos)</a:t>
+              <a:t>TOP DESTINATARIOS (116 pontos)</a:t>
             </a:r>
           </a:p>
         </p:txBody>
@@ -7522,99 +8832,99 @@
                           </a:solidFill>
                           <a:latin typeface="Calibri"/>
                         </a:rPr>
-                        <a:t>7</a:t>
-                      </a:r>
-                    </a:p>
-                  </a:txBody>
-                  <a:tcPr>
-                    <a:solidFill>
-                      <a:srgbClr val="FFFFFF"/>
-                    </a:solidFill>
-                  </a:tcPr>
-                </a:tc>
-                <a:tc>
-                  <a:txBody>
-                    <a:bodyPr/>
-                    <a:lstStyle/>
-                    <a:p>
-                      <a:pPr algn="l"/>
-                      <a:r>
-                        <a:rPr sz="1000" b="0">
-                          <a:solidFill>
-                            <a:srgbClr val="1D1B43"/>
-                          </a:solidFill>
-                          <a:latin typeface="Calibri"/>
-                        </a:rPr>
-                        <a:t>7</a:t>
-                      </a:r>
-                    </a:p>
-                  </a:txBody>
-                  <a:tcPr>
-                    <a:solidFill>
-                      <a:srgbClr val="FFFFFF"/>
-                    </a:solidFill>
-                  </a:tcPr>
-                </a:tc>
-                <a:tc>
-                  <a:txBody>
-                    <a:bodyPr/>
-                    <a:lstStyle/>
-                    <a:p>
-                      <a:pPr algn="l"/>
-                      <a:r>
-                        <a:rPr sz="1000" b="0">
-                          <a:solidFill>
-                            <a:srgbClr val="1D1B43"/>
-                          </a:solidFill>
-                          <a:latin typeface="Calibri"/>
-                        </a:rPr>
-                        <a:t>0</a:t>
-                      </a:r>
-                    </a:p>
-                  </a:txBody>
-                  <a:tcPr>
-                    <a:solidFill>
-                      <a:srgbClr val="FFFFFF"/>
-                    </a:solidFill>
-                  </a:tcPr>
-                </a:tc>
-                <a:tc>
-                  <a:txBody>
-                    <a:bodyPr/>
-                    <a:lstStyle/>
-                    <a:p>
-                      <a:pPr algn="l"/>
-                      <a:r>
-                        <a:rPr sz="1000" b="0">
-                          <a:solidFill>
-                            <a:srgbClr val="1D1B43"/>
-                          </a:solidFill>
-                          <a:latin typeface="Calibri"/>
-                        </a:rPr>
-                        <a:t>100.0%</a:t>
-                      </a:r>
-                    </a:p>
-                  </a:txBody>
-                  <a:tcPr>
-                    <a:solidFill>
-                      <a:srgbClr val="FFFFFF"/>
-                    </a:solidFill>
-                  </a:tcPr>
-                </a:tc>
-                <a:tc>
-                  <a:txBody>
-                    <a:bodyPr/>
-                    <a:lstStyle/>
-                    <a:p>
-                      <a:pPr algn="l"/>
-                      <a:r>
-                        <a:rPr sz="1000" b="0">
-                          <a:solidFill>
-                            <a:srgbClr val="1D1B43"/>
-                          </a:solidFill>
-                          <a:latin typeface="Calibri"/>
-                        </a:rPr>
-                        <a:t>Excelente</a:t>
+                        <a:t>14</a:t>
+                      </a:r>
+                    </a:p>
+                  </a:txBody>
+                  <a:tcPr>
+                    <a:solidFill>
+                      <a:srgbClr val="FFFFFF"/>
+                    </a:solidFill>
+                  </a:tcPr>
+                </a:tc>
+                <a:tc>
+                  <a:txBody>
+                    <a:bodyPr/>
+                    <a:lstStyle/>
+                    <a:p>
+                      <a:pPr algn="l"/>
+                      <a:r>
+                        <a:rPr sz="1000" b="0">
+                          <a:solidFill>
+                            <a:srgbClr val="1D1B43"/>
+                          </a:solidFill>
+                          <a:latin typeface="Calibri"/>
+                        </a:rPr>
+                        <a:t>13</a:t>
+                      </a:r>
+                    </a:p>
+                  </a:txBody>
+                  <a:tcPr>
+                    <a:solidFill>
+                      <a:srgbClr val="FFFFFF"/>
+                    </a:solidFill>
+                  </a:tcPr>
+                </a:tc>
+                <a:tc>
+                  <a:txBody>
+                    <a:bodyPr/>
+                    <a:lstStyle/>
+                    <a:p>
+                      <a:pPr algn="l"/>
+                      <a:r>
+                        <a:rPr sz="1000" b="0">
+                          <a:solidFill>
+                            <a:srgbClr val="1D1B43"/>
+                          </a:solidFill>
+                          <a:latin typeface="Calibri"/>
+                        </a:rPr>
+                        <a:t>1</a:t>
+                      </a:r>
+                    </a:p>
+                  </a:txBody>
+                  <a:tcPr>
+                    <a:solidFill>
+                      <a:srgbClr val="FFFFFF"/>
+                    </a:solidFill>
+                  </a:tcPr>
+                </a:tc>
+                <a:tc>
+                  <a:txBody>
+                    <a:bodyPr/>
+                    <a:lstStyle/>
+                    <a:p>
+                      <a:pPr algn="l"/>
+                      <a:r>
+                        <a:rPr sz="1000" b="0">
+                          <a:solidFill>
+                            <a:srgbClr val="1D1B43"/>
+                          </a:solidFill>
+                          <a:latin typeface="Calibri"/>
+                        </a:rPr>
+                        <a:t>92.9%</a:t>
+                      </a:r>
+                    </a:p>
+                  </a:txBody>
+                  <a:tcPr>
+                    <a:solidFill>
+                      <a:srgbClr val="FFFFFF"/>
+                    </a:solidFill>
+                  </a:tcPr>
+                </a:tc>
+                <a:tc>
+                  <a:txBody>
+                    <a:bodyPr/>
+                    <a:lstStyle/>
+                    <a:p>
+                      <a:pPr algn="l"/>
+                      <a:r>
+                        <a:rPr sz="1000" b="0">
+                          <a:solidFill>
+                            <a:srgbClr val="1D1B43"/>
+                          </a:solidFill>
+                          <a:latin typeface="Calibri"/>
+                        </a:rPr>
+                        <a:t>Regular</a:t>
                       </a:r>
                     </a:p>
                   </a:txBody>
@@ -7662,7 +8972,7 @@
                           </a:solidFill>
                           <a:latin typeface="Calibri"/>
                         </a:rPr>
-                        <a:t>CKS INTERNATIONAL CO - ITAJAI / SC</a:t>
+                        <a:t>BRAFT DO BRASIL IMPO - GUARULHOS / SP</a:t>
                       </a:r>
                     </a:p>
                   </a:txBody>
@@ -7685,7 +8995,7 @@
                           </a:solidFill>
                           <a:latin typeface="Calibri"/>
                         </a:rPr>
-                        <a:t>2</a:t>
+                        <a:t>5</a:t>
                       </a:r>
                     </a:p>
                   </a:txBody>
@@ -7708,7 +9018,7 @@
                           </a:solidFill>
                           <a:latin typeface="Calibri"/>
                         </a:rPr>
-                        <a:t>2</a:t>
+                        <a:t>5</a:t>
                       </a:r>
                     </a:p>
                   </a:txBody>
@@ -7825,53 +9135,53 @@
                           </a:solidFill>
                           <a:latin typeface="Calibri"/>
                         </a:rPr>
-                        <a:t>MATTEL DO BRASIL LTD - NAVEGANTES / SC</a:t>
-                      </a:r>
-                    </a:p>
-                  </a:txBody>
-                  <a:tcPr>
-                    <a:solidFill>
-                      <a:srgbClr val="FFFFFF"/>
-                    </a:solidFill>
-                  </a:tcPr>
-                </a:tc>
-                <a:tc>
-                  <a:txBody>
-                    <a:bodyPr/>
-                    <a:lstStyle/>
-                    <a:p>
-                      <a:pPr algn="l"/>
-                      <a:r>
-                        <a:rPr sz="1000" b="0">
-                          <a:solidFill>
-                            <a:srgbClr val="1D1B43"/>
-                          </a:solidFill>
-                          <a:latin typeface="Calibri"/>
-                        </a:rPr>
-                        <a:t>2</a:t>
-                      </a:r>
-                    </a:p>
-                  </a:txBody>
-                  <a:tcPr>
-                    <a:solidFill>
-                      <a:srgbClr val="FFFFFF"/>
-                    </a:solidFill>
-                  </a:tcPr>
-                </a:tc>
-                <a:tc>
-                  <a:txBody>
-                    <a:bodyPr/>
-                    <a:lstStyle/>
-                    <a:p>
-                      <a:pPr algn="l"/>
-                      <a:r>
-                        <a:rPr sz="1000" b="0">
-                          <a:solidFill>
-                            <a:srgbClr val="1D1B43"/>
-                          </a:solidFill>
-                          <a:latin typeface="Calibri"/>
-                        </a:rPr>
-                        <a:t>2</a:t>
+                        <a:t>PORTOEXPRESS LOGISTI - SAO PAULO / SP</a:t>
+                      </a:r>
+                    </a:p>
+                  </a:txBody>
+                  <a:tcPr>
+                    <a:solidFill>
+                      <a:srgbClr val="FFFFFF"/>
+                    </a:solidFill>
+                  </a:tcPr>
+                </a:tc>
+                <a:tc>
+                  <a:txBody>
+                    <a:bodyPr/>
+                    <a:lstStyle/>
+                    <a:p>
+                      <a:pPr algn="l"/>
+                      <a:r>
+                        <a:rPr sz="1000" b="0">
+                          <a:solidFill>
+                            <a:srgbClr val="1D1B43"/>
+                          </a:solidFill>
+                          <a:latin typeface="Calibri"/>
+                        </a:rPr>
+                        <a:t>5</a:t>
+                      </a:r>
+                    </a:p>
+                  </a:txBody>
+                  <a:tcPr>
+                    <a:solidFill>
+                      <a:srgbClr val="FFFFFF"/>
+                    </a:solidFill>
+                  </a:tcPr>
+                </a:tc>
+                <a:tc>
+                  <a:txBody>
+                    <a:bodyPr/>
+                    <a:lstStyle/>
+                    <a:p>
+                      <a:pPr algn="l"/>
+                      <a:r>
+                        <a:rPr sz="1000" b="0">
+                          <a:solidFill>
+                            <a:srgbClr val="1D1B43"/>
+                          </a:solidFill>
+                          <a:latin typeface="Calibri"/>
+                        </a:rPr>
+                        <a:t>5</a:t>
                       </a:r>
                     </a:p>
                   </a:txBody>
@@ -7988,7 +9298,7 @@
                           </a:solidFill>
                           <a:latin typeface="Calibri"/>
                         </a:rPr>
-                        <a:t>HGS GAS E AGUA DO BR - RIO DE JANEIRO / RJ</a:t>
+                        <a:t>ANDRA S A ELECTRIC S - CAJAMAR / SP</a:t>
                       </a:r>
                     </a:p>
                   </a:txBody>
@@ -8011,7 +9321,7 @@
                           </a:solidFill>
                           <a:latin typeface="Calibri"/>
                         </a:rPr>
-                        <a:t>2</a:t>
+                        <a:t>4</a:t>
                       </a:r>
                     </a:p>
                   </a:txBody>
@@ -8034,7 +9344,7 @@
                           </a:solidFill>
                           <a:latin typeface="Calibri"/>
                         </a:rPr>
-                        <a:t>1</a:t>
+                        <a:t>4</a:t>
                       </a:r>
                     </a:p>
                   </a:txBody>
@@ -8057,7 +9367,7 @@
                           </a:solidFill>
                           <a:latin typeface="Calibri"/>
                         </a:rPr>
-                        <a:t>1</a:t>
+                        <a:t>0</a:t>
                       </a:r>
                     </a:p>
                   </a:txBody>
@@ -8080,7 +9390,7 @@
                           </a:solidFill>
                           <a:latin typeface="Calibri"/>
                         </a:rPr>
-                        <a:t>50.0%</a:t>
+                        <a:t>100.0%</a:t>
                       </a:r>
                     </a:p>
                   </a:txBody>
@@ -8103,7 +9413,7 @@
                           </a:solidFill>
                           <a:latin typeface="Calibri"/>
                         </a:rPr>
-                        <a:t>Atencao</a:t>
+                        <a:t>Excelente</a:t>
                       </a:r>
                     </a:p>
                   </a:txBody>
@@ -8151,122 +9461,122 @@
                           </a:solidFill>
                           <a:latin typeface="Calibri"/>
                         </a:rPr>
-                        <a:t>CHRISTIAN SIEGL - LAURO DE FREITAS / BA</a:t>
-                      </a:r>
-                    </a:p>
-                  </a:txBody>
-                  <a:tcPr>
-                    <a:solidFill>
-                      <a:srgbClr val="FFFFFF"/>
-                    </a:solidFill>
-                  </a:tcPr>
-                </a:tc>
-                <a:tc>
-                  <a:txBody>
-                    <a:bodyPr/>
-                    <a:lstStyle/>
-                    <a:p>
-                      <a:pPr algn="l"/>
-                      <a:r>
-                        <a:rPr sz="1000" b="0">
-                          <a:solidFill>
-                            <a:srgbClr val="1D1B43"/>
-                          </a:solidFill>
-                          <a:latin typeface="Calibri"/>
-                        </a:rPr>
-                        <a:t>2</a:t>
-                      </a:r>
-                    </a:p>
-                  </a:txBody>
-                  <a:tcPr>
-                    <a:solidFill>
-                      <a:srgbClr val="FFFFFF"/>
-                    </a:solidFill>
-                  </a:tcPr>
-                </a:tc>
-                <a:tc>
-                  <a:txBody>
-                    <a:bodyPr/>
-                    <a:lstStyle/>
-                    <a:p>
-                      <a:pPr algn="l"/>
-                      <a:r>
-                        <a:rPr sz="1000" b="0">
-                          <a:solidFill>
-                            <a:srgbClr val="1D1B43"/>
-                          </a:solidFill>
-                          <a:latin typeface="Calibri"/>
-                        </a:rPr>
-                        <a:t>2</a:t>
-                      </a:r>
-                    </a:p>
-                  </a:txBody>
-                  <a:tcPr>
-                    <a:solidFill>
-                      <a:srgbClr val="FFFFFF"/>
-                    </a:solidFill>
-                  </a:tcPr>
-                </a:tc>
-                <a:tc>
-                  <a:txBody>
-                    <a:bodyPr/>
-                    <a:lstStyle/>
-                    <a:p>
-                      <a:pPr algn="l"/>
-                      <a:r>
-                        <a:rPr sz="1000" b="0">
-                          <a:solidFill>
-                            <a:srgbClr val="1D1B43"/>
-                          </a:solidFill>
-                          <a:latin typeface="Calibri"/>
-                        </a:rPr>
-                        <a:t>0</a:t>
-                      </a:r>
-                    </a:p>
-                  </a:txBody>
-                  <a:tcPr>
-                    <a:solidFill>
-                      <a:srgbClr val="FFFFFF"/>
-                    </a:solidFill>
-                  </a:tcPr>
-                </a:tc>
-                <a:tc>
-                  <a:txBody>
-                    <a:bodyPr/>
-                    <a:lstStyle/>
-                    <a:p>
-                      <a:pPr algn="l"/>
-                      <a:r>
-                        <a:rPr sz="1000" b="0">
-                          <a:solidFill>
-                            <a:srgbClr val="1D1B43"/>
-                          </a:solidFill>
-                          <a:latin typeface="Calibri"/>
-                        </a:rPr>
-                        <a:t>100.0%</a:t>
-                      </a:r>
-                    </a:p>
-                  </a:txBody>
-                  <a:tcPr>
-                    <a:solidFill>
-                      <a:srgbClr val="FFFFFF"/>
-                    </a:solidFill>
-                  </a:tcPr>
-                </a:tc>
-                <a:tc>
-                  <a:txBody>
-                    <a:bodyPr/>
-                    <a:lstStyle/>
-                    <a:p>
-                      <a:pPr algn="l"/>
-                      <a:r>
-                        <a:rPr sz="1000" b="0">
-                          <a:solidFill>
-                            <a:srgbClr val="1D1B43"/>
-                          </a:solidFill>
-                          <a:latin typeface="Calibri"/>
-                        </a:rPr>
-                        <a:t>Excelente</a:t>
+                        <a:t>KUKA PRODUTOS INFANT - SAO PAULO / SP</a:t>
+                      </a:r>
+                    </a:p>
+                  </a:txBody>
+                  <a:tcPr>
+                    <a:solidFill>
+                      <a:srgbClr val="FFFFFF"/>
+                    </a:solidFill>
+                  </a:tcPr>
+                </a:tc>
+                <a:tc>
+                  <a:txBody>
+                    <a:bodyPr/>
+                    <a:lstStyle/>
+                    <a:p>
+                      <a:pPr algn="l"/>
+                      <a:r>
+                        <a:rPr sz="1000" b="0">
+                          <a:solidFill>
+                            <a:srgbClr val="1D1B43"/>
+                          </a:solidFill>
+                          <a:latin typeface="Calibri"/>
+                        </a:rPr>
+                        <a:t>4</a:t>
+                      </a:r>
+                    </a:p>
+                  </a:txBody>
+                  <a:tcPr>
+                    <a:solidFill>
+                      <a:srgbClr val="FFFFFF"/>
+                    </a:solidFill>
+                  </a:tcPr>
+                </a:tc>
+                <a:tc>
+                  <a:txBody>
+                    <a:bodyPr/>
+                    <a:lstStyle/>
+                    <a:p>
+                      <a:pPr algn="l"/>
+                      <a:r>
+                        <a:rPr sz="1000" b="0">
+                          <a:solidFill>
+                            <a:srgbClr val="1D1B43"/>
+                          </a:solidFill>
+                          <a:latin typeface="Calibri"/>
+                        </a:rPr>
+                        <a:t>3</a:t>
+                      </a:r>
+                    </a:p>
+                  </a:txBody>
+                  <a:tcPr>
+                    <a:solidFill>
+                      <a:srgbClr val="FFFFFF"/>
+                    </a:solidFill>
+                  </a:tcPr>
+                </a:tc>
+                <a:tc>
+                  <a:txBody>
+                    <a:bodyPr/>
+                    <a:lstStyle/>
+                    <a:p>
+                      <a:pPr algn="l"/>
+                      <a:r>
+                        <a:rPr sz="1000" b="0">
+                          <a:solidFill>
+                            <a:srgbClr val="1D1B43"/>
+                          </a:solidFill>
+                          <a:latin typeface="Calibri"/>
+                        </a:rPr>
+                        <a:t>1</a:t>
+                      </a:r>
+                    </a:p>
+                  </a:txBody>
+                  <a:tcPr>
+                    <a:solidFill>
+                      <a:srgbClr val="FFFFFF"/>
+                    </a:solidFill>
+                  </a:tcPr>
+                </a:tc>
+                <a:tc>
+                  <a:txBody>
+                    <a:bodyPr/>
+                    <a:lstStyle/>
+                    <a:p>
+                      <a:pPr algn="l"/>
+                      <a:r>
+                        <a:rPr sz="1000" b="0">
+                          <a:solidFill>
+                            <a:srgbClr val="1D1B43"/>
+                          </a:solidFill>
+                          <a:latin typeface="Calibri"/>
+                        </a:rPr>
+                        <a:t>75.0%</a:t>
+                      </a:r>
+                    </a:p>
+                  </a:txBody>
+                  <a:tcPr>
+                    <a:solidFill>
+                      <a:srgbClr val="FFFFFF"/>
+                    </a:solidFill>
+                  </a:tcPr>
+                </a:tc>
+                <a:tc>
+                  <a:txBody>
+                    <a:bodyPr/>
+                    <a:lstStyle/>
+                    <a:p>
+                      <a:pPr algn="l"/>
+                      <a:r>
+                        <a:rPr sz="1000" b="0">
+                          <a:solidFill>
+                            <a:srgbClr val="1D1B43"/>
+                          </a:solidFill>
+                          <a:latin typeface="Calibri"/>
+                        </a:rPr>
+                        <a:t>Atencao</a:t>
                       </a:r>
                     </a:p>
                   </a:txBody>
@@ -8314,7 +9624,7 @@
                           </a:solidFill>
                           <a:latin typeface="Calibri"/>
                         </a:rPr>
-                        <a:t>JC ENCOMENDA EXPRESS - RECIFE / PE</a:t>
+                        <a:t>YANKE COMERCIO ELETR - RIO CLARO / SP</a:t>
                       </a:r>
                     </a:p>
                   </a:txBody>
@@ -8337,6 +9647,29 @@
                           </a:solidFill>
                           <a:latin typeface="Calibri"/>
                         </a:rPr>
+                        <a:t>4</a:t>
+                      </a:r>
+                    </a:p>
+                  </a:txBody>
+                  <a:tcPr>
+                    <a:solidFill>
+                      <a:srgbClr val="F2F2F2"/>
+                    </a:solidFill>
+                  </a:tcPr>
+                </a:tc>
+                <a:tc>
+                  <a:txBody>
+                    <a:bodyPr/>
+                    <a:lstStyle/>
+                    <a:p>
+                      <a:pPr algn="l"/>
+                      <a:r>
+                        <a:rPr sz="1000" b="0">
+                          <a:solidFill>
+                            <a:srgbClr val="1D1B43"/>
+                          </a:solidFill>
+                          <a:latin typeface="Calibri"/>
+                        </a:rPr>
                         <a:t>2</a:t>
                       </a:r>
                     </a:p>
@@ -8383,7 +9716,7 @@
                           </a:solidFill>
                           <a:latin typeface="Calibri"/>
                         </a:rPr>
-                        <a:t>0</a:t>
+                        <a:t>50.0%</a:t>
                       </a:r>
                     </a:p>
                   </a:txBody>
@@ -8406,30 +9739,7 @@
                           </a:solidFill>
                           <a:latin typeface="Calibri"/>
                         </a:rPr>
-                        <a:t>100.0%</a:t>
-                      </a:r>
-                    </a:p>
-                  </a:txBody>
-                  <a:tcPr>
-                    <a:solidFill>
-                      <a:srgbClr val="F2F2F2"/>
-                    </a:solidFill>
-                  </a:tcPr>
-                </a:tc>
-                <a:tc>
-                  <a:txBody>
-                    <a:bodyPr/>
-                    <a:lstStyle/>
-                    <a:p>
-                      <a:pPr algn="l"/>
-                      <a:r>
-                        <a:rPr sz="1000" b="0">
-                          <a:solidFill>
-                            <a:srgbClr val="1D1B43"/>
-                          </a:solidFill>
-                          <a:latin typeface="Calibri"/>
-                        </a:rPr>
-                        <a:t>Excelente</a:t>
+                        <a:t>Atencao</a:t>
                       </a:r>
                     </a:p>
                   </a:txBody>
@@ -8477,53 +9787,53 @@
                           </a:solidFill>
                           <a:latin typeface="Calibri"/>
                         </a:rPr>
-                        <a:t>BLUE BAY COMERCIAL - SAO FRANCISCO DO SUL / SC</a:t>
-                      </a:r>
-                    </a:p>
-                  </a:txBody>
-                  <a:tcPr>
-                    <a:solidFill>
-                      <a:srgbClr val="FFFFFF"/>
-                    </a:solidFill>
-                  </a:tcPr>
-                </a:tc>
-                <a:tc>
-                  <a:txBody>
-                    <a:bodyPr/>
-                    <a:lstStyle/>
-                    <a:p>
-                      <a:pPr algn="l"/>
-                      <a:r>
-                        <a:rPr sz="1000" b="0">
-                          <a:solidFill>
-                            <a:srgbClr val="1D1B43"/>
-                          </a:solidFill>
-                          <a:latin typeface="Calibri"/>
-                        </a:rPr>
-                        <a:t>1</a:t>
-                      </a:r>
-                    </a:p>
-                  </a:txBody>
-                  <a:tcPr>
-                    <a:solidFill>
-                      <a:srgbClr val="FFFFFF"/>
-                    </a:solidFill>
-                  </a:tcPr>
-                </a:tc>
-                <a:tc>
-                  <a:txBody>
-                    <a:bodyPr/>
-                    <a:lstStyle/>
-                    <a:p>
-                      <a:pPr algn="l"/>
-                      <a:r>
-                        <a:rPr sz="1000" b="0">
-                          <a:solidFill>
-                            <a:srgbClr val="1D1B43"/>
-                          </a:solidFill>
-                          <a:latin typeface="Calibri"/>
-                        </a:rPr>
-                        <a:t>1</a:t>
+                        <a:t>NAMASTE SERVICOS LTD - SAO PAULO / SP</a:t>
+                      </a:r>
+                    </a:p>
+                  </a:txBody>
+                  <a:tcPr>
+                    <a:solidFill>
+                      <a:srgbClr val="FFFFFF"/>
+                    </a:solidFill>
+                  </a:tcPr>
+                </a:tc>
+                <a:tc>
+                  <a:txBody>
+                    <a:bodyPr/>
+                    <a:lstStyle/>
+                    <a:p>
+                      <a:pPr algn="l"/>
+                      <a:r>
+                        <a:rPr sz="1000" b="0">
+                          <a:solidFill>
+                            <a:srgbClr val="1D1B43"/>
+                          </a:solidFill>
+                          <a:latin typeface="Calibri"/>
+                        </a:rPr>
+                        <a:t>3</a:t>
+                      </a:r>
+                    </a:p>
+                  </a:txBody>
+                  <a:tcPr>
+                    <a:solidFill>
+                      <a:srgbClr val="FFFFFF"/>
+                    </a:solidFill>
+                  </a:tcPr>
+                </a:tc>
+                <a:tc>
+                  <a:txBody>
+                    <a:bodyPr/>
+                    <a:lstStyle/>
+                    <a:p>
+                      <a:pPr algn="l"/>
+                      <a:r>
+                        <a:rPr sz="1000" b="0">
+                          <a:solidFill>
+                            <a:srgbClr val="1D1B43"/>
+                          </a:solidFill>
+                          <a:latin typeface="Calibri"/>
+                        </a:rPr>
+                        <a:t>3</a:t>
                       </a:r>
                     </a:p>
                   </a:txBody>
@@ -8640,7 +9950,7 @@
                           </a:solidFill>
                           <a:latin typeface="Calibri"/>
                         </a:rPr>
-                        <a:t>CAJADAN TEXTIL LTDA. - JOINVILLE / SC</a:t>
+                        <a:t>TERMACO LOGISTICA - GUARULHOS / SP</a:t>
                       </a:r>
                     </a:p>
                   </a:txBody>
@@ -8663,7 +9973,7 @@
                           </a:solidFill>
                           <a:latin typeface="Calibri"/>
                         </a:rPr>
-                        <a:t>1</a:t>
+                        <a:t>3</a:t>
                       </a:r>
                     </a:p>
                   </a:txBody>
@@ -8686,7 +9996,7 @@
                           </a:solidFill>
                           <a:latin typeface="Calibri"/>
                         </a:rPr>
-                        <a:t>1</a:t>
+                        <a:t>3</a:t>
                       </a:r>
                     </a:p>
                   </a:txBody>
@@ -8803,53 +10113,53 @@
                           </a:solidFill>
                           <a:latin typeface="Calibri"/>
                         </a:rPr>
-                        <a:t>COMERCIAL HUGEN - SAPUCAIA DO SUL / RS</a:t>
-                      </a:r>
-                    </a:p>
-                  </a:txBody>
-                  <a:tcPr>
-                    <a:solidFill>
-                      <a:srgbClr val="FFFFFF"/>
-                    </a:solidFill>
-                  </a:tcPr>
-                </a:tc>
-                <a:tc>
-                  <a:txBody>
-                    <a:bodyPr/>
-                    <a:lstStyle/>
-                    <a:p>
-                      <a:pPr algn="l"/>
-                      <a:r>
-                        <a:rPr sz="1000" b="0">
-                          <a:solidFill>
-                            <a:srgbClr val="1D1B43"/>
-                          </a:solidFill>
-                          <a:latin typeface="Calibri"/>
-                        </a:rPr>
-                        <a:t>1</a:t>
-                      </a:r>
-                    </a:p>
-                  </a:txBody>
-                  <a:tcPr>
-                    <a:solidFill>
-                      <a:srgbClr val="FFFFFF"/>
-                    </a:solidFill>
-                  </a:tcPr>
-                </a:tc>
-                <a:tc>
-                  <a:txBody>
-                    <a:bodyPr/>
-                    <a:lstStyle/>
-                    <a:p>
-                      <a:pPr algn="l"/>
-                      <a:r>
-                        <a:rPr sz="1000" b="0">
-                          <a:solidFill>
-                            <a:srgbClr val="1D1B43"/>
-                          </a:solidFill>
-                          <a:latin typeface="Calibri"/>
-                        </a:rPr>
-                        <a:t>1</a:t>
+                        <a:t>DUO SP COMERCIO DE V - SAO PAULO / SP</a:t>
+                      </a:r>
+                    </a:p>
+                  </a:txBody>
+                  <a:tcPr>
+                    <a:solidFill>
+                      <a:srgbClr val="FFFFFF"/>
+                    </a:solidFill>
+                  </a:tcPr>
+                </a:tc>
+                <a:tc>
+                  <a:txBody>
+                    <a:bodyPr/>
+                    <a:lstStyle/>
+                    <a:p>
+                      <a:pPr algn="l"/>
+                      <a:r>
+                        <a:rPr sz="1000" b="0">
+                          <a:solidFill>
+                            <a:srgbClr val="1D1B43"/>
+                          </a:solidFill>
+                          <a:latin typeface="Calibri"/>
+                        </a:rPr>
+                        <a:t>2</a:t>
+                      </a:r>
+                    </a:p>
+                  </a:txBody>
+                  <a:tcPr>
+                    <a:solidFill>
+                      <a:srgbClr val="FFFFFF"/>
+                    </a:solidFill>
+                  </a:tcPr>
+                </a:tc>
+                <a:tc>
+                  <a:txBody>
+                    <a:bodyPr/>
+                    <a:lstStyle/>
+                    <a:p>
+                      <a:pPr algn="l"/>
+                      <a:r>
+                        <a:rPr sz="1000" b="0">
+                          <a:solidFill>
+                            <a:srgbClr val="1D1B43"/>
+                          </a:solidFill>
+                          <a:latin typeface="Calibri"/>
+                        </a:rPr>
+                        <a:t>2</a:t>
                       </a:r>
                     </a:p>
                   </a:txBody>
@@ -8966,7 +10276,7 @@
                           </a:solidFill>
                           <a:latin typeface="Calibri"/>
                         </a:rPr>
-                        <a:t>BRSL LOGISTICA LTDA - ITAJAI / SC</a:t>
+                        <a:t>GIRO CERTO CARGAS E - GUARULHOS / SP</a:t>
                       </a:r>
                     </a:p>
                   </a:txBody>
@@ -8989,7 +10299,7 @@
                           </a:solidFill>
                           <a:latin typeface="Calibri"/>
                         </a:rPr>
-                        <a:t>1</a:t>
+                        <a:t>2</a:t>
                       </a:r>
                     </a:p>
                   </a:txBody>
@@ -9012,7 +10322,7 @@
                           </a:solidFill>
                           <a:latin typeface="Calibri"/>
                         </a:rPr>
-                        <a:t>1</a:t>
+                        <a:t>2</a:t>
                       </a:r>
                     </a:p>
                   </a:txBody>
@@ -9129,53 +10439,53 @@
                           </a:solidFill>
                           <a:latin typeface="Calibri"/>
                         </a:rPr>
-                        <a:t>ANNA CAROLLYNE ALEXA - TURVANIA / GO</a:t>
-                      </a:r>
-                    </a:p>
-                  </a:txBody>
-                  <a:tcPr>
-                    <a:solidFill>
-                      <a:srgbClr val="FFFFFF"/>
-                    </a:solidFill>
-                  </a:tcPr>
-                </a:tc>
-                <a:tc>
-                  <a:txBody>
-                    <a:bodyPr/>
-                    <a:lstStyle/>
-                    <a:p>
-                      <a:pPr algn="l"/>
-                      <a:r>
-                        <a:rPr sz="1000" b="0">
-                          <a:solidFill>
-                            <a:srgbClr val="1D1B43"/>
-                          </a:solidFill>
-                          <a:latin typeface="Calibri"/>
-                        </a:rPr>
-                        <a:t>1</a:t>
-                      </a:r>
-                    </a:p>
-                  </a:txBody>
-                  <a:tcPr>
-                    <a:solidFill>
-                      <a:srgbClr val="FFFFFF"/>
-                    </a:solidFill>
-                  </a:tcPr>
-                </a:tc>
-                <a:tc>
-                  <a:txBody>
-                    <a:bodyPr/>
-                    <a:lstStyle/>
-                    <a:p>
-                      <a:pPr algn="l"/>
-                      <a:r>
-                        <a:rPr sz="1000" b="0">
-                          <a:solidFill>
-                            <a:srgbClr val="1D1B43"/>
-                          </a:solidFill>
-                          <a:latin typeface="Calibri"/>
-                        </a:rPr>
-                        <a:t>1</a:t>
+                        <a:t>PICCOLI TRANSPORTES - GUARULHOS / SP</a:t>
+                      </a:r>
+                    </a:p>
+                  </a:txBody>
+                  <a:tcPr>
+                    <a:solidFill>
+                      <a:srgbClr val="FFFFFF"/>
+                    </a:solidFill>
+                  </a:tcPr>
+                </a:tc>
+                <a:tc>
+                  <a:txBody>
+                    <a:bodyPr/>
+                    <a:lstStyle/>
+                    <a:p>
+                      <a:pPr algn="l"/>
+                      <a:r>
+                        <a:rPr sz="1000" b="0">
+                          <a:solidFill>
+                            <a:srgbClr val="1D1B43"/>
+                          </a:solidFill>
+                          <a:latin typeface="Calibri"/>
+                        </a:rPr>
+                        <a:t>2</a:t>
+                      </a:r>
+                    </a:p>
+                  </a:txBody>
+                  <a:tcPr>
+                    <a:solidFill>
+                      <a:srgbClr val="FFFFFF"/>
+                    </a:solidFill>
+                  </a:tcPr>
+                </a:tc>
+                <a:tc>
+                  <a:txBody>
+                    <a:bodyPr/>
+                    <a:lstStyle/>
+                    <a:p>
+                      <a:pPr algn="l"/>
+                      <a:r>
+                        <a:rPr sz="1000" b="0">
+                          <a:solidFill>
+                            <a:srgbClr val="1D1B43"/>
+                          </a:solidFill>
+                          <a:latin typeface="Calibri"/>
+                        </a:rPr>
+                        <a:t>2</a:t>
                       </a:r>
                     </a:p>
                   </a:txBody>
@@ -9292,7 +10602,7 @@
                           </a:solidFill>
                           <a:latin typeface="Calibri"/>
                         </a:rPr>
-                        <a:t>AMAZON SERVICOS DE V - BETIM / MG</a:t>
+                        <a:t>VICTOR HUGO TAVARES - DIADEMA / SP</a:t>
                       </a:r>
                     </a:p>
                   </a:txBody>
@@ -9315,7 +10625,7 @@
                           </a:solidFill>
                           <a:latin typeface="Calibri"/>
                         </a:rPr>
-                        <a:t>1</a:t>
+                        <a:t>2</a:t>
                       </a:r>
                     </a:p>
                   </a:txBody>
@@ -9338,7 +10648,7 @@
                           </a:solidFill>
                           <a:latin typeface="Calibri"/>
                         </a:rPr>
-                        <a:t>1</a:t>
+                        <a:t>2</a:t>
                       </a:r>
                     </a:p>
                   </a:txBody>
@@ -9455,53 +10765,53 @@
                           </a:solidFill>
                           <a:latin typeface="Calibri"/>
                         </a:rPr>
-                        <a:t>AEROPORTO INTERNACIO - GUARULHOS / SP</a:t>
-                      </a:r>
-                    </a:p>
-                  </a:txBody>
-                  <a:tcPr>
-                    <a:solidFill>
-                      <a:srgbClr val="FFFFFF"/>
-                    </a:solidFill>
-                  </a:tcPr>
-                </a:tc>
-                <a:tc>
-                  <a:txBody>
-                    <a:bodyPr/>
-                    <a:lstStyle/>
-                    <a:p>
-                      <a:pPr algn="l"/>
-                      <a:r>
-                        <a:rPr sz="1000" b="0">
-                          <a:solidFill>
-                            <a:srgbClr val="1D1B43"/>
-                          </a:solidFill>
-                          <a:latin typeface="Calibri"/>
-                        </a:rPr>
-                        <a:t>1</a:t>
-                      </a:r>
-                    </a:p>
-                  </a:txBody>
-                  <a:tcPr>
-                    <a:solidFill>
-                      <a:srgbClr val="FFFFFF"/>
-                    </a:solidFill>
-                  </a:tcPr>
-                </a:tc>
-                <a:tc>
-                  <a:txBody>
-                    <a:bodyPr/>
-                    <a:lstStyle/>
-                    <a:p>
-                      <a:pPr algn="l"/>
-                      <a:r>
-                        <a:rPr sz="1000" b="0">
-                          <a:solidFill>
-                            <a:srgbClr val="1D1B43"/>
-                          </a:solidFill>
-                          <a:latin typeface="Calibri"/>
-                        </a:rPr>
-                        <a:t>1</a:t>
+                        <a:t>NSNA SOCIOAMBIENTAL - SAO PAULO / SP</a:t>
+                      </a:r>
+                    </a:p>
+                  </a:txBody>
+                  <a:tcPr>
+                    <a:solidFill>
+                      <a:srgbClr val="FFFFFF"/>
+                    </a:solidFill>
+                  </a:tcPr>
+                </a:tc>
+                <a:tc>
+                  <a:txBody>
+                    <a:bodyPr/>
+                    <a:lstStyle/>
+                    <a:p>
+                      <a:pPr algn="l"/>
+                      <a:r>
+                        <a:rPr sz="1000" b="0">
+                          <a:solidFill>
+                            <a:srgbClr val="1D1B43"/>
+                          </a:solidFill>
+                          <a:latin typeface="Calibri"/>
+                        </a:rPr>
+                        <a:t>2</a:t>
+                      </a:r>
+                    </a:p>
+                  </a:txBody>
+                  <a:tcPr>
+                    <a:solidFill>
+                      <a:srgbClr val="FFFFFF"/>
+                    </a:solidFill>
+                  </a:tcPr>
+                </a:tc>
+                <a:tc>
+                  <a:txBody>
+                    <a:bodyPr/>
+                    <a:lstStyle/>
+                    <a:p>
+                      <a:pPr algn="l"/>
+                      <a:r>
+                        <a:rPr sz="1000" b="0">
+                          <a:solidFill>
+                            <a:srgbClr val="1D1B43"/>
+                          </a:solidFill>
+                          <a:latin typeface="Calibri"/>
+                        </a:rPr>
+                        <a:t>2</a:t>
                       </a:r>
                     </a:p>
                   </a:txBody>
@@ -9618,7 +10928,7 @@
                           </a:solidFill>
                           <a:latin typeface="Calibri"/>
                         </a:rPr>
-                        <a:t>GATTO LOG - RIBEIRAO PRETO / SP</a:t>
+                        <a:t>RAFAEL PAULISTA DE C - OSASCO / SP</a:t>
                       </a:r>
                     </a:p>
                   </a:txBody>
@@ -9641,7 +10951,7 @@
                           </a:solidFill>
                           <a:latin typeface="Calibri"/>
                         </a:rPr>
-                        <a:t>1</a:t>
+                        <a:t>2</a:t>
                       </a:r>
                     </a:p>
                   </a:txBody>
@@ -9664,7 +10974,7 @@
                           </a:solidFill>
                           <a:latin typeface="Calibri"/>
                         </a:rPr>
-                        <a:t>1</a:t>
+                        <a:t>2</a:t>
                       </a:r>
                     </a:p>
                   </a:txBody>
